--- a/downloads/presentations/modules/lesson-25-ai-for-public-health-communications-and-message-development.pptx
+++ b/downloads/presentations/modules/lesson-25-ai-for-public-health-communications-and-message-development.pptx
@@ -26,9 +26,11 @@
     <p:sldId id="274" r:id="rId20"/>
     <p:sldId id="275" r:id="rId21"/>
     <p:sldId id="276" r:id="rId22"/>
+    <p:sldId id="277" r:id="rId23"/>
+    <p:sldId id="278" r:id="rId24"/>
   </p:sldIdLst>
   <p:notesMasterIdLst>
-    <p:notesMasterId r:id="rId23"/>
+    <p:notesMasterId r:id="rId25"/>
   </p:notesMasterIdLst>
   <p:sldSz cx="12192000" cy="6858000"/>
   <p:notesSz cx="6858000" cy="12192000"/>
@@ -611,10 +613,8 @@
           <a:p>
             <a:r>
               <a:rPr lang="en-US" dirty="0"/>
-              <a:t>Risks, Failure Modes, and Guardrails
-Unverified translations or readability changes that alter meaning.
-Public-facing content being released without required subject matter or leadership review.
-Messages that assume access to resources, technology, transportation, or healthcare that the audience may not have.</a:t>
+              <a:t>Topic Deep Dive
+AI can also support review, but it should not replace reviewers. A communications workflow should define who checks technical accuracy, who reviews equity and accessibility, who approves public release, and who monitors public response after dissemination. For urgent communications, the workflow should include expedited review rules that still preserve accuracy and accountability.</a:t>
             </a:r>
             <a:endParaRPr lang="en-US" dirty="0"/>
           </a:p>
@@ -703,9 +703,9 @@
             <a:r>
               <a:rPr lang="en-US" dirty="0"/>
               <a:t>Risks, Failure Modes, and Guardrails
-Recommended guardrails include the following:
-Use only approved tools and approved source material for public health communications.
-Require human review for accuracy, plain language, accessibility, equity, and tone.</a:t>
+Risks and failure modes include the following:
+AI-generated messages overstating evidence or omitting uncertainty.
+Use of stigmatizing, blaming, or culturally inappropriate language.</a:t>
             </a:r>
             <a:endParaRPr lang="en-US" dirty="0"/>
           </a:p>
@@ -794,9 +794,9 @@
             <a:r>
               <a:rPr lang="en-US" dirty="0"/>
               <a:t>Risks, Failure Modes, and Guardrails
-Document source material used for public-facing claims.
-Use qualified review for translation and language access needs.
-Route public-facing materials through the agency approval process before release.</a:t>
+Unverified translations or readability changes that alter meaning.
+Public-facing content being released without required subject matter or leadership review.
+Messages that assume access to resources, technology, transportation, or healthcare that the audience may not have.</a:t>
             </a:r>
             <a:endParaRPr lang="en-US" dirty="0"/>
           </a:p>
@@ -884,10 +884,10 @@
           <a:p>
             <a:r>
               <a:rPr lang="en-US" dirty="0"/>
-              <a:t>Reflection Questions
-Where does this topic appear in your agency, program, or workflow?
-Which staff roles would need to understand or apply this concept before AI use is approved?
-What could go wrong if this topic is not addressed before implementation?</a:t>
+              <a:t>Risks, Failure Modes, and Guardrails
+Recommended guardrails include the following:
+Use only approved tools and approved source material for public health communications.
+Require human review for accuracy, plain language, accessibility, equity, and tone.</a:t>
             </a:r>
             <a:endParaRPr lang="en-US" dirty="0"/>
           </a:p>
@@ -975,9 +975,10 @@
           <a:p>
             <a:r>
               <a:rPr lang="en-US" dirty="0"/>
-              <a:t>Reflection Questions
-What evidence would governance, leadership, or operations staff need before moving forward?
-Which policy, data, equity, privacy, security, or workflow questions remain unresolved?</a:t>
+              <a:t>Risks, Failure Modes, and Guardrails
+Document source material used for public-facing claims.
+Use qualified review for translation and language access needs.
+Route public-facing materials through the agency approval process before release.</a:t>
             </a:r>
             <a:endParaRPr lang="en-US" dirty="0"/>
           </a:p>
@@ -1065,8 +1066,10 @@
           <a:p>
             <a:r>
               <a:rPr lang="en-US" dirty="0"/>
-              <a:t>Practical Exercise
-Create an AI-assisted communications review checklist for one public health message. Include intended audience, source material, factual claims to verify, plain language review, accessibility review, language access review, equity review, approval pathway, and documentation expectations.</a:t>
+              <a:t>Reflection Questions
+Where does this topic appear in your agency, program, or workflow?
+Which staff roles would need to understand or apply this concept before AI use is approved?
+What could go wrong if this topic is not addressed before implementation?</a:t>
             </a:r>
             <a:endParaRPr lang="en-US" dirty="0"/>
           </a:p>
@@ -1154,10 +1157,9 @@
           <a:p>
             <a:r>
               <a:rPr lang="en-US" dirty="0"/>
-              <a:t>Expected Artifact or Evidence
-AI-assisted communications review checklist
-Source verification notes
-Plain language and accessibility review notes</a:t>
+              <a:t>Reflection Questions
+What evidence would governance, leadership, or operations staff need before moving forward?
+Which policy, data, equity, privacy, security, or workflow questions remain unresolved?</a:t>
             </a:r>
             <a:endParaRPr lang="en-US" dirty="0"/>
           </a:p>
@@ -1245,9 +1247,8 @@
           <a:p>
             <a:r>
               <a:rPr lang="en-US" dirty="0"/>
-              <a:t>Expected Artifact or Evidence
-Approval pathway documentation
-Final reviewed message or sample revision</a:t>
+              <a:t>Practical Exercise
+Create an AI-assisted communications review checklist for one public health message. Include intended audience, source material, factual claims to verify, plain language review, accessibility review, language access review, equity review, approval pathway, and documentation expectations.</a:t>
             </a:r>
             <a:endParaRPr lang="en-US" dirty="0"/>
           </a:p>
@@ -1335,12 +1336,10 @@
           <a:p>
             <a:r>
               <a:rPr lang="en-US" dirty="0"/>
-              <a:t>Expected Assignment
+              <a:t>Expected Artifact or Evidence
 AI-assisted communications review checklist
 Source verification notes
-Plain language and accessibility review notes
-Approval pathway documentation
-Final reviewed message or sample revision</a:t>
+Plain language and accessibility review notes</a:t>
             </a:r>
             <a:endParaRPr lang="en-US" dirty="0"/>
           </a:p>
@@ -1428,12 +1427,9 @@
           <a:p>
             <a:r>
               <a:rPr lang="en-US" dirty="0"/>
-              <a:t>Knowledge Check
-1. What is an appropriate role for AI in public health communications?
-2. Why is source verification necessary?
-3. Which review is especially important for public-facing AI-assisted messages?
-4. What should happen with AI-assisted translation for public health messages?
-5. What is strong completion evidence?</a:t>
+              <a:t>Expected Artifact or Evidence
+Approval pathway documentation
+Final reviewed message or sample revision</a:t>
             </a:r>
             <a:endParaRPr lang="en-US" dirty="0"/>
           </a:p>
@@ -1613,12 +1609,12 @@
           <a:p>
             <a:r>
               <a:rPr lang="en-US" dirty="0"/>
-              <a:t>References and Resources
-NIST Artificial Intelligence Risk Management Framework: https://www.nist.gov/itl/ai-risk-management-framework
-NIST Generative AI Profile: https://www.nist.gov/publications/artificial-intelligence-risk-management-framework-generative-artificial-intelligence
-CDC Public Health Data Strategy and Data Modernization resources: https://www.cdc.gov/public-health-data-strategy/php/about/index.html
-OWASP guidance for LLM application security
-Agency policies for privacy, cybersecurity, records, procurement, accessibility, and public communications</a:t>
+              <a:t>Expected Assignment
+AI-assisted communications review checklist
+Source verification notes
+Plain language and accessibility review notes
+Approval pathway documentation
+Final reviewed message or sample revision</a:t>
             </a:r>
             <a:endParaRPr lang="en-US" dirty="0"/>
           </a:p>
@@ -1706,8 +1702,12 @@
           <a:p>
             <a:r>
               <a:rPr lang="en-US" dirty="0"/>
-              <a:t>References and Resources
-Relevant public health program SOPs, data governance documentation, and implementation plans</a:t>
+              <a:t>Knowledge Check
+1. What is an appropriate role for AI in public health communications?
+2. Why is source verification necessary?
+3. Which review is especially important for public-facing AI-assisted messages?
+4. What should happen with AI-assisted translation for public health messages?
+5. What is strong completion evidence?</a:t>
             </a:r>
             <a:endParaRPr lang="en-US" dirty="0"/>
           </a:p>
@@ -1731,6 +1731,188 @@
             <a:fld id="{F7021451-1387-4CA6-816F-3879F97B5CBC}" type="slidenum">
               <a:rPr lang="en-US"/>
               <a:t>21</a:t>
+            </a:fld>
+            <a:endParaRPr lang="en-US"/>
+          </a:p>
+        </p:txBody>
+      </p:sp>
+    </p:spTree>
+    <p:extLst>
+      <p:ext uri="{BB962C8B-B14F-4D97-AF65-F5344CB8AC3E}">
+        <p14:creationId xmlns:p14="http://schemas.microsoft.com/office/powerpoint/2010/main" val="1024086991"/>
+      </p:ext>
+    </p:extLst>
+  </p:cSld>
+  <p:clrMapOvr>
+    <a:masterClrMapping/>
+  </p:clrMapOvr>
+</p:notes>
+</file>
+
+<file path=ppt/notesSlides/notesSlide22.xml><?xml version="1.0" encoding="utf-8"?>
+<p:notes xmlns:a="http://schemas.openxmlformats.org/drawingml/2006/main" xmlns:r="http://schemas.openxmlformats.org/officeDocument/2006/relationships" xmlns:p="http://schemas.openxmlformats.org/presentationml/2006/main">
+  <p:cSld>
+    <p:spTree>
+      <p:nvGrpSpPr>
+        <p:cNvPr id="1" name=""/>
+        <p:cNvGrpSpPr/>
+        <p:nvPr/>
+      </p:nvGrpSpPr>
+      <p:grpSpPr>
+        <a:xfrm>
+          <a:off x="0" y="0"/>
+          <a:ext cx="0" cy="0"/>
+          <a:chOff x="0" y="0"/>
+          <a:chExt cx="0" cy="0"/>
+        </a:xfrm>
+      </p:grpSpPr>
+      <p:sp>
+        <p:nvSpPr>
+          <p:cNvPr id="2" name="Slide Image Placeholder 1"/>
+          <p:cNvSpPr>
+            <a:spLocks noGrp="1" noRot="1" noChangeAspect="1"/>
+          </p:cNvSpPr>
+          <p:nvPr>
+            <p:ph type="sldImg"/>
+          </p:nvPr>
+        </p:nvSpPr>
+        <p:spPr/>
+      </p:sp>
+      <p:sp>
+        <p:nvSpPr>
+          <p:cNvPr id="3" name="Notes Placeholder 2"/>
+          <p:cNvSpPr>
+            <a:spLocks noGrp="1"/>
+          </p:cNvSpPr>
+          <p:nvPr>
+            <p:ph type="body" idx="1"/>
+          </p:nvPr>
+        </p:nvSpPr>
+        <p:spPr/>
+        <p:txBody>
+          <a:bodyPr/>
+          <a:lstStyle/>
+          <a:p>
+            <a:r>
+              <a:rPr lang="en-US" dirty="0"/>
+              <a:t>References and Resources
+NIST Artificial Intelligence Risk Management Framework: https://www.nist.gov/itl/ai-risk-management-framework
+NIST Generative AI Profile: https://www.nist.gov/publications/artificial-intelligence-risk-management-framework-generative-artificial-intelligence
+CDC Public Health Data Strategy and Data Modernization resources: https://www.cdc.gov/public-health-data-strategy/php/about/index.html
+OWASP guidance for LLM application security
+Agency policies for privacy, cybersecurity, records, procurement, accessibility, and public communications</a:t>
+            </a:r>
+            <a:endParaRPr lang="en-US" dirty="0"/>
+          </a:p>
+        </p:txBody>
+      </p:sp>
+      <p:sp>
+        <p:nvSpPr>
+          <p:cNvPr id="4" name="Slide Number Placeholder 3"/>
+          <p:cNvSpPr>
+            <a:spLocks noGrp="1"/>
+          </p:cNvSpPr>
+          <p:nvPr>
+            <p:ph type="sldNum" sz="quarter" idx="10"/>
+          </p:nvPr>
+        </p:nvSpPr>
+        <p:spPr/>
+        <p:txBody>
+          <a:bodyPr/>
+          <a:lstStyle/>
+          <a:p>
+            <a:fld id="{F7021451-1387-4CA6-816F-3879F97B5CBC}" type="slidenum">
+              <a:rPr lang="en-US"/>
+              <a:t>22</a:t>
+            </a:fld>
+            <a:endParaRPr lang="en-US"/>
+          </a:p>
+        </p:txBody>
+      </p:sp>
+    </p:spTree>
+    <p:extLst>
+      <p:ext uri="{BB962C8B-B14F-4D97-AF65-F5344CB8AC3E}">
+        <p14:creationId xmlns:p14="http://schemas.microsoft.com/office/powerpoint/2010/main" val="1024086991"/>
+      </p:ext>
+    </p:extLst>
+  </p:cSld>
+  <p:clrMapOvr>
+    <a:masterClrMapping/>
+  </p:clrMapOvr>
+</p:notes>
+</file>
+
+<file path=ppt/notesSlides/notesSlide23.xml><?xml version="1.0" encoding="utf-8"?>
+<p:notes xmlns:a="http://schemas.openxmlformats.org/drawingml/2006/main" xmlns:r="http://schemas.openxmlformats.org/officeDocument/2006/relationships" xmlns:p="http://schemas.openxmlformats.org/presentationml/2006/main">
+  <p:cSld>
+    <p:spTree>
+      <p:nvGrpSpPr>
+        <p:cNvPr id="1" name=""/>
+        <p:cNvGrpSpPr/>
+        <p:nvPr/>
+      </p:nvGrpSpPr>
+      <p:grpSpPr>
+        <a:xfrm>
+          <a:off x="0" y="0"/>
+          <a:ext cx="0" cy="0"/>
+          <a:chOff x="0" y="0"/>
+          <a:chExt cx="0" cy="0"/>
+        </a:xfrm>
+      </p:grpSpPr>
+      <p:sp>
+        <p:nvSpPr>
+          <p:cNvPr id="2" name="Slide Image Placeholder 1"/>
+          <p:cNvSpPr>
+            <a:spLocks noGrp="1" noRot="1" noChangeAspect="1"/>
+          </p:cNvSpPr>
+          <p:nvPr>
+            <p:ph type="sldImg"/>
+          </p:nvPr>
+        </p:nvSpPr>
+        <p:spPr/>
+      </p:sp>
+      <p:sp>
+        <p:nvSpPr>
+          <p:cNvPr id="3" name="Notes Placeholder 2"/>
+          <p:cNvSpPr>
+            <a:spLocks noGrp="1"/>
+          </p:cNvSpPr>
+          <p:nvPr>
+            <p:ph type="body" idx="1"/>
+          </p:nvPr>
+        </p:nvSpPr>
+        <p:spPr/>
+        <p:txBody>
+          <a:bodyPr/>
+          <a:lstStyle/>
+          <a:p>
+            <a:r>
+              <a:rPr lang="en-US" dirty="0"/>
+              <a:t>References and Resources
+Relevant public health program SOPs, data governance documentation, and implementation plans</a:t>
+            </a:r>
+            <a:endParaRPr lang="en-US" dirty="0"/>
+          </a:p>
+        </p:txBody>
+      </p:sp>
+      <p:sp>
+        <p:nvSpPr>
+          <p:cNvPr id="4" name="Slide Number Placeholder 3"/>
+          <p:cNvSpPr>
+            <a:spLocks noGrp="1"/>
+          </p:cNvSpPr>
+          <p:nvPr>
+            <p:ph type="sldNum" sz="quarter" idx="10"/>
+          </p:nvPr>
+        </p:nvSpPr>
+        <p:spPr/>
+        <p:txBody>
+          <a:bodyPr/>
+          <a:lstStyle/>
+          <a:p>
+            <a:fld id="{F7021451-1387-4CA6-816F-3879F97B5CBC}" type="slidenum">
+              <a:rPr lang="en-US"/>
+              <a:t>23</a:t>
             </a:fld>
             <a:endParaRPr lang="en-US"/>
           </a:p>
@@ -1795,12 +1977,11 @@
           <a:p>
             <a:r>
               <a:rPr lang="en-US" dirty="0"/>
-              <a:t>Learning Objectives
-Identify appropriate and inappropriate uses of AI in public health communications.
-Apply source verification, plain language, accessibility, and equity review to AI-generated messages.
-Design a human review workflow for AI-assisted public-facing communications.
-Recognize misinformation, overstatement, missing uncertainty, and stigmatizing language risks.
-Produce an AI-assisted communications review checklist.</a:t>
+              <a:t>Related Playbook Plays
+Play 11: Build and Deploy AI Solutions - This lesson informs Play 11 by helping learners connect the lesson topic to build and deploy ai solutions work in the AI Playbook.
+Play 3: Establish AI Governance - This lesson informs Play 3 by helping learners connect the lesson topic to establish ai governance work in the AI Playbook sequence.
+Play 1: Vision &amp; Guardrails - This lesson informs Play 1 by helping learners connect the lesson topic to vision &amp; guardrails work in the AI Playbook sequence.
+Play 2: Readiness Assessment - This lesson informs Play 2 by helping learners connect the lesson topic to readiness assessment work in the AI Playbook sequence.</a:t>
             </a:r>
             <a:endParaRPr lang="en-US" dirty="0"/>
           </a:p>
@@ -1888,10 +2069,13 @@
           <a:p>
             <a:r>
               <a:rPr lang="en-US" dirty="0"/>
-              <a:t>Module Overview
-Generative AI can support public health communications by helping staff draft, revise, simplify, translate, tailor, and test messages. However, public health communication carries high trust, equity, accessibility, and accuracy obligations. AI-generated text can sound clear and authoritative while misstating evidence, omitting uncertainty, using stigmatizing language, failing to meet accessibility needs, or creating messages that do not fit community context.
-This module teaches communications staff and program partners how to use AI as a drafting and review aid while preserving human accountability. It focuses on public-facing messages, internal communications, plain language, community relevance, multilingual communication, misinformation risks, and review workflows.
-The goal is not to replace skilled communicators. The goal is to help communications teams use AI safely for efficiency, brainstorming, and consistency while retaining professional judgment, source verification, community review, and public trust.</a:t>
+              <a:t>Related Toolkit Resources
+Tool 4: AI Policy Landscape Scan (Worksheet) - Use AI Policy Landscape Scan to translate this lesson into a documented public health AI planning, governance, implementation,.
+Tool 5: AI Environmental and Resource Impact Review (Checklist) - Use AI Environmental and Resource Impact Review to translate this lesson into a documented public health AI planning,.
+Tool 6: Human-Centered AI Decision Rule Checklist (Checklist) - Use this tool to complete or strengthen the practical exercise for the module using fictional, de-identified, or generalized.
+Tool 8: AI Project Charter (Planning) - Use AI Project Charter to translate this lesson into a documented public health AI planning, governance, implementation, or.
+Tool 9: Data Quality Assessment Checklist (Checklist) - Use this tool to complete or strengthen the practical exercise for the module using fictional, de-identified, or generalized.
+Tool 10: Tiered Data Classification for AI Use (Worksheet) - Use this tool to complete or strengthen the practical exercise for the module using fictional, de-identified, or generalized.</a:t>
             </a:r>
             <a:endParaRPr lang="en-US" dirty="0"/>
           </a:p>
@@ -1979,8 +2163,12 @@
           <a:p>
             <a:r>
               <a:rPr lang="en-US" dirty="0"/>
-              <a:t>Jurisdiction and Agency Policy Note
-This national-level module is intended for training and planning purposes. It does not replace legal, privacy, procurement, civil rights, records, or agency policy review. Learners should confirm applicable requirements in their own jurisdiction and organization before implementing AI-supported workflows.</a:t>
+              <a:t>Learning Objectives
+Identify appropriate and inappropriate uses of AI in public health communications.
+Apply source verification, plain language, accessibility, and equity review to AI-generated messages.
+Design a human review workflow for AI-assisted public-facing communications.
+Recognize misinformation, overstatement, missing uncertainty, and stigmatizing language risks.
+Produce an AI-assisted communications review checklist.</a:t>
             </a:r>
             <a:endParaRPr lang="en-US" dirty="0"/>
           </a:p>
@@ -2068,8 +2256,10 @@
           <a:p>
             <a:r>
               <a:rPr lang="en-US" dirty="0"/>
-              <a:t>Public Health Example
-A health department uses AI to draft a heat safety message for older adults, outdoor workers, and people without reliable air conditioning. Communications staff verify the recommendations against official guidance, rewrite the message in plain language, review it for accessibility and language access, avoid blaming individuals for structural risks, and route the final version through the approved public information process before release.</a:t>
+              <a:t>Module Overview
+Generative AI can support public health communications by helping staff draft, revise, simplify, translate, tailor, and test messages. However, public health communication carries high trust, equity, accessibility, and accuracy obligations. AI-generated text can sound clear and authoritative while misstating evidence, omitting uncertainty, using stigmatizing language, failing to meet accessibility needs, or creating messages that do not fit community context.
+This module teaches communications staff and program partners how to use AI as a drafting and review aid while preserving human accountability. It focuses on public-facing messages, internal communications, plain language, community relevance, multilingual communication, misinformation risks, and review workflows.
+The goal is not to replace skilled communicators. The goal is to help communications teams use AI safely for efficiency, brainstorming, and consistency while retaining professional judgment, source verification, community review, and public trust.</a:t>
             </a:r>
             <a:endParaRPr lang="en-US" dirty="0"/>
           </a:p>
@@ -2157,10 +2347,8 @@
           <a:p>
             <a:r>
               <a:rPr lang="en-US" dirty="0"/>
-              <a:t>Topic Deep Dive
-AI can be useful early in the message development process. It can generate first drafts, propose alternative tones, simplify technical language, identify jargon, create audience-specific versions, and suggest questions the public may ask. These uses can save time, especially when communications staff support multiple programs. However, AI should not be treated as the authority on public health content. The approved evidence base should come from agency guidance, subject matter experts, official data, and community context.
-Source verification is essential because AI-generated language may include unsupported claims, outdated recommendations, fabricated details, or overconfident statements. Communications staff should verify factual claims, numbers, dates, risk statements, recommendations, and eligibility criteria against approved sources. When uncertainty exists, the message should explain what is known, what is not known, and what actions people can take.
-Equity and accessibility review should be built into the workflow. AI-generated messages may not adequately address language access, disability access, literacy, cultural context, rural access, transportation barriers, technology access, or historical mistrust. Public health messages should be reviewed for plain language, readability, alternative formats, translation quality, non-stigmatizing language, and practical feasibility for the intended audience.</a:t>
+              <a:t>Jurisdiction and Agency Policy Note
+This national-level module is intended for training and planning purposes. It does not replace legal, privacy, procurement, civil rights, records, or agency policy review. Learners should confirm applicable requirements in their own jurisdiction and organization before implementing AI-supported workflows.</a:t>
             </a:r>
             <a:endParaRPr lang="en-US" dirty="0"/>
           </a:p>
@@ -2248,8 +2436,8 @@
           <a:p>
             <a:r>
               <a:rPr lang="en-US" dirty="0"/>
-              <a:t>Topic Deep Dive
-AI can also support review, but it should not replace reviewers. A communications workflow should define who checks technical accuracy, who reviews equity and accessibility, who approves public release, and who monitors public response after dissemination. For urgent communications, the workflow should include expedited review rules that still preserve accuracy and accountability.</a:t>
+              <a:t>Public Health Example
+A health department uses AI to draft a heat safety message for older adults, outdoor workers, and people without reliable air conditioning. Communications staff verify the recommendations against official guidance, rewrite the message in plain language, review it for accessibility and language access, avoid blaming individuals for structural risks, and route the final version through the approved public information process before release.</a:t>
             </a:r>
             <a:endParaRPr lang="en-US" dirty="0"/>
           </a:p>
@@ -2337,10 +2525,10 @@
           <a:p>
             <a:r>
               <a:rPr lang="en-US" dirty="0"/>
-              <a:t>Risks, Failure Modes, and Guardrails
-Risks and failure modes include the following:
-AI-generated messages overstating evidence or omitting uncertainty.
-Use of stigmatizing, blaming, or culturally inappropriate language.</a:t>
+              <a:t>Topic Deep Dive
+AI can be useful early in the message development process. It can generate first drafts, propose alternative tones, simplify technical language, identify jargon, create audience-specific versions, and suggest questions the public may ask. These uses can save time, especially when communications staff support multiple programs. However, AI should not be treated as the authority on public health content. The approved evidence base should come from agency guidance, subject matter experts, official data, and community context.
+Source verification is essential because AI-generated language may include unsupported claims, outdated recommendations, fabricated details, or overconfident statements. Communications staff should verify factual claims, numbers, dates, risk statements, recommendations, and eligibility criteria against approved sources. When uncertainty exists, the message should explain what is known, what is not known, and what actions people can take.
+Equity and accessibility review should be built into the workflow. AI-generated messages may not adequately address language access, disability access, literacy, cultural context, rural access, transportation barriers, technology access, or historical mistrust. Public health messages should be reviewed for plain language, readability, alternative formats, translation quality, non-stigmatizing language, and practical feasibility for the intended audience.</a:t>
             </a:r>
             <a:endParaRPr lang="en-US" dirty="0"/>
           </a:p>
@@ -2963,7 +3151,32 @@
       </p:sp>
       <p:sp>
         <p:nvSpPr>
-          <p:cNvPr id="3" name="Text 1"/>
+          <p:cNvPr id="3" name="Shape 1"/>
+          <p:cNvSpPr/>
+          <p:nvPr/>
+        </p:nvSpPr>
+        <p:spPr>
+          <a:xfrm>
+            <a:off x="0" y="164592"/>
+            <a:ext cx="146304" cy="6693408"/>
+          </a:xfrm>
+          <a:prstGeom prst="rect">
+            <a:avLst/>
+          </a:prstGeom>
+          <a:solidFill>
+            <a:srgbClr val="2F8A28"/>
+          </a:solidFill>
+          <a:ln w="12700">
+            <a:solidFill>
+              <a:srgbClr val="2F8A28"/>
+            </a:solidFill>
+            <a:prstDash val="solid"/>
+          </a:ln>
+        </p:spPr>
+      </p:sp>
+      <p:sp>
+        <p:nvSpPr>
+          <p:cNvPr id="4" name="Text 2"/>
           <p:cNvSpPr/>
           <p:nvPr/>
         </p:nvSpPr>
@@ -3002,7 +3215,7 @@
       </p:sp>
       <p:sp>
         <p:nvSpPr>
-          <p:cNvPr id="4" name="Text 2"/>
+          <p:cNvPr id="5" name="Text 3"/>
           <p:cNvSpPr/>
           <p:nvPr/>
         </p:nvSpPr>
@@ -3041,7 +3254,7 @@
       </p:sp>
       <p:sp>
         <p:nvSpPr>
-          <p:cNvPr id="5" name="Text 3"/>
+          <p:cNvPr id="6" name="Text 4"/>
           <p:cNvSpPr/>
           <p:nvPr/>
         </p:nvSpPr>
@@ -3080,7 +3293,7 @@
       </p:sp>
       <p:sp>
         <p:nvSpPr>
-          <p:cNvPr id="6" name="Text 4"/>
+          <p:cNvPr id="7" name="Text 5"/>
           <p:cNvSpPr/>
           <p:nvPr/>
         </p:nvSpPr>
@@ -3113,7 +3326,7 @@
                 <a:ea typeface="Aptos Display" pitchFamily="34" charset="-122"/>
                 <a:cs typeface="Aptos Display" pitchFamily="34" charset="-120"/>
               </a:rPr>
-              <a:t>Risks, Failure Modes, and Guardrails Continued</a:t>
+              <a:t>Topic Deep Dive Continued</a:t>
             </a:r>
             <a:endParaRPr lang="en-US" sz="2700" dirty="0"/>
           </a:p>
@@ -3121,32 +3334,29 @@
       </p:sp>
       <p:sp>
         <p:nvSpPr>
-          <p:cNvPr id="7" name="Text 5"/>
-          <p:cNvSpPr/>
-          <p:nvPr/>
-        </p:nvSpPr>
-        <p:spPr>
-          <a:xfrm>
-            <a:off x="822960" y="1325880"/>
-            <a:ext cx="10378440" cy="4800600"/>
-          </a:xfrm>
-          <a:prstGeom prst="rect">
-            <a:avLst/>
-          </a:prstGeom>
-          <a:noFill/>
-          <a:ln/>
-        </p:spPr>
-        <p:txBody>
-          <a:bodyPr wrap="square" lIns="1016" tIns="1016" rIns="1016" bIns="1016" rtlCol="0" anchor="t">
+          <p:cNvPr id="8" name="Text 6"/>
+          <p:cNvSpPr/>
+          <p:nvPr/>
+        </p:nvSpPr>
+        <p:spPr>
+          <a:xfrm>
+            <a:off x="868680" y="1417320"/>
+            <a:ext cx="6675120" cy="4434840"/>
+          </a:xfrm>
+          <a:prstGeom prst="rect">
+            <a:avLst/>
+          </a:prstGeom>
+          <a:noFill/>
+          <a:ln/>
+        </p:spPr>
+        <p:txBody>
+          <a:bodyPr wrap="square" lIns="635" tIns="635" rIns="635" bIns="635" rtlCol="0" anchor="t">
             <a:normAutofit/>
           </a:bodyPr>
           <a:lstStyle/>
           <a:p>
-            <a:pPr indent="0" marL="0">
-              <a:buNone/>
-            </a:pPr>
-            <a:r>
-              <a:rPr lang="en-US" sz="1420" dirty="0">
+            <a:r>
+              <a:rPr lang="en-US" sz="1700" dirty="0">
                 <a:solidFill>
                   <a:srgbClr val="17364A"/>
                 </a:solidFill>
@@ -3154,9 +3364,251 @@
                 <a:ea typeface="Aptos" pitchFamily="34" charset="-122"/>
                 <a:cs typeface="Aptos" pitchFamily="34" charset="-120"/>
               </a:rPr>
-              <a:t>Unverified translations or readability changes that alter meaning. Public-facing content being released without required subject matter or leadership review. Messages that assume access to resources, technology, transportation, or healthcare that the audience may not have.</a:t>
-            </a:r>
-            <a:endParaRPr lang="en-US" sz="1420" dirty="0"/>
+              <a:t>AI can also support review, but it should not replace reviewers.</a:t>
+            </a:r>
+            <a:endParaRPr lang="en-US" sz="1700" dirty="0"/>
+          </a:p>
+          <a:p>
+            <a:r>
+              <a:rPr lang="en-US" sz="1700" dirty="0">
+                <a:solidFill>
+                  <a:srgbClr val="17364A"/>
+                </a:solidFill>
+                <a:latin typeface="Aptos" pitchFamily="34" charset="0"/>
+                <a:ea typeface="Aptos" pitchFamily="34" charset="-122"/>
+                <a:cs typeface="Aptos" pitchFamily="34" charset="-120"/>
+              </a:rPr>
+              <a:t>A communications workflow should define who checks technical accuracy, who reviews equity and accessibility, who approves.</a:t>
+            </a:r>
+            <a:endParaRPr lang="en-US" sz="1700" dirty="0"/>
+          </a:p>
+          <a:p>
+            <a:r>
+              <a:rPr lang="en-US" sz="1700" dirty="0">
+                <a:solidFill>
+                  <a:srgbClr val="17364A"/>
+                </a:solidFill>
+                <a:latin typeface="Aptos" pitchFamily="34" charset="0"/>
+                <a:ea typeface="Aptos" pitchFamily="34" charset="-122"/>
+                <a:cs typeface="Aptos" pitchFamily="34" charset="-120"/>
+              </a:rPr>
+              <a:t>For urgent communications, the workflow should include expedited review rules that still preserve accuracy and.</a:t>
+            </a:r>
+            <a:endParaRPr lang="en-US" sz="1700" dirty="0"/>
+          </a:p>
+        </p:txBody>
+      </p:sp>
+      <p:sp>
+        <p:nvSpPr>
+          <p:cNvPr id="9" name="Shape 7"/>
+          <p:cNvSpPr/>
+          <p:nvPr/>
+        </p:nvSpPr>
+        <p:spPr>
+          <a:xfrm>
+            <a:off x="7909560" y="1417320"/>
+            <a:ext cx="3154680" cy="1828800"/>
+          </a:xfrm>
+          <a:prstGeom prst="roundRect">
+            <a:avLst>
+              <a:gd name="adj" fmla="val 6000"/>
+            </a:avLst>
+          </a:prstGeom>
+          <a:solidFill>
+            <a:srgbClr val="EEF8ED"/>
+          </a:solidFill>
+          <a:ln w="12700">
+            <a:solidFill>
+              <a:srgbClr val="B9D7E6"/>
+            </a:solidFill>
+            <a:prstDash val="solid"/>
+          </a:ln>
+        </p:spPr>
+      </p:sp>
+      <p:sp>
+        <p:nvSpPr>
+          <p:cNvPr id="10" name="Text 8"/>
+          <p:cNvSpPr/>
+          <p:nvPr/>
+        </p:nvSpPr>
+        <p:spPr>
+          <a:xfrm>
+            <a:off x="8074152" y="1563624"/>
+            <a:ext cx="2825496" cy="201168"/>
+          </a:xfrm>
+          <a:prstGeom prst="rect">
+            <a:avLst/>
+          </a:prstGeom>
+          <a:noFill/>
+          <a:ln/>
+        </p:spPr>
+        <p:txBody>
+          <a:bodyPr wrap="square" lIns="0" tIns="0" rIns="0" bIns="0" rtlCol="0" anchor="ctr"/>
+          <a:lstStyle/>
+          <a:p>
+            <a:pPr indent="0" marL="0">
+              <a:buNone/>
+            </a:pPr>
+            <a:r>
+              <a:rPr lang="en-US" sz="950" b="1" dirty="0">
+                <a:solidFill>
+                  <a:srgbClr val="0068B7"/>
+                </a:solidFill>
+                <a:latin typeface="Aptos" pitchFamily="34" charset="0"/>
+                <a:ea typeface="Aptos" pitchFamily="34" charset="-122"/>
+                <a:cs typeface="Aptos" pitchFamily="34" charset="-120"/>
+              </a:rPr>
+              <a:t>Key idea</a:t>
+            </a:r>
+            <a:endParaRPr lang="en-US" sz="950" dirty="0"/>
+          </a:p>
+        </p:txBody>
+      </p:sp>
+      <p:sp>
+        <p:nvSpPr>
+          <p:cNvPr id="11" name="Text 9"/>
+          <p:cNvSpPr/>
+          <p:nvPr/>
+        </p:nvSpPr>
+        <p:spPr>
+          <a:xfrm>
+            <a:off x="8074152" y="1856232"/>
+            <a:ext cx="2825496" cy="1261872"/>
+          </a:xfrm>
+          <a:prstGeom prst="rect">
+            <a:avLst/>
+          </a:prstGeom>
+          <a:noFill/>
+          <a:ln/>
+        </p:spPr>
+        <p:txBody>
+          <a:bodyPr wrap="square" lIns="0" tIns="0" rIns="0" bIns="0" rtlCol="0" anchor="t">
+            <a:normAutofit/>
+          </a:bodyPr>
+          <a:lstStyle/>
+          <a:p>
+            <a:pPr indent="0" marL="0">
+              <a:buNone/>
+            </a:pPr>
+            <a:r>
+              <a:rPr lang="en-US" sz="1250" dirty="0">
+                <a:solidFill>
+                  <a:srgbClr val="17364A"/>
+                </a:solidFill>
+                <a:latin typeface="Aptos" pitchFamily="34" charset="0"/>
+                <a:ea typeface="Aptos" pitchFamily="34" charset="-122"/>
+                <a:cs typeface="Aptos" pitchFamily="34" charset="-120"/>
+              </a:rPr>
+              <a:t>AI can also support review, but it should not replace reviewers.</a:t>
+            </a:r>
+            <a:endParaRPr lang="en-US" sz="1250" dirty="0"/>
+          </a:p>
+        </p:txBody>
+      </p:sp>
+      <p:sp>
+        <p:nvSpPr>
+          <p:cNvPr id="12" name="Shape 10"/>
+          <p:cNvSpPr/>
+          <p:nvPr/>
+        </p:nvSpPr>
+        <p:spPr>
+          <a:xfrm>
+            <a:off x="7909560" y="3520440"/>
+            <a:ext cx="3154680" cy="1737360"/>
+          </a:xfrm>
+          <a:prstGeom prst="roundRect">
+            <a:avLst>
+              <a:gd name="adj" fmla="val 6316"/>
+            </a:avLst>
+          </a:prstGeom>
+          <a:solidFill>
+            <a:srgbClr val="EAF6F8"/>
+          </a:solidFill>
+          <a:ln w="12700">
+            <a:solidFill>
+              <a:srgbClr val="B9D7E6"/>
+            </a:solidFill>
+            <a:prstDash val="solid"/>
+          </a:ln>
+        </p:spPr>
+      </p:sp>
+      <p:sp>
+        <p:nvSpPr>
+          <p:cNvPr id="13" name="Text 11"/>
+          <p:cNvSpPr/>
+          <p:nvPr/>
+        </p:nvSpPr>
+        <p:spPr>
+          <a:xfrm>
+            <a:off x="8074152" y="3666744"/>
+            <a:ext cx="2825496" cy="201168"/>
+          </a:xfrm>
+          <a:prstGeom prst="rect">
+            <a:avLst/>
+          </a:prstGeom>
+          <a:noFill/>
+          <a:ln/>
+        </p:spPr>
+        <p:txBody>
+          <a:bodyPr wrap="square" lIns="0" tIns="0" rIns="0" bIns="0" rtlCol="0" anchor="ctr"/>
+          <a:lstStyle/>
+          <a:p>
+            <a:pPr indent="0" marL="0">
+              <a:buNone/>
+            </a:pPr>
+            <a:r>
+              <a:rPr lang="en-US" sz="950" b="1" dirty="0">
+                <a:solidFill>
+                  <a:srgbClr val="0068B7"/>
+                </a:solidFill>
+                <a:latin typeface="Aptos" pitchFamily="34" charset="0"/>
+                <a:ea typeface="Aptos" pitchFamily="34" charset="-122"/>
+                <a:cs typeface="Aptos" pitchFamily="34" charset="-120"/>
+              </a:rPr>
+              <a:t>Use this for</a:t>
+            </a:r>
+            <a:endParaRPr lang="en-US" sz="950" dirty="0"/>
+          </a:p>
+        </p:txBody>
+      </p:sp>
+      <p:sp>
+        <p:nvSpPr>
+          <p:cNvPr id="14" name="Text 12"/>
+          <p:cNvSpPr/>
+          <p:nvPr/>
+        </p:nvSpPr>
+        <p:spPr>
+          <a:xfrm>
+            <a:off x="8074152" y="3959352"/>
+            <a:ext cx="2825496" cy="1170432"/>
+          </a:xfrm>
+          <a:prstGeom prst="rect">
+            <a:avLst/>
+          </a:prstGeom>
+          <a:noFill/>
+          <a:ln/>
+        </p:spPr>
+        <p:txBody>
+          <a:bodyPr wrap="square" lIns="0" tIns="0" rIns="0" bIns="0" rtlCol="0" anchor="t">
+            <a:normAutofit/>
+          </a:bodyPr>
+          <a:lstStyle/>
+          <a:p>
+            <a:pPr indent="0" marL="0">
+              <a:buNone/>
+            </a:pPr>
+            <a:r>
+              <a:rPr lang="en-US" sz="1250" dirty="0">
+                <a:solidFill>
+                  <a:srgbClr val="17364A"/>
+                </a:solidFill>
+                <a:latin typeface="Aptos" pitchFamily="34" charset="0"/>
+                <a:ea typeface="Aptos" pitchFamily="34" charset="-122"/>
+                <a:cs typeface="Aptos" pitchFamily="34" charset="-120"/>
+              </a:rPr>
+              <a:t>Connect the concept to public health decisions, safeguards, documentation, or implementation work.</a:t>
+            </a:r>
+            <a:endParaRPr lang="en-US" sz="1250" dirty="0"/>
           </a:p>
         </p:txBody>
       </p:sp>
@@ -3219,7 +3671,32 @@
       </p:sp>
       <p:sp>
         <p:nvSpPr>
-          <p:cNvPr id="3" name="Text 1"/>
+          <p:cNvPr id="3" name="Shape 1"/>
+          <p:cNvSpPr/>
+          <p:nvPr/>
+        </p:nvSpPr>
+        <p:spPr>
+          <a:xfrm>
+            <a:off x="0" y="164592"/>
+            <a:ext cx="146304" cy="6693408"/>
+          </a:xfrm>
+          <a:prstGeom prst="rect">
+            <a:avLst/>
+          </a:prstGeom>
+          <a:solidFill>
+            <a:srgbClr val="2F8A28"/>
+          </a:solidFill>
+          <a:ln w="12700">
+            <a:solidFill>
+              <a:srgbClr val="2F8A28"/>
+            </a:solidFill>
+            <a:prstDash val="solid"/>
+          </a:ln>
+        </p:spPr>
+      </p:sp>
+      <p:sp>
+        <p:nvSpPr>
+          <p:cNvPr id="4" name="Text 2"/>
           <p:cNvSpPr/>
           <p:nvPr/>
         </p:nvSpPr>
@@ -3258,7 +3735,7 @@
       </p:sp>
       <p:sp>
         <p:nvSpPr>
-          <p:cNvPr id="4" name="Text 2"/>
+          <p:cNvPr id="5" name="Text 3"/>
           <p:cNvSpPr/>
           <p:nvPr/>
         </p:nvSpPr>
@@ -3297,7 +3774,7 @@
       </p:sp>
       <p:sp>
         <p:nvSpPr>
-          <p:cNvPr id="5" name="Text 3"/>
+          <p:cNvPr id="6" name="Text 4"/>
           <p:cNvSpPr/>
           <p:nvPr/>
         </p:nvSpPr>
@@ -3336,13 +3813,77 @@
       </p:sp>
       <p:sp>
         <p:nvSpPr>
-          <p:cNvPr id="6" name="Text 4"/>
+          <p:cNvPr id="7" name="Shape 5"/>
           <p:cNvSpPr/>
           <p:nvPr/>
         </p:nvSpPr>
         <p:spPr>
           <a:xfrm>
             <a:off x="640080" y="658368"/>
+            <a:ext cx="420624" cy="420624"/>
+          </a:xfrm>
+          <a:prstGeom prst="ellipse">
+            <a:avLst/>
+          </a:prstGeom>
+          <a:solidFill>
+            <a:srgbClr val="0068B7"/>
+          </a:solidFill>
+          <a:ln w="12700">
+            <a:solidFill>
+              <a:srgbClr val="0068B7"/>
+            </a:solidFill>
+            <a:prstDash val="solid"/>
+          </a:ln>
+        </p:spPr>
+      </p:sp>
+      <p:sp>
+        <p:nvSpPr>
+          <p:cNvPr id="8" name="Text 6"/>
+          <p:cNvSpPr/>
+          <p:nvPr/>
+        </p:nvSpPr>
+        <p:spPr>
+          <a:xfrm>
+            <a:off x="640080" y="731520"/>
+            <a:ext cx="420624" cy="164592"/>
+          </a:xfrm>
+          <a:prstGeom prst="rect">
+            <a:avLst/>
+          </a:prstGeom>
+          <a:noFill/>
+          <a:ln/>
+        </p:spPr>
+        <p:txBody>
+          <a:bodyPr wrap="square" lIns="0" tIns="0" rIns="0" bIns="0" rtlCol="0" anchor="ctr"/>
+          <a:lstStyle/>
+          <a:p>
+            <a:pPr algn="ctr" indent="0" marL="0">
+              <a:buNone/>
+            </a:pPr>
+            <a:r>
+              <a:rPr lang="en-US" sz="1100" b="1" dirty="0">
+                <a:solidFill>
+                  <a:srgbClr val="FFFFFF"/>
+                </a:solidFill>
+                <a:latin typeface="Aptos" pitchFamily="34" charset="0"/>
+                <a:ea typeface="Aptos" pitchFamily="34" charset="-122"/>
+                <a:cs typeface="Aptos" pitchFamily="34" charset="-120"/>
+              </a:rPr>
+              <a:t>6</a:t>
+            </a:r>
+            <a:endParaRPr lang="en-US" sz="1100" dirty="0"/>
+          </a:p>
+        </p:txBody>
+      </p:sp>
+      <p:sp>
+        <p:nvSpPr>
+          <p:cNvPr id="9" name="Text 7"/>
+          <p:cNvSpPr/>
+          <p:nvPr/>
+        </p:nvSpPr>
+        <p:spPr>
+          <a:xfrm>
+            <a:off x="640080" y="621792"/>
             <a:ext cx="10881360" cy="566928"/>
           </a:xfrm>
           <a:prstGeom prst="rect">
@@ -3369,7 +3910,7 @@
                 <a:ea typeface="Aptos Display" pitchFamily="34" charset="-122"/>
                 <a:cs typeface="Aptos Display" pitchFamily="34" charset="-120"/>
               </a:rPr>
-              <a:t>Risks, Failure Modes, and Guardrails Continued</a:t>
+              <a:t>Risks, Failure Modes, and Guardrails</a:t>
             </a:r>
             <a:endParaRPr lang="en-US" sz="2700" dirty="0"/>
           </a:p>
@@ -3377,32 +3918,29 @@
       </p:sp>
       <p:sp>
         <p:nvSpPr>
-          <p:cNvPr id="7" name="Text 5"/>
-          <p:cNvSpPr/>
-          <p:nvPr/>
-        </p:nvSpPr>
-        <p:spPr>
-          <a:xfrm>
-            <a:off x="822960" y="1325880"/>
-            <a:ext cx="10378440" cy="4800600"/>
-          </a:xfrm>
-          <a:prstGeom prst="rect">
-            <a:avLst/>
-          </a:prstGeom>
-          <a:noFill/>
-          <a:ln/>
-        </p:spPr>
-        <p:txBody>
-          <a:bodyPr wrap="square" lIns="1016" tIns="1016" rIns="1016" bIns="1016" rtlCol="0" anchor="t">
+          <p:cNvPr id="10" name="Text 8"/>
+          <p:cNvSpPr/>
+          <p:nvPr/>
+        </p:nvSpPr>
+        <p:spPr>
+          <a:xfrm>
+            <a:off x="868680" y="1417320"/>
+            <a:ext cx="6675120" cy="4434840"/>
+          </a:xfrm>
+          <a:prstGeom prst="rect">
+            <a:avLst/>
+          </a:prstGeom>
+          <a:noFill/>
+          <a:ln/>
+        </p:spPr>
+        <p:txBody>
+          <a:bodyPr wrap="square" lIns="635" tIns="635" rIns="635" bIns="635" rtlCol="0" anchor="t">
             <a:normAutofit/>
           </a:bodyPr>
           <a:lstStyle/>
           <a:p>
-            <a:pPr indent="0" marL="0">
-              <a:buNone/>
-            </a:pPr>
-            <a:r>
-              <a:rPr lang="en-US" sz="1420" dirty="0">
+            <a:r>
+              <a:rPr lang="en-US" sz="1700" dirty="0">
                 <a:solidFill>
                   <a:srgbClr val="17364A"/>
                 </a:solidFill>
@@ -3410,9 +3948,251 @@
                 <a:ea typeface="Aptos" pitchFamily="34" charset="-122"/>
                 <a:cs typeface="Aptos" pitchFamily="34" charset="-120"/>
               </a:rPr>
-              <a:t>Recommended guardrails include the following: Use only approved tools and approved source material for public health communications. Require human review for accuracy, plain language, accessibility, equity, and tone.</a:t>
-            </a:r>
-            <a:endParaRPr lang="en-US" sz="1420" dirty="0"/>
+              <a:t>Risks and failure modes include the following:</a:t>
+            </a:r>
+            <a:endParaRPr lang="en-US" sz="1700" dirty="0"/>
+          </a:p>
+          <a:p>
+            <a:r>
+              <a:rPr lang="en-US" sz="1700" dirty="0">
+                <a:solidFill>
+                  <a:srgbClr val="17364A"/>
+                </a:solidFill>
+                <a:latin typeface="Aptos" pitchFamily="34" charset="0"/>
+                <a:ea typeface="Aptos" pitchFamily="34" charset="-122"/>
+                <a:cs typeface="Aptos" pitchFamily="34" charset="-120"/>
+              </a:rPr>
+              <a:t>AI-generated messages overstating evidence or omitting uncertainty.</a:t>
+            </a:r>
+            <a:endParaRPr lang="en-US" sz="1700" dirty="0"/>
+          </a:p>
+          <a:p>
+            <a:r>
+              <a:rPr lang="en-US" sz="1700" dirty="0">
+                <a:solidFill>
+                  <a:srgbClr val="17364A"/>
+                </a:solidFill>
+                <a:latin typeface="Aptos" pitchFamily="34" charset="0"/>
+                <a:ea typeface="Aptos" pitchFamily="34" charset="-122"/>
+                <a:cs typeface="Aptos" pitchFamily="34" charset="-120"/>
+              </a:rPr>
+              <a:t>Use of stigmatizing, blaming, or culturally inappropriate language.</a:t>
+            </a:r>
+            <a:endParaRPr lang="en-US" sz="1700" dirty="0"/>
+          </a:p>
+        </p:txBody>
+      </p:sp>
+      <p:sp>
+        <p:nvSpPr>
+          <p:cNvPr id="11" name="Shape 9"/>
+          <p:cNvSpPr/>
+          <p:nvPr/>
+        </p:nvSpPr>
+        <p:spPr>
+          <a:xfrm>
+            <a:off x="7909560" y="1417320"/>
+            <a:ext cx="3154680" cy="1828800"/>
+          </a:xfrm>
+          <a:prstGeom prst="roundRect">
+            <a:avLst>
+              <a:gd name="adj" fmla="val 6000"/>
+            </a:avLst>
+          </a:prstGeom>
+          <a:solidFill>
+            <a:srgbClr val="EEF8ED"/>
+          </a:solidFill>
+          <a:ln w="12700">
+            <a:solidFill>
+              <a:srgbClr val="B9D7E6"/>
+            </a:solidFill>
+            <a:prstDash val="solid"/>
+          </a:ln>
+        </p:spPr>
+      </p:sp>
+      <p:sp>
+        <p:nvSpPr>
+          <p:cNvPr id="12" name="Text 10"/>
+          <p:cNvSpPr/>
+          <p:nvPr/>
+        </p:nvSpPr>
+        <p:spPr>
+          <a:xfrm>
+            <a:off x="8074152" y="1563624"/>
+            <a:ext cx="2825496" cy="201168"/>
+          </a:xfrm>
+          <a:prstGeom prst="rect">
+            <a:avLst/>
+          </a:prstGeom>
+          <a:noFill/>
+          <a:ln/>
+        </p:spPr>
+        <p:txBody>
+          <a:bodyPr wrap="square" lIns="0" tIns="0" rIns="0" bIns="0" rtlCol="0" anchor="ctr"/>
+          <a:lstStyle/>
+          <a:p>
+            <a:pPr indent="0" marL="0">
+              <a:buNone/>
+            </a:pPr>
+            <a:r>
+              <a:rPr lang="en-US" sz="950" b="1" dirty="0">
+                <a:solidFill>
+                  <a:srgbClr val="0068B7"/>
+                </a:solidFill>
+                <a:latin typeface="Aptos" pitchFamily="34" charset="0"/>
+                <a:ea typeface="Aptos" pitchFamily="34" charset="-122"/>
+                <a:cs typeface="Aptos" pitchFamily="34" charset="-120"/>
+              </a:rPr>
+              <a:t>Key idea</a:t>
+            </a:r>
+            <a:endParaRPr lang="en-US" sz="950" dirty="0"/>
+          </a:p>
+        </p:txBody>
+      </p:sp>
+      <p:sp>
+        <p:nvSpPr>
+          <p:cNvPr id="13" name="Text 11"/>
+          <p:cNvSpPr/>
+          <p:nvPr/>
+        </p:nvSpPr>
+        <p:spPr>
+          <a:xfrm>
+            <a:off x="8074152" y="1856232"/>
+            <a:ext cx="2825496" cy="1261872"/>
+          </a:xfrm>
+          <a:prstGeom prst="rect">
+            <a:avLst/>
+          </a:prstGeom>
+          <a:noFill/>
+          <a:ln/>
+        </p:spPr>
+        <p:txBody>
+          <a:bodyPr wrap="square" lIns="0" tIns="0" rIns="0" bIns="0" rtlCol="0" anchor="t">
+            <a:normAutofit/>
+          </a:bodyPr>
+          <a:lstStyle/>
+          <a:p>
+            <a:pPr indent="0" marL="0">
+              <a:buNone/>
+            </a:pPr>
+            <a:r>
+              <a:rPr lang="en-US" sz="1250" dirty="0">
+                <a:solidFill>
+                  <a:srgbClr val="17364A"/>
+                </a:solidFill>
+                <a:latin typeface="Aptos" pitchFamily="34" charset="0"/>
+                <a:ea typeface="Aptos" pitchFamily="34" charset="-122"/>
+                <a:cs typeface="Aptos" pitchFamily="34" charset="-120"/>
+              </a:rPr>
+              <a:t>Risks and failure modes include the following:</a:t>
+            </a:r>
+            <a:endParaRPr lang="en-US" sz="1250" dirty="0"/>
+          </a:p>
+        </p:txBody>
+      </p:sp>
+      <p:sp>
+        <p:nvSpPr>
+          <p:cNvPr id="14" name="Shape 12"/>
+          <p:cNvSpPr/>
+          <p:nvPr/>
+        </p:nvSpPr>
+        <p:spPr>
+          <a:xfrm>
+            <a:off x="7909560" y="3520440"/>
+            <a:ext cx="3154680" cy="1737360"/>
+          </a:xfrm>
+          <a:prstGeom prst="roundRect">
+            <a:avLst>
+              <a:gd name="adj" fmla="val 6316"/>
+            </a:avLst>
+          </a:prstGeom>
+          <a:solidFill>
+            <a:srgbClr val="EAF6F8"/>
+          </a:solidFill>
+          <a:ln w="12700">
+            <a:solidFill>
+              <a:srgbClr val="B9D7E6"/>
+            </a:solidFill>
+            <a:prstDash val="solid"/>
+          </a:ln>
+        </p:spPr>
+      </p:sp>
+      <p:sp>
+        <p:nvSpPr>
+          <p:cNvPr id="15" name="Text 13"/>
+          <p:cNvSpPr/>
+          <p:nvPr/>
+        </p:nvSpPr>
+        <p:spPr>
+          <a:xfrm>
+            <a:off x="8074152" y="3666744"/>
+            <a:ext cx="2825496" cy="201168"/>
+          </a:xfrm>
+          <a:prstGeom prst="rect">
+            <a:avLst/>
+          </a:prstGeom>
+          <a:noFill/>
+          <a:ln/>
+        </p:spPr>
+        <p:txBody>
+          <a:bodyPr wrap="square" lIns="0" tIns="0" rIns="0" bIns="0" rtlCol="0" anchor="ctr"/>
+          <a:lstStyle/>
+          <a:p>
+            <a:pPr indent="0" marL="0">
+              <a:buNone/>
+            </a:pPr>
+            <a:r>
+              <a:rPr lang="en-US" sz="950" b="1" dirty="0">
+                <a:solidFill>
+                  <a:srgbClr val="0068B7"/>
+                </a:solidFill>
+                <a:latin typeface="Aptos" pitchFamily="34" charset="0"/>
+                <a:ea typeface="Aptos" pitchFamily="34" charset="-122"/>
+                <a:cs typeface="Aptos" pitchFamily="34" charset="-120"/>
+              </a:rPr>
+              <a:t>Use this for</a:t>
+            </a:r>
+            <a:endParaRPr lang="en-US" sz="950" dirty="0"/>
+          </a:p>
+        </p:txBody>
+      </p:sp>
+      <p:sp>
+        <p:nvSpPr>
+          <p:cNvPr id="16" name="Text 14"/>
+          <p:cNvSpPr/>
+          <p:nvPr/>
+        </p:nvSpPr>
+        <p:spPr>
+          <a:xfrm>
+            <a:off x="8074152" y="3959352"/>
+            <a:ext cx="2825496" cy="1170432"/>
+          </a:xfrm>
+          <a:prstGeom prst="rect">
+            <a:avLst/>
+          </a:prstGeom>
+          <a:noFill/>
+          <a:ln/>
+        </p:spPr>
+        <p:txBody>
+          <a:bodyPr wrap="square" lIns="0" tIns="0" rIns="0" bIns="0" rtlCol="0" anchor="t">
+            <a:normAutofit/>
+          </a:bodyPr>
+          <a:lstStyle/>
+          <a:p>
+            <a:pPr indent="0" marL="0">
+              <a:buNone/>
+            </a:pPr>
+            <a:r>
+              <a:rPr lang="en-US" sz="1250" dirty="0">
+                <a:solidFill>
+                  <a:srgbClr val="17364A"/>
+                </a:solidFill>
+                <a:latin typeface="Aptos" pitchFamily="34" charset="0"/>
+                <a:ea typeface="Aptos" pitchFamily="34" charset="-122"/>
+                <a:cs typeface="Aptos" pitchFamily="34" charset="-120"/>
+              </a:rPr>
+              <a:t>Connect the concept to public health decisions, safeguards, documentation, or implementation work.</a:t>
+            </a:r>
+            <a:endParaRPr lang="en-US" sz="1250" dirty="0"/>
           </a:p>
         </p:txBody>
       </p:sp>
@@ -3475,7 +4255,32 @@
       </p:sp>
       <p:sp>
         <p:nvSpPr>
-          <p:cNvPr id="3" name="Text 1"/>
+          <p:cNvPr id="3" name="Shape 1"/>
+          <p:cNvSpPr/>
+          <p:nvPr/>
+        </p:nvSpPr>
+        <p:spPr>
+          <a:xfrm>
+            <a:off x="0" y="164592"/>
+            <a:ext cx="146304" cy="6693408"/>
+          </a:xfrm>
+          <a:prstGeom prst="rect">
+            <a:avLst/>
+          </a:prstGeom>
+          <a:solidFill>
+            <a:srgbClr val="2F8A28"/>
+          </a:solidFill>
+          <a:ln w="12700">
+            <a:solidFill>
+              <a:srgbClr val="2F8A28"/>
+            </a:solidFill>
+            <a:prstDash val="solid"/>
+          </a:ln>
+        </p:spPr>
+      </p:sp>
+      <p:sp>
+        <p:nvSpPr>
+          <p:cNvPr id="4" name="Text 2"/>
           <p:cNvSpPr/>
           <p:nvPr/>
         </p:nvSpPr>
@@ -3514,7 +4319,7 @@
       </p:sp>
       <p:sp>
         <p:nvSpPr>
-          <p:cNvPr id="4" name="Text 2"/>
+          <p:cNvPr id="5" name="Text 3"/>
           <p:cNvSpPr/>
           <p:nvPr/>
         </p:nvSpPr>
@@ -3553,7 +4358,7 @@
       </p:sp>
       <p:sp>
         <p:nvSpPr>
-          <p:cNvPr id="5" name="Text 3"/>
+          <p:cNvPr id="6" name="Text 4"/>
           <p:cNvSpPr/>
           <p:nvPr/>
         </p:nvSpPr>
@@ -3592,7 +4397,7 @@
       </p:sp>
       <p:sp>
         <p:nvSpPr>
-          <p:cNvPr id="6" name="Text 4"/>
+          <p:cNvPr id="7" name="Text 5"/>
           <p:cNvSpPr/>
           <p:nvPr/>
         </p:nvSpPr>
@@ -3633,32 +4438,29 @@
       </p:sp>
       <p:sp>
         <p:nvSpPr>
-          <p:cNvPr id="7" name="Text 5"/>
-          <p:cNvSpPr/>
-          <p:nvPr/>
-        </p:nvSpPr>
-        <p:spPr>
-          <a:xfrm>
-            <a:off x="822960" y="1325880"/>
-            <a:ext cx="10378440" cy="4800600"/>
-          </a:xfrm>
-          <a:prstGeom prst="rect">
-            <a:avLst/>
-          </a:prstGeom>
-          <a:noFill/>
-          <a:ln/>
-        </p:spPr>
-        <p:txBody>
-          <a:bodyPr wrap="square" lIns="1016" tIns="1016" rIns="1016" bIns="1016" rtlCol="0" anchor="t">
+          <p:cNvPr id="8" name="Text 6"/>
+          <p:cNvSpPr/>
+          <p:nvPr/>
+        </p:nvSpPr>
+        <p:spPr>
+          <a:xfrm>
+            <a:off x="868680" y="1417320"/>
+            <a:ext cx="6675120" cy="4434840"/>
+          </a:xfrm>
+          <a:prstGeom prst="rect">
+            <a:avLst/>
+          </a:prstGeom>
+          <a:noFill/>
+          <a:ln/>
+        </p:spPr>
+        <p:txBody>
+          <a:bodyPr wrap="square" lIns="635" tIns="635" rIns="635" bIns="635" rtlCol="0" anchor="t">
             <a:normAutofit/>
           </a:bodyPr>
           <a:lstStyle/>
           <a:p>
-            <a:pPr indent="0" marL="0">
-              <a:buNone/>
-            </a:pPr>
-            <a:r>
-              <a:rPr lang="en-US" sz="1420" dirty="0">
+            <a:r>
+              <a:rPr lang="en-US" sz="1700" dirty="0">
                 <a:solidFill>
                   <a:srgbClr val="17364A"/>
                 </a:solidFill>
@@ -3666,9 +4468,251 @@
                 <a:ea typeface="Aptos" pitchFamily="34" charset="-122"/>
                 <a:cs typeface="Aptos" pitchFamily="34" charset="-120"/>
               </a:rPr>
-              <a:t>Document source material used for public-facing claims. Use qualified review for translation and language access needs. Route public-facing materials through the agency approval process before release.</a:t>
-            </a:r>
-            <a:endParaRPr lang="en-US" sz="1420" dirty="0"/>
+              <a:t>Unverified translations or readability changes that alter meaning.</a:t>
+            </a:r>
+            <a:endParaRPr lang="en-US" sz="1700" dirty="0"/>
+          </a:p>
+          <a:p>
+            <a:r>
+              <a:rPr lang="en-US" sz="1700" dirty="0">
+                <a:solidFill>
+                  <a:srgbClr val="17364A"/>
+                </a:solidFill>
+                <a:latin typeface="Aptos" pitchFamily="34" charset="0"/>
+                <a:ea typeface="Aptos" pitchFamily="34" charset="-122"/>
+                <a:cs typeface="Aptos" pitchFamily="34" charset="-120"/>
+              </a:rPr>
+              <a:t>Public-facing content being released without required subject matter or leadership review.</a:t>
+            </a:r>
+            <a:endParaRPr lang="en-US" sz="1700" dirty="0"/>
+          </a:p>
+          <a:p>
+            <a:r>
+              <a:rPr lang="en-US" sz="1700" dirty="0">
+                <a:solidFill>
+                  <a:srgbClr val="17364A"/>
+                </a:solidFill>
+                <a:latin typeface="Aptos" pitchFamily="34" charset="0"/>
+                <a:ea typeface="Aptos" pitchFamily="34" charset="-122"/>
+                <a:cs typeface="Aptos" pitchFamily="34" charset="-120"/>
+              </a:rPr>
+              <a:t>Messages that assume access to resources, technology, transportation, or healthcare that the audience may not have.</a:t>
+            </a:r>
+            <a:endParaRPr lang="en-US" sz="1700" dirty="0"/>
+          </a:p>
+        </p:txBody>
+      </p:sp>
+      <p:sp>
+        <p:nvSpPr>
+          <p:cNvPr id="9" name="Shape 7"/>
+          <p:cNvSpPr/>
+          <p:nvPr/>
+        </p:nvSpPr>
+        <p:spPr>
+          <a:xfrm>
+            <a:off x="7909560" y="1417320"/>
+            <a:ext cx="3154680" cy="1828800"/>
+          </a:xfrm>
+          <a:prstGeom prst="roundRect">
+            <a:avLst>
+              <a:gd name="adj" fmla="val 6000"/>
+            </a:avLst>
+          </a:prstGeom>
+          <a:solidFill>
+            <a:srgbClr val="EEF8ED"/>
+          </a:solidFill>
+          <a:ln w="12700">
+            <a:solidFill>
+              <a:srgbClr val="B9D7E6"/>
+            </a:solidFill>
+            <a:prstDash val="solid"/>
+          </a:ln>
+        </p:spPr>
+      </p:sp>
+      <p:sp>
+        <p:nvSpPr>
+          <p:cNvPr id="10" name="Text 8"/>
+          <p:cNvSpPr/>
+          <p:nvPr/>
+        </p:nvSpPr>
+        <p:spPr>
+          <a:xfrm>
+            <a:off x="8074152" y="1563624"/>
+            <a:ext cx="2825496" cy="201168"/>
+          </a:xfrm>
+          <a:prstGeom prst="rect">
+            <a:avLst/>
+          </a:prstGeom>
+          <a:noFill/>
+          <a:ln/>
+        </p:spPr>
+        <p:txBody>
+          <a:bodyPr wrap="square" lIns="0" tIns="0" rIns="0" bIns="0" rtlCol="0" anchor="ctr"/>
+          <a:lstStyle/>
+          <a:p>
+            <a:pPr indent="0" marL="0">
+              <a:buNone/>
+            </a:pPr>
+            <a:r>
+              <a:rPr lang="en-US" sz="950" b="1" dirty="0">
+                <a:solidFill>
+                  <a:srgbClr val="0068B7"/>
+                </a:solidFill>
+                <a:latin typeface="Aptos" pitchFamily="34" charset="0"/>
+                <a:ea typeface="Aptos" pitchFamily="34" charset="-122"/>
+                <a:cs typeface="Aptos" pitchFamily="34" charset="-120"/>
+              </a:rPr>
+              <a:t>Key idea</a:t>
+            </a:r>
+            <a:endParaRPr lang="en-US" sz="950" dirty="0"/>
+          </a:p>
+        </p:txBody>
+      </p:sp>
+      <p:sp>
+        <p:nvSpPr>
+          <p:cNvPr id="11" name="Text 9"/>
+          <p:cNvSpPr/>
+          <p:nvPr/>
+        </p:nvSpPr>
+        <p:spPr>
+          <a:xfrm>
+            <a:off x="8074152" y="1856232"/>
+            <a:ext cx="2825496" cy="1261872"/>
+          </a:xfrm>
+          <a:prstGeom prst="rect">
+            <a:avLst/>
+          </a:prstGeom>
+          <a:noFill/>
+          <a:ln/>
+        </p:spPr>
+        <p:txBody>
+          <a:bodyPr wrap="square" lIns="0" tIns="0" rIns="0" bIns="0" rtlCol="0" anchor="t">
+            <a:normAutofit/>
+          </a:bodyPr>
+          <a:lstStyle/>
+          <a:p>
+            <a:pPr indent="0" marL="0">
+              <a:buNone/>
+            </a:pPr>
+            <a:r>
+              <a:rPr lang="en-US" sz="1250" dirty="0">
+                <a:solidFill>
+                  <a:srgbClr val="17364A"/>
+                </a:solidFill>
+                <a:latin typeface="Aptos" pitchFamily="34" charset="0"/>
+                <a:ea typeface="Aptos" pitchFamily="34" charset="-122"/>
+                <a:cs typeface="Aptos" pitchFamily="34" charset="-120"/>
+              </a:rPr>
+              <a:t>Unverified translations or readability changes that alter meaning.</a:t>
+            </a:r>
+            <a:endParaRPr lang="en-US" sz="1250" dirty="0"/>
+          </a:p>
+        </p:txBody>
+      </p:sp>
+      <p:sp>
+        <p:nvSpPr>
+          <p:cNvPr id="12" name="Shape 10"/>
+          <p:cNvSpPr/>
+          <p:nvPr/>
+        </p:nvSpPr>
+        <p:spPr>
+          <a:xfrm>
+            <a:off x="7909560" y="3520440"/>
+            <a:ext cx="3154680" cy="1737360"/>
+          </a:xfrm>
+          <a:prstGeom prst="roundRect">
+            <a:avLst>
+              <a:gd name="adj" fmla="val 6316"/>
+            </a:avLst>
+          </a:prstGeom>
+          <a:solidFill>
+            <a:srgbClr val="EAF6F8"/>
+          </a:solidFill>
+          <a:ln w="12700">
+            <a:solidFill>
+              <a:srgbClr val="B9D7E6"/>
+            </a:solidFill>
+            <a:prstDash val="solid"/>
+          </a:ln>
+        </p:spPr>
+      </p:sp>
+      <p:sp>
+        <p:nvSpPr>
+          <p:cNvPr id="13" name="Text 11"/>
+          <p:cNvSpPr/>
+          <p:nvPr/>
+        </p:nvSpPr>
+        <p:spPr>
+          <a:xfrm>
+            <a:off x="8074152" y="3666744"/>
+            <a:ext cx="2825496" cy="201168"/>
+          </a:xfrm>
+          <a:prstGeom prst="rect">
+            <a:avLst/>
+          </a:prstGeom>
+          <a:noFill/>
+          <a:ln/>
+        </p:spPr>
+        <p:txBody>
+          <a:bodyPr wrap="square" lIns="0" tIns="0" rIns="0" bIns="0" rtlCol="0" anchor="ctr"/>
+          <a:lstStyle/>
+          <a:p>
+            <a:pPr indent="0" marL="0">
+              <a:buNone/>
+            </a:pPr>
+            <a:r>
+              <a:rPr lang="en-US" sz="950" b="1" dirty="0">
+                <a:solidFill>
+                  <a:srgbClr val="0068B7"/>
+                </a:solidFill>
+                <a:latin typeface="Aptos" pitchFamily="34" charset="0"/>
+                <a:ea typeface="Aptos" pitchFamily="34" charset="-122"/>
+                <a:cs typeface="Aptos" pitchFamily="34" charset="-120"/>
+              </a:rPr>
+              <a:t>Use this for</a:t>
+            </a:r>
+            <a:endParaRPr lang="en-US" sz="950" dirty="0"/>
+          </a:p>
+        </p:txBody>
+      </p:sp>
+      <p:sp>
+        <p:nvSpPr>
+          <p:cNvPr id="14" name="Text 12"/>
+          <p:cNvSpPr/>
+          <p:nvPr/>
+        </p:nvSpPr>
+        <p:spPr>
+          <a:xfrm>
+            <a:off x="8074152" y="3959352"/>
+            <a:ext cx="2825496" cy="1170432"/>
+          </a:xfrm>
+          <a:prstGeom prst="rect">
+            <a:avLst/>
+          </a:prstGeom>
+          <a:noFill/>
+          <a:ln/>
+        </p:spPr>
+        <p:txBody>
+          <a:bodyPr wrap="square" lIns="0" tIns="0" rIns="0" bIns="0" rtlCol="0" anchor="t">
+            <a:normAutofit/>
+          </a:bodyPr>
+          <a:lstStyle/>
+          <a:p>
+            <a:pPr indent="0" marL="0">
+              <a:buNone/>
+            </a:pPr>
+            <a:r>
+              <a:rPr lang="en-US" sz="1250" dirty="0">
+                <a:solidFill>
+                  <a:srgbClr val="17364A"/>
+                </a:solidFill>
+                <a:latin typeface="Aptos" pitchFamily="34" charset="0"/>
+                <a:ea typeface="Aptos" pitchFamily="34" charset="-122"/>
+                <a:cs typeface="Aptos" pitchFamily="34" charset="-120"/>
+              </a:rPr>
+              <a:t>Connect the concept to public health decisions, safeguards, documentation, or implementation work.</a:t>
+            </a:r>
+            <a:endParaRPr lang="en-US" sz="1250" dirty="0"/>
           </a:p>
         </p:txBody>
       </p:sp>
@@ -3731,7 +4775,32 @@
       </p:sp>
       <p:sp>
         <p:nvSpPr>
-          <p:cNvPr id="3" name="Text 1"/>
+          <p:cNvPr id="3" name="Shape 1"/>
+          <p:cNvSpPr/>
+          <p:nvPr/>
+        </p:nvSpPr>
+        <p:spPr>
+          <a:xfrm>
+            <a:off x="0" y="164592"/>
+            <a:ext cx="146304" cy="6693408"/>
+          </a:xfrm>
+          <a:prstGeom prst="rect">
+            <a:avLst/>
+          </a:prstGeom>
+          <a:solidFill>
+            <a:srgbClr val="2F8A28"/>
+          </a:solidFill>
+          <a:ln w="12700">
+            <a:solidFill>
+              <a:srgbClr val="2F8A28"/>
+            </a:solidFill>
+            <a:prstDash val="solid"/>
+          </a:ln>
+        </p:spPr>
+      </p:sp>
+      <p:sp>
+        <p:nvSpPr>
+          <p:cNvPr id="4" name="Text 2"/>
           <p:cNvSpPr/>
           <p:nvPr/>
         </p:nvSpPr>
@@ -3770,7 +4839,7 @@
       </p:sp>
       <p:sp>
         <p:nvSpPr>
-          <p:cNvPr id="4" name="Text 2"/>
+          <p:cNvPr id="5" name="Text 3"/>
           <p:cNvSpPr/>
           <p:nvPr/>
         </p:nvSpPr>
@@ -3809,7 +4878,7 @@
       </p:sp>
       <p:sp>
         <p:nvSpPr>
-          <p:cNvPr id="5" name="Text 3"/>
+          <p:cNvPr id="6" name="Text 4"/>
           <p:cNvSpPr/>
           <p:nvPr/>
         </p:nvSpPr>
@@ -3848,7 +4917,7 @@
       </p:sp>
       <p:sp>
         <p:nvSpPr>
-          <p:cNvPr id="6" name="Text 4"/>
+          <p:cNvPr id="7" name="Text 5"/>
           <p:cNvSpPr/>
           <p:nvPr/>
         </p:nvSpPr>
@@ -3881,7 +4950,7 @@
                 <a:ea typeface="Aptos Display" pitchFamily="34" charset="-122"/>
                 <a:cs typeface="Aptos Display" pitchFamily="34" charset="-120"/>
               </a:rPr>
-              <a:t>Reflection Questions</a:t>
+              <a:t>Risks, Failure Modes, and Guardrails Continued</a:t>
             </a:r>
             <a:endParaRPr lang="en-US" sz="2700" dirty="0"/>
           </a:p>
@@ -3889,32 +4958,29 @@
       </p:sp>
       <p:sp>
         <p:nvSpPr>
-          <p:cNvPr id="7" name="Text 5"/>
-          <p:cNvSpPr/>
-          <p:nvPr/>
-        </p:nvSpPr>
-        <p:spPr>
-          <a:xfrm>
-            <a:off x="822960" y="1325880"/>
-            <a:ext cx="10378440" cy="4800600"/>
-          </a:xfrm>
-          <a:prstGeom prst="rect">
-            <a:avLst/>
-          </a:prstGeom>
-          <a:noFill/>
-          <a:ln/>
-        </p:spPr>
-        <p:txBody>
-          <a:bodyPr wrap="square" lIns="1016" tIns="1016" rIns="1016" bIns="1016" rtlCol="0" anchor="t">
+          <p:cNvPr id="8" name="Text 6"/>
+          <p:cNvSpPr/>
+          <p:nvPr/>
+        </p:nvSpPr>
+        <p:spPr>
+          <a:xfrm>
+            <a:off x="868680" y="1417320"/>
+            <a:ext cx="6675120" cy="4434840"/>
+          </a:xfrm>
+          <a:prstGeom prst="rect">
+            <a:avLst/>
+          </a:prstGeom>
+          <a:noFill/>
+          <a:ln/>
+        </p:spPr>
+        <p:txBody>
+          <a:bodyPr wrap="square" lIns="635" tIns="635" rIns="635" bIns="635" rtlCol="0" anchor="t">
             <a:normAutofit/>
           </a:bodyPr>
           <a:lstStyle/>
           <a:p>
-            <a:pPr indent="0" marL="0">
-              <a:buNone/>
-            </a:pPr>
-            <a:r>
-              <a:rPr lang="en-US" sz="1420" dirty="0">
+            <a:r>
+              <a:rPr lang="en-US" sz="1700" dirty="0">
                 <a:solidFill>
                   <a:srgbClr val="17364A"/>
                 </a:solidFill>
@@ -3922,9 +4988,251 @@
                 <a:ea typeface="Aptos" pitchFamily="34" charset="-122"/>
                 <a:cs typeface="Aptos" pitchFamily="34" charset="-120"/>
               </a:rPr>
-              <a:t>Where does this topic appear in your agency, program, or workflow? Which staff roles would need to understand or apply this concept before AI use is approved? What could go wrong if this topic is not addressed before implementation?</a:t>
-            </a:r>
-            <a:endParaRPr lang="en-US" sz="1420" dirty="0"/>
+              <a:t>Recommended guardrails include the following:</a:t>
+            </a:r>
+            <a:endParaRPr lang="en-US" sz="1700" dirty="0"/>
+          </a:p>
+          <a:p>
+            <a:r>
+              <a:rPr lang="en-US" sz="1700" dirty="0">
+                <a:solidFill>
+                  <a:srgbClr val="17364A"/>
+                </a:solidFill>
+                <a:latin typeface="Aptos" pitchFamily="34" charset="0"/>
+                <a:ea typeface="Aptos" pitchFamily="34" charset="-122"/>
+                <a:cs typeface="Aptos" pitchFamily="34" charset="-120"/>
+              </a:rPr>
+              <a:t>Use only approved tools and approved source material for public health communications.</a:t>
+            </a:r>
+            <a:endParaRPr lang="en-US" sz="1700" dirty="0"/>
+          </a:p>
+          <a:p>
+            <a:r>
+              <a:rPr lang="en-US" sz="1700" dirty="0">
+                <a:solidFill>
+                  <a:srgbClr val="17364A"/>
+                </a:solidFill>
+                <a:latin typeface="Aptos" pitchFamily="34" charset="0"/>
+                <a:ea typeface="Aptos" pitchFamily="34" charset="-122"/>
+                <a:cs typeface="Aptos" pitchFamily="34" charset="-120"/>
+              </a:rPr>
+              <a:t>Require human review for accuracy, plain language, accessibility, equity, and tone.</a:t>
+            </a:r>
+            <a:endParaRPr lang="en-US" sz="1700" dirty="0"/>
+          </a:p>
+        </p:txBody>
+      </p:sp>
+      <p:sp>
+        <p:nvSpPr>
+          <p:cNvPr id="9" name="Shape 7"/>
+          <p:cNvSpPr/>
+          <p:nvPr/>
+        </p:nvSpPr>
+        <p:spPr>
+          <a:xfrm>
+            <a:off x="7909560" y="1417320"/>
+            <a:ext cx="3154680" cy="1828800"/>
+          </a:xfrm>
+          <a:prstGeom prst="roundRect">
+            <a:avLst>
+              <a:gd name="adj" fmla="val 6000"/>
+            </a:avLst>
+          </a:prstGeom>
+          <a:solidFill>
+            <a:srgbClr val="EEF8ED"/>
+          </a:solidFill>
+          <a:ln w="12700">
+            <a:solidFill>
+              <a:srgbClr val="B9D7E6"/>
+            </a:solidFill>
+            <a:prstDash val="solid"/>
+          </a:ln>
+        </p:spPr>
+      </p:sp>
+      <p:sp>
+        <p:nvSpPr>
+          <p:cNvPr id="10" name="Text 8"/>
+          <p:cNvSpPr/>
+          <p:nvPr/>
+        </p:nvSpPr>
+        <p:spPr>
+          <a:xfrm>
+            <a:off x="8074152" y="1563624"/>
+            <a:ext cx="2825496" cy="201168"/>
+          </a:xfrm>
+          <a:prstGeom prst="rect">
+            <a:avLst/>
+          </a:prstGeom>
+          <a:noFill/>
+          <a:ln/>
+        </p:spPr>
+        <p:txBody>
+          <a:bodyPr wrap="square" lIns="0" tIns="0" rIns="0" bIns="0" rtlCol="0" anchor="ctr"/>
+          <a:lstStyle/>
+          <a:p>
+            <a:pPr indent="0" marL="0">
+              <a:buNone/>
+            </a:pPr>
+            <a:r>
+              <a:rPr lang="en-US" sz="950" b="1" dirty="0">
+                <a:solidFill>
+                  <a:srgbClr val="0068B7"/>
+                </a:solidFill>
+                <a:latin typeface="Aptos" pitchFamily="34" charset="0"/>
+                <a:ea typeface="Aptos" pitchFamily="34" charset="-122"/>
+                <a:cs typeface="Aptos" pitchFamily="34" charset="-120"/>
+              </a:rPr>
+              <a:t>Key idea</a:t>
+            </a:r>
+            <a:endParaRPr lang="en-US" sz="950" dirty="0"/>
+          </a:p>
+        </p:txBody>
+      </p:sp>
+      <p:sp>
+        <p:nvSpPr>
+          <p:cNvPr id="11" name="Text 9"/>
+          <p:cNvSpPr/>
+          <p:nvPr/>
+        </p:nvSpPr>
+        <p:spPr>
+          <a:xfrm>
+            <a:off x="8074152" y="1856232"/>
+            <a:ext cx="2825496" cy="1261872"/>
+          </a:xfrm>
+          <a:prstGeom prst="rect">
+            <a:avLst/>
+          </a:prstGeom>
+          <a:noFill/>
+          <a:ln/>
+        </p:spPr>
+        <p:txBody>
+          <a:bodyPr wrap="square" lIns="0" tIns="0" rIns="0" bIns="0" rtlCol="0" anchor="t">
+            <a:normAutofit/>
+          </a:bodyPr>
+          <a:lstStyle/>
+          <a:p>
+            <a:pPr indent="0" marL="0">
+              <a:buNone/>
+            </a:pPr>
+            <a:r>
+              <a:rPr lang="en-US" sz="1250" dirty="0">
+                <a:solidFill>
+                  <a:srgbClr val="17364A"/>
+                </a:solidFill>
+                <a:latin typeface="Aptos" pitchFamily="34" charset="0"/>
+                <a:ea typeface="Aptos" pitchFamily="34" charset="-122"/>
+                <a:cs typeface="Aptos" pitchFamily="34" charset="-120"/>
+              </a:rPr>
+              <a:t>Recommended guardrails include the following:</a:t>
+            </a:r>
+            <a:endParaRPr lang="en-US" sz="1250" dirty="0"/>
+          </a:p>
+        </p:txBody>
+      </p:sp>
+      <p:sp>
+        <p:nvSpPr>
+          <p:cNvPr id="12" name="Shape 10"/>
+          <p:cNvSpPr/>
+          <p:nvPr/>
+        </p:nvSpPr>
+        <p:spPr>
+          <a:xfrm>
+            <a:off x="7909560" y="3520440"/>
+            <a:ext cx="3154680" cy="1737360"/>
+          </a:xfrm>
+          <a:prstGeom prst="roundRect">
+            <a:avLst>
+              <a:gd name="adj" fmla="val 6316"/>
+            </a:avLst>
+          </a:prstGeom>
+          <a:solidFill>
+            <a:srgbClr val="EAF6F8"/>
+          </a:solidFill>
+          <a:ln w="12700">
+            <a:solidFill>
+              <a:srgbClr val="B9D7E6"/>
+            </a:solidFill>
+            <a:prstDash val="solid"/>
+          </a:ln>
+        </p:spPr>
+      </p:sp>
+      <p:sp>
+        <p:nvSpPr>
+          <p:cNvPr id="13" name="Text 11"/>
+          <p:cNvSpPr/>
+          <p:nvPr/>
+        </p:nvSpPr>
+        <p:spPr>
+          <a:xfrm>
+            <a:off x="8074152" y="3666744"/>
+            <a:ext cx="2825496" cy="201168"/>
+          </a:xfrm>
+          <a:prstGeom prst="rect">
+            <a:avLst/>
+          </a:prstGeom>
+          <a:noFill/>
+          <a:ln/>
+        </p:spPr>
+        <p:txBody>
+          <a:bodyPr wrap="square" lIns="0" tIns="0" rIns="0" bIns="0" rtlCol="0" anchor="ctr"/>
+          <a:lstStyle/>
+          <a:p>
+            <a:pPr indent="0" marL="0">
+              <a:buNone/>
+            </a:pPr>
+            <a:r>
+              <a:rPr lang="en-US" sz="950" b="1" dirty="0">
+                <a:solidFill>
+                  <a:srgbClr val="0068B7"/>
+                </a:solidFill>
+                <a:latin typeface="Aptos" pitchFamily="34" charset="0"/>
+                <a:ea typeface="Aptos" pitchFamily="34" charset="-122"/>
+                <a:cs typeface="Aptos" pitchFamily="34" charset="-120"/>
+              </a:rPr>
+              <a:t>Use this for</a:t>
+            </a:r>
+            <a:endParaRPr lang="en-US" sz="950" dirty="0"/>
+          </a:p>
+        </p:txBody>
+      </p:sp>
+      <p:sp>
+        <p:nvSpPr>
+          <p:cNvPr id="14" name="Text 12"/>
+          <p:cNvSpPr/>
+          <p:nvPr/>
+        </p:nvSpPr>
+        <p:spPr>
+          <a:xfrm>
+            <a:off x="8074152" y="3959352"/>
+            <a:ext cx="2825496" cy="1170432"/>
+          </a:xfrm>
+          <a:prstGeom prst="rect">
+            <a:avLst/>
+          </a:prstGeom>
+          <a:noFill/>
+          <a:ln/>
+        </p:spPr>
+        <p:txBody>
+          <a:bodyPr wrap="square" lIns="0" tIns="0" rIns="0" bIns="0" rtlCol="0" anchor="t">
+            <a:normAutofit/>
+          </a:bodyPr>
+          <a:lstStyle/>
+          <a:p>
+            <a:pPr indent="0" marL="0">
+              <a:buNone/>
+            </a:pPr>
+            <a:r>
+              <a:rPr lang="en-US" sz="1250" dirty="0">
+                <a:solidFill>
+                  <a:srgbClr val="17364A"/>
+                </a:solidFill>
+                <a:latin typeface="Aptos" pitchFamily="34" charset="0"/>
+                <a:ea typeface="Aptos" pitchFamily="34" charset="-122"/>
+                <a:cs typeface="Aptos" pitchFamily="34" charset="-120"/>
+              </a:rPr>
+              <a:t>Connect the concept to public health decisions, safeguards, documentation, or implementation work.</a:t>
+            </a:r>
+            <a:endParaRPr lang="en-US" sz="1250" dirty="0"/>
           </a:p>
         </p:txBody>
       </p:sp>
@@ -3987,7 +5295,32 @@
       </p:sp>
       <p:sp>
         <p:nvSpPr>
-          <p:cNvPr id="3" name="Text 1"/>
+          <p:cNvPr id="3" name="Shape 1"/>
+          <p:cNvSpPr/>
+          <p:nvPr/>
+        </p:nvSpPr>
+        <p:spPr>
+          <a:xfrm>
+            <a:off x="0" y="164592"/>
+            <a:ext cx="146304" cy="6693408"/>
+          </a:xfrm>
+          <a:prstGeom prst="rect">
+            <a:avLst/>
+          </a:prstGeom>
+          <a:solidFill>
+            <a:srgbClr val="2F8A28"/>
+          </a:solidFill>
+          <a:ln w="12700">
+            <a:solidFill>
+              <a:srgbClr val="2F8A28"/>
+            </a:solidFill>
+            <a:prstDash val="solid"/>
+          </a:ln>
+        </p:spPr>
+      </p:sp>
+      <p:sp>
+        <p:nvSpPr>
+          <p:cNvPr id="4" name="Text 2"/>
           <p:cNvSpPr/>
           <p:nvPr/>
         </p:nvSpPr>
@@ -4026,7 +5359,7 @@
       </p:sp>
       <p:sp>
         <p:nvSpPr>
-          <p:cNvPr id="4" name="Text 2"/>
+          <p:cNvPr id="5" name="Text 3"/>
           <p:cNvSpPr/>
           <p:nvPr/>
         </p:nvSpPr>
@@ -4065,7 +5398,7 @@
       </p:sp>
       <p:sp>
         <p:nvSpPr>
-          <p:cNvPr id="5" name="Text 3"/>
+          <p:cNvPr id="6" name="Text 4"/>
           <p:cNvSpPr/>
           <p:nvPr/>
         </p:nvSpPr>
@@ -4104,7 +5437,7 @@
       </p:sp>
       <p:sp>
         <p:nvSpPr>
-          <p:cNvPr id="6" name="Text 4"/>
+          <p:cNvPr id="7" name="Text 5"/>
           <p:cNvSpPr/>
           <p:nvPr/>
         </p:nvSpPr>
@@ -4137,7 +5470,7 @@
                 <a:ea typeface="Aptos Display" pitchFamily="34" charset="-122"/>
                 <a:cs typeface="Aptos Display" pitchFamily="34" charset="-120"/>
               </a:rPr>
-              <a:t>Reflection Questions Continued</a:t>
+              <a:t>Risks, Failure Modes, and Guardrails Continued</a:t>
             </a:r>
             <a:endParaRPr lang="en-US" sz="2700" dirty="0"/>
           </a:p>
@@ -4145,32 +5478,29 @@
       </p:sp>
       <p:sp>
         <p:nvSpPr>
-          <p:cNvPr id="7" name="Text 5"/>
-          <p:cNvSpPr/>
-          <p:nvPr/>
-        </p:nvSpPr>
-        <p:spPr>
-          <a:xfrm>
-            <a:off x="822960" y="1325880"/>
-            <a:ext cx="10378440" cy="4800600"/>
-          </a:xfrm>
-          <a:prstGeom prst="rect">
-            <a:avLst/>
-          </a:prstGeom>
-          <a:noFill/>
-          <a:ln/>
-        </p:spPr>
-        <p:txBody>
-          <a:bodyPr wrap="square" lIns="1016" tIns="1016" rIns="1016" bIns="1016" rtlCol="0" anchor="t">
+          <p:cNvPr id="8" name="Text 6"/>
+          <p:cNvSpPr/>
+          <p:nvPr/>
+        </p:nvSpPr>
+        <p:spPr>
+          <a:xfrm>
+            <a:off x="868680" y="1417320"/>
+            <a:ext cx="6675120" cy="4434840"/>
+          </a:xfrm>
+          <a:prstGeom prst="rect">
+            <a:avLst/>
+          </a:prstGeom>
+          <a:noFill/>
+          <a:ln/>
+        </p:spPr>
+        <p:txBody>
+          <a:bodyPr wrap="square" lIns="635" tIns="635" rIns="635" bIns="635" rtlCol="0" anchor="t">
             <a:normAutofit/>
           </a:bodyPr>
           <a:lstStyle/>
           <a:p>
-            <a:pPr indent="0" marL="0">
-              <a:buNone/>
-            </a:pPr>
-            <a:r>
-              <a:rPr lang="en-US" sz="1420" dirty="0">
+            <a:r>
+              <a:rPr lang="en-US" sz="1700" dirty="0">
                 <a:solidFill>
                   <a:srgbClr val="17364A"/>
                 </a:solidFill>
@@ -4178,9 +5508,251 @@
                 <a:ea typeface="Aptos" pitchFamily="34" charset="-122"/>
                 <a:cs typeface="Aptos" pitchFamily="34" charset="-120"/>
               </a:rPr>
-              <a:t>What evidence would governance, leadership, or operations staff need before moving forward? Which policy, data, equity, privacy, security, or workflow questions remain unresolved?</a:t>
-            </a:r>
-            <a:endParaRPr lang="en-US" sz="1420" dirty="0"/>
+              <a:t>Document source material used for public-facing claims.</a:t>
+            </a:r>
+            <a:endParaRPr lang="en-US" sz="1700" dirty="0"/>
+          </a:p>
+          <a:p>
+            <a:r>
+              <a:rPr lang="en-US" sz="1700" dirty="0">
+                <a:solidFill>
+                  <a:srgbClr val="17364A"/>
+                </a:solidFill>
+                <a:latin typeface="Aptos" pitchFamily="34" charset="0"/>
+                <a:ea typeface="Aptos" pitchFamily="34" charset="-122"/>
+                <a:cs typeface="Aptos" pitchFamily="34" charset="-120"/>
+              </a:rPr>
+              <a:t>Use qualified review for translation and language access needs.</a:t>
+            </a:r>
+            <a:endParaRPr lang="en-US" sz="1700" dirty="0"/>
+          </a:p>
+          <a:p>
+            <a:r>
+              <a:rPr lang="en-US" sz="1700" dirty="0">
+                <a:solidFill>
+                  <a:srgbClr val="17364A"/>
+                </a:solidFill>
+                <a:latin typeface="Aptos" pitchFamily="34" charset="0"/>
+                <a:ea typeface="Aptos" pitchFamily="34" charset="-122"/>
+                <a:cs typeface="Aptos" pitchFamily="34" charset="-120"/>
+              </a:rPr>
+              <a:t>Route public-facing materials through the agency approval process before release.</a:t>
+            </a:r>
+            <a:endParaRPr lang="en-US" sz="1700" dirty="0"/>
+          </a:p>
+        </p:txBody>
+      </p:sp>
+      <p:sp>
+        <p:nvSpPr>
+          <p:cNvPr id="9" name="Shape 7"/>
+          <p:cNvSpPr/>
+          <p:nvPr/>
+        </p:nvSpPr>
+        <p:spPr>
+          <a:xfrm>
+            <a:off x="7909560" y="1417320"/>
+            <a:ext cx="3154680" cy="1828800"/>
+          </a:xfrm>
+          <a:prstGeom prst="roundRect">
+            <a:avLst>
+              <a:gd name="adj" fmla="val 6000"/>
+            </a:avLst>
+          </a:prstGeom>
+          <a:solidFill>
+            <a:srgbClr val="EEF8ED"/>
+          </a:solidFill>
+          <a:ln w="12700">
+            <a:solidFill>
+              <a:srgbClr val="B9D7E6"/>
+            </a:solidFill>
+            <a:prstDash val="solid"/>
+          </a:ln>
+        </p:spPr>
+      </p:sp>
+      <p:sp>
+        <p:nvSpPr>
+          <p:cNvPr id="10" name="Text 8"/>
+          <p:cNvSpPr/>
+          <p:nvPr/>
+        </p:nvSpPr>
+        <p:spPr>
+          <a:xfrm>
+            <a:off x="8074152" y="1563624"/>
+            <a:ext cx="2825496" cy="201168"/>
+          </a:xfrm>
+          <a:prstGeom prst="rect">
+            <a:avLst/>
+          </a:prstGeom>
+          <a:noFill/>
+          <a:ln/>
+        </p:spPr>
+        <p:txBody>
+          <a:bodyPr wrap="square" lIns="0" tIns="0" rIns="0" bIns="0" rtlCol="0" anchor="ctr"/>
+          <a:lstStyle/>
+          <a:p>
+            <a:pPr indent="0" marL="0">
+              <a:buNone/>
+            </a:pPr>
+            <a:r>
+              <a:rPr lang="en-US" sz="950" b="1" dirty="0">
+                <a:solidFill>
+                  <a:srgbClr val="0068B7"/>
+                </a:solidFill>
+                <a:latin typeface="Aptos" pitchFamily="34" charset="0"/>
+                <a:ea typeface="Aptos" pitchFamily="34" charset="-122"/>
+                <a:cs typeface="Aptos" pitchFamily="34" charset="-120"/>
+              </a:rPr>
+              <a:t>Key idea</a:t>
+            </a:r>
+            <a:endParaRPr lang="en-US" sz="950" dirty="0"/>
+          </a:p>
+        </p:txBody>
+      </p:sp>
+      <p:sp>
+        <p:nvSpPr>
+          <p:cNvPr id="11" name="Text 9"/>
+          <p:cNvSpPr/>
+          <p:nvPr/>
+        </p:nvSpPr>
+        <p:spPr>
+          <a:xfrm>
+            <a:off x="8074152" y="1856232"/>
+            <a:ext cx="2825496" cy="1261872"/>
+          </a:xfrm>
+          <a:prstGeom prst="rect">
+            <a:avLst/>
+          </a:prstGeom>
+          <a:noFill/>
+          <a:ln/>
+        </p:spPr>
+        <p:txBody>
+          <a:bodyPr wrap="square" lIns="0" tIns="0" rIns="0" bIns="0" rtlCol="0" anchor="t">
+            <a:normAutofit/>
+          </a:bodyPr>
+          <a:lstStyle/>
+          <a:p>
+            <a:pPr indent="0" marL="0">
+              <a:buNone/>
+            </a:pPr>
+            <a:r>
+              <a:rPr lang="en-US" sz="1250" dirty="0">
+                <a:solidFill>
+                  <a:srgbClr val="17364A"/>
+                </a:solidFill>
+                <a:latin typeface="Aptos" pitchFamily="34" charset="0"/>
+                <a:ea typeface="Aptos" pitchFamily="34" charset="-122"/>
+                <a:cs typeface="Aptos" pitchFamily="34" charset="-120"/>
+              </a:rPr>
+              <a:t>Document source material used for public-facing claims.</a:t>
+            </a:r>
+            <a:endParaRPr lang="en-US" sz="1250" dirty="0"/>
+          </a:p>
+        </p:txBody>
+      </p:sp>
+      <p:sp>
+        <p:nvSpPr>
+          <p:cNvPr id="12" name="Shape 10"/>
+          <p:cNvSpPr/>
+          <p:nvPr/>
+        </p:nvSpPr>
+        <p:spPr>
+          <a:xfrm>
+            <a:off x="7909560" y="3520440"/>
+            <a:ext cx="3154680" cy="1737360"/>
+          </a:xfrm>
+          <a:prstGeom prst="roundRect">
+            <a:avLst>
+              <a:gd name="adj" fmla="val 6316"/>
+            </a:avLst>
+          </a:prstGeom>
+          <a:solidFill>
+            <a:srgbClr val="EAF6F8"/>
+          </a:solidFill>
+          <a:ln w="12700">
+            <a:solidFill>
+              <a:srgbClr val="B9D7E6"/>
+            </a:solidFill>
+            <a:prstDash val="solid"/>
+          </a:ln>
+        </p:spPr>
+      </p:sp>
+      <p:sp>
+        <p:nvSpPr>
+          <p:cNvPr id="13" name="Text 11"/>
+          <p:cNvSpPr/>
+          <p:nvPr/>
+        </p:nvSpPr>
+        <p:spPr>
+          <a:xfrm>
+            <a:off x="8074152" y="3666744"/>
+            <a:ext cx="2825496" cy="201168"/>
+          </a:xfrm>
+          <a:prstGeom prst="rect">
+            <a:avLst/>
+          </a:prstGeom>
+          <a:noFill/>
+          <a:ln/>
+        </p:spPr>
+        <p:txBody>
+          <a:bodyPr wrap="square" lIns="0" tIns="0" rIns="0" bIns="0" rtlCol="0" anchor="ctr"/>
+          <a:lstStyle/>
+          <a:p>
+            <a:pPr indent="0" marL="0">
+              <a:buNone/>
+            </a:pPr>
+            <a:r>
+              <a:rPr lang="en-US" sz="950" b="1" dirty="0">
+                <a:solidFill>
+                  <a:srgbClr val="0068B7"/>
+                </a:solidFill>
+                <a:latin typeface="Aptos" pitchFamily="34" charset="0"/>
+                <a:ea typeface="Aptos" pitchFamily="34" charset="-122"/>
+                <a:cs typeface="Aptos" pitchFamily="34" charset="-120"/>
+              </a:rPr>
+              <a:t>Use this for</a:t>
+            </a:r>
+            <a:endParaRPr lang="en-US" sz="950" dirty="0"/>
+          </a:p>
+        </p:txBody>
+      </p:sp>
+      <p:sp>
+        <p:nvSpPr>
+          <p:cNvPr id="14" name="Text 12"/>
+          <p:cNvSpPr/>
+          <p:nvPr/>
+        </p:nvSpPr>
+        <p:spPr>
+          <a:xfrm>
+            <a:off x="8074152" y="3959352"/>
+            <a:ext cx="2825496" cy="1170432"/>
+          </a:xfrm>
+          <a:prstGeom prst="rect">
+            <a:avLst/>
+          </a:prstGeom>
+          <a:noFill/>
+          <a:ln/>
+        </p:spPr>
+        <p:txBody>
+          <a:bodyPr wrap="square" lIns="0" tIns="0" rIns="0" bIns="0" rtlCol="0" anchor="t">
+            <a:normAutofit/>
+          </a:bodyPr>
+          <a:lstStyle/>
+          <a:p>
+            <a:pPr indent="0" marL="0">
+              <a:buNone/>
+            </a:pPr>
+            <a:r>
+              <a:rPr lang="en-US" sz="1250" dirty="0">
+                <a:solidFill>
+                  <a:srgbClr val="17364A"/>
+                </a:solidFill>
+                <a:latin typeface="Aptos" pitchFamily="34" charset="0"/>
+                <a:ea typeface="Aptos" pitchFamily="34" charset="-122"/>
+                <a:cs typeface="Aptos" pitchFamily="34" charset="-120"/>
+              </a:rPr>
+              <a:t>Connect the concept to public health decisions, safeguards, documentation, or implementation work.</a:t>
+            </a:r>
+            <a:endParaRPr lang="en-US" sz="1250" dirty="0"/>
           </a:p>
         </p:txBody>
       </p:sp>
@@ -4243,7 +5815,32 @@
       </p:sp>
       <p:sp>
         <p:nvSpPr>
-          <p:cNvPr id="3" name="Text 1"/>
+          <p:cNvPr id="3" name="Shape 1"/>
+          <p:cNvSpPr/>
+          <p:nvPr/>
+        </p:nvSpPr>
+        <p:spPr>
+          <a:xfrm>
+            <a:off x="0" y="164592"/>
+            <a:ext cx="146304" cy="6693408"/>
+          </a:xfrm>
+          <a:prstGeom prst="rect">
+            <a:avLst/>
+          </a:prstGeom>
+          <a:solidFill>
+            <a:srgbClr val="2F8A28"/>
+          </a:solidFill>
+          <a:ln w="12700">
+            <a:solidFill>
+              <a:srgbClr val="2F8A28"/>
+            </a:solidFill>
+            <a:prstDash val="solid"/>
+          </a:ln>
+        </p:spPr>
+      </p:sp>
+      <p:sp>
+        <p:nvSpPr>
+          <p:cNvPr id="4" name="Text 2"/>
           <p:cNvSpPr/>
           <p:nvPr/>
         </p:nvSpPr>
@@ -4282,7 +5879,7 @@
       </p:sp>
       <p:sp>
         <p:nvSpPr>
-          <p:cNvPr id="4" name="Text 2"/>
+          <p:cNvPr id="5" name="Text 3"/>
           <p:cNvSpPr/>
           <p:nvPr/>
         </p:nvSpPr>
@@ -4321,7 +5918,7 @@
       </p:sp>
       <p:sp>
         <p:nvSpPr>
-          <p:cNvPr id="5" name="Text 3"/>
+          <p:cNvPr id="6" name="Text 4"/>
           <p:cNvSpPr/>
           <p:nvPr/>
         </p:nvSpPr>
@@ -4360,13 +5957,77 @@
       </p:sp>
       <p:sp>
         <p:nvSpPr>
-          <p:cNvPr id="6" name="Text 4"/>
+          <p:cNvPr id="7" name="Shape 5"/>
           <p:cNvSpPr/>
           <p:nvPr/>
         </p:nvSpPr>
         <p:spPr>
           <a:xfrm>
             <a:off x="640080" y="658368"/>
+            <a:ext cx="420624" cy="420624"/>
+          </a:xfrm>
+          <a:prstGeom prst="ellipse">
+            <a:avLst/>
+          </a:prstGeom>
+          <a:solidFill>
+            <a:srgbClr val="0068B7"/>
+          </a:solidFill>
+          <a:ln w="12700">
+            <a:solidFill>
+              <a:srgbClr val="0068B7"/>
+            </a:solidFill>
+            <a:prstDash val="solid"/>
+          </a:ln>
+        </p:spPr>
+      </p:sp>
+      <p:sp>
+        <p:nvSpPr>
+          <p:cNvPr id="8" name="Text 6"/>
+          <p:cNvSpPr/>
+          <p:nvPr/>
+        </p:nvSpPr>
+        <p:spPr>
+          <a:xfrm>
+            <a:off x="640080" y="731520"/>
+            <a:ext cx="420624" cy="164592"/>
+          </a:xfrm>
+          <a:prstGeom prst="rect">
+            <a:avLst/>
+          </a:prstGeom>
+          <a:noFill/>
+          <a:ln/>
+        </p:spPr>
+        <p:txBody>
+          <a:bodyPr wrap="square" lIns="0" tIns="0" rIns="0" bIns="0" rtlCol="0" anchor="ctr"/>
+          <a:lstStyle/>
+          <a:p>
+            <a:pPr algn="ctr" indent="0" marL="0">
+              <a:buNone/>
+            </a:pPr>
+            <a:r>
+              <a:rPr lang="en-US" sz="1100" b="1" dirty="0">
+                <a:solidFill>
+                  <a:srgbClr val="FFFFFF"/>
+                </a:solidFill>
+                <a:latin typeface="Aptos" pitchFamily="34" charset="0"/>
+                <a:ea typeface="Aptos" pitchFamily="34" charset="-122"/>
+                <a:cs typeface="Aptos" pitchFamily="34" charset="-120"/>
+              </a:rPr>
+              <a:t>7</a:t>
+            </a:r>
+            <a:endParaRPr lang="en-US" sz="1100" dirty="0"/>
+          </a:p>
+        </p:txBody>
+      </p:sp>
+      <p:sp>
+        <p:nvSpPr>
+          <p:cNvPr id="9" name="Text 7"/>
+          <p:cNvSpPr/>
+          <p:nvPr/>
+        </p:nvSpPr>
+        <p:spPr>
+          <a:xfrm>
+            <a:off x="640080" y="621792"/>
             <a:ext cx="10881360" cy="566928"/>
           </a:xfrm>
           <a:prstGeom prst="rect">
@@ -4393,7 +6054,7 @@
                 <a:ea typeface="Aptos Display" pitchFamily="34" charset="-122"/>
                 <a:cs typeface="Aptos Display" pitchFamily="34" charset="-120"/>
               </a:rPr>
-              <a:t>Practical Exercise</a:t>
+              <a:t>Reflection Questions</a:t>
             </a:r>
             <a:endParaRPr lang="en-US" sz="2700" dirty="0"/>
           </a:p>
@@ -4401,32 +6062,29 @@
       </p:sp>
       <p:sp>
         <p:nvSpPr>
-          <p:cNvPr id="7" name="Text 5"/>
-          <p:cNvSpPr/>
-          <p:nvPr/>
-        </p:nvSpPr>
-        <p:spPr>
-          <a:xfrm>
-            <a:off x="822960" y="1325880"/>
-            <a:ext cx="10378440" cy="4800600"/>
-          </a:xfrm>
-          <a:prstGeom prst="rect">
-            <a:avLst/>
-          </a:prstGeom>
-          <a:noFill/>
-          <a:ln/>
-        </p:spPr>
-        <p:txBody>
-          <a:bodyPr wrap="square" lIns="1016" tIns="1016" rIns="1016" bIns="1016" rtlCol="0" anchor="t">
+          <p:cNvPr id="10" name="Text 8"/>
+          <p:cNvSpPr/>
+          <p:nvPr/>
+        </p:nvSpPr>
+        <p:spPr>
+          <a:xfrm>
+            <a:off x="868680" y="1417320"/>
+            <a:ext cx="6675120" cy="4434840"/>
+          </a:xfrm>
+          <a:prstGeom prst="rect">
+            <a:avLst/>
+          </a:prstGeom>
+          <a:noFill/>
+          <a:ln/>
+        </p:spPr>
+        <p:txBody>
+          <a:bodyPr wrap="square" lIns="635" tIns="635" rIns="635" bIns="635" rtlCol="0" anchor="t">
             <a:normAutofit/>
           </a:bodyPr>
           <a:lstStyle/>
           <a:p>
-            <a:pPr indent="0" marL="0">
-              <a:buNone/>
-            </a:pPr>
-            <a:r>
-              <a:rPr lang="en-US" sz="1420" dirty="0">
+            <a:r>
+              <a:rPr lang="en-US" sz="1700" dirty="0">
                 <a:solidFill>
                   <a:srgbClr val="17364A"/>
                 </a:solidFill>
@@ -4434,9 +6092,251 @@
                 <a:ea typeface="Aptos" pitchFamily="34" charset="-122"/>
                 <a:cs typeface="Aptos" pitchFamily="34" charset="-120"/>
               </a:rPr>
-              <a:t>Create an AI-assisted communications review checklist for one public health message. Include intended audience, source material, factual claims to verify, plain language review, accessibility review, language access review, equity review, approval pathway, and documentation expectations.</a:t>
-            </a:r>
-            <a:endParaRPr lang="en-US" sz="1420" dirty="0"/>
+              <a:t>Where does this topic appear in your agency, program, or workflow?</a:t>
+            </a:r>
+            <a:endParaRPr lang="en-US" sz="1700" dirty="0"/>
+          </a:p>
+          <a:p>
+            <a:r>
+              <a:rPr lang="en-US" sz="1700" dirty="0">
+                <a:solidFill>
+                  <a:srgbClr val="17364A"/>
+                </a:solidFill>
+                <a:latin typeface="Aptos" pitchFamily="34" charset="0"/>
+                <a:ea typeface="Aptos" pitchFamily="34" charset="-122"/>
+                <a:cs typeface="Aptos" pitchFamily="34" charset="-120"/>
+              </a:rPr>
+              <a:t>Which staff roles would need to understand or apply this concept before AI use is approved?</a:t>
+            </a:r>
+            <a:endParaRPr lang="en-US" sz="1700" dirty="0"/>
+          </a:p>
+          <a:p>
+            <a:r>
+              <a:rPr lang="en-US" sz="1700" dirty="0">
+                <a:solidFill>
+                  <a:srgbClr val="17364A"/>
+                </a:solidFill>
+                <a:latin typeface="Aptos" pitchFamily="34" charset="0"/>
+                <a:ea typeface="Aptos" pitchFamily="34" charset="-122"/>
+                <a:cs typeface="Aptos" pitchFamily="34" charset="-120"/>
+              </a:rPr>
+              <a:t>What could go wrong if this topic is not addressed before implementation?</a:t>
+            </a:r>
+            <a:endParaRPr lang="en-US" sz="1700" dirty="0"/>
+          </a:p>
+        </p:txBody>
+      </p:sp>
+      <p:sp>
+        <p:nvSpPr>
+          <p:cNvPr id="11" name="Shape 9"/>
+          <p:cNvSpPr/>
+          <p:nvPr/>
+        </p:nvSpPr>
+        <p:spPr>
+          <a:xfrm>
+            <a:off x="7909560" y="1417320"/>
+            <a:ext cx="3154680" cy="1828800"/>
+          </a:xfrm>
+          <a:prstGeom prst="roundRect">
+            <a:avLst>
+              <a:gd name="adj" fmla="val 6000"/>
+            </a:avLst>
+          </a:prstGeom>
+          <a:solidFill>
+            <a:srgbClr val="EEF8ED"/>
+          </a:solidFill>
+          <a:ln w="12700">
+            <a:solidFill>
+              <a:srgbClr val="B9D7E6"/>
+            </a:solidFill>
+            <a:prstDash val="solid"/>
+          </a:ln>
+        </p:spPr>
+      </p:sp>
+      <p:sp>
+        <p:nvSpPr>
+          <p:cNvPr id="12" name="Text 10"/>
+          <p:cNvSpPr/>
+          <p:nvPr/>
+        </p:nvSpPr>
+        <p:spPr>
+          <a:xfrm>
+            <a:off x="8074152" y="1563624"/>
+            <a:ext cx="2825496" cy="201168"/>
+          </a:xfrm>
+          <a:prstGeom prst="rect">
+            <a:avLst/>
+          </a:prstGeom>
+          <a:noFill/>
+          <a:ln/>
+        </p:spPr>
+        <p:txBody>
+          <a:bodyPr wrap="square" lIns="0" tIns="0" rIns="0" bIns="0" rtlCol="0" anchor="ctr"/>
+          <a:lstStyle/>
+          <a:p>
+            <a:pPr indent="0" marL="0">
+              <a:buNone/>
+            </a:pPr>
+            <a:r>
+              <a:rPr lang="en-US" sz="950" b="1" dirty="0">
+                <a:solidFill>
+                  <a:srgbClr val="0068B7"/>
+                </a:solidFill>
+                <a:latin typeface="Aptos" pitchFamily="34" charset="0"/>
+                <a:ea typeface="Aptos" pitchFamily="34" charset="-122"/>
+                <a:cs typeface="Aptos" pitchFamily="34" charset="-120"/>
+              </a:rPr>
+              <a:t>Key idea</a:t>
+            </a:r>
+            <a:endParaRPr lang="en-US" sz="950" dirty="0"/>
+          </a:p>
+        </p:txBody>
+      </p:sp>
+      <p:sp>
+        <p:nvSpPr>
+          <p:cNvPr id="13" name="Text 11"/>
+          <p:cNvSpPr/>
+          <p:nvPr/>
+        </p:nvSpPr>
+        <p:spPr>
+          <a:xfrm>
+            <a:off x="8074152" y="1856232"/>
+            <a:ext cx="2825496" cy="1261872"/>
+          </a:xfrm>
+          <a:prstGeom prst="rect">
+            <a:avLst/>
+          </a:prstGeom>
+          <a:noFill/>
+          <a:ln/>
+        </p:spPr>
+        <p:txBody>
+          <a:bodyPr wrap="square" lIns="0" tIns="0" rIns="0" bIns="0" rtlCol="0" anchor="t">
+            <a:normAutofit/>
+          </a:bodyPr>
+          <a:lstStyle/>
+          <a:p>
+            <a:pPr indent="0" marL="0">
+              <a:buNone/>
+            </a:pPr>
+            <a:r>
+              <a:rPr lang="en-US" sz="1250" dirty="0">
+                <a:solidFill>
+                  <a:srgbClr val="17364A"/>
+                </a:solidFill>
+                <a:latin typeface="Aptos" pitchFamily="34" charset="0"/>
+                <a:ea typeface="Aptos" pitchFamily="34" charset="-122"/>
+                <a:cs typeface="Aptos" pitchFamily="34" charset="-120"/>
+              </a:rPr>
+              <a:t>Where does this topic appear in your agency, program, or workflow?</a:t>
+            </a:r>
+            <a:endParaRPr lang="en-US" sz="1250" dirty="0"/>
+          </a:p>
+        </p:txBody>
+      </p:sp>
+      <p:sp>
+        <p:nvSpPr>
+          <p:cNvPr id="14" name="Shape 12"/>
+          <p:cNvSpPr/>
+          <p:nvPr/>
+        </p:nvSpPr>
+        <p:spPr>
+          <a:xfrm>
+            <a:off x="7909560" y="3520440"/>
+            <a:ext cx="3154680" cy="1737360"/>
+          </a:xfrm>
+          <a:prstGeom prst="roundRect">
+            <a:avLst>
+              <a:gd name="adj" fmla="val 6316"/>
+            </a:avLst>
+          </a:prstGeom>
+          <a:solidFill>
+            <a:srgbClr val="EAF6F8"/>
+          </a:solidFill>
+          <a:ln w="12700">
+            <a:solidFill>
+              <a:srgbClr val="B9D7E6"/>
+            </a:solidFill>
+            <a:prstDash val="solid"/>
+          </a:ln>
+        </p:spPr>
+      </p:sp>
+      <p:sp>
+        <p:nvSpPr>
+          <p:cNvPr id="15" name="Text 13"/>
+          <p:cNvSpPr/>
+          <p:nvPr/>
+        </p:nvSpPr>
+        <p:spPr>
+          <a:xfrm>
+            <a:off x="8074152" y="3666744"/>
+            <a:ext cx="2825496" cy="201168"/>
+          </a:xfrm>
+          <a:prstGeom prst="rect">
+            <a:avLst/>
+          </a:prstGeom>
+          <a:noFill/>
+          <a:ln/>
+        </p:spPr>
+        <p:txBody>
+          <a:bodyPr wrap="square" lIns="0" tIns="0" rIns="0" bIns="0" rtlCol="0" anchor="ctr"/>
+          <a:lstStyle/>
+          <a:p>
+            <a:pPr indent="0" marL="0">
+              <a:buNone/>
+            </a:pPr>
+            <a:r>
+              <a:rPr lang="en-US" sz="950" b="1" dirty="0">
+                <a:solidFill>
+                  <a:srgbClr val="0068B7"/>
+                </a:solidFill>
+                <a:latin typeface="Aptos" pitchFamily="34" charset="0"/>
+                <a:ea typeface="Aptos" pitchFamily="34" charset="-122"/>
+                <a:cs typeface="Aptos" pitchFamily="34" charset="-120"/>
+              </a:rPr>
+              <a:t>Use this for</a:t>
+            </a:r>
+            <a:endParaRPr lang="en-US" sz="950" dirty="0"/>
+          </a:p>
+        </p:txBody>
+      </p:sp>
+      <p:sp>
+        <p:nvSpPr>
+          <p:cNvPr id="16" name="Text 14"/>
+          <p:cNvSpPr/>
+          <p:nvPr/>
+        </p:nvSpPr>
+        <p:spPr>
+          <a:xfrm>
+            <a:off x="8074152" y="3959352"/>
+            <a:ext cx="2825496" cy="1170432"/>
+          </a:xfrm>
+          <a:prstGeom prst="rect">
+            <a:avLst/>
+          </a:prstGeom>
+          <a:noFill/>
+          <a:ln/>
+        </p:spPr>
+        <p:txBody>
+          <a:bodyPr wrap="square" lIns="0" tIns="0" rIns="0" bIns="0" rtlCol="0" anchor="t">
+            <a:normAutofit/>
+          </a:bodyPr>
+          <a:lstStyle/>
+          <a:p>
+            <a:pPr indent="0" marL="0">
+              <a:buNone/>
+            </a:pPr>
+            <a:r>
+              <a:rPr lang="en-US" sz="1250" dirty="0">
+                <a:solidFill>
+                  <a:srgbClr val="17364A"/>
+                </a:solidFill>
+                <a:latin typeface="Aptos" pitchFamily="34" charset="0"/>
+                <a:ea typeface="Aptos" pitchFamily="34" charset="-122"/>
+                <a:cs typeface="Aptos" pitchFamily="34" charset="-120"/>
+              </a:rPr>
+              <a:t>Connect the concept to public health decisions, safeguards, documentation, or implementation work.</a:t>
+            </a:r>
+            <a:endParaRPr lang="en-US" sz="1250" dirty="0"/>
           </a:p>
         </p:txBody>
       </p:sp>
@@ -4499,7 +6399,32 @@
       </p:sp>
       <p:sp>
         <p:nvSpPr>
-          <p:cNvPr id="3" name="Text 1"/>
+          <p:cNvPr id="3" name="Shape 1"/>
+          <p:cNvSpPr/>
+          <p:nvPr/>
+        </p:nvSpPr>
+        <p:spPr>
+          <a:xfrm>
+            <a:off x="0" y="164592"/>
+            <a:ext cx="146304" cy="6693408"/>
+          </a:xfrm>
+          <a:prstGeom prst="rect">
+            <a:avLst/>
+          </a:prstGeom>
+          <a:solidFill>
+            <a:srgbClr val="2F8A28"/>
+          </a:solidFill>
+          <a:ln w="12700">
+            <a:solidFill>
+              <a:srgbClr val="2F8A28"/>
+            </a:solidFill>
+            <a:prstDash val="solid"/>
+          </a:ln>
+        </p:spPr>
+      </p:sp>
+      <p:sp>
+        <p:nvSpPr>
+          <p:cNvPr id="4" name="Text 2"/>
           <p:cNvSpPr/>
           <p:nvPr/>
         </p:nvSpPr>
@@ -4538,7 +6463,7 @@
       </p:sp>
       <p:sp>
         <p:nvSpPr>
-          <p:cNvPr id="4" name="Text 2"/>
+          <p:cNvPr id="5" name="Text 3"/>
           <p:cNvSpPr/>
           <p:nvPr/>
         </p:nvSpPr>
@@ -4577,7 +6502,7 @@
       </p:sp>
       <p:sp>
         <p:nvSpPr>
-          <p:cNvPr id="5" name="Text 3"/>
+          <p:cNvPr id="6" name="Text 4"/>
           <p:cNvSpPr/>
           <p:nvPr/>
         </p:nvSpPr>
@@ -4616,7 +6541,7 @@
       </p:sp>
       <p:sp>
         <p:nvSpPr>
-          <p:cNvPr id="6" name="Text 4"/>
+          <p:cNvPr id="7" name="Text 5"/>
           <p:cNvSpPr/>
           <p:nvPr/>
         </p:nvSpPr>
@@ -4649,7 +6574,7 @@
                 <a:ea typeface="Aptos Display" pitchFamily="34" charset="-122"/>
                 <a:cs typeface="Aptos Display" pitchFamily="34" charset="-120"/>
               </a:rPr>
-              <a:t>Expected Artifact or Evidence</a:t>
+              <a:t>Reflection Questions Continued</a:t>
             </a:r>
             <a:endParaRPr lang="en-US" sz="2700" dirty="0"/>
           </a:p>
@@ -4657,32 +6582,29 @@
       </p:sp>
       <p:sp>
         <p:nvSpPr>
-          <p:cNvPr id="7" name="Text 5"/>
-          <p:cNvSpPr/>
-          <p:nvPr/>
-        </p:nvSpPr>
-        <p:spPr>
-          <a:xfrm>
-            <a:off x="822960" y="1325880"/>
-            <a:ext cx="10378440" cy="4800600"/>
-          </a:xfrm>
-          <a:prstGeom prst="rect">
-            <a:avLst/>
-          </a:prstGeom>
-          <a:noFill/>
-          <a:ln/>
-        </p:spPr>
-        <p:txBody>
-          <a:bodyPr wrap="square" lIns="1016" tIns="1016" rIns="1016" bIns="1016" rtlCol="0" anchor="t">
+          <p:cNvPr id="8" name="Text 6"/>
+          <p:cNvSpPr/>
+          <p:nvPr/>
+        </p:nvSpPr>
+        <p:spPr>
+          <a:xfrm>
+            <a:off x="868680" y="1417320"/>
+            <a:ext cx="6675120" cy="4434840"/>
+          </a:xfrm>
+          <a:prstGeom prst="rect">
+            <a:avLst/>
+          </a:prstGeom>
+          <a:noFill/>
+          <a:ln/>
+        </p:spPr>
+        <p:txBody>
+          <a:bodyPr wrap="square" lIns="635" tIns="635" rIns="635" bIns="635" rtlCol="0" anchor="t">
             <a:normAutofit/>
           </a:bodyPr>
           <a:lstStyle/>
           <a:p>
-            <a:pPr indent="0" marL="0">
-              <a:buNone/>
-            </a:pPr>
-            <a:r>
-              <a:rPr lang="en-US" sz="1420" dirty="0">
+            <a:r>
+              <a:rPr lang="en-US" sz="1700" dirty="0">
                 <a:solidFill>
                   <a:srgbClr val="17364A"/>
                 </a:solidFill>
@@ -4690,9 +6612,237 @@
                 <a:ea typeface="Aptos" pitchFamily="34" charset="-122"/>
                 <a:cs typeface="Aptos" pitchFamily="34" charset="-120"/>
               </a:rPr>
-              <a:t>AI-assisted communications review checklist Source verification notes Plain language and accessibility review notes</a:t>
-            </a:r>
-            <a:endParaRPr lang="en-US" sz="1420" dirty="0"/>
+              <a:t>What evidence would governance, leadership, or operations staff need before moving forward?</a:t>
+            </a:r>
+            <a:endParaRPr lang="en-US" sz="1700" dirty="0"/>
+          </a:p>
+          <a:p>
+            <a:r>
+              <a:rPr lang="en-US" sz="1700" dirty="0">
+                <a:solidFill>
+                  <a:srgbClr val="17364A"/>
+                </a:solidFill>
+                <a:latin typeface="Aptos" pitchFamily="34" charset="0"/>
+                <a:ea typeface="Aptos" pitchFamily="34" charset="-122"/>
+                <a:cs typeface="Aptos" pitchFamily="34" charset="-120"/>
+              </a:rPr>
+              <a:t>Which policy, data, equity, privacy, security, or workflow questions remain unresolved?</a:t>
+            </a:r>
+            <a:endParaRPr lang="en-US" sz="1700" dirty="0"/>
+          </a:p>
+        </p:txBody>
+      </p:sp>
+      <p:sp>
+        <p:nvSpPr>
+          <p:cNvPr id="9" name="Shape 7"/>
+          <p:cNvSpPr/>
+          <p:nvPr/>
+        </p:nvSpPr>
+        <p:spPr>
+          <a:xfrm>
+            <a:off x="7909560" y="1417320"/>
+            <a:ext cx="3154680" cy="1828800"/>
+          </a:xfrm>
+          <a:prstGeom prst="roundRect">
+            <a:avLst>
+              <a:gd name="adj" fmla="val 6000"/>
+            </a:avLst>
+          </a:prstGeom>
+          <a:solidFill>
+            <a:srgbClr val="EEF8ED"/>
+          </a:solidFill>
+          <a:ln w="12700">
+            <a:solidFill>
+              <a:srgbClr val="B9D7E6"/>
+            </a:solidFill>
+            <a:prstDash val="solid"/>
+          </a:ln>
+        </p:spPr>
+      </p:sp>
+      <p:sp>
+        <p:nvSpPr>
+          <p:cNvPr id="10" name="Text 8"/>
+          <p:cNvSpPr/>
+          <p:nvPr/>
+        </p:nvSpPr>
+        <p:spPr>
+          <a:xfrm>
+            <a:off x="8074152" y="1563624"/>
+            <a:ext cx="2825496" cy="201168"/>
+          </a:xfrm>
+          <a:prstGeom prst="rect">
+            <a:avLst/>
+          </a:prstGeom>
+          <a:noFill/>
+          <a:ln/>
+        </p:spPr>
+        <p:txBody>
+          <a:bodyPr wrap="square" lIns="0" tIns="0" rIns="0" bIns="0" rtlCol="0" anchor="ctr"/>
+          <a:lstStyle/>
+          <a:p>
+            <a:pPr indent="0" marL="0">
+              <a:buNone/>
+            </a:pPr>
+            <a:r>
+              <a:rPr lang="en-US" sz="950" b="1" dirty="0">
+                <a:solidFill>
+                  <a:srgbClr val="0068B7"/>
+                </a:solidFill>
+                <a:latin typeface="Aptos" pitchFamily="34" charset="0"/>
+                <a:ea typeface="Aptos" pitchFamily="34" charset="-122"/>
+                <a:cs typeface="Aptos" pitchFamily="34" charset="-120"/>
+              </a:rPr>
+              <a:t>Key idea</a:t>
+            </a:r>
+            <a:endParaRPr lang="en-US" sz="950" dirty="0"/>
+          </a:p>
+        </p:txBody>
+      </p:sp>
+      <p:sp>
+        <p:nvSpPr>
+          <p:cNvPr id="11" name="Text 9"/>
+          <p:cNvSpPr/>
+          <p:nvPr/>
+        </p:nvSpPr>
+        <p:spPr>
+          <a:xfrm>
+            <a:off x="8074152" y="1856232"/>
+            <a:ext cx="2825496" cy="1261872"/>
+          </a:xfrm>
+          <a:prstGeom prst="rect">
+            <a:avLst/>
+          </a:prstGeom>
+          <a:noFill/>
+          <a:ln/>
+        </p:spPr>
+        <p:txBody>
+          <a:bodyPr wrap="square" lIns="0" tIns="0" rIns="0" bIns="0" rtlCol="0" anchor="t">
+            <a:normAutofit/>
+          </a:bodyPr>
+          <a:lstStyle/>
+          <a:p>
+            <a:pPr indent="0" marL="0">
+              <a:buNone/>
+            </a:pPr>
+            <a:r>
+              <a:rPr lang="en-US" sz="1250" dirty="0">
+                <a:solidFill>
+                  <a:srgbClr val="17364A"/>
+                </a:solidFill>
+                <a:latin typeface="Aptos" pitchFamily="34" charset="0"/>
+                <a:ea typeface="Aptos" pitchFamily="34" charset="-122"/>
+                <a:cs typeface="Aptos" pitchFamily="34" charset="-120"/>
+              </a:rPr>
+              <a:t>What evidence would governance, leadership, or operations staff need before moving forward?</a:t>
+            </a:r>
+            <a:endParaRPr lang="en-US" sz="1250" dirty="0"/>
+          </a:p>
+        </p:txBody>
+      </p:sp>
+      <p:sp>
+        <p:nvSpPr>
+          <p:cNvPr id="12" name="Shape 10"/>
+          <p:cNvSpPr/>
+          <p:nvPr/>
+        </p:nvSpPr>
+        <p:spPr>
+          <a:xfrm>
+            <a:off x="7909560" y="3520440"/>
+            <a:ext cx="3154680" cy="1737360"/>
+          </a:xfrm>
+          <a:prstGeom prst="roundRect">
+            <a:avLst>
+              <a:gd name="adj" fmla="val 6316"/>
+            </a:avLst>
+          </a:prstGeom>
+          <a:solidFill>
+            <a:srgbClr val="EAF6F8"/>
+          </a:solidFill>
+          <a:ln w="12700">
+            <a:solidFill>
+              <a:srgbClr val="B9D7E6"/>
+            </a:solidFill>
+            <a:prstDash val="solid"/>
+          </a:ln>
+        </p:spPr>
+      </p:sp>
+      <p:sp>
+        <p:nvSpPr>
+          <p:cNvPr id="13" name="Text 11"/>
+          <p:cNvSpPr/>
+          <p:nvPr/>
+        </p:nvSpPr>
+        <p:spPr>
+          <a:xfrm>
+            <a:off x="8074152" y="3666744"/>
+            <a:ext cx="2825496" cy="201168"/>
+          </a:xfrm>
+          <a:prstGeom prst="rect">
+            <a:avLst/>
+          </a:prstGeom>
+          <a:noFill/>
+          <a:ln/>
+        </p:spPr>
+        <p:txBody>
+          <a:bodyPr wrap="square" lIns="0" tIns="0" rIns="0" bIns="0" rtlCol="0" anchor="ctr"/>
+          <a:lstStyle/>
+          <a:p>
+            <a:pPr indent="0" marL="0">
+              <a:buNone/>
+            </a:pPr>
+            <a:r>
+              <a:rPr lang="en-US" sz="950" b="1" dirty="0">
+                <a:solidFill>
+                  <a:srgbClr val="0068B7"/>
+                </a:solidFill>
+                <a:latin typeface="Aptos" pitchFamily="34" charset="0"/>
+                <a:ea typeface="Aptos" pitchFamily="34" charset="-122"/>
+                <a:cs typeface="Aptos" pitchFamily="34" charset="-120"/>
+              </a:rPr>
+              <a:t>Use this for</a:t>
+            </a:r>
+            <a:endParaRPr lang="en-US" sz="950" dirty="0"/>
+          </a:p>
+        </p:txBody>
+      </p:sp>
+      <p:sp>
+        <p:nvSpPr>
+          <p:cNvPr id="14" name="Text 12"/>
+          <p:cNvSpPr/>
+          <p:nvPr/>
+        </p:nvSpPr>
+        <p:spPr>
+          <a:xfrm>
+            <a:off x="8074152" y="3959352"/>
+            <a:ext cx="2825496" cy="1170432"/>
+          </a:xfrm>
+          <a:prstGeom prst="rect">
+            <a:avLst/>
+          </a:prstGeom>
+          <a:noFill/>
+          <a:ln/>
+        </p:spPr>
+        <p:txBody>
+          <a:bodyPr wrap="square" lIns="0" tIns="0" rIns="0" bIns="0" rtlCol="0" anchor="t">
+            <a:normAutofit/>
+          </a:bodyPr>
+          <a:lstStyle/>
+          <a:p>
+            <a:pPr indent="0" marL="0">
+              <a:buNone/>
+            </a:pPr>
+            <a:r>
+              <a:rPr lang="en-US" sz="1250" dirty="0">
+                <a:solidFill>
+                  <a:srgbClr val="17364A"/>
+                </a:solidFill>
+                <a:latin typeface="Aptos" pitchFamily="34" charset="0"/>
+                <a:ea typeface="Aptos" pitchFamily="34" charset="-122"/>
+                <a:cs typeface="Aptos" pitchFamily="34" charset="-120"/>
+              </a:rPr>
+              <a:t>Connect the concept to public health decisions, safeguards, documentation, or implementation work.</a:t>
+            </a:r>
+            <a:endParaRPr lang="en-US" sz="1250" dirty="0"/>
           </a:p>
         </p:txBody>
       </p:sp>
@@ -4755,7 +6905,32 @@
       </p:sp>
       <p:sp>
         <p:nvSpPr>
-          <p:cNvPr id="3" name="Text 1"/>
+          <p:cNvPr id="3" name="Shape 1"/>
+          <p:cNvSpPr/>
+          <p:nvPr/>
+        </p:nvSpPr>
+        <p:spPr>
+          <a:xfrm>
+            <a:off x="0" y="164592"/>
+            <a:ext cx="146304" cy="6693408"/>
+          </a:xfrm>
+          <a:prstGeom prst="rect">
+            <a:avLst/>
+          </a:prstGeom>
+          <a:solidFill>
+            <a:srgbClr val="2F8A28"/>
+          </a:solidFill>
+          <a:ln w="12700">
+            <a:solidFill>
+              <a:srgbClr val="2F8A28"/>
+            </a:solidFill>
+            <a:prstDash val="solid"/>
+          </a:ln>
+        </p:spPr>
+      </p:sp>
+      <p:sp>
+        <p:nvSpPr>
+          <p:cNvPr id="4" name="Text 2"/>
           <p:cNvSpPr/>
           <p:nvPr/>
         </p:nvSpPr>
@@ -4794,7 +6969,7 @@
       </p:sp>
       <p:sp>
         <p:nvSpPr>
-          <p:cNvPr id="4" name="Text 2"/>
+          <p:cNvPr id="5" name="Text 3"/>
           <p:cNvSpPr/>
           <p:nvPr/>
         </p:nvSpPr>
@@ -4833,7 +7008,7 @@
       </p:sp>
       <p:sp>
         <p:nvSpPr>
-          <p:cNvPr id="5" name="Text 3"/>
+          <p:cNvPr id="6" name="Text 4"/>
           <p:cNvSpPr/>
           <p:nvPr/>
         </p:nvSpPr>
@@ -4872,13 +7047,77 @@
       </p:sp>
       <p:sp>
         <p:nvSpPr>
-          <p:cNvPr id="6" name="Text 4"/>
+          <p:cNvPr id="7" name="Shape 5"/>
           <p:cNvSpPr/>
           <p:nvPr/>
         </p:nvSpPr>
         <p:spPr>
           <a:xfrm>
             <a:off x="640080" y="658368"/>
+            <a:ext cx="420624" cy="420624"/>
+          </a:xfrm>
+          <a:prstGeom prst="ellipse">
+            <a:avLst/>
+          </a:prstGeom>
+          <a:solidFill>
+            <a:srgbClr val="0068B7"/>
+          </a:solidFill>
+          <a:ln w="12700">
+            <a:solidFill>
+              <a:srgbClr val="0068B7"/>
+            </a:solidFill>
+            <a:prstDash val="solid"/>
+          </a:ln>
+        </p:spPr>
+      </p:sp>
+      <p:sp>
+        <p:nvSpPr>
+          <p:cNvPr id="8" name="Text 6"/>
+          <p:cNvSpPr/>
+          <p:nvPr/>
+        </p:nvSpPr>
+        <p:spPr>
+          <a:xfrm>
+            <a:off x="640080" y="731520"/>
+            <a:ext cx="420624" cy="164592"/>
+          </a:xfrm>
+          <a:prstGeom prst="rect">
+            <a:avLst/>
+          </a:prstGeom>
+          <a:noFill/>
+          <a:ln/>
+        </p:spPr>
+        <p:txBody>
+          <a:bodyPr wrap="square" lIns="0" tIns="0" rIns="0" bIns="0" rtlCol="0" anchor="ctr"/>
+          <a:lstStyle/>
+          <a:p>
+            <a:pPr algn="ctr" indent="0" marL="0">
+              <a:buNone/>
+            </a:pPr>
+            <a:r>
+              <a:rPr lang="en-US" sz="1100" b="1" dirty="0">
+                <a:solidFill>
+                  <a:srgbClr val="FFFFFF"/>
+                </a:solidFill>
+                <a:latin typeface="Aptos" pitchFamily="34" charset="0"/>
+                <a:ea typeface="Aptos" pitchFamily="34" charset="-122"/>
+                <a:cs typeface="Aptos" pitchFamily="34" charset="-120"/>
+              </a:rPr>
+              <a:t>8</a:t>
+            </a:r>
+            <a:endParaRPr lang="en-US" sz="1100" dirty="0"/>
+          </a:p>
+        </p:txBody>
+      </p:sp>
+      <p:sp>
+        <p:nvSpPr>
+          <p:cNvPr id="9" name="Text 7"/>
+          <p:cNvSpPr/>
+          <p:nvPr/>
+        </p:nvSpPr>
+        <p:spPr>
+          <a:xfrm>
+            <a:off x="640080" y="621792"/>
             <a:ext cx="10881360" cy="566928"/>
           </a:xfrm>
           <a:prstGeom prst="rect">
@@ -4905,7 +7144,7 @@
                 <a:ea typeface="Aptos Display" pitchFamily="34" charset="-122"/>
                 <a:cs typeface="Aptos Display" pitchFamily="34" charset="-120"/>
               </a:rPr>
-              <a:t>Expected Artifact or Evidence Continued</a:t>
+              <a:t>Practical Exercise</a:t>
             </a:r>
             <a:endParaRPr lang="en-US" sz="2700" dirty="0"/>
           </a:p>
@@ -4913,32 +7152,29 @@
       </p:sp>
       <p:sp>
         <p:nvSpPr>
-          <p:cNvPr id="7" name="Text 5"/>
-          <p:cNvSpPr/>
-          <p:nvPr/>
-        </p:nvSpPr>
-        <p:spPr>
-          <a:xfrm>
-            <a:off x="822960" y="1325880"/>
-            <a:ext cx="10378440" cy="4800600"/>
-          </a:xfrm>
-          <a:prstGeom prst="rect">
-            <a:avLst/>
-          </a:prstGeom>
-          <a:noFill/>
-          <a:ln/>
-        </p:spPr>
-        <p:txBody>
-          <a:bodyPr wrap="square" lIns="1016" tIns="1016" rIns="1016" bIns="1016" rtlCol="0" anchor="t">
+          <p:cNvPr id="10" name="Text 8"/>
+          <p:cNvSpPr/>
+          <p:nvPr/>
+        </p:nvSpPr>
+        <p:spPr>
+          <a:xfrm>
+            <a:off x="868680" y="1417320"/>
+            <a:ext cx="6675120" cy="4434840"/>
+          </a:xfrm>
+          <a:prstGeom prst="rect">
+            <a:avLst/>
+          </a:prstGeom>
+          <a:noFill/>
+          <a:ln/>
+        </p:spPr>
+        <p:txBody>
+          <a:bodyPr wrap="square" lIns="635" tIns="635" rIns="635" bIns="635" rtlCol="0" anchor="t">
             <a:normAutofit/>
           </a:bodyPr>
           <a:lstStyle/>
           <a:p>
-            <a:pPr indent="0" marL="0">
-              <a:buNone/>
-            </a:pPr>
-            <a:r>
-              <a:rPr lang="en-US" sz="1420" dirty="0">
+            <a:r>
+              <a:rPr lang="en-US" sz="1700" dirty="0">
                 <a:solidFill>
                   <a:srgbClr val="17364A"/>
                 </a:solidFill>
@@ -4946,9 +7182,237 @@
                 <a:ea typeface="Aptos" pitchFamily="34" charset="-122"/>
                 <a:cs typeface="Aptos" pitchFamily="34" charset="-120"/>
               </a:rPr>
-              <a:t>Approval pathway documentation Final reviewed message or sample revision</a:t>
-            </a:r>
-            <a:endParaRPr lang="en-US" sz="1420" dirty="0"/>
+              <a:t>Create an AI-assisted communications review checklist for one public health message.</a:t>
+            </a:r>
+            <a:endParaRPr lang="en-US" sz="1700" dirty="0"/>
+          </a:p>
+          <a:p>
+            <a:r>
+              <a:rPr lang="en-US" sz="1700" dirty="0">
+                <a:solidFill>
+                  <a:srgbClr val="17364A"/>
+                </a:solidFill>
+                <a:latin typeface="Aptos" pitchFamily="34" charset="0"/>
+                <a:ea typeface="Aptos" pitchFamily="34" charset="-122"/>
+                <a:cs typeface="Aptos" pitchFamily="34" charset="-120"/>
+              </a:rPr>
+              <a:t>Include intended audience, source material, factual claims to verify, plain language review, accessibility review, language.</a:t>
+            </a:r>
+            <a:endParaRPr lang="en-US" sz="1700" dirty="0"/>
+          </a:p>
+        </p:txBody>
+      </p:sp>
+      <p:sp>
+        <p:nvSpPr>
+          <p:cNvPr id="11" name="Shape 9"/>
+          <p:cNvSpPr/>
+          <p:nvPr/>
+        </p:nvSpPr>
+        <p:spPr>
+          <a:xfrm>
+            <a:off x="7909560" y="1417320"/>
+            <a:ext cx="3154680" cy="1828800"/>
+          </a:xfrm>
+          <a:prstGeom prst="roundRect">
+            <a:avLst>
+              <a:gd name="adj" fmla="val 6000"/>
+            </a:avLst>
+          </a:prstGeom>
+          <a:solidFill>
+            <a:srgbClr val="EEF8ED"/>
+          </a:solidFill>
+          <a:ln w="12700">
+            <a:solidFill>
+              <a:srgbClr val="B9D7E6"/>
+            </a:solidFill>
+            <a:prstDash val="solid"/>
+          </a:ln>
+        </p:spPr>
+      </p:sp>
+      <p:sp>
+        <p:nvSpPr>
+          <p:cNvPr id="12" name="Text 10"/>
+          <p:cNvSpPr/>
+          <p:nvPr/>
+        </p:nvSpPr>
+        <p:spPr>
+          <a:xfrm>
+            <a:off x="8074152" y="1563624"/>
+            <a:ext cx="2825496" cy="201168"/>
+          </a:xfrm>
+          <a:prstGeom prst="rect">
+            <a:avLst/>
+          </a:prstGeom>
+          <a:noFill/>
+          <a:ln/>
+        </p:spPr>
+        <p:txBody>
+          <a:bodyPr wrap="square" lIns="0" tIns="0" rIns="0" bIns="0" rtlCol="0" anchor="ctr"/>
+          <a:lstStyle/>
+          <a:p>
+            <a:pPr indent="0" marL="0">
+              <a:buNone/>
+            </a:pPr>
+            <a:r>
+              <a:rPr lang="en-US" sz="950" b="1" dirty="0">
+                <a:solidFill>
+                  <a:srgbClr val="0068B7"/>
+                </a:solidFill>
+                <a:latin typeface="Aptos" pitchFamily="34" charset="0"/>
+                <a:ea typeface="Aptos" pitchFamily="34" charset="-122"/>
+                <a:cs typeface="Aptos" pitchFamily="34" charset="-120"/>
+              </a:rPr>
+              <a:t>Key idea</a:t>
+            </a:r>
+            <a:endParaRPr lang="en-US" sz="950" dirty="0"/>
+          </a:p>
+        </p:txBody>
+      </p:sp>
+      <p:sp>
+        <p:nvSpPr>
+          <p:cNvPr id="13" name="Text 11"/>
+          <p:cNvSpPr/>
+          <p:nvPr/>
+        </p:nvSpPr>
+        <p:spPr>
+          <a:xfrm>
+            <a:off x="8074152" y="1856232"/>
+            <a:ext cx="2825496" cy="1261872"/>
+          </a:xfrm>
+          <a:prstGeom prst="rect">
+            <a:avLst/>
+          </a:prstGeom>
+          <a:noFill/>
+          <a:ln/>
+        </p:spPr>
+        <p:txBody>
+          <a:bodyPr wrap="square" lIns="0" tIns="0" rIns="0" bIns="0" rtlCol="0" anchor="t">
+            <a:normAutofit/>
+          </a:bodyPr>
+          <a:lstStyle/>
+          <a:p>
+            <a:pPr indent="0" marL="0">
+              <a:buNone/>
+            </a:pPr>
+            <a:r>
+              <a:rPr lang="en-US" sz="1250" dirty="0">
+                <a:solidFill>
+                  <a:srgbClr val="17364A"/>
+                </a:solidFill>
+                <a:latin typeface="Aptos" pitchFamily="34" charset="0"/>
+                <a:ea typeface="Aptos" pitchFamily="34" charset="-122"/>
+                <a:cs typeface="Aptos" pitchFamily="34" charset="-120"/>
+              </a:rPr>
+              <a:t>Create an AI-assisted communications review checklist for one public health message.</a:t>
+            </a:r>
+            <a:endParaRPr lang="en-US" sz="1250" dirty="0"/>
+          </a:p>
+        </p:txBody>
+      </p:sp>
+      <p:sp>
+        <p:nvSpPr>
+          <p:cNvPr id="14" name="Shape 12"/>
+          <p:cNvSpPr/>
+          <p:nvPr/>
+        </p:nvSpPr>
+        <p:spPr>
+          <a:xfrm>
+            <a:off x="7909560" y="3520440"/>
+            <a:ext cx="3154680" cy="1737360"/>
+          </a:xfrm>
+          <a:prstGeom prst="roundRect">
+            <a:avLst>
+              <a:gd name="adj" fmla="val 6316"/>
+            </a:avLst>
+          </a:prstGeom>
+          <a:solidFill>
+            <a:srgbClr val="EAF6F8"/>
+          </a:solidFill>
+          <a:ln w="12700">
+            <a:solidFill>
+              <a:srgbClr val="B9D7E6"/>
+            </a:solidFill>
+            <a:prstDash val="solid"/>
+          </a:ln>
+        </p:spPr>
+      </p:sp>
+      <p:sp>
+        <p:nvSpPr>
+          <p:cNvPr id="15" name="Text 13"/>
+          <p:cNvSpPr/>
+          <p:nvPr/>
+        </p:nvSpPr>
+        <p:spPr>
+          <a:xfrm>
+            <a:off x="8074152" y="3666744"/>
+            <a:ext cx="2825496" cy="201168"/>
+          </a:xfrm>
+          <a:prstGeom prst="rect">
+            <a:avLst/>
+          </a:prstGeom>
+          <a:noFill/>
+          <a:ln/>
+        </p:spPr>
+        <p:txBody>
+          <a:bodyPr wrap="square" lIns="0" tIns="0" rIns="0" bIns="0" rtlCol="0" anchor="ctr"/>
+          <a:lstStyle/>
+          <a:p>
+            <a:pPr indent="0" marL="0">
+              <a:buNone/>
+            </a:pPr>
+            <a:r>
+              <a:rPr lang="en-US" sz="950" b="1" dirty="0">
+                <a:solidFill>
+                  <a:srgbClr val="0068B7"/>
+                </a:solidFill>
+                <a:latin typeface="Aptos" pitchFamily="34" charset="0"/>
+                <a:ea typeface="Aptos" pitchFamily="34" charset="-122"/>
+                <a:cs typeface="Aptos" pitchFamily="34" charset="-120"/>
+              </a:rPr>
+              <a:t>Use this for</a:t>
+            </a:r>
+            <a:endParaRPr lang="en-US" sz="950" dirty="0"/>
+          </a:p>
+        </p:txBody>
+      </p:sp>
+      <p:sp>
+        <p:nvSpPr>
+          <p:cNvPr id="16" name="Text 14"/>
+          <p:cNvSpPr/>
+          <p:nvPr/>
+        </p:nvSpPr>
+        <p:spPr>
+          <a:xfrm>
+            <a:off x="8074152" y="3959352"/>
+            <a:ext cx="2825496" cy="1170432"/>
+          </a:xfrm>
+          <a:prstGeom prst="rect">
+            <a:avLst/>
+          </a:prstGeom>
+          <a:noFill/>
+          <a:ln/>
+        </p:spPr>
+        <p:txBody>
+          <a:bodyPr wrap="square" lIns="0" tIns="0" rIns="0" bIns="0" rtlCol="0" anchor="t">
+            <a:normAutofit/>
+          </a:bodyPr>
+          <a:lstStyle/>
+          <a:p>
+            <a:pPr indent="0" marL="0">
+              <a:buNone/>
+            </a:pPr>
+            <a:r>
+              <a:rPr lang="en-US" sz="1250" dirty="0">
+                <a:solidFill>
+                  <a:srgbClr val="17364A"/>
+                </a:solidFill>
+                <a:latin typeface="Aptos" pitchFamily="34" charset="0"/>
+                <a:ea typeface="Aptos" pitchFamily="34" charset="-122"/>
+                <a:cs typeface="Aptos" pitchFamily="34" charset="-120"/>
+              </a:rPr>
+              <a:t>Connect the concept to public health decisions, safeguards, documentation, or implementation work.</a:t>
+            </a:r>
+            <a:endParaRPr lang="en-US" sz="1250" dirty="0"/>
           </a:p>
         </p:txBody>
       </p:sp>
@@ -5011,7 +7475,32 @@
       </p:sp>
       <p:sp>
         <p:nvSpPr>
-          <p:cNvPr id="3" name="Text 1"/>
+          <p:cNvPr id="3" name="Shape 1"/>
+          <p:cNvSpPr/>
+          <p:nvPr/>
+        </p:nvSpPr>
+        <p:spPr>
+          <a:xfrm>
+            <a:off x="0" y="164592"/>
+            <a:ext cx="146304" cy="6693408"/>
+          </a:xfrm>
+          <a:prstGeom prst="rect">
+            <a:avLst/>
+          </a:prstGeom>
+          <a:solidFill>
+            <a:srgbClr val="2F8A28"/>
+          </a:solidFill>
+          <a:ln w="12700">
+            <a:solidFill>
+              <a:srgbClr val="2F8A28"/>
+            </a:solidFill>
+            <a:prstDash val="solid"/>
+          </a:ln>
+        </p:spPr>
+      </p:sp>
+      <p:sp>
+        <p:nvSpPr>
+          <p:cNvPr id="4" name="Text 2"/>
           <p:cNvSpPr/>
           <p:nvPr/>
         </p:nvSpPr>
@@ -5050,7 +7539,7 @@
       </p:sp>
       <p:sp>
         <p:nvSpPr>
-          <p:cNvPr id="4" name="Text 2"/>
+          <p:cNvPr id="5" name="Text 3"/>
           <p:cNvSpPr/>
           <p:nvPr/>
         </p:nvSpPr>
@@ -5089,7 +7578,7 @@
       </p:sp>
       <p:sp>
         <p:nvSpPr>
-          <p:cNvPr id="5" name="Text 3"/>
+          <p:cNvPr id="6" name="Text 4"/>
           <p:cNvSpPr/>
           <p:nvPr/>
         </p:nvSpPr>
@@ -5128,13 +7617,77 @@
       </p:sp>
       <p:sp>
         <p:nvSpPr>
-          <p:cNvPr id="6" name="Text 4"/>
+          <p:cNvPr id="7" name="Shape 5"/>
           <p:cNvSpPr/>
           <p:nvPr/>
         </p:nvSpPr>
         <p:spPr>
           <a:xfrm>
             <a:off x="640080" y="658368"/>
+            <a:ext cx="420624" cy="420624"/>
+          </a:xfrm>
+          <a:prstGeom prst="ellipse">
+            <a:avLst/>
+          </a:prstGeom>
+          <a:solidFill>
+            <a:srgbClr val="0068B7"/>
+          </a:solidFill>
+          <a:ln w="12700">
+            <a:solidFill>
+              <a:srgbClr val="0068B7"/>
+            </a:solidFill>
+            <a:prstDash val="solid"/>
+          </a:ln>
+        </p:spPr>
+      </p:sp>
+      <p:sp>
+        <p:nvSpPr>
+          <p:cNvPr id="8" name="Text 6"/>
+          <p:cNvSpPr/>
+          <p:nvPr/>
+        </p:nvSpPr>
+        <p:spPr>
+          <a:xfrm>
+            <a:off x="640080" y="731520"/>
+            <a:ext cx="420624" cy="164592"/>
+          </a:xfrm>
+          <a:prstGeom prst="rect">
+            <a:avLst/>
+          </a:prstGeom>
+          <a:noFill/>
+          <a:ln/>
+        </p:spPr>
+        <p:txBody>
+          <a:bodyPr wrap="square" lIns="0" tIns="0" rIns="0" bIns="0" rtlCol="0" anchor="ctr"/>
+          <a:lstStyle/>
+          <a:p>
+            <a:pPr algn="ctr" indent="0" marL="0">
+              <a:buNone/>
+            </a:pPr>
+            <a:r>
+              <a:rPr lang="en-US" sz="1100" b="1" dirty="0">
+                <a:solidFill>
+                  <a:srgbClr val="FFFFFF"/>
+                </a:solidFill>
+                <a:latin typeface="Aptos" pitchFamily="34" charset="0"/>
+                <a:ea typeface="Aptos" pitchFamily="34" charset="-122"/>
+                <a:cs typeface="Aptos" pitchFamily="34" charset="-120"/>
+              </a:rPr>
+              <a:t>9</a:t>
+            </a:r>
+            <a:endParaRPr lang="en-US" sz="1100" dirty="0"/>
+          </a:p>
+        </p:txBody>
+      </p:sp>
+      <p:sp>
+        <p:nvSpPr>
+          <p:cNvPr id="9" name="Text 7"/>
+          <p:cNvSpPr/>
+          <p:nvPr/>
+        </p:nvSpPr>
+        <p:spPr>
+          <a:xfrm>
+            <a:off x="640080" y="621792"/>
             <a:ext cx="10881360" cy="566928"/>
           </a:xfrm>
           <a:prstGeom prst="rect">
@@ -5161,7 +7714,7 @@
                 <a:ea typeface="Aptos Display" pitchFamily="34" charset="-122"/>
                 <a:cs typeface="Aptos Display" pitchFamily="34" charset="-120"/>
               </a:rPr>
-              <a:t>Expected Assignment</a:t>
+              <a:t>Expected Artifact or Evidence</a:t>
             </a:r>
             <a:endParaRPr lang="en-US" sz="2700" dirty="0"/>
           </a:p>
@@ -5169,14 +7722,14 @@
       </p:sp>
       <p:sp>
         <p:nvSpPr>
-          <p:cNvPr id="7" name="Text 5"/>
-          <p:cNvSpPr/>
-          <p:nvPr/>
-        </p:nvSpPr>
-        <p:spPr>
-          <a:xfrm>
-            <a:off x="822960" y="1325880"/>
-            <a:ext cx="10378440" cy="4800600"/>
+          <p:cNvPr id="10" name="Text 8"/>
+          <p:cNvSpPr/>
+          <p:nvPr/>
+        </p:nvSpPr>
+        <p:spPr>
+          <a:xfrm>
+            <a:off x="868680" y="1417320"/>
+            <a:ext cx="6675120" cy="4434840"/>
           </a:xfrm>
           <a:prstGeom prst="rect">
             <a:avLst/>
@@ -5191,7 +7744,7 @@
           <a:lstStyle/>
           <a:p>
             <a:r>
-              <a:rPr lang="en-US" sz="1450" dirty="0">
+              <a:rPr lang="en-US" sz="1700" dirty="0">
                 <a:solidFill>
                   <a:srgbClr val="17364A"/>
                 </a:solidFill>
@@ -5201,11 +7754,11 @@
               </a:rPr>
               <a:t>AI-assisted communications review checklist</a:t>
             </a:r>
-            <a:endParaRPr lang="en-US" sz="1450" dirty="0"/>
-          </a:p>
-          <a:p>
-            <a:r>
-              <a:rPr lang="en-US" sz="1450" dirty="0">
+            <a:endParaRPr lang="en-US" sz="1700" dirty="0"/>
+          </a:p>
+          <a:p>
+            <a:r>
+              <a:rPr lang="en-US" sz="1700" dirty="0">
                 <a:solidFill>
                   <a:srgbClr val="17364A"/>
                 </a:solidFill>
@@ -5215,11 +7768,11 @@
               </a:rPr>
               <a:t>Source verification notes</a:t>
             </a:r>
-            <a:endParaRPr lang="en-US" sz="1450" dirty="0"/>
-          </a:p>
-          <a:p>
-            <a:r>
-              <a:rPr lang="en-US" sz="1450" dirty="0">
+            <a:endParaRPr lang="en-US" sz="1700" dirty="0"/>
+          </a:p>
+          <a:p>
+            <a:r>
+              <a:rPr lang="en-US" sz="1700" dirty="0">
                 <a:solidFill>
                   <a:srgbClr val="17364A"/>
                 </a:solidFill>
@@ -5229,11 +7782,104 @@
               </a:rPr>
               <a:t>Plain language and accessibility review notes</a:t>
             </a:r>
-            <a:endParaRPr lang="en-US" sz="1450" dirty="0"/>
-          </a:p>
-          <a:p>
-            <a:r>
-              <a:rPr lang="en-US" sz="1450" dirty="0">
+            <a:endParaRPr lang="en-US" sz="1700" dirty="0"/>
+          </a:p>
+        </p:txBody>
+      </p:sp>
+      <p:sp>
+        <p:nvSpPr>
+          <p:cNvPr id="11" name="Shape 9"/>
+          <p:cNvSpPr/>
+          <p:nvPr/>
+        </p:nvSpPr>
+        <p:spPr>
+          <a:xfrm>
+            <a:off x="7909560" y="1417320"/>
+            <a:ext cx="3154680" cy="1828800"/>
+          </a:xfrm>
+          <a:prstGeom prst="roundRect">
+            <a:avLst>
+              <a:gd name="adj" fmla="val 6000"/>
+            </a:avLst>
+          </a:prstGeom>
+          <a:solidFill>
+            <a:srgbClr val="EEF8ED"/>
+          </a:solidFill>
+          <a:ln w="12700">
+            <a:solidFill>
+              <a:srgbClr val="B9D7E6"/>
+            </a:solidFill>
+            <a:prstDash val="solid"/>
+          </a:ln>
+        </p:spPr>
+      </p:sp>
+      <p:sp>
+        <p:nvSpPr>
+          <p:cNvPr id="12" name="Text 10"/>
+          <p:cNvSpPr/>
+          <p:nvPr/>
+        </p:nvSpPr>
+        <p:spPr>
+          <a:xfrm>
+            <a:off x="8074152" y="1563624"/>
+            <a:ext cx="2825496" cy="201168"/>
+          </a:xfrm>
+          <a:prstGeom prst="rect">
+            <a:avLst/>
+          </a:prstGeom>
+          <a:noFill/>
+          <a:ln/>
+        </p:spPr>
+        <p:txBody>
+          <a:bodyPr wrap="square" lIns="0" tIns="0" rIns="0" bIns="0" rtlCol="0" anchor="ctr"/>
+          <a:lstStyle/>
+          <a:p>
+            <a:pPr indent="0" marL="0">
+              <a:buNone/>
+            </a:pPr>
+            <a:r>
+              <a:rPr lang="en-US" sz="950" b="1" dirty="0">
+                <a:solidFill>
+                  <a:srgbClr val="0068B7"/>
+                </a:solidFill>
+                <a:latin typeface="Aptos" pitchFamily="34" charset="0"/>
+                <a:ea typeface="Aptos" pitchFamily="34" charset="-122"/>
+                <a:cs typeface="Aptos" pitchFamily="34" charset="-120"/>
+              </a:rPr>
+              <a:t>Key idea</a:t>
+            </a:r>
+            <a:endParaRPr lang="en-US" sz="950" dirty="0"/>
+          </a:p>
+        </p:txBody>
+      </p:sp>
+      <p:sp>
+        <p:nvSpPr>
+          <p:cNvPr id="13" name="Text 11"/>
+          <p:cNvSpPr/>
+          <p:nvPr/>
+        </p:nvSpPr>
+        <p:spPr>
+          <a:xfrm>
+            <a:off x="8074152" y="1856232"/>
+            <a:ext cx="2825496" cy="1261872"/>
+          </a:xfrm>
+          <a:prstGeom prst="rect">
+            <a:avLst/>
+          </a:prstGeom>
+          <a:noFill/>
+          <a:ln/>
+        </p:spPr>
+        <p:txBody>
+          <a:bodyPr wrap="square" lIns="0" tIns="0" rIns="0" bIns="0" rtlCol="0" anchor="t">
+            <a:normAutofit/>
+          </a:bodyPr>
+          <a:lstStyle/>
+          <a:p>
+            <a:pPr indent="0" marL="0">
+              <a:buNone/>
+            </a:pPr>
+            <a:r>
+              <a:rPr lang="en-US" sz="1250" dirty="0">
                 <a:solidFill>
                   <a:srgbClr val="17364A"/>
                 </a:solidFill>
@@ -5241,13 +7887,106 @@
                 <a:ea typeface="Aptos" pitchFamily="34" charset="-122"/>
                 <a:cs typeface="Aptos" pitchFamily="34" charset="-120"/>
               </a:rPr>
-              <a:t>Approval pathway documentation</a:t>
-            </a:r>
-            <a:endParaRPr lang="en-US" sz="1450" dirty="0"/>
-          </a:p>
-          <a:p>
-            <a:r>
-              <a:rPr lang="en-US" sz="1450" dirty="0">
+              <a:t>AI-assisted communications review checklist</a:t>
+            </a:r>
+            <a:endParaRPr lang="en-US" sz="1250" dirty="0"/>
+          </a:p>
+        </p:txBody>
+      </p:sp>
+      <p:sp>
+        <p:nvSpPr>
+          <p:cNvPr id="14" name="Shape 12"/>
+          <p:cNvSpPr/>
+          <p:nvPr/>
+        </p:nvSpPr>
+        <p:spPr>
+          <a:xfrm>
+            <a:off x="7909560" y="3520440"/>
+            <a:ext cx="3154680" cy="1737360"/>
+          </a:xfrm>
+          <a:prstGeom prst="roundRect">
+            <a:avLst>
+              <a:gd name="adj" fmla="val 6316"/>
+            </a:avLst>
+          </a:prstGeom>
+          <a:solidFill>
+            <a:srgbClr val="EAF6F8"/>
+          </a:solidFill>
+          <a:ln w="12700">
+            <a:solidFill>
+              <a:srgbClr val="B9D7E6"/>
+            </a:solidFill>
+            <a:prstDash val="solid"/>
+          </a:ln>
+        </p:spPr>
+      </p:sp>
+      <p:sp>
+        <p:nvSpPr>
+          <p:cNvPr id="15" name="Text 13"/>
+          <p:cNvSpPr/>
+          <p:nvPr/>
+        </p:nvSpPr>
+        <p:spPr>
+          <a:xfrm>
+            <a:off x="8074152" y="3666744"/>
+            <a:ext cx="2825496" cy="201168"/>
+          </a:xfrm>
+          <a:prstGeom prst="rect">
+            <a:avLst/>
+          </a:prstGeom>
+          <a:noFill/>
+          <a:ln/>
+        </p:spPr>
+        <p:txBody>
+          <a:bodyPr wrap="square" lIns="0" tIns="0" rIns="0" bIns="0" rtlCol="0" anchor="ctr"/>
+          <a:lstStyle/>
+          <a:p>
+            <a:pPr indent="0" marL="0">
+              <a:buNone/>
+            </a:pPr>
+            <a:r>
+              <a:rPr lang="en-US" sz="950" b="1" dirty="0">
+                <a:solidFill>
+                  <a:srgbClr val="0068B7"/>
+                </a:solidFill>
+                <a:latin typeface="Aptos" pitchFamily="34" charset="0"/>
+                <a:ea typeface="Aptos" pitchFamily="34" charset="-122"/>
+                <a:cs typeface="Aptos" pitchFamily="34" charset="-120"/>
+              </a:rPr>
+              <a:t>Use this for</a:t>
+            </a:r>
+            <a:endParaRPr lang="en-US" sz="950" dirty="0"/>
+          </a:p>
+        </p:txBody>
+      </p:sp>
+      <p:sp>
+        <p:nvSpPr>
+          <p:cNvPr id="16" name="Text 14"/>
+          <p:cNvSpPr/>
+          <p:nvPr/>
+        </p:nvSpPr>
+        <p:spPr>
+          <a:xfrm>
+            <a:off x="8074152" y="3959352"/>
+            <a:ext cx="2825496" cy="1170432"/>
+          </a:xfrm>
+          <a:prstGeom prst="rect">
+            <a:avLst/>
+          </a:prstGeom>
+          <a:noFill/>
+          <a:ln/>
+        </p:spPr>
+        <p:txBody>
+          <a:bodyPr wrap="square" lIns="0" tIns="0" rIns="0" bIns="0" rtlCol="0" anchor="t">
+            <a:normAutofit/>
+          </a:bodyPr>
+          <a:lstStyle/>
+          <a:p>
+            <a:pPr indent="0" marL="0">
+              <a:buNone/>
+            </a:pPr>
+            <a:r>
+              <a:rPr lang="en-US" sz="1250" dirty="0">
                 <a:solidFill>
                   <a:srgbClr val="17364A"/>
                 </a:solidFill>
@@ -5255,9 +7994,9 @@
                 <a:ea typeface="Aptos" pitchFamily="34" charset="-122"/>
                 <a:cs typeface="Aptos" pitchFamily="34" charset="-120"/>
               </a:rPr>
-              <a:t>Final reviewed message or sample revision</a:t>
-            </a:r>
-            <a:endParaRPr lang="en-US" sz="1450" dirty="0"/>
+              <a:t>Connect the concept to public health decisions, safeguards, documentation, or implementation work.</a:t>
+            </a:r>
+            <a:endParaRPr lang="en-US" sz="1250" dirty="0"/>
           </a:p>
         </p:txBody>
       </p:sp>
@@ -5320,7 +8059,32 @@
       </p:sp>
       <p:sp>
         <p:nvSpPr>
-          <p:cNvPr id="3" name="Text 1"/>
+          <p:cNvPr id="3" name="Shape 1"/>
+          <p:cNvSpPr/>
+          <p:nvPr/>
+        </p:nvSpPr>
+        <p:spPr>
+          <a:xfrm>
+            <a:off x="0" y="164592"/>
+            <a:ext cx="146304" cy="6693408"/>
+          </a:xfrm>
+          <a:prstGeom prst="rect">
+            <a:avLst/>
+          </a:prstGeom>
+          <a:solidFill>
+            <a:srgbClr val="2F8A28"/>
+          </a:solidFill>
+          <a:ln w="12700">
+            <a:solidFill>
+              <a:srgbClr val="2F8A28"/>
+            </a:solidFill>
+            <a:prstDash val="solid"/>
+          </a:ln>
+        </p:spPr>
+      </p:sp>
+      <p:sp>
+        <p:nvSpPr>
+          <p:cNvPr id="4" name="Text 2"/>
           <p:cNvSpPr/>
           <p:nvPr/>
         </p:nvSpPr>
@@ -5359,7 +8123,7 @@
       </p:sp>
       <p:sp>
         <p:nvSpPr>
-          <p:cNvPr id="4" name="Text 2"/>
+          <p:cNvPr id="5" name="Text 3"/>
           <p:cNvSpPr/>
           <p:nvPr/>
         </p:nvSpPr>
@@ -5398,7 +8162,7 @@
       </p:sp>
       <p:sp>
         <p:nvSpPr>
-          <p:cNvPr id="5" name="Text 3"/>
+          <p:cNvPr id="6" name="Text 4"/>
           <p:cNvSpPr/>
           <p:nvPr/>
         </p:nvSpPr>
@@ -5437,7 +8201,7 @@
       </p:sp>
       <p:sp>
         <p:nvSpPr>
-          <p:cNvPr id="6" name="Text 4"/>
+          <p:cNvPr id="7" name="Text 5"/>
           <p:cNvSpPr/>
           <p:nvPr/>
         </p:nvSpPr>
@@ -5470,7 +8234,7 @@
                 <a:ea typeface="Aptos Display" pitchFamily="34" charset="-122"/>
                 <a:cs typeface="Aptos Display" pitchFamily="34" charset="-120"/>
               </a:rPr>
-              <a:t>Knowledge Check</a:t>
+              <a:t>Expected Artifact or Evidence Continued</a:t>
             </a:r>
             <a:endParaRPr lang="en-US" sz="2700" dirty="0"/>
           </a:p>
@@ -5478,14 +8242,14 @@
       </p:sp>
       <p:sp>
         <p:nvSpPr>
-          <p:cNvPr id="7" name="Text 5"/>
-          <p:cNvSpPr/>
-          <p:nvPr/>
-        </p:nvSpPr>
-        <p:spPr>
-          <a:xfrm>
-            <a:off x="822960" y="1325880"/>
-            <a:ext cx="10378440" cy="4800600"/>
+          <p:cNvPr id="8" name="Text 6"/>
+          <p:cNvSpPr/>
+          <p:nvPr/>
+        </p:nvSpPr>
+        <p:spPr>
+          <a:xfrm>
+            <a:off x="868680" y="1417320"/>
+            <a:ext cx="6675120" cy="4434840"/>
           </a:xfrm>
           <a:prstGeom prst="rect">
             <a:avLst/>
@@ -5500,7 +8264,7 @@
           <a:lstStyle/>
           <a:p>
             <a:r>
-              <a:rPr lang="en-US" sz="1450" dirty="0">
+              <a:rPr lang="en-US" sz="1700" dirty="0">
                 <a:solidFill>
                   <a:srgbClr val="17364A"/>
                 </a:solidFill>
@@ -5508,13 +8272,13 @@
                 <a:ea typeface="Aptos" pitchFamily="34" charset="-122"/>
                 <a:cs typeface="Aptos" pitchFamily="34" charset="-120"/>
               </a:rPr>
-              <a:t>1. What is an appropriate role for AI in public health communications?</a:t>
-            </a:r>
-            <a:endParaRPr lang="en-US" sz="1450" dirty="0"/>
-          </a:p>
-          <a:p>
-            <a:r>
-              <a:rPr lang="en-US" sz="1450" dirty="0">
+              <a:t>Approval pathway documentation</a:t>
+            </a:r>
+            <a:endParaRPr lang="en-US" sz="1700" dirty="0"/>
+          </a:p>
+          <a:p>
+            <a:r>
+              <a:rPr lang="en-US" sz="1700" dirty="0">
                 <a:solidFill>
                   <a:srgbClr val="17364A"/>
                 </a:solidFill>
@@ -5522,13 +8286,106 @@
                 <a:ea typeface="Aptos" pitchFamily="34" charset="-122"/>
                 <a:cs typeface="Aptos" pitchFamily="34" charset="-120"/>
               </a:rPr>
-              <a:t>2. Why is source verification necessary?</a:t>
-            </a:r>
-            <a:endParaRPr lang="en-US" sz="1450" dirty="0"/>
-          </a:p>
-          <a:p>
-            <a:r>
-              <a:rPr lang="en-US" sz="1450" dirty="0">
+              <a:t>Final reviewed message or sample revision</a:t>
+            </a:r>
+            <a:endParaRPr lang="en-US" sz="1700" dirty="0"/>
+          </a:p>
+        </p:txBody>
+      </p:sp>
+      <p:sp>
+        <p:nvSpPr>
+          <p:cNvPr id="9" name="Shape 7"/>
+          <p:cNvSpPr/>
+          <p:nvPr/>
+        </p:nvSpPr>
+        <p:spPr>
+          <a:xfrm>
+            <a:off x="7909560" y="1417320"/>
+            <a:ext cx="3154680" cy="1828800"/>
+          </a:xfrm>
+          <a:prstGeom prst="roundRect">
+            <a:avLst>
+              <a:gd name="adj" fmla="val 6000"/>
+            </a:avLst>
+          </a:prstGeom>
+          <a:solidFill>
+            <a:srgbClr val="EEF8ED"/>
+          </a:solidFill>
+          <a:ln w="12700">
+            <a:solidFill>
+              <a:srgbClr val="B9D7E6"/>
+            </a:solidFill>
+            <a:prstDash val="solid"/>
+          </a:ln>
+        </p:spPr>
+      </p:sp>
+      <p:sp>
+        <p:nvSpPr>
+          <p:cNvPr id="10" name="Text 8"/>
+          <p:cNvSpPr/>
+          <p:nvPr/>
+        </p:nvSpPr>
+        <p:spPr>
+          <a:xfrm>
+            <a:off x="8074152" y="1563624"/>
+            <a:ext cx="2825496" cy="201168"/>
+          </a:xfrm>
+          <a:prstGeom prst="rect">
+            <a:avLst/>
+          </a:prstGeom>
+          <a:noFill/>
+          <a:ln/>
+        </p:spPr>
+        <p:txBody>
+          <a:bodyPr wrap="square" lIns="0" tIns="0" rIns="0" bIns="0" rtlCol="0" anchor="ctr"/>
+          <a:lstStyle/>
+          <a:p>
+            <a:pPr indent="0" marL="0">
+              <a:buNone/>
+            </a:pPr>
+            <a:r>
+              <a:rPr lang="en-US" sz="950" b="1" dirty="0">
+                <a:solidFill>
+                  <a:srgbClr val="0068B7"/>
+                </a:solidFill>
+                <a:latin typeface="Aptos" pitchFamily="34" charset="0"/>
+                <a:ea typeface="Aptos" pitchFamily="34" charset="-122"/>
+                <a:cs typeface="Aptos" pitchFamily="34" charset="-120"/>
+              </a:rPr>
+              <a:t>Key idea</a:t>
+            </a:r>
+            <a:endParaRPr lang="en-US" sz="950" dirty="0"/>
+          </a:p>
+        </p:txBody>
+      </p:sp>
+      <p:sp>
+        <p:nvSpPr>
+          <p:cNvPr id="11" name="Text 9"/>
+          <p:cNvSpPr/>
+          <p:nvPr/>
+        </p:nvSpPr>
+        <p:spPr>
+          <a:xfrm>
+            <a:off x="8074152" y="1856232"/>
+            <a:ext cx="2825496" cy="1261872"/>
+          </a:xfrm>
+          <a:prstGeom prst="rect">
+            <a:avLst/>
+          </a:prstGeom>
+          <a:noFill/>
+          <a:ln/>
+        </p:spPr>
+        <p:txBody>
+          <a:bodyPr wrap="square" lIns="0" tIns="0" rIns="0" bIns="0" rtlCol="0" anchor="t">
+            <a:normAutofit/>
+          </a:bodyPr>
+          <a:lstStyle/>
+          <a:p>
+            <a:pPr indent="0" marL="0">
+              <a:buNone/>
+            </a:pPr>
+            <a:r>
+              <a:rPr lang="en-US" sz="1250" dirty="0">
                 <a:solidFill>
                   <a:srgbClr val="17364A"/>
                 </a:solidFill>
@@ -5536,13 +8393,106 @@
                 <a:ea typeface="Aptos" pitchFamily="34" charset="-122"/>
                 <a:cs typeface="Aptos" pitchFamily="34" charset="-120"/>
               </a:rPr>
-              <a:t>3. Which review is especially important for public-facing AI-assisted messages?</a:t>
-            </a:r>
-            <a:endParaRPr lang="en-US" sz="1450" dirty="0"/>
-          </a:p>
-          <a:p>
-            <a:r>
-              <a:rPr lang="en-US" sz="1450" dirty="0">
+              <a:t>Approval pathway documentation</a:t>
+            </a:r>
+            <a:endParaRPr lang="en-US" sz="1250" dirty="0"/>
+          </a:p>
+        </p:txBody>
+      </p:sp>
+      <p:sp>
+        <p:nvSpPr>
+          <p:cNvPr id="12" name="Shape 10"/>
+          <p:cNvSpPr/>
+          <p:nvPr/>
+        </p:nvSpPr>
+        <p:spPr>
+          <a:xfrm>
+            <a:off x="7909560" y="3520440"/>
+            <a:ext cx="3154680" cy="1737360"/>
+          </a:xfrm>
+          <a:prstGeom prst="roundRect">
+            <a:avLst>
+              <a:gd name="adj" fmla="val 6316"/>
+            </a:avLst>
+          </a:prstGeom>
+          <a:solidFill>
+            <a:srgbClr val="EAF6F8"/>
+          </a:solidFill>
+          <a:ln w="12700">
+            <a:solidFill>
+              <a:srgbClr val="B9D7E6"/>
+            </a:solidFill>
+            <a:prstDash val="solid"/>
+          </a:ln>
+        </p:spPr>
+      </p:sp>
+      <p:sp>
+        <p:nvSpPr>
+          <p:cNvPr id="13" name="Text 11"/>
+          <p:cNvSpPr/>
+          <p:nvPr/>
+        </p:nvSpPr>
+        <p:spPr>
+          <a:xfrm>
+            <a:off x="8074152" y="3666744"/>
+            <a:ext cx="2825496" cy="201168"/>
+          </a:xfrm>
+          <a:prstGeom prst="rect">
+            <a:avLst/>
+          </a:prstGeom>
+          <a:noFill/>
+          <a:ln/>
+        </p:spPr>
+        <p:txBody>
+          <a:bodyPr wrap="square" lIns="0" tIns="0" rIns="0" bIns="0" rtlCol="0" anchor="ctr"/>
+          <a:lstStyle/>
+          <a:p>
+            <a:pPr indent="0" marL="0">
+              <a:buNone/>
+            </a:pPr>
+            <a:r>
+              <a:rPr lang="en-US" sz="950" b="1" dirty="0">
+                <a:solidFill>
+                  <a:srgbClr val="0068B7"/>
+                </a:solidFill>
+                <a:latin typeface="Aptos" pitchFamily="34" charset="0"/>
+                <a:ea typeface="Aptos" pitchFamily="34" charset="-122"/>
+                <a:cs typeface="Aptos" pitchFamily="34" charset="-120"/>
+              </a:rPr>
+              <a:t>Use this for</a:t>
+            </a:r>
+            <a:endParaRPr lang="en-US" sz="950" dirty="0"/>
+          </a:p>
+        </p:txBody>
+      </p:sp>
+      <p:sp>
+        <p:nvSpPr>
+          <p:cNvPr id="14" name="Text 12"/>
+          <p:cNvSpPr/>
+          <p:nvPr/>
+        </p:nvSpPr>
+        <p:spPr>
+          <a:xfrm>
+            <a:off x="8074152" y="3959352"/>
+            <a:ext cx="2825496" cy="1170432"/>
+          </a:xfrm>
+          <a:prstGeom prst="rect">
+            <a:avLst/>
+          </a:prstGeom>
+          <a:noFill/>
+          <a:ln/>
+        </p:spPr>
+        <p:txBody>
+          <a:bodyPr wrap="square" lIns="0" tIns="0" rIns="0" bIns="0" rtlCol="0" anchor="t">
+            <a:normAutofit/>
+          </a:bodyPr>
+          <a:lstStyle/>
+          <a:p>
+            <a:pPr indent="0" marL="0">
+              <a:buNone/>
+            </a:pPr>
+            <a:r>
+              <a:rPr lang="en-US" sz="1250" dirty="0">
                 <a:solidFill>
                   <a:srgbClr val="17364A"/>
                 </a:solidFill>
@@ -5550,23 +8500,9 @@
                 <a:ea typeface="Aptos" pitchFamily="34" charset="-122"/>
                 <a:cs typeface="Aptos" pitchFamily="34" charset="-120"/>
               </a:rPr>
-              <a:t>4. What should happen with AI-assisted translation for public health messages?</a:t>
-            </a:r>
-            <a:endParaRPr lang="en-US" sz="1450" dirty="0"/>
-          </a:p>
-          <a:p>
-            <a:r>
-              <a:rPr lang="en-US" sz="1450" dirty="0">
-                <a:solidFill>
-                  <a:srgbClr val="17364A"/>
-                </a:solidFill>
-                <a:latin typeface="Aptos" pitchFamily="34" charset="0"/>
-                <a:ea typeface="Aptos" pitchFamily="34" charset="-122"/>
-                <a:cs typeface="Aptos" pitchFamily="34" charset="-120"/>
-              </a:rPr>
-              <a:t>5. What is strong completion evidence?</a:t>
-            </a:r>
-            <a:endParaRPr lang="en-US" sz="1450" dirty="0"/>
+              <a:t>Connect the concept to public health decisions, safeguards, documentation, or implementation work.</a:t>
+            </a:r>
+            <a:endParaRPr lang="en-US" sz="1250" dirty="0"/>
           </a:p>
         </p:txBody>
       </p:sp>
@@ -5629,7 +8565,32 @@
       </p:sp>
       <p:sp>
         <p:nvSpPr>
-          <p:cNvPr id="3" name="Text 1"/>
+          <p:cNvPr id="3" name="Shape 1"/>
+          <p:cNvSpPr/>
+          <p:nvPr/>
+        </p:nvSpPr>
+        <p:spPr>
+          <a:xfrm>
+            <a:off x="0" y="164592"/>
+            <a:ext cx="146304" cy="6693408"/>
+          </a:xfrm>
+          <a:prstGeom prst="rect">
+            <a:avLst/>
+          </a:prstGeom>
+          <a:solidFill>
+            <a:srgbClr val="2F8A28"/>
+          </a:solidFill>
+          <a:ln w="12700">
+            <a:solidFill>
+              <a:srgbClr val="2F8A28"/>
+            </a:solidFill>
+            <a:prstDash val="solid"/>
+          </a:ln>
+        </p:spPr>
+      </p:sp>
+      <p:sp>
+        <p:nvSpPr>
+          <p:cNvPr id="4" name="Text 2"/>
           <p:cNvSpPr/>
           <p:nvPr/>
         </p:nvSpPr>
@@ -5668,7 +8629,7 @@
       </p:sp>
       <p:sp>
         <p:nvSpPr>
-          <p:cNvPr id="4" name="Text 2"/>
+          <p:cNvPr id="5" name="Text 3"/>
           <p:cNvSpPr/>
           <p:nvPr/>
         </p:nvSpPr>
@@ -5707,7 +8668,7 @@
       </p:sp>
       <p:sp>
         <p:nvSpPr>
-          <p:cNvPr id="5" name="Text 3"/>
+          <p:cNvPr id="6" name="Text 4"/>
           <p:cNvSpPr/>
           <p:nvPr/>
         </p:nvSpPr>
@@ -5746,7 +8707,7 @@
       </p:sp>
       <p:sp>
         <p:nvSpPr>
-          <p:cNvPr id="6" name="Text 4"/>
+          <p:cNvPr id="7" name="Text 5"/>
           <p:cNvSpPr/>
           <p:nvPr/>
         </p:nvSpPr>
@@ -5779,7 +8740,7 @@
                 <a:ea typeface="Aptos Display" pitchFamily="34" charset="-122"/>
                 <a:cs typeface="Aptos Display" pitchFamily="34" charset="-120"/>
               </a:rPr>
-              <a:t>Module Context</a:t>
+              <a:t>What this module helps you do</a:t>
             </a:r>
             <a:endParaRPr lang="en-US" sz="2700" dirty="0"/>
           </a:p>
@@ -5787,14 +8748,14 @@
       </p:sp>
       <p:sp>
         <p:nvSpPr>
-          <p:cNvPr id="7" name="Text 5"/>
-          <p:cNvSpPr/>
-          <p:nvPr/>
-        </p:nvSpPr>
-        <p:spPr>
-          <a:xfrm>
-            <a:off x="822960" y="1325880"/>
-            <a:ext cx="10378440" cy="1371600"/>
+          <p:cNvPr id="8" name="Text 6"/>
+          <p:cNvSpPr/>
+          <p:nvPr/>
+        </p:nvSpPr>
+        <p:spPr>
+          <a:xfrm>
+            <a:off x="868680" y="1417320"/>
+            <a:ext cx="6675120" cy="3291840"/>
           </a:xfrm>
           <a:prstGeom prst="rect">
             <a:avLst/>
@@ -5809,7 +8770,7 @@
           <a:lstStyle/>
           <a:p>
             <a:r>
-              <a:rPr lang="en-US" sz="1600" dirty="0">
+              <a:rPr lang="en-US" sz="1700" dirty="0">
                 <a:solidFill>
                   <a:srgbClr val="17364A"/>
                 </a:solidFill>
@@ -5817,13 +8778,13 @@
                 <a:ea typeface="Aptos" pitchFamily="34" charset="-122"/>
                 <a:cs typeface="Aptos" pitchFamily="34" charset="-120"/>
               </a:rPr>
-              <a:t>Level: applied/foundational</a:t>
-            </a:r>
-            <a:endParaRPr lang="en-US" sz="1600" dirty="0"/>
-          </a:p>
-          <a:p>
-            <a:r>
-              <a:rPr lang="en-US" sz="1600" dirty="0">
+              <a:t>Generative AI can support public health communications by helping staff draft, revise, simplify, translate, tailor, and test messages.</a:t>
+            </a:r>
+            <a:endParaRPr lang="en-US" sz="1700" dirty="0"/>
+          </a:p>
+          <a:p>
+            <a:r>
+              <a:rPr lang="en-US" sz="1700" dirty="0">
                 <a:solidFill>
                   <a:srgbClr val="17364A"/>
                 </a:solidFill>
@@ -5831,13 +8792,13 @@
                 <a:ea typeface="Aptos" pitchFamily="34" charset="-122"/>
                 <a:cs typeface="Aptos" pitchFamily="34" charset="-120"/>
               </a:rPr>
-              <a:t>Primary track: Communications Role-Based Track</a:t>
-            </a:r>
-            <a:endParaRPr lang="en-US" sz="1600" dirty="0"/>
-          </a:p>
-          <a:p>
-            <a:r>
-              <a:rPr lang="en-US" sz="1600" dirty="0">
+              <a:t>However, public health communication carries high trust, equity, accessibility, and accuracy obligations.</a:t>
+            </a:r>
+            <a:endParaRPr lang="en-US" sz="1700" dirty="0"/>
+          </a:p>
+          <a:p>
+            <a:r>
+              <a:rPr lang="en-US" sz="1700" dirty="0">
                 <a:solidFill>
                   <a:srgbClr val="17364A"/>
                 </a:solidFill>
@@ -5845,31 +8806,111 @@
                 <a:ea typeface="Aptos" pitchFamily="34" charset="-122"/>
                 <a:cs typeface="Aptos" pitchFamily="34" charset="-120"/>
               </a:rPr>
-              <a:t>Appears in tracks: communications, shared-foundational, policy, public-health-executive-leadership</a:t>
-            </a:r>
-            <a:endParaRPr lang="en-US" sz="1600" dirty="0"/>
-          </a:p>
-        </p:txBody>
-      </p:sp>
-      <p:sp>
-        <p:nvSpPr>
-          <p:cNvPr id="8" name="Text 6"/>
-          <p:cNvSpPr/>
-          <p:nvPr/>
-        </p:nvSpPr>
-        <p:spPr>
-          <a:xfrm>
-            <a:off x="822960" y="2743200"/>
-            <a:ext cx="10378440" cy="2834640"/>
-          </a:xfrm>
-          <a:prstGeom prst="rect">
-            <a:avLst/>
-          </a:prstGeom>
-          <a:noFill/>
-          <a:ln/>
-        </p:spPr>
-        <p:txBody>
-          <a:bodyPr wrap="square" lIns="1016" tIns="1016" rIns="1016" bIns="1016" rtlCol="0" anchor="t">
+              <a:t>AI-generated text can sound clear and authoritative while misstating evidence, omitting uncertainty, using stigmatizing language, failing to meet.</a:t>
+            </a:r>
+            <a:endParaRPr lang="en-US" sz="1700" dirty="0"/>
+          </a:p>
+          <a:p>
+            <a:r>
+              <a:rPr lang="en-US" sz="1700" dirty="0">
+                <a:solidFill>
+                  <a:srgbClr val="17364A"/>
+                </a:solidFill>
+                <a:latin typeface="Aptos" pitchFamily="34" charset="0"/>
+                <a:ea typeface="Aptos" pitchFamily="34" charset="-122"/>
+                <a:cs typeface="Aptos" pitchFamily="34" charset="-120"/>
+              </a:rPr>
+              <a:t>This module teaches communications staff and program partners how to use AI as a drafting and review aid while preserving human accountability.</a:t>
+            </a:r>
+            <a:endParaRPr lang="en-US" sz="1700" dirty="0"/>
+          </a:p>
+        </p:txBody>
+      </p:sp>
+      <p:sp>
+        <p:nvSpPr>
+          <p:cNvPr id="9" name="Shape 7"/>
+          <p:cNvSpPr/>
+          <p:nvPr/>
+        </p:nvSpPr>
+        <p:spPr>
+          <a:xfrm>
+            <a:off x="7909560" y="1417320"/>
+            <a:ext cx="3154680" cy="1920240"/>
+          </a:xfrm>
+          <a:prstGeom prst="roundRect">
+            <a:avLst>
+              <a:gd name="adj" fmla="val 5714"/>
+            </a:avLst>
+          </a:prstGeom>
+          <a:solidFill>
+            <a:srgbClr val="EAF6F8"/>
+          </a:solidFill>
+          <a:ln w="12700">
+            <a:solidFill>
+              <a:srgbClr val="B9D7E6"/>
+            </a:solidFill>
+            <a:prstDash val="solid"/>
+          </a:ln>
+        </p:spPr>
+      </p:sp>
+      <p:sp>
+        <p:nvSpPr>
+          <p:cNvPr id="10" name="Text 8"/>
+          <p:cNvSpPr/>
+          <p:nvPr/>
+        </p:nvSpPr>
+        <p:spPr>
+          <a:xfrm>
+            <a:off x="8074152" y="1563624"/>
+            <a:ext cx="2825496" cy="201168"/>
+          </a:xfrm>
+          <a:prstGeom prst="rect">
+            <a:avLst/>
+          </a:prstGeom>
+          <a:noFill/>
+          <a:ln/>
+        </p:spPr>
+        <p:txBody>
+          <a:bodyPr wrap="square" lIns="0" tIns="0" rIns="0" bIns="0" rtlCol="0" anchor="ctr"/>
+          <a:lstStyle/>
+          <a:p>
+            <a:pPr indent="0" marL="0">
+              <a:buNone/>
+            </a:pPr>
+            <a:r>
+              <a:rPr lang="en-US" sz="950" b="1" dirty="0">
+                <a:solidFill>
+                  <a:srgbClr val="0068B7"/>
+                </a:solidFill>
+                <a:latin typeface="Aptos" pitchFamily="34" charset="0"/>
+                <a:ea typeface="Aptos" pitchFamily="34" charset="-122"/>
+                <a:cs typeface="Aptos" pitchFamily="34" charset="-120"/>
+              </a:rPr>
+              <a:t>Module details</a:t>
+            </a:r>
+            <a:endParaRPr lang="en-US" sz="950" dirty="0"/>
+          </a:p>
+        </p:txBody>
+      </p:sp>
+      <p:sp>
+        <p:nvSpPr>
+          <p:cNvPr id="11" name="Text 9"/>
+          <p:cNvSpPr/>
+          <p:nvPr/>
+        </p:nvSpPr>
+        <p:spPr>
+          <a:xfrm>
+            <a:off x="8074152" y="1856232"/>
+            <a:ext cx="2825496" cy="1353312"/>
+          </a:xfrm>
+          <a:prstGeom prst="rect">
+            <a:avLst/>
+          </a:prstGeom>
+          <a:noFill/>
+          <a:ln/>
+        </p:spPr>
+        <p:txBody>
+          <a:bodyPr wrap="square" lIns="0" tIns="0" rIns="0" bIns="0" rtlCol="0" anchor="t">
             <a:normAutofit/>
           </a:bodyPr>
           <a:lstStyle/>
@@ -5878,7 +8919,7 @@
               <a:buNone/>
             </a:pPr>
             <a:r>
-              <a:rPr lang="en-US" sz="1400" dirty="0">
+              <a:rPr lang="en-US" sz="1250" dirty="0">
                 <a:solidFill>
                   <a:srgbClr val="17364A"/>
                 </a:solidFill>
@@ -5886,9 +8927,150 @@
                 <a:ea typeface="Aptos" pitchFamily="34" charset="-122"/>
                 <a:cs typeface="Aptos" pitchFamily="34" charset="-120"/>
               </a:rPr>
-              <a:t>Generative AI can support public health communications by helping staff draft, revise, simplify, translate, tailor, and test messages. However, public health communication carries high trust, equity, accessibility, and accuracy obligations. AI-generated text can sound clear and authoritative while misstating evidence, omitting uncertainty, using stigmatizing language, failing to meet accessibility needs, or creating messages that do not fit community context. This module teaches communications staff and program partners how to use AI as a drafting and review aid while preserving human accountability. It focuses on public-facing messages, internal communications, plain language, community relevance, multilingual communication, misinformation risks, and review workflows. The goal is not to replace skilled communicators. The goal is to help communications teams use AI safely for efficiency, brainstorming, and consistency while retaining professional judgment, source verification, community review, and public trust.</a:t>
-            </a:r>
-            <a:endParaRPr lang="en-US" sz="1400" dirty="0"/>
+              <a:t>Level: applied/foundational</a:t>
+            </a:r>
+            <a:endParaRPr lang="en-US" sz="1250" dirty="0"/>
+          </a:p>
+          <a:p>
+            <a:pPr indent="0" marL="0">
+              <a:buNone/>
+            </a:pPr>
+            <a:r>
+              <a:rPr lang="en-US" sz="1250" dirty="0">
+                <a:solidFill>
+                  <a:srgbClr val="17364A"/>
+                </a:solidFill>
+                <a:latin typeface="Aptos" pitchFamily="34" charset="0"/>
+                <a:ea typeface="Aptos" pitchFamily="34" charset="-122"/>
+                <a:cs typeface="Aptos" pitchFamily="34" charset="-120"/>
+              </a:rPr>
+              <a:t>Primary track: Communications Role-Based Track</a:t>
+            </a:r>
+            <a:endParaRPr lang="en-US" sz="1250" dirty="0"/>
+          </a:p>
+          <a:p>
+            <a:pPr indent="0" marL="0">
+              <a:buNone/>
+            </a:pPr>
+            <a:r>
+              <a:rPr lang="en-US" sz="1250" dirty="0">
+                <a:solidFill>
+                  <a:srgbClr val="17364A"/>
+                </a:solidFill>
+                <a:latin typeface="Aptos" pitchFamily="34" charset="0"/>
+                <a:ea typeface="Aptos" pitchFamily="34" charset="-122"/>
+                <a:cs typeface="Aptos" pitchFamily="34" charset="-120"/>
+              </a:rPr>
+              <a:t>Appears in tracks: communications, shared-foundational, policy, public-health-executive-leadership</a:t>
+            </a:r>
+            <a:endParaRPr lang="en-US" sz="1250" dirty="0"/>
+          </a:p>
+        </p:txBody>
+      </p:sp>
+      <p:sp>
+        <p:nvSpPr>
+          <p:cNvPr id="12" name="Shape 10"/>
+          <p:cNvSpPr/>
+          <p:nvPr/>
+        </p:nvSpPr>
+        <p:spPr>
+          <a:xfrm>
+            <a:off x="7909560" y="3611880"/>
+            <a:ext cx="3154680" cy="1783080"/>
+          </a:xfrm>
+          <a:prstGeom prst="roundRect">
+            <a:avLst>
+              <a:gd name="adj" fmla="val 6154"/>
+            </a:avLst>
+          </a:prstGeom>
+          <a:solidFill>
+            <a:srgbClr val="EEF8ED"/>
+          </a:solidFill>
+          <a:ln w="12700">
+            <a:solidFill>
+              <a:srgbClr val="B9D7E6"/>
+            </a:solidFill>
+            <a:prstDash val="solid"/>
+          </a:ln>
+        </p:spPr>
+      </p:sp>
+      <p:sp>
+        <p:nvSpPr>
+          <p:cNvPr id="13" name="Text 11"/>
+          <p:cNvSpPr/>
+          <p:nvPr/>
+        </p:nvSpPr>
+        <p:spPr>
+          <a:xfrm>
+            <a:off x="8074152" y="3758184"/>
+            <a:ext cx="2825496" cy="201168"/>
+          </a:xfrm>
+          <a:prstGeom prst="rect">
+            <a:avLst/>
+          </a:prstGeom>
+          <a:noFill/>
+          <a:ln/>
+        </p:spPr>
+        <p:txBody>
+          <a:bodyPr wrap="square" lIns="0" tIns="0" rIns="0" bIns="0" rtlCol="0" anchor="ctr"/>
+          <a:lstStyle/>
+          <a:p>
+            <a:pPr indent="0" marL="0">
+              <a:buNone/>
+            </a:pPr>
+            <a:r>
+              <a:rPr lang="en-US" sz="950" b="1" dirty="0">
+                <a:solidFill>
+                  <a:srgbClr val="0068B7"/>
+                </a:solidFill>
+                <a:latin typeface="Aptos" pitchFamily="34" charset="0"/>
+                <a:ea typeface="Aptos" pitchFamily="34" charset="-122"/>
+                <a:cs typeface="Aptos" pitchFamily="34" charset="-120"/>
+              </a:rPr>
+              <a:t>Learning approach</a:t>
+            </a:r>
+            <a:endParaRPr lang="en-US" sz="950" dirty="0"/>
+          </a:p>
+        </p:txBody>
+      </p:sp>
+      <p:sp>
+        <p:nvSpPr>
+          <p:cNvPr id="14" name="Text 12"/>
+          <p:cNvSpPr/>
+          <p:nvPr/>
+        </p:nvSpPr>
+        <p:spPr>
+          <a:xfrm>
+            <a:off x="8074152" y="4050792"/>
+            <a:ext cx="2825496" cy="1216152"/>
+          </a:xfrm>
+          <a:prstGeom prst="rect">
+            <a:avLst/>
+          </a:prstGeom>
+          <a:noFill/>
+          <a:ln/>
+        </p:spPr>
+        <p:txBody>
+          <a:bodyPr wrap="square" lIns="0" tIns="0" rIns="0" bIns="0" rtlCol="0" anchor="t">
+            <a:normAutofit/>
+          </a:bodyPr>
+          <a:lstStyle/>
+          <a:p>
+            <a:pPr indent="0" marL="0">
+              <a:buNone/>
+            </a:pPr>
+            <a:r>
+              <a:rPr lang="en-US" sz="1250" dirty="0">
+                <a:solidFill>
+                  <a:srgbClr val="17364A"/>
+                </a:solidFill>
+                <a:latin typeface="Aptos" pitchFamily="34" charset="0"/>
+                <a:ea typeface="Aptos" pitchFamily="34" charset="-122"/>
+                <a:cs typeface="Aptos" pitchFamily="34" charset="-120"/>
+              </a:rPr>
+              <a:t>Review the core ideas, complete the practical exercise, check your understanding, and use the related plays and tools to apply the lesson.</a:t>
+            </a:r>
+            <a:endParaRPr lang="en-US" sz="1250" dirty="0"/>
           </a:p>
         </p:txBody>
       </p:sp>
@@ -5951,7 +9133,32 @@
       </p:sp>
       <p:sp>
         <p:nvSpPr>
-          <p:cNvPr id="3" name="Text 1"/>
+          <p:cNvPr id="3" name="Shape 1"/>
+          <p:cNvSpPr/>
+          <p:nvPr/>
+        </p:nvSpPr>
+        <p:spPr>
+          <a:xfrm>
+            <a:off x="0" y="164592"/>
+            <a:ext cx="146304" cy="6693408"/>
+          </a:xfrm>
+          <a:prstGeom prst="rect">
+            <a:avLst/>
+          </a:prstGeom>
+          <a:solidFill>
+            <a:srgbClr val="2F8A28"/>
+          </a:solidFill>
+          <a:ln w="12700">
+            <a:solidFill>
+              <a:srgbClr val="2F8A28"/>
+            </a:solidFill>
+            <a:prstDash val="solid"/>
+          </a:ln>
+        </p:spPr>
+      </p:sp>
+      <p:sp>
+        <p:nvSpPr>
+          <p:cNvPr id="4" name="Text 2"/>
           <p:cNvSpPr/>
           <p:nvPr/>
         </p:nvSpPr>
@@ -5990,7 +9197,7 @@
       </p:sp>
       <p:sp>
         <p:nvSpPr>
-          <p:cNvPr id="4" name="Text 2"/>
+          <p:cNvPr id="5" name="Text 3"/>
           <p:cNvSpPr/>
           <p:nvPr/>
         </p:nvSpPr>
@@ -6029,7 +9236,7 @@
       </p:sp>
       <p:sp>
         <p:nvSpPr>
-          <p:cNvPr id="5" name="Text 3"/>
+          <p:cNvPr id="6" name="Text 4"/>
           <p:cNvSpPr/>
           <p:nvPr/>
         </p:nvSpPr>
@@ -6068,13 +9275,77 @@
       </p:sp>
       <p:sp>
         <p:nvSpPr>
-          <p:cNvPr id="6" name="Text 4"/>
+          <p:cNvPr id="7" name="Shape 5"/>
           <p:cNvSpPr/>
           <p:nvPr/>
         </p:nvSpPr>
         <p:spPr>
           <a:xfrm>
             <a:off x="640080" y="658368"/>
+            <a:ext cx="420624" cy="420624"/>
+          </a:xfrm>
+          <a:prstGeom prst="ellipse">
+            <a:avLst/>
+          </a:prstGeom>
+          <a:solidFill>
+            <a:srgbClr val="0068B7"/>
+          </a:solidFill>
+          <a:ln w="12700">
+            <a:solidFill>
+              <a:srgbClr val="0068B7"/>
+            </a:solidFill>
+            <a:prstDash val="solid"/>
+          </a:ln>
+        </p:spPr>
+      </p:sp>
+      <p:sp>
+        <p:nvSpPr>
+          <p:cNvPr id="8" name="Text 6"/>
+          <p:cNvSpPr/>
+          <p:nvPr/>
+        </p:nvSpPr>
+        <p:spPr>
+          <a:xfrm>
+            <a:off x="640080" y="731520"/>
+            <a:ext cx="420624" cy="164592"/>
+          </a:xfrm>
+          <a:prstGeom prst="rect">
+            <a:avLst/>
+          </a:prstGeom>
+          <a:noFill/>
+          <a:ln/>
+        </p:spPr>
+        <p:txBody>
+          <a:bodyPr wrap="square" lIns="0" tIns="0" rIns="0" bIns="0" rtlCol="0" anchor="ctr"/>
+          <a:lstStyle/>
+          <a:p>
+            <a:pPr algn="ctr" indent="0" marL="0">
+              <a:buNone/>
+            </a:pPr>
+            <a:r>
+              <a:rPr lang="en-US" sz="1100" b="1" dirty="0">
+                <a:solidFill>
+                  <a:srgbClr val="FFFFFF"/>
+                </a:solidFill>
+                <a:latin typeface="Aptos" pitchFamily="34" charset="0"/>
+                <a:ea typeface="Aptos" pitchFamily="34" charset="-122"/>
+                <a:cs typeface="Aptos" pitchFamily="34" charset="-120"/>
+              </a:rPr>
+              <a:t>10</a:t>
+            </a:r>
+            <a:endParaRPr lang="en-US" sz="1100" dirty="0"/>
+          </a:p>
+        </p:txBody>
+      </p:sp>
+      <p:sp>
+        <p:nvSpPr>
+          <p:cNvPr id="9" name="Text 7"/>
+          <p:cNvSpPr/>
+          <p:nvPr/>
+        </p:nvSpPr>
+        <p:spPr>
+          <a:xfrm>
+            <a:off x="640080" y="621792"/>
             <a:ext cx="10881360" cy="566928"/>
           </a:xfrm>
           <a:prstGeom prst="rect">
@@ -6101,7 +9372,7 @@
                 <a:ea typeface="Aptos Display" pitchFamily="34" charset="-122"/>
                 <a:cs typeface="Aptos Display" pitchFamily="34" charset="-120"/>
               </a:rPr>
-              <a:t>References and Resources</a:t>
+              <a:t>Expected Assignment</a:t>
             </a:r>
             <a:endParaRPr lang="en-US" sz="2700" dirty="0"/>
           </a:p>
@@ -6109,14 +9380,14 @@
       </p:sp>
       <p:sp>
         <p:nvSpPr>
-          <p:cNvPr id="7" name="Text 5"/>
-          <p:cNvSpPr/>
-          <p:nvPr/>
-        </p:nvSpPr>
-        <p:spPr>
-          <a:xfrm>
-            <a:off x="822960" y="1325880"/>
-            <a:ext cx="10378440" cy="4800600"/>
+          <p:cNvPr id="10" name="Text 8"/>
+          <p:cNvSpPr/>
+          <p:nvPr/>
+        </p:nvSpPr>
+        <p:spPr>
+          <a:xfrm>
+            <a:off x="868680" y="1417320"/>
+            <a:ext cx="6675120" cy="4434840"/>
           </a:xfrm>
           <a:prstGeom prst="rect">
             <a:avLst/>
@@ -6131,7 +9402,7 @@
           <a:lstStyle/>
           <a:p>
             <a:r>
-              <a:rPr lang="en-US" sz="1450" dirty="0">
+              <a:rPr lang="en-US" sz="1700" dirty="0">
                 <a:solidFill>
                   <a:srgbClr val="17364A"/>
                 </a:solidFill>
@@ -6139,13 +9410,13 @@
                 <a:ea typeface="Aptos" pitchFamily="34" charset="-122"/>
                 <a:cs typeface="Aptos" pitchFamily="34" charset="-120"/>
               </a:rPr>
-              <a:t>NIST Artificial Intelligence Risk Management Framework: https://www.nist.gov/itl/ai-risk-management-framework</a:t>
-            </a:r>
-            <a:endParaRPr lang="en-US" sz="1450" dirty="0"/>
-          </a:p>
-          <a:p>
-            <a:r>
-              <a:rPr lang="en-US" sz="1450" dirty="0">
+              <a:t>AI-assisted communications review checklist</a:t>
+            </a:r>
+            <a:endParaRPr lang="en-US" sz="1700" dirty="0"/>
+          </a:p>
+          <a:p>
+            <a:r>
+              <a:rPr lang="en-US" sz="1700" dirty="0">
                 <a:solidFill>
                   <a:srgbClr val="17364A"/>
                 </a:solidFill>
@@ -6153,13 +9424,13 @@
                 <a:ea typeface="Aptos" pitchFamily="34" charset="-122"/>
                 <a:cs typeface="Aptos" pitchFamily="34" charset="-120"/>
               </a:rPr>
-              <a:t>NIST Generative AI Profile: https://www.nist.gov/publications/artificial-intelligence-risk-management-framework-generative-artificial-intelligence</a:t>
-            </a:r>
-            <a:endParaRPr lang="en-US" sz="1450" dirty="0"/>
-          </a:p>
-          <a:p>
-            <a:r>
-              <a:rPr lang="en-US" sz="1450" dirty="0">
+              <a:t>Source verification notes</a:t>
+            </a:r>
+            <a:endParaRPr lang="en-US" sz="1700" dirty="0"/>
+          </a:p>
+          <a:p>
+            <a:r>
+              <a:rPr lang="en-US" sz="1700" dirty="0">
                 <a:solidFill>
                   <a:srgbClr val="17364A"/>
                 </a:solidFill>
@@ -6167,13 +9438,13 @@
                 <a:ea typeface="Aptos" pitchFamily="34" charset="-122"/>
                 <a:cs typeface="Aptos" pitchFamily="34" charset="-120"/>
               </a:rPr>
-              <a:t>CDC Public Health Data Strategy and Data Modernization resources: https://www.cdc.gov/public-health-data-strategy/php/about/index.html</a:t>
-            </a:r>
-            <a:endParaRPr lang="en-US" sz="1450" dirty="0"/>
-          </a:p>
-          <a:p>
-            <a:r>
-              <a:rPr lang="en-US" sz="1450" dirty="0">
+              <a:t>Plain language and accessibility review notes</a:t>
+            </a:r>
+            <a:endParaRPr lang="en-US" sz="1700" dirty="0"/>
+          </a:p>
+          <a:p>
+            <a:r>
+              <a:rPr lang="en-US" sz="1700" dirty="0">
                 <a:solidFill>
                   <a:srgbClr val="17364A"/>
                 </a:solidFill>
@@ -6181,13 +9452,106 @@
                 <a:ea typeface="Aptos" pitchFamily="34" charset="-122"/>
                 <a:cs typeface="Aptos" pitchFamily="34" charset="-120"/>
               </a:rPr>
-              <a:t>OWASP guidance for LLM application security</a:t>
-            </a:r>
-            <a:endParaRPr lang="en-US" sz="1450" dirty="0"/>
-          </a:p>
-          <a:p>
-            <a:r>
-              <a:rPr lang="en-US" sz="1450" dirty="0">
+              <a:t>Approval pathway documentation</a:t>
+            </a:r>
+            <a:endParaRPr lang="en-US" sz="1700" dirty="0"/>
+          </a:p>
+        </p:txBody>
+      </p:sp>
+      <p:sp>
+        <p:nvSpPr>
+          <p:cNvPr id="11" name="Shape 9"/>
+          <p:cNvSpPr/>
+          <p:nvPr/>
+        </p:nvSpPr>
+        <p:spPr>
+          <a:xfrm>
+            <a:off x="7909560" y="1417320"/>
+            <a:ext cx="3154680" cy="1828800"/>
+          </a:xfrm>
+          <a:prstGeom prst="roundRect">
+            <a:avLst>
+              <a:gd name="adj" fmla="val 6000"/>
+            </a:avLst>
+          </a:prstGeom>
+          <a:solidFill>
+            <a:srgbClr val="EEF8ED"/>
+          </a:solidFill>
+          <a:ln w="12700">
+            <a:solidFill>
+              <a:srgbClr val="B9D7E6"/>
+            </a:solidFill>
+            <a:prstDash val="solid"/>
+          </a:ln>
+        </p:spPr>
+      </p:sp>
+      <p:sp>
+        <p:nvSpPr>
+          <p:cNvPr id="12" name="Text 10"/>
+          <p:cNvSpPr/>
+          <p:nvPr/>
+        </p:nvSpPr>
+        <p:spPr>
+          <a:xfrm>
+            <a:off x="8074152" y="1563624"/>
+            <a:ext cx="2825496" cy="201168"/>
+          </a:xfrm>
+          <a:prstGeom prst="rect">
+            <a:avLst/>
+          </a:prstGeom>
+          <a:noFill/>
+          <a:ln/>
+        </p:spPr>
+        <p:txBody>
+          <a:bodyPr wrap="square" lIns="0" tIns="0" rIns="0" bIns="0" rtlCol="0" anchor="ctr"/>
+          <a:lstStyle/>
+          <a:p>
+            <a:pPr indent="0" marL="0">
+              <a:buNone/>
+            </a:pPr>
+            <a:r>
+              <a:rPr lang="en-US" sz="950" b="1" dirty="0">
+                <a:solidFill>
+                  <a:srgbClr val="0068B7"/>
+                </a:solidFill>
+                <a:latin typeface="Aptos" pitchFamily="34" charset="0"/>
+                <a:ea typeface="Aptos" pitchFamily="34" charset="-122"/>
+                <a:cs typeface="Aptos" pitchFamily="34" charset="-120"/>
+              </a:rPr>
+              <a:t>Key idea</a:t>
+            </a:r>
+            <a:endParaRPr lang="en-US" sz="950" dirty="0"/>
+          </a:p>
+        </p:txBody>
+      </p:sp>
+      <p:sp>
+        <p:nvSpPr>
+          <p:cNvPr id="13" name="Text 11"/>
+          <p:cNvSpPr/>
+          <p:nvPr/>
+        </p:nvSpPr>
+        <p:spPr>
+          <a:xfrm>
+            <a:off x="8074152" y="1856232"/>
+            <a:ext cx="2825496" cy="1261872"/>
+          </a:xfrm>
+          <a:prstGeom prst="rect">
+            <a:avLst/>
+          </a:prstGeom>
+          <a:noFill/>
+          <a:ln/>
+        </p:spPr>
+        <p:txBody>
+          <a:bodyPr wrap="square" lIns="0" tIns="0" rIns="0" bIns="0" rtlCol="0" anchor="t">
+            <a:normAutofit/>
+          </a:bodyPr>
+          <a:lstStyle/>
+          <a:p>
+            <a:pPr indent="0" marL="0">
+              <a:buNone/>
+            </a:pPr>
+            <a:r>
+              <a:rPr lang="en-US" sz="1250" dirty="0">
                 <a:solidFill>
                   <a:srgbClr val="17364A"/>
                 </a:solidFill>
@@ -6195,9 +9559,116 @@
                 <a:ea typeface="Aptos" pitchFamily="34" charset="-122"/>
                 <a:cs typeface="Aptos" pitchFamily="34" charset="-120"/>
               </a:rPr>
-              <a:t>Agency policies for privacy, cybersecurity, records, procurement, accessibility, and public communications</a:t>
-            </a:r>
-            <a:endParaRPr lang="en-US" sz="1450" dirty="0"/>
+              <a:t>AI-assisted communications review checklist</a:t>
+            </a:r>
+            <a:endParaRPr lang="en-US" sz="1250" dirty="0"/>
+          </a:p>
+        </p:txBody>
+      </p:sp>
+      <p:sp>
+        <p:nvSpPr>
+          <p:cNvPr id="14" name="Shape 12"/>
+          <p:cNvSpPr/>
+          <p:nvPr/>
+        </p:nvSpPr>
+        <p:spPr>
+          <a:xfrm>
+            <a:off x="7909560" y="3520440"/>
+            <a:ext cx="3154680" cy="1737360"/>
+          </a:xfrm>
+          <a:prstGeom prst="roundRect">
+            <a:avLst>
+              <a:gd name="adj" fmla="val 6316"/>
+            </a:avLst>
+          </a:prstGeom>
+          <a:solidFill>
+            <a:srgbClr val="EAF6F8"/>
+          </a:solidFill>
+          <a:ln w="12700">
+            <a:solidFill>
+              <a:srgbClr val="B9D7E6"/>
+            </a:solidFill>
+            <a:prstDash val="solid"/>
+          </a:ln>
+        </p:spPr>
+      </p:sp>
+      <p:sp>
+        <p:nvSpPr>
+          <p:cNvPr id="15" name="Text 13"/>
+          <p:cNvSpPr/>
+          <p:nvPr/>
+        </p:nvSpPr>
+        <p:spPr>
+          <a:xfrm>
+            <a:off x="8074152" y="3666744"/>
+            <a:ext cx="2825496" cy="201168"/>
+          </a:xfrm>
+          <a:prstGeom prst="rect">
+            <a:avLst/>
+          </a:prstGeom>
+          <a:noFill/>
+          <a:ln/>
+        </p:spPr>
+        <p:txBody>
+          <a:bodyPr wrap="square" lIns="0" tIns="0" rIns="0" bIns="0" rtlCol="0" anchor="ctr"/>
+          <a:lstStyle/>
+          <a:p>
+            <a:pPr indent="0" marL="0">
+              <a:buNone/>
+            </a:pPr>
+            <a:r>
+              <a:rPr lang="en-US" sz="950" b="1" dirty="0">
+                <a:solidFill>
+                  <a:srgbClr val="0068B7"/>
+                </a:solidFill>
+                <a:latin typeface="Aptos" pitchFamily="34" charset="0"/>
+                <a:ea typeface="Aptos" pitchFamily="34" charset="-122"/>
+                <a:cs typeface="Aptos" pitchFamily="34" charset="-120"/>
+              </a:rPr>
+              <a:t>Use this for</a:t>
+            </a:r>
+            <a:endParaRPr lang="en-US" sz="950" dirty="0"/>
+          </a:p>
+        </p:txBody>
+      </p:sp>
+      <p:sp>
+        <p:nvSpPr>
+          <p:cNvPr id="16" name="Text 14"/>
+          <p:cNvSpPr/>
+          <p:nvPr/>
+        </p:nvSpPr>
+        <p:spPr>
+          <a:xfrm>
+            <a:off x="8074152" y="3959352"/>
+            <a:ext cx="2825496" cy="1170432"/>
+          </a:xfrm>
+          <a:prstGeom prst="rect">
+            <a:avLst/>
+          </a:prstGeom>
+          <a:noFill/>
+          <a:ln/>
+        </p:spPr>
+        <p:txBody>
+          <a:bodyPr wrap="square" lIns="0" tIns="0" rIns="0" bIns="0" rtlCol="0" anchor="t">
+            <a:normAutofit/>
+          </a:bodyPr>
+          <a:lstStyle/>
+          <a:p>
+            <a:pPr indent="0" marL="0">
+              <a:buNone/>
+            </a:pPr>
+            <a:r>
+              <a:rPr lang="en-US" sz="1250" dirty="0">
+                <a:solidFill>
+                  <a:srgbClr val="17364A"/>
+                </a:solidFill>
+                <a:latin typeface="Aptos" pitchFamily="34" charset="0"/>
+                <a:ea typeface="Aptos" pitchFamily="34" charset="-122"/>
+                <a:cs typeface="Aptos" pitchFamily="34" charset="-120"/>
+              </a:rPr>
+              <a:t>Connect the concept to public health decisions, safeguards, documentation, or implementation work.</a:t>
+            </a:r>
+            <a:endParaRPr lang="en-US" sz="1250" dirty="0"/>
           </a:p>
         </p:txBody>
       </p:sp>
@@ -6260,7 +9731,32 @@
       </p:sp>
       <p:sp>
         <p:nvSpPr>
-          <p:cNvPr id="3" name="Text 1"/>
+          <p:cNvPr id="3" name="Shape 1"/>
+          <p:cNvSpPr/>
+          <p:nvPr/>
+        </p:nvSpPr>
+        <p:spPr>
+          <a:xfrm>
+            <a:off x="0" y="164592"/>
+            <a:ext cx="146304" cy="6693408"/>
+          </a:xfrm>
+          <a:prstGeom prst="rect">
+            <a:avLst/>
+          </a:prstGeom>
+          <a:solidFill>
+            <a:srgbClr val="2F8A28"/>
+          </a:solidFill>
+          <a:ln w="12700">
+            <a:solidFill>
+              <a:srgbClr val="2F8A28"/>
+            </a:solidFill>
+            <a:prstDash val="solid"/>
+          </a:ln>
+        </p:spPr>
+      </p:sp>
+      <p:sp>
+        <p:nvSpPr>
+          <p:cNvPr id="4" name="Text 2"/>
           <p:cNvSpPr/>
           <p:nvPr/>
         </p:nvSpPr>
@@ -6299,7 +9795,7 @@
       </p:sp>
       <p:sp>
         <p:nvSpPr>
-          <p:cNvPr id="4" name="Text 2"/>
+          <p:cNvPr id="5" name="Text 3"/>
           <p:cNvSpPr/>
           <p:nvPr/>
         </p:nvSpPr>
@@ -6338,7 +9834,7 @@
       </p:sp>
       <p:sp>
         <p:nvSpPr>
-          <p:cNvPr id="5" name="Text 3"/>
+          <p:cNvPr id="6" name="Text 4"/>
           <p:cNvSpPr/>
           <p:nvPr/>
         </p:nvSpPr>
@@ -6377,13 +9873,77 @@
       </p:sp>
       <p:sp>
         <p:nvSpPr>
-          <p:cNvPr id="6" name="Text 4"/>
+          <p:cNvPr id="7" name="Shape 5"/>
           <p:cNvSpPr/>
           <p:nvPr/>
         </p:nvSpPr>
         <p:spPr>
           <a:xfrm>
             <a:off x="640080" y="658368"/>
+            <a:ext cx="420624" cy="420624"/>
+          </a:xfrm>
+          <a:prstGeom prst="ellipse">
+            <a:avLst/>
+          </a:prstGeom>
+          <a:solidFill>
+            <a:srgbClr val="0068B7"/>
+          </a:solidFill>
+          <a:ln w="12700">
+            <a:solidFill>
+              <a:srgbClr val="0068B7"/>
+            </a:solidFill>
+            <a:prstDash val="solid"/>
+          </a:ln>
+        </p:spPr>
+      </p:sp>
+      <p:sp>
+        <p:nvSpPr>
+          <p:cNvPr id="8" name="Text 6"/>
+          <p:cNvSpPr/>
+          <p:nvPr/>
+        </p:nvSpPr>
+        <p:spPr>
+          <a:xfrm>
+            <a:off x="640080" y="731520"/>
+            <a:ext cx="420624" cy="164592"/>
+          </a:xfrm>
+          <a:prstGeom prst="rect">
+            <a:avLst/>
+          </a:prstGeom>
+          <a:noFill/>
+          <a:ln/>
+        </p:spPr>
+        <p:txBody>
+          <a:bodyPr wrap="square" lIns="0" tIns="0" rIns="0" bIns="0" rtlCol="0" anchor="ctr"/>
+          <a:lstStyle/>
+          <a:p>
+            <a:pPr algn="ctr" indent="0" marL="0">
+              <a:buNone/>
+            </a:pPr>
+            <a:r>
+              <a:rPr lang="en-US" sz="1100" b="1" dirty="0">
+                <a:solidFill>
+                  <a:srgbClr val="FFFFFF"/>
+                </a:solidFill>
+                <a:latin typeface="Aptos" pitchFamily="34" charset="0"/>
+                <a:ea typeface="Aptos" pitchFamily="34" charset="-122"/>
+                <a:cs typeface="Aptos" pitchFamily="34" charset="-120"/>
+              </a:rPr>
+              <a:t>11</a:t>
+            </a:r>
+            <a:endParaRPr lang="en-US" sz="1100" dirty="0"/>
+          </a:p>
+        </p:txBody>
+      </p:sp>
+      <p:sp>
+        <p:nvSpPr>
+          <p:cNvPr id="9" name="Text 7"/>
+          <p:cNvSpPr/>
+          <p:nvPr/>
+        </p:nvSpPr>
+        <p:spPr>
+          <a:xfrm>
+            <a:off x="640080" y="621792"/>
             <a:ext cx="10881360" cy="566928"/>
           </a:xfrm>
           <a:prstGeom prst="rect">
@@ -6410,7 +9970,7 @@
                 <a:ea typeface="Aptos Display" pitchFamily="34" charset="-122"/>
                 <a:cs typeface="Aptos Display" pitchFamily="34" charset="-120"/>
               </a:rPr>
-              <a:t>References and Resources Continued</a:t>
+              <a:t>Knowledge Check</a:t>
             </a:r>
             <a:endParaRPr lang="en-US" sz="2700" dirty="0"/>
           </a:p>
@@ -6418,14 +9978,14 @@
       </p:sp>
       <p:sp>
         <p:nvSpPr>
-          <p:cNvPr id="7" name="Text 5"/>
-          <p:cNvSpPr/>
-          <p:nvPr/>
-        </p:nvSpPr>
-        <p:spPr>
-          <a:xfrm>
-            <a:off x="822960" y="1325880"/>
-            <a:ext cx="10378440" cy="4800600"/>
+          <p:cNvPr id="10" name="Text 8"/>
+          <p:cNvSpPr/>
+          <p:nvPr/>
+        </p:nvSpPr>
+        <p:spPr>
+          <a:xfrm>
+            <a:off x="868680" y="1417320"/>
+            <a:ext cx="6675120" cy="4434840"/>
           </a:xfrm>
           <a:prstGeom prst="rect">
             <a:avLst/>
@@ -6440,7 +10000,7 @@
           <a:lstStyle/>
           <a:p>
             <a:r>
-              <a:rPr lang="en-US" sz="1450" dirty="0">
+              <a:rPr lang="en-US" sz="1700" dirty="0">
                 <a:solidFill>
                   <a:srgbClr val="17364A"/>
                 </a:solidFill>
@@ -6448,9 +10008,1355 @@
                 <a:ea typeface="Aptos" pitchFamily="34" charset="-122"/>
                 <a:cs typeface="Aptos" pitchFamily="34" charset="-120"/>
               </a:rPr>
+              <a:t>1. What is an appropriate role for AI in public health communications?</a:t>
+            </a:r>
+            <a:endParaRPr lang="en-US" sz="1700" dirty="0"/>
+          </a:p>
+          <a:p>
+            <a:r>
+              <a:rPr lang="en-US" sz="1700" dirty="0">
+                <a:solidFill>
+                  <a:srgbClr val="17364A"/>
+                </a:solidFill>
+                <a:latin typeface="Aptos" pitchFamily="34" charset="0"/>
+                <a:ea typeface="Aptos" pitchFamily="34" charset="-122"/>
+                <a:cs typeface="Aptos" pitchFamily="34" charset="-120"/>
+              </a:rPr>
+              <a:t>2. Why is source verification necessary?</a:t>
+            </a:r>
+            <a:endParaRPr lang="en-US" sz="1700" dirty="0"/>
+          </a:p>
+          <a:p>
+            <a:r>
+              <a:rPr lang="en-US" sz="1700" dirty="0">
+                <a:solidFill>
+                  <a:srgbClr val="17364A"/>
+                </a:solidFill>
+                <a:latin typeface="Aptos" pitchFamily="34" charset="0"/>
+                <a:ea typeface="Aptos" pitchFamily="34" charset="-122"/>
+                <a:cs typeface="Aptos" pitchFamily="34" charset="-120"/>
+              </a:rPr>
+              <a:t>3. Which review is especially important for public-facing AI-assisted messages?</a:t>
+            </a:r>
+            <a:endParaRPr lang="en-US" sz="1700" dirty="0"/>
+          </a:p>
+          <a:p>
+            <a:r>
+              <a:rPr lang="en-US" sz="1700" dirty="0">
+                <a:solidFill>
+                  <a:srgbClr val="17364A"/>
+                </a:solidFill>
+                <a:latin typeface="Aptos" pitchFamily="34" charset="0"/>
+                <a:ea typeface="Aptos" pitchFamily="34" charset="-122"/>
+                <a:cs typeface="Aptos" pitchFamily="34" charset="-120"/>
+              </a:rPr>
+              <a:t>4. What should happen with AI-assisted translation for public health messages?</a:t>
+            </a:r>
+            <a:endParaRPr lang="en-US" sz="1700" dirty="0"/>
+          </a:p>
+        </p:txBody>
+      </p:sp>
+      <p:sp>
+        <p:nvSpPr>
+          <p:cNvPr id="11" name="Shape 9"/>
+          <p:cNvSpPr/>
+          <p:nvPr/>
+        </p:nvSpPr>
+        <p:spPr>
+          <a:xfrm>
+            <a:off x="7909560" y="1417320"/>
+            <a:ext cx="3154680" cy="1828800"/>
+          </a:xfrm>
+          <a:prstGeom prst="roundRect">
+            <a:avLst>
+              <a:gd name="adj" fmla="val 6000"/>
+            </a:avLst>
+          </a:prstGeom>
+          <a:solidFill>
+            <a:srgbClr val="EEF8ED"/>
+          </a:solidFill>
+          <a:ln w="12700">
+            <a:solidFill>
+              <a:srgbClr val="B9D7E6"/>
+            </a:solidFill>
+            <a:prstDash val="solid"/>
+          </a:ln>
+        </p:spPr>
+      </p:sp>
+      <p:sp>
+        <p:nvSpPr>
+          <p:cNvPr id="12" name="Text 10"/>
+          <p:cNvSpPr/>
+          <p:nvPr/>
+        </p:nvSpPr>
+        <p:spPr>
+          <a:xfrm>
+            <a:off x="8074152" y="1563624"/>
+            <a:ext cx="2825496" cy="201168"/>
+          </a:xfrm>
+          <a:prstGeom prst="rect">
+            <a:avLst/>
+          </a:prstGeom>
+          <a:noFill/>
+          <a:ln/>
+        </p:spPr>
+        <p:txBody>
+          <a:bodyPr wrap="square" lIns="0" tIns="0" rIns="0" bIns="0" rtlCol="0" anchor="ctr"/>
+          <a:lstStyle/>
+          <a:p>
+            <a:pPr indent="0" marL="0">
+              <a:buNone/>
+            </a:pPr>
+            <a:r>
+              <a:rPr lang="en-US" sz="950" b="1" dirty="0">
+                <a:solidFill>
+                  <a:srgbClr val="0068B7"/>
+                </a:solidFill>
+                <a:latin typeface="Aptos" pitchFamily="34" charset="0"/>
+                <a:ea typeface="Aptos" pitchFamily="34" charset="-122"/>
+                <a:cs typeface="Aptos" pitchFamily="34" charset="-120"/>
+              </a:rPr>
+              <a:t>Key idea</a:t>
+            </a:r>
+            <a:endParaRPr lang="en-US" sz="950" dirty="0"/>
+          </a:p>
+        </p:txBody>
+      </p:sp>
+      <p:sp>
+        <p:nvSpPr>
+          <p:cNvPr id="13" name="Text 11"/>
+          <p:cNvSpPr/>
+          <p:nvPr/>
+        </p:nvSpPr>
+        <p:spPr>
+          <a:xfrm>
+            <a:off x="8074152" y="1856232"/>
+            <a:ext cx="2825496" cy="1261872"/>
+          </a:xfrm>
+          <a:prstGeom prst="rect">
+            <a:avLst/>
+          </a:prstGeom>
+          <a:noFill/>
+          <a:ln/>
+        </p:spPr>
+        <p:txBody>
+          <a:bodyPr wrap="square" lIns="0" tIns="0" rIns="0" bIns="0" rtlCol="0" anchor="t">
+            <a:normAutofit/>
+          </a:bodyPr>
+          <a:lstStyle/>
+          <a:p>
+            <a:pPr indent="0" marL="0">
+              <a:buNone/>
+            </a:pPr>
+            <a:r>
+              <a:rPr lang="en-US" sz="1250" dirty="0">
+                <a:solidFill>
+                  <a:srgbClr val="17364A"/>
+                </a:solidFill>
+                <a:latin typeface="Aptos" pitchFamily="34" charset="0"/>
+                <a:ea typeface="Aptos" pitchFamily="34" charset="-122"/>
+                <a:cs typeface="Aptos" pitchFamily="34" charset="-120"/>
+              </a:rPr>
+              <a:t>1. What is an appropriate role for AI in public health communications?</a:t>
+            </a:r>
+            <a:endParaRPr lang="en-US" sz="1250" dirty="0"/>
+          </a:p>
+        </p:txBody>
+      </p:sp>
+      <p:sp>
+        <p:nvSpPr>
+          <p:cNvPr id="14" name="Shape 12"/>
+          <p:cNvSpPr/>
+          <p:nvPr/>
+        </p:nvSpPr>
+        <p:spPr>
+          <a:xfrm>
+            <a:off x="7909560" y="3520440"/>
+            <a:ext cx="3154680" cy="1737360"/>
+          </a:xfrm>
+          <a:prstGeom prst="roundRect">
+            <a:avLst>
+              <a:gd name="adj" fmla="val 6316"/>
+            </a:avLst>
+          </a:prstGeom>
+          <a:solidFill>
+            <a:srgbClr val="EAF6F8"/>
+          </a:solidFill>
+          <a:ln w="12700">
+            <a:solidFill>
+              <a:srgbClr val="B9D7E6"/>
+            </a:solidFill>
+            <a:prstDash val="solid"/>
+          </a:ln>
+        </p:spPr>
+      </p:sp>
+      <p:sp>
+        <p:nvSpPr>
+          <p:cNvPr id="15" name="Text 13"/>
+          <p:cNvSpPr/>
+          <p:nvPr/>
+        </p:nvSpPr>
+        <p:spPr>
+          <a:xfrm>
+            <a:off x="8074152" y="3666744"/>
+            <a:ext cx="2825496" cy="201168"/>
+          </a:xfrm>
+          <a:prstGeom prst="rect">
+            <a:avLst/>
+          </a:prstGeom>
+          <a:noFill/>
+          <a:ln/>
+        </p:spPr>
+        <p:txBody>
+          <a:bodyPr wrap="square" lIns="0" tIns="0" rIns="0" bIns="0" rtlCol="0" anchor="ctr"/>
+          <a:lstStyle/>
+          <a:p>
+            <a:pPr indent="0" marL="0">
+              <a:buNone/>
+            </a:pPr>
+            <a:r>
+              <a:rPr lang="en-US" sz="950" b="1" dirty="0">
+                <a:solidFill>
+                  <a:srgbClr val="0068B7"/>
+                </a:solidFill>
+                <a:latin typeface="Aptos" pitchFamily="34" charset="0"/>
+                <a:ea typeface="Aptos" pitchFamily="34" charset="-122"/>
+                <a:cs typeface="Aptos" pitchFamily="34" charset="-120"/>
+              </a:rPr>
+              <a:t>Use this for</a:t>
+            </a:r>
+            <a:endParaRPr lang="en-US" sz="950" dirty="0"/>
+          </a:p>
+        </p:txBody>
+      </p:sp>
+      <p:sp>
+        <p:nvSpPr>
+          <p:cNvPr id="16" name="Text 14"/>
+          <p:cNvSpPr/>
+          <p:nvPr/>
+        </p:nvSpPr>
+        <p:spPr>
+          <a:xfrm>
+            <a:off x="8074152" y="3959352"/>
+            <a:ext cx="2825496" cy="1170432"/>
+          </a:xfrm>
+          <a:prstGeom prst="rect">
+            <a:avLst/>
+          </a:prstGeom>
+          <a:noFill/>
+          <a:ln/>
+        </p:spPr>
+        <p:txBody>
+          <a:bodyPr wrap="square" lIns="0" tIns="0" rIns="0" bIns="0" rtlCol="0" anchor="t">
+            <a:normAutofit/>
+          </a:bodyPr>
+          <a:lstStyle/>
+          <a:p>
+            <a:pPr indent="0" marL="0">
+              <a:buNone/>
+            </a:pPr>
+            <a:r>
+              <a:rPr lang="en-US" sz="1250" dirty="0">
+                <a:solidFill>
+                  <a:srgbClr val="17364A"/>
+                </a:solidFill>
+                <a:latin typeface="Aptos" pitchFamily="34" charset="0"/>
+                <a:ea typeface="Aptos" pitchFamily="34" charset="-122"/>
+                <a:cs typeface="Aptos" pitchFamily="34" charset="-120"/>
+              </a:rPr>
+              <a:t>Connect the concept to public health decisions, safeguards, documentation, or implementation work.</a:t>
+            </a:r>
+            <a:endParaRPr lang="en-US" sz="1250" dirty="0"/>
+          </a:p>
+        </p:txBody>
+      </p:sp>
+    </p:spTree>
+  </p:cSld>
+  <p:clrMapOvr>
+    <a:masterClrMapping/>
+  </p:clrMapOvr>
+</p:sld>
+</file>
+
+<file path=ppt/slides/slide22.xml><?xml version="1.0" encoding="utf-8"?>
+<p:sld xmlns:a="http://schemas.openxmlformats.org/drawingml/2006/main" xmlns:r="http://schemas.openxmlformats.org/officeDocument/2006/relationships" xmlns:p="http://schemas.openxmlformats.org/presentationml/2006/main">
+  <p:cSld name="Slide 22">
+    <p:bg>
+      <p:bgPr>
+        <a:solidFill>
+          <a:srgbClr val="F7FBFD"/>
+        </a:solidFill>
+      </p:bgPr>
+    </p:bg>
+    <p:spTree>
+      <p:nvGrpSpPr>
+        <p:cNvPr id="1" name=""/>
+        <p:cNvGrpSpPr/>
+        <p:nvPr/>
+      </p:nvGrpSpPr>
+      <p:grpSpPr>
+        <a:xfrm>
+          <a:off x="0" y="0"/>
+          <a:ext cx="0" cy="0"/>
+          <a:chOff x="0" y="0"/>
+          <a:chExt cx="0" cy="0"/>
+        </a:xfrm>
+      </p:grpSpPr>
+      <p:sp>
+        <p:nvSpPr>
+          <p:cNvPr id="2" name="Shape 0"/>
+          <p:cNvSpPr/>
+          <p:nvPr/>
+        </p:nvSpPr>
+        <p:spPr>
+          <a:xfrm>
+            <a:off x="0" y="0"/>
+            <a:ext cx="12191695" cy="164592"/>
+          </a:xfrm>
+          <a:prstGeom prst="rect">
+            <a:avLst/>
+          </a:prstGeom>
+          <a:solidFill>
+            <a:srgbClr val="0068B7"/>
+          </a:solidFill>
+          <a:ln w="12700">
+            <a:solidFill>
+              <a:srgbClr val="0068B7"/>
+            </a:solidFill>
+            <a:prstDash val="solid"/>
+          </a:ln>
+        </p:spPr>
+      </p:sp>
+      <p:sp>
+        <p:nvSpPr>
+          <p:cNvPr id="3" name="Shape 1"/>
+          <p:cNvSpPr/>
+          <p:nvPr/>
+        </p:nvSpPr>
+        <p:spPr>
+          <a:xfrm>
+            <a:off x="0" y="164592"/>
+            <a:ext cx="146304" cy="6693408"/>
+          </a:xfrm>
+          <a:prstGeom prst="rect">
+            <a:avLst/>
+          </a:prstGeom>
+          <a:solidFill>
+            <a:srgbClr val="2F8A28"/>
+          </a:solidFill>
+          <a:ln w="12700">
+            <a:solidFill>
+              <a:srgbClr val="2F8A28"/>
+            </a:solidFill>
+            <a:prstDash val="solid"/>
+          </a:ln>
+        </p:spPr>
+      </p:sp>
+      <p:sp>
+        <p:nvSpPr>
+          <p:cNvPr id="4" name="Text 2"/>
+          <p:cNvSpPr/>
+          <p:nvPr/>
+        </p:nvSpPr>
+        <p:spPr>
+          <a:xfrm>
+            <a:off x="502920" y="292608"/>
+            <a:ext cx="10149840" cy="256032"/>
+          </a:xfrm>
+          <a:prstGeom prst="rect">
+            <a:avLst/>
+          </a:prstGeom>
+          <a:noFill/>
+          <a:ln/>
+        </p:spPr>
+        <p:txBody>
+          <a:bodyPr wrap="square" lIns="0" tIns="0" rIns="0" bIns="0" rtlCol="0" anchor="ctr"/>
+          <a:lstStyle/>
+          <a:p>
+            <a:pPr indent="0" marL="0">
+              <a:buNone/>
+            </a:pPr>
+            <a:r>
+              <a:rPr lang="en-US" sz="900" b="1" dirty="0">
+                <a:solidFill>
+                  <a:srgbClr val="5F7181"/>
+                </a:solidFill>
+                <a:latin typeface="Aptos" pitchFamily="34" charset="0"/>
+                <a:ea typeface="Aptos" pitchFamily="34" charset="-122"/>
+                <a:cs typeface="Aptos" pitchFamily="34" charset="-120"/>
+              </a:rPr>
+              <a:t>AI for Public Health Communications and Message Development</a:t>
+            </a:r>
+            <a:endParaRPr lang="en-US" sz="900" dirty="0"/>
+          </a:p>
+        </p:txBody>
+      </p:sp>
+      <p:sp>
+        <p:nvSpPr>
+          <p:cNvPr id="5" name="Text 3"/>
+          <p:cNvSpPr/>
+          <p:nvPr/>
+        </p:nvSpPr>
+        <p:spPr>
+          <a:xfrm>
+            <a:off x="502920" y="6537960"/>
+            <a:ext cx="7772400" cy="201168"/>
+          </a:xfrm>
+          <a:prstGeom prst="rect">
+            <a:avLst/>
+          </a:prstGeom>
+          <a:noFill/>
+          <a:ln/>
+        </p:spPr>
+        <p:txBody>
+          <a:bodyPr wrap="square" lIns="0" tIns="0" rIns="0" bIns="0" rtlCol="0" anchor="ctr"/>
+          <a:lstStyle/>
+          <a:p>
+            <a:pPr indent="0" marL="0">
+              <a:buNone/>
+            </a:pPr>
+            <a:r>
+              <a:rPr lang="en-US" sz="800" dirty="0">
+                <a:solidFill>
+                  <a:srgbClr val="5F7181"/>
+                </a:solidFill>
+                <a:latin typeface="Aptos" pitchFamily="34" charset="0"/>
+                <a:ea typeface="Aptos" pitchFamily="34" charset="-122"/>
+                <a:cs typeface="Aptos" pitchFamily="34" charset="-120"/>
+              </a:rPr>
+              <a:t>AI Playbook and Toolkit for Public Health Departments</a:t>
+            </a:r>
+            <a:endParaRPr lang="en-US" sz="800" dirty="0"/>
+          </a:p>
+        </p:txBody>
+      </p:sp>
+      <p:sp>
+        <p:nvSpPr>
+          <p:cNvPr id="6" name="Text 4"/>
+          <p:cNvSpPr/>
+          <p:nvPr/>
+        </p:nvSpPr>
+        <p:spPr>
+          <a:xfrm>
+            <a:off x="9966960" y="6537960"/>
+            <a:ext cx="1645920" cy="201168"/>
+          </a:xfrm>
+          <a:prstGeom prst="rect">
+            <a:avLst/>
+          </a:prstGeom>
+          <a:noFill/>
+          <a:ln/>
+        </p:spPr>
+        <p:txBody>
+          <a:bodyPr wrap="square" lIns="0" tIns="0" rIns="0" bIns="0" rtlCol="0" anchor="ctr"/>
+          <a:lstStyle/>
+          <a:p>
+            <a:pPr algn="r" indent="0" marL="0">
+              <a:buNone/>
+            </a:pPr>
+            <a:r>
+              <a:rPr lang="en-US" sz="800" dirty="0">
+                <a:solidFill>
+                  <a:srgbClr val="5F7181"/>
+                </a:solidFill>
+                <a:latin typeface="Aptos" pitchFamily="34" charset="0"/>
+                <a:ea typeface="Aptos" pitchFamily="34" charset="-122"/>
+                <a:cs typeface="Aptos" pitchFamily="34" charset="-120"/>
+              </a:rPr>
+              <a:t>© Paula Soper</a:t>
+            </a:r>
+            <a:endParaRPr lang="en-US" sz="800" dirty="0"/>
+          </a:p>
+        </p:txBody>
+      </p:sp>
+      <p:sp>
+        <p:nvSpPr>
+          <p:cNvPr id="7" name="Shape 5"/>
+          <p:cNvSpPr/>
+          <p:nvPr/>
+        </p:nvSpPr>
+        <p:spPr>
+          <a:xfrm>
+            <a:off x="640080" y="658368"/>
+            <a:ext cx="420624" cy="420624"/>
+          </a:xfrm>
+          <a:prstGeom prst="ellipse">
+            <a:avLst/>
+          </a:prstGeom>
+          <a:solidFill>
+            <a:srgbClr val="0068B7"/>
+          </a:solidFill>
+          <a:ln w="12700">
+            <a:solidFill>
+              <a:srgbClr val="0068B7"/>
+            </a:solidFill>
+            <a:prstDash val="solid"/>
+          </a:ln>
+        </p:spPr>
+      </p:sp>
+      <p:sp>
+        <p:nvSpPr>
+          <p:cNvPr id="8" name="Text 6"/>
+          <p:cNvSpPr/>
+          <p:nvPr/>
+        </p:nvSpPr>
+        <p:spPr>
+          <a:xfrm>
+            <a:off x="640080" y="731520"/>
+            <a:ext cx="420624" cy="164592"/>
+          </a:xfrm>
+          <a:prstGeom prst="rect">
+            <a:avLst/>
+          </a:prstGeom>
+          <a:noFill/>
+          <a:ln/>
+        </p:spPr>
+        <p:txBody>
+          <a:bodyPr wrap="square" lIns="0" tIns="0" rIns="0" bIns="0" rtlCol="0" anchor="ctr"/>
+          <a:lstStyle/>
+          <a:p>
+            <a:pPr algn="ctr" indent="0" marL="0">
+              <a:buNone/>
+            </a:pPr>
+            <a:r>
+              <a:rPr lang="en-US" sz="1100" b="1" dirty="0">
+                <a:solidFill>
+                  <a:srgbClr val="FFFFFF"/>
+                </a:solidFill>
+                <a:latin typeface="Aptos" pitchFamily="34" charset="0"/>
+                <a:ea typeface="Aptos" pitchFamily="34" charset="-122"/>
+                <a:cs typeface="Aptos" pitchFamily="34" charset="-120"/>
+              </a:rPr>
+              <a:t>12</a:t>
+            </a:r>
+            <a:endParaRPr lang="en-US" sz="1100" dirty="0"/>
+          </a:p>
+        </p:txBody>
+      </p:sp>
+      <p:sp>
+        <p:nvSpPr>
+          <p:cNvPr id="9" name="Text 7"/>
+          <p:cNvSpPr/>
+          <p:nvPr/>
+        </p:nvSpPr>
+        <p:spPr>
+          <a:xfrm>
+            <a:off x="640080" y="621792"/>
+            <a:ext cx="10881360" cy="566928"/>
+          </a:xfrm>
+          <a:prstGeom prst="rect">
+            <a:avLst/>
+          </a:prstGeom>
+          <a:noFill/>
+          <a:ln/>
+        </p:spPr>
+        <p:txBody>
+          <a:bodyPr wrap="square" lIns="0" tIns="0" rIns="0" bIns="0" rtlCol="0" anchor="ctr">
+            <a:normAutofit/>
+          </a:bodyPr>
+          <a:lstStyle/>
+          <a:p>
+            <a:pPr indent="0" marL="0">
+              <a:buNone/>
+            </a:pPr>
+            <a:r>
+              <a:rPr lang="en-US" sz="2700" b="1" dirty="0">
+                <a:solidFill>
+                  <a:srgbClr val="003A63"/>
+                </a:solidFill>
+                <a:latin typeface="Aptos Display" pitchFamily="34" charset="0"/>
+                <a:ea typeface="Aptos Display" pitchFamily="34" charset="-122"/>
+                <a:cs typeface="Aptos Display" pitchFamily="34" charset="-120"/>
+              </a:rPr>
+              <a:t>References and Resources</a:t>
+            </a:r>
+            <a:endParaRPr lang="en-US" sz="2700" dirty="0"/>
+          </a:p>
+        </p:txBody>
+      </p:sp>
+      <p:sp>
+        <p:nvSpPr>
+          <p:cNvPr id="10" name="Text 8"/>
+          <p:cNvSpPr/>
+          <p:nvPr/>
+        </p:nvSpPr>
+        <p:spPr>
+          <a:xfrm>
+            <a:off x="868680" y="1417320"/>
+            <a:ext cx="6675120" cy="4434840"/>
+          </a:xfrm>
+          <a:prstGeom prst="rect">
+            <a:avLst/>
+          </a:prstGeom>
+          <a:noFill/>
+          <a:ln/>
+        </p:spPr>
+        <p:txBody>
+          <a:bodyPr wrap="square" lIns="635" tIns="635" rIns="635" bIns="635" rtlCol="0" anchor="t">
+            <a:normAutofit/>
+          </a:bodyPr>
+          <a:lstStyle/>
+          <a:p>
+            <a:r>
+              <a:rPr lang="en-US" sz="1700" dirty="0">
+                <a:solidFill>
+                  <a:srgbClr val="17364A"/>
+                </a:solidFill>
+                <a:latin typeface="Aptos" pitchFamily="34" charset="0"/>
+                <a:ea typeface="Aptos" pitchFamily="34" charset="-122"/>
+                <a:cs typeface="Aptos" pitchFamily="34" charset="-120"/>
+              </a:rPr>
+              <a:t>NIST Artificial Intelligence Risk Management Framework: https://www.nist.gov/itl/ai-risk-management-framework</a:t>
+            </a:r>
+            <a:endParaRPr lang="en-US" sz="1700" dirty="0"/>
+          </a:p>
+          <a:p>
+            <a:r>
+              <a:rPr lang="en-US" sz="1700" dirty="0">
+                <a:solidFill>
+                  <a:srgbClr val="17364A"/>
+                </a:solidFill>
+                <a:latin typeface="Aptos" pitchFamily="34" charset="0"/>
+                <a:ea typeface="Aptos" pitchFamily="34" charset="-122"/>
+                <a:cs typeface="Aptos" pitchFamily="34" charset="-120"/>
+              </a:rPr>
+              <a:t>NIST Generative AI Profile:.</a:t>
+            </a:r>
+            <a:endParaRPr lang="en-US" sz="1700" dirty="0"/>
+          </a:p>
+          <a:p>
+            <a:r>
+              <a:rPr lang="en-US" sz="1700" dirty="0">
+                <a:solidFill>
+                  <a:srgbClr val="17364A"/>
+                </a:solidFill>
+                <a:latin typeface="Aptos" pitchFamily="34" charset="0"/>
+                <a:ea typeface="Aptos" pitchFamily="34" charset="-122"/>
+                <a:cs typeface="Aptos" pitchFamily="34" charset="-120"/>
+              </a:rPr>
+              <a:t>CDC Public Health Data Strategy and Data Modernization resources:.</a:t>
+            </a:r>
+            <a:endParaRPr lang="en-US" sz="1700" dirty="0"/>
+          </a:p>
+          <a:p>
+            <a:r>
+              <a:rPr lang="en-US" sz="1700" dirty="0">
+                <a:solidFill>
+                  <a:srgbClr val="17364A"/>
+                </a:solidFill>
+                <a:latin typeface="Aptos" pitchFamily="34" charset="0"/>
+                <a:ea typeface="Aptos" pitchFamily="34" charset="-122"/>
+                <a:cs typeface="Aptos" pitchFamily="34" charset="-120"/>
+              </a:rPr>
+              <a:t>OWASP guidance for LLM application security</a:t>
+            </a:r>
+            <a:endParaRPr lang="en-US" sz="1700" dirty="0"/>
+          </a:p>
+        </p:txBody>
+      </p:sp>
+      <p:sp>
+        <p:nvSpPr>
+          <p:cNvPr id="11" name="Shape 9"/>
+          <p:cNvSpPr/>
+          <p:nvPr/>
+        </p:nvSpPr>
+        <p:spPr>
+          <a:xfrm>
+            <a:off x="7909560" y="1417320"/>
+            <a:ext cx="3154680" cy="1828800"/>
+          </a:xfrm>
+          <a:prstGeom prst="roundRect">
+            <a:avLst>
+              <a:gd name="adj" fmla="val 6000"/>
+            </a:avLst>
+          </a:prstGeom>
+          <a:solidFill>
+            <a:srgbClr val="EEF8ED"/>
+          </a:solidFill>
+          <a:ln w="12700">
+            <a:solidFill>
+              <a:srgbClr val="B9D7E6"/>
+            </a:solidFill>
+            <a:prstDash val="solid"/>
+          </a:ln>
+        </p:spPr>
+      </p:sp>
+      <p:sp>
+        <p:nvSpPr>
+          <p:cNvPr id="12" name="Text 10"/>
+          <p:cNvSpPr/>
+          <p:nvPr/>
+        </p:nvSpPr>
+        <p:spPr>
+          <a:xfrm>
+            <a:off x="8074152" y="1563624"/>
+            <a:ext cx="2825496" cy="201168"/>
+          </a:xfrm>
+          <a:prstGeom prst="rect">
+            <a:avLst/>
+          </a:prstGeom>
+          <a:noFill/>
+          <a:ln/>
+        </p:spPr>
+        <p:txBody>
+          <a:bodyPr wrap="square" lIns="0" tIns="0" rIns="0" bIns="0" rtlCol="0" anchor="ctr"/>
+          <a:lstStyle/>
+          <a:p>
+            <a:pPr indent="0" marL="0">
+              <a:buNone/>
+            </a:pPr>
+            <a:r>
+              <a:rPr lang="en-US" sz="950" b="1" dirty="0">
+                <a:solidFill>
+                  <a:srgbClr val="0068B7"/>
+                </a:solidFill>
+                <a:latin typeface="Aptos" pitchFamily="34" charset="0"/>
+                <a:ea typeface="Aptos" pitchFamily="34" charset="-122"/>
+                <a:cs typeface="Aptos" pitchFamily="34" charset="-120"/>
+              </a:rPr>
+              <a:t>Key idea</a:t>
+            </a:r>
+            <a:endParaRPr lang="en-US" sz="950" dirty="0"/>
+          </a:p>
+        </p:txBody>
+      </p:sp>
+      <p:sp>
+        <p:nvSpPr>
+          <p:cNvPr id="13" name="Text 11"/>
+          <p:cNvSpPr/>
+          <p:nvPr/>
+        </p:nvSpPr>
+        <p:spPr>
+          <a:xfrm>
+            <a:off x="8074152" y="1856232"/>
+            <a:ext cx="2825496" cy="1261872"/>
+          </a:xfrm>
+          <a:prstGeom prst="rect">
+            <a:avLst/>
+          </a:prstGeom>
+          <a:noFill/>
+          <a:ln/>
+        </p:spPr>
+        <p:txBody>
+          <a:bodyPr wrap="square" lIns="0" tIns="0" rIns="0" bIns="0" rtlCol="0" anchor="t">
+            <a:normAutofit/>
+          </a:bodyPr>
+          <a:lstStyle/>
+          <a:p>
+            <a:pPr indent="0" marL="0">
+              <a:buNone/>
+            </a:pPr>
+            <a:r>
+              <a:rPr lang="en-US" sz="1250" dirty="0">
+                <a:solidFill>
+                  <a:srgbClr val="17364A"/>
+                </a:solidFill>
+                <a:latin typeface="Aptos" pitchFamily="34" charset="0"/>
+                <a:ea typeface="Aptos" pitchFamily="34" charset="-122"/>
+                <a:cs typeface="Aptos" pitchFamily="34" charset="-120"/>
+              </a:rPr>
+              <a:t>NIST Artificial Intelligence Risk Management Framework: https://www.nist.gov/itl/ai-risk-management-framework</a:t>
+            </a:r>
+            <a:endParaRPr lang="en-US" sz="1250" dirty="0"/>
+          </a:p>
+        </p:txBody>
+      </p:sp>
+      <p:sp>
+        <p:nvSpPr>
+          <p:cNvPr id="14" name="Shape 12"/>
+          <p:cNvSpPr/>
+          <p:nvPr/>
+        </p:nvSpPr>
+        <p:spPr>
+          <a:xfrm>
+            <a:off x="7909560" y="3520440"/>
+            <a:ext cx="3154680" cy="1737360"/>
+          </a:xfrm>
+          <a:prstGeom prst="roundRect">
+            <a:avLst>
+              <a:gd name="adj" fmla="val 6316"/>
+            </a:avLst>
+          </a:prstGeom>
+          <a:solidFill>
+            <a:srgbClr val="EAF6F8"/>
+          </a:solidFill>
+          <a:ln w="12700">
+            <a:solidFill>
+              <a:srgbClr val="B9D7E6"/>
+            </a:solidFill>
+            <a:prstDash val="solid"/>
+          </a:ln>
+        </p:spPr>
+      </p:sp>
+      <p:sp>
+        <p:nvSpPr>
+          <p:cNvPr id="15" name="Text 13"/>
+          <p:cNvSpPr/>
+          <p:nvPr/>
+        </p:nvSpPr>
+        <p:spPr>
+          <a:xfrm>
+            <a:off x="8074152" y="3666744"/>
+            <a:ext cx="2825496" cy="201168"/>
+          </a:xfrm>
+          <a:prstGeom prst="rect">
+            <a:avLst/>
+          </a:prstGeom>
+          <a:noFill/>
+          <a:ln/>
+        </p:spPr>
+        <p:txBody>
+          <a:bodyPr wrap="square" lIns="0" tIns="0" rIns="0" bIns="0" rtlCol="0" anchor="ctr"/>
+          <a:lstStyle/>
+          <a:p>
+            <a:pPr indent="0" marL="0">
+              <a:buNone/>
+            </a:pPr>
+            <a:r>
+              <a:rPr lang="en-US" sz="950" b="1" dirty="0">
+                <a:solidFill>
+                  <a:srgbClr val="0068B7"/>
+                </a:solidFill>
+                <a:latin typeface="Aptos" pitchFamily="34" charset="0"/>
+                <a:ea typeface="Aptos" pitchFamily="34" charset="-122"/>
+                <a:cs typeface="Aptos" pitchFamily="34" charset="-120"/>
+              </a:rPr>
+              <a:t>Use this for</a:t>
+            </a:r>
+            <a:endParaRPr lang="en-US" sz="950" dirty="0"/>
+          </a:p>
+        </p:txBody>
+      </p:sp>
+      <p:sp>
+        <p:nvSpPr>
+          <p:cNvPr id="16" name="Text 14"/>
+          <p:cNvSpPr/>
+          <p:nvPr/>
+        </p:nvSpPr>
+        <p:spPr>
+          <a:xfrm>
+            <a:off x="8074152" y="3959352"/>
+            <a:ext cx="2825496" cy="1170432"/>
+          </a:xfrm>
+          <a:prstGeom prst="rect">
+            <a:avLst/>
+          </a:prstGeom>
+          <a:noFill/>
+          <a:ln/>
+        </p:spPr>
+        <p:txBody>
+          <a:bodyPr wrap="square" lIns="0" tIns="0" rIns="0" bIns="0" rtlCol="0" anchor="t">
+            <a:normAutofit/>
+          </a:bodyPr>
+          <a:lstStyle/>
+          <a:p>
+            <a:pPr indent="0" marL="0">
+              <a:buNone/>
+            </a:pPr>
+            <a:r>
+              <a:rPr lang="en-US" sz="1250" dirty="0">
+                <a:solidFill>
+                  <a:srgbClr val="17364A"/>
+                </a:solidFill>
+                <a:latin typeface="Aptos" pitchFamily="34" charset="0"/>
+                <a:ea typeface="Aptos" pitchFamily="34" charset="-122"/>
+                <a:cs typeface="Aptos" pitchFamily="34" charset="-120"/>
+              </a:rPr>
+              <a:t>Connect the concept to public health decisions, safeguards, documentation, or implementation work.</a:t>
+            </a:r>
+            <a:endParaRPr lang="en-US" sz="1250" dirty="0"/>
+          </a:p>
+        </p:txBody>
+      </p:sp>
+    </p:spTree>
+  </p:cSld>
+  <p:clrMapOvr>
+    <a:masterClrMapping/>
+  </p:clrMapOvr>
+</p:sld>
+</file>
+
+<file path=ppt/slides/slide23.xml><?xml version="1.0" encoding="utf-8"?>
+<p:sld xmlns:a="http://schemas.openxmlformats.org/drawingml/2006/main" xmlns:r="http://schemas.openxmlformats.org/officeDocument/2006/relationships" xmlns:p="http://schemas.openxmlformats.org/presentationml/2006/main">
+  <p:cSld name="Slide 23">
+    <p:bg>
+      <p:bgPr>
+        <a:solidFill>
+          <a:srgbClr val="F7FBFD"/>
+        </a:solidFill>
+      </p:bgPr>
+    </p:bg>
+    <p:spTree>
+      <p:nvGrpSpPr>
+        <p:cNvPr id="1" name=""/>
+        <p:cNvGrpSpPr/>
+        <p:nvPr/>
+      </p:nvGrpSpPr>
+      <p:grpSpPr>
+        <a:xfrm>
+          <a:off x="0" y="0"/>
+          <a:ext cx="0" cy="0"/>
+          <a:chOff x="0" y="0"/>
+          <a:chExt cx="0" cy="0"/>
+        </a:xfrm>
+      </p:grpSpPr>
+      <p:sp>
+        <p:nvSpPr>
+          <p:cNvPr id="2" name="Shape 0"/>
+          <p:cNvSpPr/>
+          <p:nvPr/>
+        </p:nvSpPr>
+        <p:spPr>
+          <a:xfrm>
+            <a:off x="0" y="0"/>
+            <a:ext cx="12191695" cy="164592"/>
+          </a:xfrm>
+          <a:prstGeom prst="rect">
+            <a:avLst/>
+          </a:prstGeom>
+          <a:solidFill>
+            <a:srgbClr val="0068B7"/>
+          </a:solidFill>
+          <a:ln w="12700">
+            <a:solidFill>
+              <a:srgbClr val="0068B7"/>
+            </a:solidFill>
+            <a:prstDash val="solid"/>
+          </a:ln>
+        </p:spPr>
+      </p:sp>
+      <p:sp>
+        <p:nvSpPr>
+          <p:cNvPr id="3" name="Shape 1"/>
+          <p:cNvSpPr/>
+          <p:nvPr/>
+        </p:nvSpPr>
+        <p:spPr>
+          <a:xfrm>
+            <a:off x="0" y="164592"/>
+            <a:ext cx="146304" cy="6693408"/>
+          </a:xfrm>
+          <a:prstGeom prst="rect">
+            <a:avLst/>
+          </a:prstGeom>
+          <a:solidFill>
+            <a:srgbClr val="2F8A28"/>
+          </a:solidFill>
+          <a:ln w="12700">
+            <a:solidFill>
+              <a:srgbClr val="2F8A28"/>
+            </a:solidFill>
+            <a:prstDash val="solid"/>
+          </a:ln>
+        </p:spPr>
+      </p:sp>
+      <p:sp>
+        <p:nvSpPr>
+          <p:cNvPr id="4" name="Text 2"/>
+          <p:cNvSpPr/>
+          <p:nvPr/>
+        </p:nvSpPr>
+        <p:spPr>
+          <a:xfrm>
+            <a:off x="502920" y="292608"/>
+            <a:ext cx="10149840" cy="256032"/>
+          </a:xfrm>
+          <a:prstGeom prst="rect">
+            <a:avLst/>
+          </a:prstGeom>
+          <a:noFill/>
+          <a:ln/>
+        </p:spPr>
+        <p:txBody>
+          <a:bodyPr wrap="square" lIns="0" tIns="0" rIns="0" bIns="0" rtlCol="0" anchor="ctr"/>
+          <a:lstStyle/>
+          <a:p>
+            <a:pPr indent="0" marL="0">
+              <a:buNone/>
+            </a:pPr>
+            <a:r>
+              <a:rPr lang="en-US" sz="900" b="1" dirty="0">
+                <a:solidFill>
+                  <a:srgbClr val="5F7181"/>
+                </a:solidFill>
+                <a:latin typeface="Aptos" pitchFamily="34" charset="0"/>
+                <a:ea typeface="Aptos" pitchFamily="34" charset="-122"/>
+                <a:cs typeface="Aptos" pitchFamily="34" charset="-120"/>
+              </a:rPr>
+              <a:t>AI for Public Health Communications and Message Development</a:t>
+            </a:r>
+            <a:endParaRPr lang="en-US" sz="900" dirty="0"/>
+          </a:p>
+        </p:txBody>
+      </p:sp>
+      <p:sp>
+        <p:nvSpPr>
+          <p:cNvPr id="5" name="Text 3"/>
+          <p:cNvSpPr/>
+          <p:nvPr/>
+        </p:nvSpPr>
+        <p:spPr>
+          <a:xfrm>
+            <a:off x="502920" y="6537960"/>
+            <a:ext cx="7772400" cy="201168"/>
+          </a:xfrm>
+          <a:prstGeom prst="rect">
+            <a:avLst/>
+          </a:prstGeom>
+          <a:noFill/>
+          <a:ln/>
+        </p:spPr>
+        <p:txBody>
+          <a:bodyPr wrap="square" lIns="0" tIns="0" rIns="0" bIns="0" rtlCol="0" anchor="ctr"/>
+          <a:lstStyle/>
+          <a:p>
+            <a:pPr indent="0" marL="0">
+              <a:buNone/>
+            </a:pPr>
+            <a:r>
+              <a:rPr lang="en-US" sz="800" dirty="0">
+                <a:solidFill>
+                  <a:srgbClr val="5F7181"/>
+                </a:solidFill>
+                <a:latin typeface="Aptos" pitchFamily="34" charset="0"/>
+                <a:ea typeface="Aptos" pitchFamily="34" charset="-122"/>
+                <a:cs typeface="Aptos" pitchFamily="34" charset="-120"/>
+              </a:rPr>
+              <a:t>AI Playbook and Toolkit for Public Health Departments</a:t>
+            </a:r>
+            <a:endParaRPr lang="en-US" sz="800" dirty="0"/>
+          </a:p>
+        </p:txBody>
+      </p:sp>
+      <p:sp>
+        <p:nvSpPr>
+          <p:cNvPr id="6" name="Text 4"/>
+          <p:cNvSpPr/>
+          <p:nvPr/>
+        </p:nvSpPr>
+        <p:spPr>
+          <a:xfrm>
+            <a:off x="9966960" y="6537960"/>
+            <a:ext cx="1645920" cy="201168"/>
+          </a:xfrm>
+          <a:prstGeom prst="rect">
+            <a:avLst/>
+          </a:prstGeom>
+          <a:noFill/>
+          <a:ln/>
+        </p:spPr>
+        <p:txBody>
+          <a:bodyPr wrap="square" lIns="0" tIns="0" rIns="0" bIns="0" rtlCol="0" anchor="ctr"/>
+          <a:lstStyle/>
+          <a:p>
+            <a:pPr algn="r" indent="0" marL="0">
+              <a:buNone/>
+            </a:pPr>
+            <a:r>
+              <a:rPr lang="en-US" sz="800" dirty="0">
+                <a:solidFill>
+                  <a:srgbClr val="5F7181"/>
+                </a:solidFill>
+                <a:latin typeface="Aptos" pitchFamily="34" charset="0"/>
+                <a:ea typeface="Aptos" pitchFamily="34" charset="-122"/>
+                <a:cs typeface="Aptos" pitchFamily="34" charset="-120"/>
+              </a:rPr>
+              <a:t>© Paula Soper</a:t>
+            </a:r>
+            <a:endParaRPr lang="en-US" sz="800" dirty="0"/>
+          </a:p>
+        </p:txBody>
+      </p:sp>
+      <p:sp>
+        <p:nvSpPr>
+          <p:cNvPr id="7" name="Text 5"/>
+          <p:cNvSpPr/>
+          <p:nvPr/>
+        </p:nvSpPr>
+        <p:spPr>
+          <a:xfrm>
+            <a:off x="640080" y="658368"/>
+            <a:ext cx="10881360" cy="566928"/>
+          </a:xfrm>
+          <a:prstGeom prst="rect">
+            <a:avLst/>
+          </a:prstGeom>
+          <a:noFill/>
+          <a:ln/>
+        </p:spPr>
+        <p:txBody>
+          <a:bodyPr wrap="square" lIns="0" tIns="0" rIns="0" bIns="0" rtlCol="0" anchor="ctr">
+            <a:normAutofit/>
+          </a:bodyPr>
+          <a:lstStyle/>
+          <a:p>
+            <a:pPr indent="0" marL="0">
+              <a:buNone/>
+            </a:pPr>
+            <a:r>
+              <a:rPr lang="en-US" sz="2700" b="1" dirty="0">
+                <a:solidFill>
+                  <a:srgbClr val="003A63"/>
+                </a:solidFill>
+                <a:latin typeface="Aptos Display" pitchFamily="34" charset="0"/>
+                <a:ea typeface="Aptos Display" pitchFamily="34" charset="-122"/>
+                <a:cs typeface="Aptos Display" pitchFamily="34" charset="-120"/>
+              </a:rPr>
+              <a:t>References and Resources Continued</a:t>
+            </a:r>
+            <a:endParaRPr lang="en-US" sz="2700" dirty="0"/>
+          </a:p>
+        </p:txBody>
+      </p:sp>
+      <p:sp>
+        <p:nvSpPr>
+          <p:cNvPr id="8" name="Text 6"/>
+          <p:cNvSpPr/>
+          <p:nvPr/>
+        </p:nvSpPr>
+        <p:spPr>
+          <a:xfrm>
+            <a:off x="868680" y="1417320"/>
+            <a:ext cx="6675120" cy="4434840"/>
+          </a:xfrm>
+          <a:prstGeom prst="rect">
+            <a:avLst/>
+          </a:prstGeom>
+          <a:noFill/>
+          <a:ln/>
+        </p:spPr>
+        <p:txBody>
+          <a:bodyPr wrap="square" lIns="635" tIns="635" rIns="635" bIns="635" rtlCol="0" anchor="t">
+            <a:normAutofit/>
+          </a:bodyPr>
+          <a:lstStyle/>
+          <a:p>
+            <a:r>
+              <a:rPr lang="en-US" sz="1700" dirty="0">
+                <a:solidFill>
+                  <a:srgbClr val="17364A"/>
+                </a:solidFill>
+                <a:latin typeface="Aptos" pitchFamily="34" charset="0"/>
+                <a:ea typeface="Aptos" pitchFamily="34" charset="-122"/>
+                <a:cs typeface="Aptos" pitchFamily="34" charset="-120"/>
+              </a:rPr>
               <a:t>Relevant public health program SOPs, data governance documentation, and implementation plans</a:t>
             </a:r>
-            <a:endParaRPr lang="en-US" sz="1450" dirty="0"/>
+            <a:endParaRPr lang="en-US" sz="1700" dirty="0"/>
+          </a:p>
+        </p:txBody>
+      </p:sp>
+      <p:sp>
+        <p:nvSpPr>
+          <p:cNvPr id="9" name="Shape 7"/>
+          <p:cNvSpPr/>
+          <p:nvPr/>
+        </p:nvSpPr>
+        <p:spPr>
+          <a:xfrm>
+            <a:off x="7909560" y="1417320"/>
+            <a:ext cx="3154680" cy="1828800"/>
+          </a:xfrm>
+          <a:prstGeom prst="roundRect">
+            <a:avLst>
+              <a:gd name="adj" fmla="val 6000"/>
+            </a:avLst>
+          </a:prstGeom>
+          <a:solidFill>
+            <a:srgbClr val="EEF8ED"/>
+          </a:solidFill>
+          <a:ln w="12700">
+            <a:solidFill>
+              <a:srgbClr val="B9D7E6"/>
+            </a:solidFill>
+            <a:prstDash val="solid"/>
+          </a:ln>
+        </p:spPr>
+      </p:sp>
+      <p:sp>
+        <p:nvSpPr>
+          <p:cNvPr id="10" name="Text 8"/>
+          <p:cNvSpPr/>
+          <p:nvPr/>
+        </p:nvSpPr>
+        <p:spPr>
+          <a:xfrm>
+            <a:off x="8074152" y="1563624"/>
+            <a:ext cx="2825496" cy="201168"/>
+          </a:xfrm>
+          <a:prstGeom prst="rect">
+            <a:avLst/>
+          </a:prstGeom>
+          <a:noFill/>
+          <a:ln/>
+        </p:spPr>
+        <p:txBody>
+          <a:bodyPr wrap="square" lIns="0" tIns="0" rIns="0" bIns="0" rtlCol="0" anchor="ctr"/>
+          <a:lstStyle/>
+          <a:p>
+            <a:pPr indent="0" marL="0">
+              <a:buNone/>
+            </a:pPr>
+            <a:r>
+              <a:rPr lang="en-US" sz="950" b="1" dirty="0">
+                <a:solidFill>
+                  <a:srgbClr val="0068B7"/>
+                </a:solidFill>
+                <a:latin typeface="Aptos" pitchFamily="34" charset="0"/>
+                <a:ea typeface="Aptos" pitchFamily="34" charset="-122"/>
+                <a:cs typeface="Aptos" pitchFamily="34" charset="-120"/>
+              </a:rPr>
+              <a:t>Key idea</a:t>
+            </a:r>
+            <a:endParaRPr lang="en-US" sz="950" dirty="0"/>
+          </a:p>
+        </p:txBody>
+      </p:sp>
+      <p:sp>
+        <p:nvSpPr>
+          <p:cNvPr id="11" name="Text 9"/>
+          <p:cNvSpPr/>
+          <p:nvPr/>
+        </p:nvSpPr>
+        <p:spPr>
+          <a:xfrm>
+            <a:off x="8074152" y="1856232"/>
+            <a:ext cx="2825496" cy="1261872"/>
+          </a:xfrm>
+          <a:prstGeom prst="rect">
+            <a:avLst/>
+          </a:prstGeom>
+          <a:noFill/>
+          <a:ln/>
+        </p:spPr>
+        <p:txBody>
+          <a:bodyPr wrap="square" lIns="0" tIns="0" rIns="0" bIns="0" rtlCol="0" anchor="t">
+            <a:normAutofit/>
+          </a:bodyPr>
+          <a:lstStyle/>
+          <a:p>
+            <a:pPr indent="0" marL="0">
+              <a:buNone/>
+            </a:pPr>
+            <a:r>
+              <a:rPr lang="en-US" sz="1250" dirty="0">
+                <a:solidFill>
+                  <a:srgbClr val="17364A"/>
+                </a:solidFill>
+                <a:latin typeface="Aptos" pitchFamily="34" charset="0"/>
+                <a:ea typeface="Aptos" pitchFamily="34" charset="-122"/>
+                <a:cs typeface="Aptos" pitchFamily="34" charset="-120"/>
+              </a:rPr>
+              <a:t>Relevant public health program SOPs, data governance documentation, and implementation plans</a:t>
+            </a:r>
+            <a:endParaRPr lang="en-US" sz="1250" dirty="0"/>
+          </a:p>
+        </p:txBody>
+      </p:sp>
+      <p:sp>
+        <p:nvSpPr>
+          <p:cNvPr id="12" name="Shape 10"/>
+          <p:cNvSpPr/>
+          <p:nvPr/>
+        </p:nvSpPr>
+        <p:spPr>
+          <a:xfrm>
+            <a:off x="7909560" y="3520440"/>
+            <a:ext cx="3154680" cy="1737360"/>
+          </a:xfrm>
+          <a:prstGeom prst="roundRect">
+            <a:avLst>
+              <a:gd name="adj" fmla="val 6316"/>
+            </a:avLst>
+          </a:prstGeom>
+          <a:solidFill>
+            <a:srgbClr val="EAF6F8"/>
+          </a:solidFill>
+          <a:ln w="12700">
+            <a:solidFill>
+              <a:srgbClr val="B9D7E6"/>
+            </a:solidFill>
+            <a:prstDash val="solid"/>
+          </a:ln>
+        </p:spPr>
+      </p:sp>
+      <p:sp>
+        <p:nvSpPr>
+          <p:cNvPr id="13" name="Text 11"/>
+          <p:cNvSpPr/>
+          <p:nvPr/>
+        </p:nvSpPr>
+        <p:spPr>
+          <a:xfrm>
+            <a:off x="8074152" y="3666744"/>
+            <a:ext cx="2825496" cy="201168"/>
+          </a:xfrm>
+          <a:prstGeom prst="rect">
+            <a:avLst/>
+          </a:prstGeom>
+          <a:noFill/>
+          <a:ln/>
+        </p:spPr>
+        <p:txBody>
+          <a:bodyPr wrap="square" lIns="0" tIns="0" rIns="0" bIns="0" rtlCol="0" anchor="ctr"/>
+          <a:lstStyle/>
+          <a:p>
+            <a:pPr indent="0" marL="0">
+              <a:buNone/>
+            </a:pPr>
+            <a:r>
+              <a:rPr lang="en-US" sz="950" b="1" dirty="0">
+                <a:solidFill>
+                  <a:srgbClr val="0068B7"/>
+                </a:solidFill>
+                <a:latin typeface="Aptos" pitchFamily="34" charset="0"/>
+                <a:ea typeface="Aptos" pitchFamily="34" charset="-122"/>
+                <a:cs typeface="Aptos" pitchFamily="34" charset="-120"/>
+              </a:rPr>
+              <a:t>Use this for</a:t>
+            </a:r>
+            <a:endParaRPr lang="en-US" sz="950" dirty="0"/>
+          </a:p>
+        </p:txBody>
+      </p:sp>
+      <p:sp>
+        <p:nvSpPr>
+          <p:cNvPr id="14" name="Text 12"/>
+          <p:cNvSpPr/>
+          <p:nvPr/>
+        </p:nvSpPr>
+        <p:spPr>
+          <a:xfrm>
+            <a:off x="8074152" y="3959352"/>
+            <a:ext cx="2825496" cy="1170432"/>
+          </a:xfrm>
+          <a:prstGeom prst="rect">
+            <a:avLst/>
+          </a:prstGeom>
+          <a:noFill/>
+          <a:ln/>
+        </p:spPr>
+        <p:txBody>
+          <a:bodyPr wrap="square" lIns="0" tIns="0" rIns="0" bIns="0" rtlCol="0" anchor="t">
+            <a:normAutofit/>
+          </a:bodyPr>
+          <a:lstStyle/>
+          <a:p>
+            <a:pPr indent="0" marL="0">
+              <a:buNone/>
+            </a:pPr>
+            <a:r>
+              <a:rPr lang="en-US" sz="1250" dirty="0">
+                <a:solidFill>
+                  <a:srgbClr val="17364A"/>
+                </a:solidFill>
+                <a:latin typeface="Aptos" pitchFamily="34" charset="0"/>
+                <a:ea typeface="Aptos" pitchFamily="34" charset="-122"/>
+                <a:cs typeface="Aptos" pitchFamily="34" charset="-120"/>
+              </a:rPr>
+              <a:t>Connect the concept to public health decisions, safeguards, documentation, or implementation work.</a:t>
+            </a:r>
+            <a:endParaRPr lang="en-US" sz="1250" dirty="0"/>
           </a:p>
         </p:txBody>
       </p:sp>
@@ -6513,7 +11419,32 @@
       </p:sp>
       <p:sp>
         <p:nvSpPr>
-          <p:cNvPr id="3" name="Text 1"/>
+          <p:cNvPr id="3" name="Shape 1"/>
+          <p:cNvSpPr/>
+          <p:nvPr/>
+        </p:nvSpPr>
+        <p:spPr>
+          <a:xfrm>
+            <a:off x="0" y="164592"/>
+            <a:ext cx="146304" cy="6693408"/>
+          </a:xfrm>
+          <a:prstGeom prst="rect">
+            <a:avLst/>
+          </a:prstGeom>
+          <a:solidFill>
+            <a:srgbClr val="2F8A28"/>
+          </a:solidFill>
+          <a:ln w="12700">
+            <a:solidFill>
+              <a:srgbClr val="2F8A28"/>
+            </a:solidFill>
+            <a:prstDash val="solid"/>
+          </a:ln>
+        </p:spPr>
+      </p:sp>
+      <p:sp>
+        <p:nvSpPr>
+          <p:cNvPr id="4" name="Text 2"/>
           <p:cNvSpPr/>
           <p:nvPr/>
         </p:nvSpPr>
@@ -6552,7 +11483,7 @@
       </p:sp>
       <p:sp>
         <p:nvSpPr>
-          <p:cNvPr id="4" name="Text 2"/>
+          <p:cNvPr id="5" name="Text 3"/>
           <p:cNvSpPr/>
           <p:nvPr/>
         </p:nvSpPr>
@@ -6591,7 +11522,7 @@
       </p:sp>
       <p:sp>
         <p:nvSpPr>
-          <p:cNvPr id="5" name="Text 3"/>
+          <p:cNvPr id="6" name="Text 4"/>
           <p:cNvSpPr/>
           <p:nvPr/>
         </p:nvSpPr>
@@ -6630,7 +11561,7 @@
       </p:sp>
       <p:sp>
         <p:nvSpPr>
-          <p:cNvPr id="6" name="Text 4"/>
+          <p:cNvPr id="7" name="Text 5"/>
           <p:cNvSpPr/>
           <p:nvPr/>
         </p:nvSpPr>
@@ -6663,7 +11594,7 @@
                 <a:ea typeface="Aptos Display" pitchFamily="34" charset="-122"/>
                 <a:cs typeface="Aptos Display" pitchFamily="34" charset="-120"/>
               </a:rPr>
-              <a:t>Learning Objectives</a:t>
+              <a:t>How this module connects to the playbook</a:t>
             </a:r>
             <a:endParaRPr lang="en-US" sz="2700" dirty="0"/>
           </a:p>
@@ -6671,14 +11602,14 @@
       </p:sp>
       <p:sp>
         <p:nvSpPr>
-          <p:cNvPr id="7" name="Text 5"/>
-          <p:cNvSpPr/>
-          <p:nvPr/>
-        </p:nvSpPr>
-        <p:spPr>
-          <a:xfrm>
-            <a:off x="822960" y="1325880"/>
-            <a:ext cx="10378440" cy="4800600"/>
+          <p:cNvPr id="8" name="Text 6"/>
+          <p:cNvSpPr/>
+          <p:nvPr/>
+        </p:nvSpPr>
+        <p:spPr>
+          <a:xfrm>
+            <a:off x="868680" y="1417320"/>
+            <a:ext cx="6903720" cy="4480560"/>
           </a:xfrm>
           <a:prstGeom prst="rect">
             <a:avLst/>
@@ -6693,7 +11624,7 @@
           <a:lstStyle/>
           <a:p>
             <a:r>
-              <a:rPr lang="en-US" sz="1450" dirty="0">
+              <a:rPr lang="en-US" sz="1540" dirty="0">
                 <a:solidFill>
                   <a:srgbClr val="17364A"/>
                 </a:solidFill>
@@ -6701,13 +11632,13 @@
                 <a:ea typeface="Aptos" pitchFamily="34" charset="-122"/>
                 <a:cs typeface="Aptos" pitchFamily="34" charset="-120"/>
               </a:rPr>
-              <a:t>Identify appropriate and inappropriate uses of AI in public health communications.</a:t>
-            </a:r>
-            <a:endParaRPr lang="en-US" sz="1450" dirty="0"/>
-          </a:p>
-          <a:p>
-            <a:r>
-              <a:rPr lang="en-US" sz="1450" dirty="0">
+              <a:t>Play 11: Build and Deploy AI Solutions - This lesson informs Play 11 by helping learners connect the lesson topic to build and deploy.</a:t>
+            </a:r>
+            <a:endParaRPr lang="en-US" sz="1540" dirty="0"/>
+          </a:p>
+          <a:p>
+            <a:r>
+              <a:rPr lang="en-US" sz="1540" dirty="0">
                 <a:solidFill>
                   <a:srgbClr val="17364A"/>
                 </a:solidFill>
@@ -6715,13 +11646,13 @@
                 <a:ea typeface="Aptos" pitchFamily="34" charset="-122"/>
                 <a:cs typeface="Aptos" pitchFamily="34" charset="-120"/>
               </a:rPr>
-              <a:t>Apply source verification, plain language, accessibility, and equity review to AI-generated messages.</a:t>
-            </a:r>
-            <a:endParaRPr lang="en-US" sz="1450" dirty="0"/>
-          </a:p>
-          <a:p>
-            <a:r>
-              <a:rPr lang="en-US" sz="1450" dirty="0">
+              <a:t>Play 3: Establish AI Governance - This lesson informs Play 3 by helping learners connect the lesson topic to establish ai governance.</a:t>
+            </a:r>
+            <a:endParaRPr lang="en-US" sz="1540" dirty="0"/>
+          </a:p>
+          <a:p>
+            <a:r>
+              <a:rPr lang="en-US" sz="1540" dirty="0">
                 <a:solidFill>
                   <a:srgbClr val="17364A"/>
                 </a:solidFill>
@@ -6729,13 +11660,13 @@
                 <a:ea typeface="Aptos" pitchFamily="34" charset="-122"/>
                 <a:cs typeface="Aptos" pitchFamily="34" charset="-120"/>
               </a:rPr>
-              <a:t>Design a human review workflow for AI-assisted public-facing communications.</a:t>
-            </a:r>
-            <a:endParaRPr lang="en-US" sz="1450" dirty="0"/>
-          </a:p>
-          <a:p>
-            <a:r>
-              <a:rPr lang="en-US" sz="1450" dirty="0">
+              <a:t>Play 1: Vision &amp; Guardrails - This lesson informs Play 1 by helping learners connect the lesson topic to vision &amp; guardrails work in.</a:t>
+            </a:r>
+            <a:endParaRPr lang="en-US" sz="1540" dirty="0"/>
+          </a:p>
+          <a:p>
+            <a:r>
+              <a:rPr lang="en-US" sz="1540" dirty="0">
                 <a:solidFill>
                   <a:srgbClr val="17364A"/>
                 </a:solidFill>
@@ -6743,13 +11674,106 @@
                 <a:ea typeface="Aptos" pitchFamily="34" charset="-122"/>
                 <a:cs typeface="Aptos" pitchFamily="34" charset="-120"/>
               </a:rPr>
-              <a:t>Recognize misinformation, overstatement, missing uncertainty, and stigmatizing language risks.</a:t>
-            </a:r>
-            <a:endParaRPr lang="en-US" sz="1450" dirty="0"/>
-          </a:p>
-          <a:p>
-            <a:r>
-              <a:rPr lang="en-US" sz="1450" dirty="0">
+              <a:t>Play 2: Readiness Assessment - This lesson informs Play 2 by helping learners connect the lesson topic to readiness assessment work.</a:t>
+            </a:r>
+            <a:endParaRPr lang="en-US" sz="1540" dirty="0"/>
+          </a:p>
+        </p:txBody>
+      </p:sp>
+      <p:sp>
+        <p:nvSpPr>
+          <p:cNvPr id="9" name="Shape 7"/>
+          <p:cNvSpPr/>
+          <p:nvPr/>
+        </p:nvSpPr>
+        <p:spPr>
+          <a:xfrm>
+            <a:off x="8046720" y="1417320"/>
+            <a:ext cx="3063240" cy="2103120"/>
+          </a:xfrm>
+          <a:prstGeom prst="roundRect">
+            <a:avLst>
+              <a:gd name="adj" fmla="val 5217"/>
+            </a:avLst>
+          </a:prstGeom>
+          <a:solidFill>
+            <a:srgbClr val="EEF8ED"/>
+          </a:solidFill>
+          <a:ln w="12700">
+            <a:solidFill>
+              <a:srgbClr val="B9D7E6"/>
+            </a:solidFill>
+            <a:prstDash val="solid"/>
+          </a:ln>
+        </p:spPr>
+      </p:sp>
+      <p:sp>
+        <p:nvSpPr>
+          <p:cNvPr id="10" name="Text 8"/>
+          <p:cNvSpPr/>
+          <p:nvPr/>
+        </p:nvSpPr>
+        <p:spPr>
+          <a:xfrm>
+            <a:off x="8211312" y="1563624"/>
+            <a:ext cx="2734056" cy="201168"/>
+          </a:xfrm>
+          <a:prstGeom prst="rect">
+            <a:avLst/>
+          </a:prstGeom>
+          <a:noFill/>
+          <a:ln/>
+        </p:spPr>
+        <p:txBody>
+          <a:bodyPr wrap="square" lIns="0" tIns="0" rIns="0" bIns="0" rtlCol="0" anchor="ctr"/>
+          <a:lstStyle/>
+          <a:p>
+            <a:pPr indent="0" marL="0">
+              <a:buNone/>
+            </a:pPr>
+            <a:r>
+              <a:rPr lang="en-US" sz="950" b="1" dirty="0">
+                <a:solidFill>
+                  <a:srgbClr val="0068B7"/>
+                </a:solidFill>
+                <a:latin typeface="Aptos" pitchFamily="34" charset="0"/>
+                <a:ea typeface="Aptos" pitchFamily="34" charset="-122"/>
+                <a:cs typeface="Aptos" pitchFamily="34" charset="-120"/>
+              </a:rPr>
+              <a:t>Apply the lesson</a:t>
+            </a:r>
+            <a:endParaRPr lang="en-US" sz="950" dirty="0"/>
+          </a:p>
+        </p:txBody>
+      </p:sp>
+      <p:sp>
+        <p:nvSpPr>
+          <p:cNvPr id="11" name="Text 9"/>
+          <p:cNvSpPr/>
+          <p:nvPr/>
+        </p:nvSpPr>
+        <p:spPr>
+          <a:xfrm>
+            <a:off x="8211312" y="1856232"/>
+            <a:ext cx="2734056" cy="1536192"/>
+          </a:xfrm>
+          <a:prstGeom prst="rect">
+            <a:avLst/>
+          </a:prstGeom>
+          <a:noFill/>
+          <a:ln/>
+        </p:spPr>
+        <p:txBody>
+          <a:bodyPr wrap="square" lIns="0" tIns="0" rIns="0" bIns="0" rtlCol="0" anchor="t">
+            <a:normAutofit/>
+          </a:bodyPr>
+          <a:lstStyle/>
+          <a:p>
+            <a:pPr indent="0" marL="0">
+              <a:buNone/>
+            </a:pPr>
+            <a:r>
+              <a:rPr lang="en-US" sz="1250" dirty="0">
                 <a:solidFill>
                   <a:srgbClr val="17364A"/>
                 </a:solidFill>
@@ -6757,9 +11781,116 @@
                 <a:ea typeface="Aptos" pitchFamily="34" charset="-122"/>
                 <a:cs typeface="Aptos" pitchFamily="34" charset="-120"/>
               </a:rPr>
-              <a:t>Produce an AI-assisted communications review checklist.</a:t>
-            </a:r>
-            <a:endParaRPr lang="en-US" sz="1450" dirty="0"/>
+              <a:t>Use the related plays to identify decisions, participants, timing, approvals, and documentation needed for responsible implementation.</a:t>
+            </a:r>
+            <a:endParaRPr lang="en-US" sz="1250" dirty="0"/>
+          </a:p>
+        </p:txBody>
+      </p:sp>
+      <p:sp>
+        <p:nvSpPr>
+          <p:cNvPr id="12" name="Shape 10"/>
+          <p:cNvSpPr/>
+          <p:nvPr/>
+        </p:nvSpPr>
+        <p:spPr>
+          <a:xfrm>
+            <a:off x="8046720" y="3794760"/>
+            <a:ext cx="3063240" cy="1508760"/>
+          </a:xfrm>
+          <a:prstGeom prst="roundRect">
+            <a:avLst>
+              <a:gd name="adj" fmla="val 7273"/>
+            </a:avLst>
+          </a:prstGeom>
+          <a:solidFill>
+            <a:srgbClr val="FFF4D9"/>
+          </a:solidFill>
+          <a:ln w="12700">
+            <a:solidFill>
+              <a:srgbClr val="B9D7E6"/>
+            </a:solidFill>
+            <a:prstDash val="solid"/>
+          </a:ln>
+        </p:spPr>
+      </p:sp>
+      <p:sp>
+        <p:nvSpPr>
+          <p:cNvPr id="13" name="Text 11"/>
+          <p:cNvSpPr/>
+          <p:nvPr/>
+        </p:nvSpPr>
+        <p:spPr>
+          <a:xfrm>
+            <a:off x="8211312" y="3941064"/>
+            <a:ext cx="2734056" cy="201168"/>
+          </a:xfrm>
+          <a:prstGeom prst="rect">
+            <a:avLst/>
+          </a:prstGeom>
+          <a:noFill/>
+          <a:ln/>
+        </p:spPr>
+        <p:txBody>
+          <a:bodyPr wrap="square" lIns="0" tIns="0" rIns="0" bIns="0" rtlCol="0" anchor="ctr"/>
+          <a:lstStyle/>
+          <a:p>
+            <a:pPr indent="0" marL="0">
+              <a:buNone/>
+            </a:pPr>
+            <a:r>
+              <a:rPr lang="en-US" sz="950" b="1" dirty="0">
+                <a:solidFill>
+                  <a:srgbClr val="0068B7"/>
+                </a:solidFill>
+                <a:latin typeface="Aptos" pitchFamily="34" charset="0"/>
+                <a:ea typeface="Aptos" pitchFamily="34" charset="-122"/>
+                <a:cs typeface="Aptos" pitchFamily="34" charset="-120"/>
+              </a:rPr>
+              <a:t>Keep in mind</a:t>
+            </a:r>
+            <a:endParaRPr lang="en-US" sz="950" dirty="0"/>
+          </a:p>
+        </p:txBody>
+      </p:sp>
+      <p:sp>
+        <p:nvSpPr>
+          <p:cNvPr id="14" name="Text 12"/>
+          <p:cNvSpPr/>
+          <p:nvPr/>
+        </p:nvSpPr>
+        <p:spPr>
+          <a:xfrm>
+            <a:off x="8211312" y="4233672"/>
+            <a:ext cx="2734056" cy="941832"/>
+          </a:xfrm>
+          <a:prstGeom prst="rect">
+            <a:avLst/>
+          </a:prstGeom>
+          <a:noFill/>
+          <a:ln/>
+        </p:spPr>
+        <p:txBody>
+          <a:bodyPr wrap="square" lIns="0" tIns="0" rIns="0" bIns="0" rtlCol="0" anchor="t">
+            <a:normAutofit/>
+          </a:bodyPr>
+          <a:lstStyle/>
+          <a:p>
+            <a:pPr indent="0" marL="0">
+              <a:buNone/>
+            </a:pPr>
+            <a:r>
+              <a:rPr lang="en-US" sz="1250" dirty="0">
+                <a:solidFill>
+                  <a:srgbClr val="17364A"/>
+                </a:solidFill>
+                <a:latin typeface="Aptos" pitchFamily="34" charset="0"/>
+                <a:ea typeface="Aptos" pitchFamily="34" charset="-122"/>
+                <a:cs typeface="Aptos" pitchFamily="34" charset="-120"/>
+              </a:rPr>
+              <a:t>The playbook connection helps turn training into agency work, not just individual knowledge.</a:t>
+            </a:r>
+            <a:endParaRPr lang="en-US" sz="1250" dirty="0"/>
           </a:p>
         </p:txBody>
       </p:sp>
@@ -6822,7 +11953,32 @@
       </p:sp>
       <p:sp>
         <p:nvSpPr>
-          <p:cNvPr id="3" name="Text 1"/>
+          <p:cNvPr id="3" name="Shape 1"/>
+          <p:cNvSpPr/>
+          <p:nvPr/>
+        </p:nvSpPr>
+        <p:spPr>
+          <a:xfrm>
+            <a:off x="0" y="164592"/>
+            <a:ext cx="146304" cy="6693408"/>
+          </a:xfrm>
+          <a:prstGeom prst="rect">
+            <a:avLst/>
+          </a:prstGeom>
+          <a:solidFill>
+            <a:srgbClr val="2F8A28"/>
+          </a:solidFill>
+          <a:ln w="12700">
+            <a:solidFill>
+              <a:srgbClr val="2F8A28"/>
+            </a:solidFill>
+            <a:prstDash val="solid"/>
+          </a:ln>
+        </p:spPr>
+      </p:sp>
+      <p:sp>
+        <p:nvSpPr>
+          <p:cNvPr id="4" name="Text 2"/>
           <p:cNvSpPr/>
           <p:nvPr/>
         </p:nvSpPr>
@@ -6861,7 +12017,7 @@
       </p:sp>
       <p:sp>
         <p:nvSpPr>
-          <p:cNvPr id="4" name="Text 2"/>
+          <p:cNvPr id="5" name="Text 3"/>
           <p:cNvSpPr/>
           <p:nvPr/>
         </p:nvSpPr>
@@ -6900,7 +12056,7 @@
       </p:sp>
       <p:sp>
         <p:nvSpPr>
-          <p:cNvPr id="5" name="Text 3"/>
+          <p:cNvPr id="6" name="Text 4"/>
           <p:cNvSpPr/>
           <p:nvPr/>
         </p:nvSpPr>
@@ -6939,7 +12095,7 @@
       </p:sp>
       <p:sp>
         <p:nvSpPr>
-          <p:cNvPr id="6" name="Text 4"/>
+          <p:cNvPr id="7" name="Text 5"/>
           <p:cNvSpPr/>
           <p:nvPr/>
         </p:nvSpPr>
@@ -6972,7 +12128,7 @@
                 <a:ea typeface="Aptos Display" pitchFamily="34" charset="-122"/>
                 <a:cs typeface="Aptos Display" pitchFamily="34" charset="-120"/>
               </a:rPr>
-              <a:t>Module Overview</a:t>
+              <a:t>Related toolkit resources</a:t>
             </a:r>
             <a:endParaRPr lang="en-US" sz="2700" dirty="0"/>
           </a:p>
@@ -6980,32 +12136,29 @@
       </p:sp>
       <p:sp>
         <p:nvSpPr>
-          <p:cNvPr id="7" name="Text 5"/>
-          <p:cNvSpPr/>
-          <p:nvPr/>
-        </p:nvSpPr>
-        <p:spPr>
-          <a:xfrm>
-            <a:off x="822960" y="1325880"/>
-            <a:ext cx="10378440" cy="4800600"/>
-          </a:xfrm>
-          <a:prstGeom prst="rect">
-            <a:avLst/>
-          </a:prstGeom>
-          <a:noFill/>
-          <a:ln/>
-        </p:spPr>
-        <p:txBody>
-          <a:bodyPr wrap="square" lIns="1016" tIns="1016" rIns="1016" bIns="1016" rtlCol="0" anchor="t">
+          <p:cNvPr id="8" name="Text 6"/>
+          <p:cNvSpPr/>
+          <p:nvPr/>
+        </p:nvSpPr>
+        <p:spPr>
+          <a:xfrm>
+            <a:off x="868680" y="1417320"/>
+            <a:ext cx="6903720" cy="4480560"/>
+          </a:xfrm>
+          <a:prstGeom prst="rect">
+            <a:avLst/>
+          </a:prstGeom>
+          <a:noFill/>
+          <a:ln/>
+        </p:spPr>
+        <p:txBody>
+          <a:bodyPr wrap="square" lIns="635" tIns="635" rIns="635" bIns="635" rtlCol="0" anchor="t">
             <a:normAutofit/>
           </a:bodyPr>
           <a:lstStyle/>
           <a:p>
-            <a:pPr indent="0" marL="0">
-              <a:buNone/>
-            </a:pPr>
-            <a:r>
-              <a:rPr lang="en-US" sz="1420" dirty="0">
+            <a:r>
+              <a:rPr lang="en-US" sz="1460" dirty="0">
                 <a:solidFill>
                   <a:srgbClr val="17364A"/>
                 </a:solidFill>
@@ -7013,9 +12166,279 @@
                 <a:ea typeface="Aptos" pitchFamily="34" charset="-122"/>
                 <a:cs typeface="Aptos" pitchFamily="34" charset="-120"/>
               </a:rPr>
-              <a:t>Generative AI can support public health communications by helping staff draft, revise, simplify, translate, tailor, and test messages. However, public health communication carries high trust, equity, accessibility, and accuracy obligations. AI-generated text can sound clear and authoritative while misstating evidence, omitting uncertainty, using stigmatizing language, failing to meet accessibility needs, or creating messages that do not fit community context. This module teaches communications staff and program partners how to use AI as a drafting and review aid while preserving human accountability. It focuses on public-facing messages, internal communications, plain language, community relevance, multilingual communication, misinformation risks, and review workflows. The goal is not to replace skilled communicators. The goal is to help communications teams use AI safely for efficiency, brainstorming, and consistency while retaining professional judgment, source verification, community review, and public trust.</a:t>
-            </a:r>
-            <a:endParaRPr lang="en-US" sz="1420" dirty="0"/>
+              <a:t>Tool 4: AI Policy Landscape Scan (Worksheet) - Use AI Policy Landscape Scan to translate this lesson into a documented public health.</a:t>
+            </a:r>
+            <a:endParaRPr lang="en-US" sz="1460" dirty="0"/>
+          </a:p>
+          <a:p>
+            <a:r>
+              <a:rPr lang="en-US" sz="1460" dirty="0">
+                <a:solidFill>
+                  <a:srgbClr val="17364A"/>
+                </a:solidFill>
+                <a:latin typeface="Aptos" pitchFamily="34" charset="0"/>
+                <a:ea typeface="Aptos" pitchFamily="34" charset="-122"/>
+                <a:cs typeface="Aptos" pitchFamily="34" charset="-120"/>
+              </a:rPr>
+              <a:t>Tool 5: AI Environmental and Resource Impact Review (Checklist) - Use AI Environmental and Resource Impact Review to translate this.</a:t>
+            </a:r>
+            <a:endParaRPr lang="en-US" sz="1460" dirty="0"/>
+          </a:p>
+          <a:p>
+            <a:r>
+              <a:rPr lang="en-US" sz="1460" dirty="0">
+                <a:solidFill>
+                  <a:srgbClr val="17364A"/>
+                </a:solidFill>
+                <a:latin typeface="Aptos" pitchFamily="34" charset="0"/>
+                <a:ea typeface="Aptos" pitchFamily="34" charset="-122"/>
+                <a:cs typeface="Aptos" pitchFamily="34" charset="-120"/>
+              </a:rPr>
+              <a:t>Tool 6: Human-Centered AI Decision Rule Checklist (Checklist) - Use this tool to complete or strengthen the practical exercise for.</a:t>
+            </a:r>
+            <a:endParaRPr lang="en-US" sz="1460" dirty="0"/>
+          </a:p>
+          <a:p>
+            <a:r>
+              <a:rPr lang="en-US" sz="1460" dirty="0">
+                <a:solidFill>
+                  <a:srgbClr val="17364A"/>
+                </a:solidFill>
+                <a:latin typeface="Aptos" pitchFamily="34" charset="0"/>
+                <a:ea typeface="Aptos" pitchFamily="34" charset="-122"/>
+                <a:cs typeface="Aptos" pitchFamily="34" charset="-120"/>
+              </a:rPr>
+              <a:t>Tool 8: AI Project Charter (Planning) - Use AI Project Charter to translate this lesson into a documented public health AI planning,.</a:t>
+            </a:r>
+            <a:endParaRPr lang="en-US" sz="1460" dirty="0"/>
+          </a:p>
+          <a:p>
+            <a:r>
+              <a:rPr lang="en-US" sz="1460" dirty="0">
+                <a:solidFill>
+                  <a:srgbClr val="17364A"/>
+                </a:solidFill>
+                <a:latin typeface="Aptos" pitchFamily="34" charset="0"/>
+                <a:ea typeface="Aptos" pitchFamily="34" charset="-122"/>
+                <a:cs typeface="Aptos" pitchFamily="34" charset="-120"/>
+              </a:rPr>
+              <a:t>Tool 9: Data Quality Assessment Checklist (Checklist) - Use this tool to complete or strengthen the practical exercise for the module.</a:t>
+            </a:r>
+            <a:endParaRPr lang="en-US" sz="1460" dirty="0"/>
+          </a:p>
+        </p:txBody>
+      </p:sp>
+      <p:sp>
+        <p:nvSpPr>
+          <p:cNvPr id="9" name="Shape 7"/>
+          <p:cNvSpPr/>
+          <p:nvPr/>
+        </p:nvSpPr>
+        <p:spPr>
+          <a:xfrm>
+            <a:off x="8046720" y="1417320"/>
+            <a:ext cx="3063240" cy="2103120"/>
+          </a:xfrm>
+          <a:prstGeom prst="roundRect">
+            <a:avLst>
+              <a:gd name="adj" fmla="val 5217"/>
+            </a:avLst>
+          </a:prstGeom>
+          <a:solidFill>
+            <a:srgbClr val="EAF6F8"/>
+          </a:solidFill>
+          <a:ln w="12700">
+            <a:solidFill>
+              <a:srgbClr val="B9D7E6"/>
+            </a:solidFill>
+            <a:prstDash val="solid"/>
+          </a:ln>
+        </p:spPr>
+      </p:sp>
+      <p:sp>
+        <p:nvSpPr>
+          <p:cNvPr id="10" name="Text 8"/>
+          <p:cNvSpPr/>
+          <p:nvPr/>
+        </p:nvSpPr>
+        <p:spPr>
+          <a:xfrm>
+            <a:off x="8211312" y="1563624"/>
+            <a:ext cx="2734056" cy="201168"/>
+          </a:xfrm>
+          <a:prstGeom prst="rect">
+            <a:avLst/>
+          </a:prstGeom>
+          <a:noFill/>
+          <a:ln/>
+        </p:spPr>
+        <p:txBody>
+          <a:bodyPr wrap="square" lIns="0" tIns="0" rIns="0" bIns="0" rtlCol="0" anchor="ctr"/>
+          <a:lstStyle/>
+          <a:p>
+            <a:pPr indent="0" marL="0">
+              <a:buNone/>
+            </a:pPr>
+            <a:r>
+              <a:rPr lang="en-US" sz="950" b="1" dirty="0">
+                <a:solidFill>
+                  <a:srgbClr val="0068B7"/>
+                </a:solidFill>
+                <a:latin typeface="Aptos" pitchFamily="34" charset="0"/>
+                <a:ea typeface="Aptos" pitchFamily="34" charset="-122"/>
+                <a:cs typeface="Aptos" pitchFamily="34" charset="-120"/>
+              </a:rPr>
+              <a:t>Use the tools</a:t>
+            </a:r>
+            <a:endParaRPr lang="en-US" sz="950" dirty="0"/>
+          </a:p>
+        </p:txBody>
+      </p:sp>
+      <p:sp>
+        <p:nvSpPr>
+          <p:cNvPr id="11" name="Text 9"/>
+          <p:cNvSpPr/>
+          <p:nvPr/>
+        </p:nvSpPr>
+        <p:spPr>
+          <a:xfrm>
+            <a:off x="8211312" y="1856232"/>
+            <a:ext cx="2734056" cy="1536192"/>
+          </a:xfrm>
+          <a:prstGeom prst="rect">
+            <a:avLst/>
+          </a:prstGeom>
+          <a:noFill/>
+          <a:ln/>
+        </p:spPr>
+        <p:txBody>
+          <a:bodyPr wrap="square" lIns="0" tIns="0" rIns="0" bIns="0" rtlCol="0" anchor="t">
+            <a:normAutofit/>
+          </a:bodyPr>
+          <a:lstStyle/>
+          <a:p>
+            <a:pPr indent="0" marL="0">
+              <a:buNone/>
+            </a:pPr>
+            <a:r>
+              <a:rPr lang="en-US" sz="1250" dirty="0">
+                <a:solidFill>
+                  <a:srgbClr val="17364A"/>
+                </a:solidFill>
+                <a:latin typeface="Aptos" pitchFamily="34" charset="0"/>
+                <a:ea typeface="Aptos" pitchFamily="34" charset="-122"/>
+                <a:cs typeface="Aptos" pitchFamily="34" charset="-120"/>
+              </a:rPr>
+              <a:t>Use linked tools when your department needs a structured worksheet, template, checklist, review process, or documentation artifact.</a:t>
+            </a:r>
+            <a:endParaRPr lang="en-US" sz="1250" dirty="0"/>
+          </a:p>
+        </p:txBody>
+      </p:sp>
+      <p:sp>
+        <p:nvSpPr>
+          <p:cNvPr id="12" name="Shape 10"/>
+          <p:cNvSpPr/>
+          <p:nvPr/>
+        </p:nvSpPr>
+        <p:spPr>
+          <a:xfrm>
+            <a:off x="8046720" y="3794760"/>
+            <a:ext cx="3063240" cy="1508760"/>
+          </a:xfrm>
+          <a:prstGeom prst="roundRect">
+            <a:avLst>
+              <a:gd name="adj" fmla="val 7273"/>
+            </a:avLst>
+          </a:prstGeom>
+          <a:solidFill>
+            <a:srgbClr val="EEF8ED"/>
+          </a:solidFill>
+          <a:ln w="12700">
+            <a:solidFill>
+              <a:srgbClr val="B9D7E6"/>
+            </a:solidFill>
+            <a:prstDash val="solid"/>
+          </a:ln>
+        </p:spPr>
+      </p:sp>
+      <p:sp>
+        <p:nvSpPr>
+          <p:cNvPr id="13" name="Text 11"/>
+          <p:cNvSpPr/>
+          <p:nvPr/>
+        </p:nvSpPr>
+        <p:spPr>
+          <a:xfrm>
+            <a:off x="8211312" y="3941064"/>
+            <a:ext cx="2734056" cy="201168"/>
+          </a:xfrm>
+          <a:prstGeom prst="rect">
+            <a:avLst/>
+          </a:prstGeom>
+          <a:noFill/>
+          <a:ln/>
+        </p:spPr>
+        <p:txBody>
+          <a:bodyPr wrap="square" lIns="0" tIns="0" rIns="0" bIns="0" rtlCol="0" anchor="ctr"/>
+          <a:lstStyle/>
+          <a:p>
+            <a:pPr indent="0" marL="0">
+              <a:buNone/>
+            </a:pPr>
+            <a:r>
+              <a:rPr lang="en-US" sz="950" b="1" dirty="0">
+                <a:solidFill>
+                  <a:srgbClr val="0068B7"/>
+                </a:solidFill>
+                <a:latin typeface="Aptos" pitchFamily="34" charset="0"/>
+                <a:ea typeface="Aptos" pitchFamily="34" charset="-122"/>
+                <a:cs typeface="Aptos" pitchFamily="34" charset="-120"/>
+              </a:rPr>
+              <a:t>Avoid duplication</a:t>
+            </a:r>
+            <a:endParaRPr lang="en-US" sz="950" dirty="0"/>
+          </a:p>
+        </p:txBody>
+      </p:sp>
+      <p:sp>
+        <p:nvSpPr>
+          <p:cNvPr id="14" name="Text 12"/>
+          <p:cNvSpPr/>
+          <p:nvPr/>
+        </p:nvSpPr>
+        <p:spPr>
+          <a:xfrm>
+            <a:off x="8211312" y="4233672"/>
+            <a:ext cx="2734056" cy="941832"/>
+          </a:xfrm>
+          <a:prstGeom prst="rect">
+            <a:avLst/>
+          </a:prstGeom>
+          <a:noFill/>
+          <a:ln/>
+        </p:spPr>
+        <p:txBody>
+          <a:bodyPr wrap="square" lIns="0" tIns="0" rIns="0" bIns="0" rtlCol="0" anchor="t">
+            <a:normAutofit/>
+          </a:bodyPr>
+          <a:lstStyle/>
+          <a:p>
+            <a:pPr indent="0" marL="0">
+              <a:buNone/>
+            </a:pPr>
+            <a:r>
+              <a:rPr lang="en-US" sz="1250" dirty="0">
+                <a:solidFill>
+                  <a:srgbClr val="17364A"/>
+                </a:solidFill>
+                <a:latin typeface="Aptos" pitchFamily="34" charset="0"/>
+                <a:ea typeface="Aptos" pitchFamily="34" charset="-122"/>
+                <a:cs typeface="Aptos" pitchFamily="34" charset="-120"/>
+              </a:rPr>
+              <a:t>If your department already has a strong equivalent tool, adapt or use the existing process instead of recreating it.</a:t>
+            </a:r>
+            <a:endParaRPr lang="en-US" sz="1250" dirty="0"/>
           </a:p>
         </p:txBody>
       </p:sp>
@@ -7078,7 +12501,32 @@
       </p:sp>
       <p:sp>
         <p:nvSpPr>
-          <p:cNvPr id="3" name="Text 1"/>
+          <p:cNvPr id="3" name="Shape 1"/>
+          <p:cNvSpPr/>
+          <p:nvPr/>
+        </p:nvSpPr>
+        <p:spPr>
+          <a:xfrm>
+            <a:off x="0" y="164592"/>
+            <a:ext cx="146304" cy="6693408"/>
+          </a:xfrm>
+          <a:prstGeom prst="rect">
+            <a:avLst/>
+          </a:prstGeom>
+          <a:solidFill>
+            <a:srgbClr val="2F8A28"/>
+          </a:solidFill>
+          <a:ln w="12700">
+            <a:solidFill>
+              <a:srgbClr val="2F8A28"/>
+            </a:solidFill>
+            <a:prstDash val="solid"/>
+          </a:ln>
+        </p:spPr>
+      </p:sp>
+      <p:sp>
+        <p:nvSpPr>
+          <p:cNvPr id="4" name="Text 2"/>
           <p:cNvSpPr/>
           <p:nvPr/>
         </p:nvSpPr>
@@ -7117,7 +12565,7 @@
       </p:sp>
       <p:sp>
         <p:nvSpPr>
-          <p:cNvPr id="4" name="Text 2"/>
+          <p:cNvPr id="5" name="Text 3"/>
           <p:cNvSpPr/>
           <p:nvPr/>
         </p:nvSpPr>
@@ -7156,7 +12604,7 @@
       </p:sp>
       <p:sp>
         <p:nvSpPr>
-          <p:cNvPr id="5" name="Text 3"/>
+          <p:cNvPr id="6" name="Text 4"/>
           <p:cNvSpPr/>
           <p:nvPr/>
         </p:nvSpPr>
@@ -7195,13 +12643,77 @@
       </p:sp>
       <p:sp>
         <p:nvSpPr>
-          <p:cNvPr id="6" name="Text 4"/>
+          <p:cNvPr id="7" name="Shape 5"/>
           <p:cNvSpPr/>
           <p:nvPr/>
         </p:nvSpPr>
         <p:spPr>
           <a:xfrm>
             <a:off x="640080" y="658368"/>
+            <a:ext cx="420624" cy="420624"/>
+          </a:xfrm>
+          <a:prstGeom prst="ellipse">
+            <a:avLst/>
+          </a:prstGeom>
+          <a:solidFill>
+            <a:srgbClr val="0068B7"/>
+          </a:solidFill>
+          <a:ln w="12700">
+            <a:solidFill>
+              <a:srgbClr val="0068B7"/>
+            </a:solidFill>
+            <a:prstDash val="solid"/>
+          </a:ln>
+        </p:spPr>
+      </p:sp>
+      <p:sp>
+        <p:nvSpPr>
+          <p:cNvPr id="8" name="Text 6"/>
+          <p:cNvSpPr/>
+          <p:nvPr/>
+        </p:nvSpPr>
+        <p:spPr>
+          <a:xfrm>
+            <a:off x="640080" y="731520"/>
+            <a:ext cx="420624" cy="164592"/>
+          </a:xfrm>
+          <a:prstGeom prst="rect">
+            <a:avLst/>
+          </a:prstGeom>
+          <a:noFill/>
+          <a:ln/>
+        </p:spPr>
+        <p:txBody>
+          <a:bodyPr wrap="square" lIns="0" tIns="0" rIns="0" bIns="0" rtlCol="0" anchor="ctr"/>
+          <a:lstStyle/>
+          <a:p>
+            <a:pPr algn="ctr" indent="0" marL="0">
+              <a:buNone/>
+            </a:pPr>
+            <a:r>
+              <a:rPr lang="en-US" sz="1100" b="1" dirty="0">
+                <a:solidFill>
+                  <a:srgbClr val="FFFFFF"/>
+                </a:solidFill>
+                <a:latin typeface="Aptos" pitchFamily="34" charset="0"/>
+                <a:ea typeface="Aptos" pitchFamily="34" charset="-122"/>
+                <a:cs typeface="Aptos" pitchFamily="34" charset="-120"/>
+              </a:rPr>
+              <a:t>1</a:t>
+            </a:r>
+            <a:endParaRPr lang="en-US" sz="1100" dirty="0"/>
+          </a:p>
+        </p:txBody>
+      </p:sp>
+      <p:sp>
+        <p:nvSpPr>
+          <p:cNvPr id="9" name="Text 7"/>
+          <p:cNvSpPr/>
+          <p:nvPr/>
+        </p:nvSpPr>
+        <p:spPr>
+          <a:xfrm>
+            <a:off x="640080" y="621792"/>
             <a:ext cx="10881360" cy="566928"/>
           </a:xfrm>
           <a:prstGeom prst="rect">
@@ -7228,7 +12740,7 @@
                 <a:ea typeface="Aptos Display" pitchFamily="34" charset="-122"/>
                 <a:cs typeface="Aptos Display" pitchFamily="34" charset="-120"/>
               </a:rPr>
-              <a:t>Jurisdiction and Agency Policy Note</a:t>
+              <a:t>Learning Objectives</a:t>
             </a:r>
             <a:endParaRPr lang="en-US" sz="2700" dirty="0"/>
           </a:p>
@@ -7236,32 +12748,29 @@
       </p:sp>
       <p:sp>
         <p:nvSpPr>
-          <p:cNvPr id="7" name="Text 5"/>
-          <p:cNvSpPr/>
-          <p:nvPr/>
-        </p:nvSpPr>
-        <p:spPr>
-          <a:xfrm>
-            <a:off x="822960" y="1325880"/>
-            <a:ext cx="10378440" cy="4800600"/>
-          </a:xfrm>
-          <a:prstGeom prst="rect">
-            <a:avLst/>
-          </a:prstGeom>
-          <a:noFill/>
-          <a:ln/>
-        </p:spPr>
-        <p:txBody>
-          <a:bodyPr wrap="square" lIns="1016" tIns="1016" rIns="1016" bIns="1016" rtlCol="0" anchor="t">
+          <p:cNvPr id="10" name="Text 8"/>
+          <p:cNvSpPr/>
+          <p:nvPr/>
+        </p:nvSpPr>
+        <p:spPr>
+          <a:xfrm>
+            <a:off x="868680" y="1417320"/>
+            <a:ext cx="6675120" cy="4434840"/>
+          </a:xfrm>
+          <a:prstGeom prst="rect">
+            <a:avLst/>
+          </a:prstGeom>
+          <a:noFill/>
+          <a:ln/>
+        </p:spPr>
+        <p:txBody>
+          <a:bodyPr wrap="square" lIns="635" tIns="635" rIns="635" bIns="635" rtlCol="0" anchor="t">
             <a:normAutofit/>
           </a:bodyPr>
           <a:lstStyle/>
           <a:p>
-            <a:pPr indent="0" marL="0">
-              <a:buNone/>
-            </a:pPr>
-            <a:r>
-              <a:rPr lang="en-US" sz="1420" dirty="0">
+            <a:r>
+              <a:rPr lang="en-US" sz="1700" dirty="0">
                 <a:solidFill>
                   <a:srgbClr val="17364A"/>
                 </a:solidFill>
@@ -7269,9 +12778,265 @@
                 <a:ea typeface="Aptos" pitchFamily="34" charset="-122"/>
                 <a:cs typeface="Aptos" pitchFamily="34" charset="-120"/>
               </a:rPr>
-              <a:t>This national-level module is intended for training and planning purposes. It does not replace legal, privacy, procurement, civil rights, records, or agency policy review. Learners should confirm applicable requirements in their own jurisdiction and organization before implementing AI-supported workflows.</a:t>
-            </a:r>
-            <a:endParaRPr lang="en-US" sz="1420" dirty="0"/>
+              <a:t>Identify appropriate and inappropriate uses of AI in public health communications.</a:t>
+            </a:r>
+            <a:endParaRPr lang="en-US" sz="1700" dirty="0"/>
+          </a:p>
+          <a:p>
+            <a:r>
+              <a:rPr lang="en-US" sz="1700" dirty="0">
+                <a:solidFill>
+                  <a:srgbClr val="17364A"/>
+                </a:solidFill>
+                <a:latin typeface="Aptos" pitchFamily="34" charset="0"/>
+                <a:ea typeface="Aptos" pitchFamily="34" charset="-122"/>
+                <a:cs typeface="Aptos" pitchFamily="34" charset="-120"/>
+              </a:rPr>
+              <a:t>Apply source verification, plain language, accessibility, and equity review to AI-generated messages.</a:t>
+            </a:r>
+            <a:endParaRPr lang="en-US" sz="1700" dirty="0"/>
+          </a:p>
+          <a:p>
+            <a:r>
+              <a:rPr lang="en-US" sz="1700" dirty="0">
+                <a:solidFill>
+                  <a:srgbClr val="17364A"/>
+                </a:solidFill>
+                <a:latin typeface="Aptos" pitchFamily="34" charset="0"/>
+                <a:ea typeface="Aptos" pitchFamily="34" charset="-122"/>
+                <a:cs typeface="Aptos" pitchFamily="34" charset="-120"/>
+              </a:rPr>
+              <a:t>Design a human review workflow for AI-assisted public-facing communications.</a:t>
+            </a:r>
+            <a:endParaRPr lang="en-US" sz="1700" dirty="0"/>
+          </a:p>
+          <a:p>
+            <a:r>
+              <a:rPr lang="en-US" sz="1700" dirty="0">
+                <a:solidFill>
+                  <a:srgbClr val="17364A"/>
+                </a:solidFill>
+                <a:latin typeface="Aptos" pitchFamily="34" charset="0"/>
+                <a:ea typeface="Aptos" pitchFamily="34" charset="-122"/>
+                <a:cs typeface="Aptos" pitchFamily="34" charset="-120"/>
+              </a:rPr>
+              <a:t>Recognize misinformation, overstatement, missing uncertainty, and stigmatizing language risks.</a:t>
+            </a:r>
+            <a:endParaRPr lang="en-US" sz="1700" dirty="0"/>
+          </a:p>
+        </p:txBody>
+      </p:sp>
+      <p:sp>
+        <p:nvSpPr>
+          <p:cNvPr id="11" name="Shape 9"/>
+          <p:cNvSpPr/>
+          <p:nvPr/>
+        </p:nvSpPr>
+        <p:spPr>
+          <a:xfrm>
+            <a:off x="7909560" y="1417320"/>
+            <a:ext cx="3154680" cy="1828800"/>
+          </a:xfrm>
+          <a:prstGeom prst="roundRect">
+            <a:avLst>
+              <a:gd name="adj" fmla="val 6000"/>
+            </a:avLst>
+          </a:prstGeom>
+          <a:solidFill>
+            <a:srgbClr val="EEF8ED"/>
+          </a:solidFill>
+          <a:ln w="12700">
+            <a:solidFill>
+              <a:srgbClr val="B9D7E6"/>
+            </a:solidFill>
+            <a:prstDash val="solid"/>
+          </a:ln>
+        </p:spPr>
+      </p:sp>
+      <p:sp>
+        <p:nvSpPr>
+          <p:cNvPr id="12" name="Text 10"/>
+          <p:cNvSpPr/>
+          <p:nvPr/>
+        </p:nvSpPr>
+        <p:spPr>
+          <a:xfrm>
+            <a:off x="8074152" y="1563624"/>
+            <a:ext cx="2825496" cy="201168"/>
+          </a:xfrm>
+          <a:prstGeom prst="rect">
+            <a:avLst/>
+          </a:prstGeom>
+          <a:noFill/>
+          <a:ln/>
+        </p:spPr>
+        <p:txBody>
+          <a:bodyPr wrap="square" lIns="0" tIns="0" rIns="0" bIns="0" rtlCol="0" anchor="ctr"/>
+          <a:lstStyle/>
+          <a:p>
+            <a:pPr indent="0" marL="0">
+              <a:buNone/>
+            </a:pPr>
+            <a:r>
+              <a:rPr lang="en-US" sz="950" b="1" dirty="0">
+                <a:solidFill>
+                  <a:srgbClr val="0068B7"/>
+                </a:solidFill>
+                <a:latin typeface="Aptos" pitchFamily="34" charset="0"/>
+                <a:ea typeface="Aptos" pitchFamily="34" charset="-122"/>
+                <a:cs typeface="Aptos" pitchFamily="34" charset="-120"/>
+              </a:rPr>
+              <a:t>Key idea</a:t>
+            </a:r>
+            <a:endParaRPr lang="en-US" sz="950" dirty="0"/>
+          </a:p>
+        </p:txBody>
+      </p:sp>
+      <p:sp>
+        <p:nvSpPr>
+          <p:cNvPr id="13" name="Text 11"/>
+          <p:cNvSpPr/>
+          <p:nvPr/>
+        </p:nvSpPr>
+        <p:spPr>
+          <a:xfrm>
+            <a:off x="8074152" y="1856232"/>
+            <a:ext cx="2825496" cy="1261872"/>
+          </a:xfrm>
+          <a:prstGeom prst="rect">
+            <a:avLst/>
+          </a:prstGeom>
+          <a:noFill/>
+          <a:ln/>
+        </p:spPr>
+        <p:txBody>
+          <a:bodyPr wrap="square" lIns="0" tIns="0" rIns="0" bIns="0" rtlCol="0" anchor="t">
+            <a:normAutofit/>
+          </a:bodyPr>
+          <a:lstStyle/>
+          <a:p>
+            <a:pPr indent="0" marL="0">
+              <a:buNone/>
+            </a:pPr>
+            <a:r>
+              <a:rPr lang="en-US" sz="1250" dirty="0">
+                <a:solidFill>
+                  <a:srgbClr val="17364A"/>
+                </a:solidFill>
+                <a:latin typeface="Aptos" pitchFamily="34" charset="0"/>
+                <a:ea typeface="Aptos" pitchFamily="34" charset="-122"/>
+                <a:cs typeface="Aptos" pitchFamily="34" charset="-120"/>
+              </a:rPr>
+              <a:t>Identify appropriate and inappropriate uses of AI in public health communications.</a:t>
+            </a:r>
+            <a:endParaRPr lang="en-US" sz="1250" dirty="0"/>
+          </a:p>
+        </p:txBody>
+      </p:sp>
+      <p:sp>
+        <p:nvSpPr>
+          <p:cNvPr id="14" name="Shape 12"/>
+          <p:cNvSpPr/>
+          <p:nvPr/>
+        </p:nvSpPr>
+        <p:spPr>
+          <a:xfrm>
+            <a:off x="7909560" y="3520440"/>
+            <a:ext cx="3154680" cy="1737360"/>
+          </a:xfrm>
+          <a:prstGeom prst="roundRect">
+            <a:avLst>
+              <a:gd name="adj" fmla="val 6316"/>
+            </a:avLst>
+          </a:prstGeom>
+          <a:solidFill>
+            <a:srgbClr val="EAF6F8"/>
+          </a:solidFill>
+          <a:ln w="12700">
+            <a:solidFill>
+              <a:srgbClr val="B9D7E6"/>
+            </a:solidFill>
+            <a:prstDash val="solid"/>
+          </a:ln>
+        </p:spPr>
+      </p:sp>
+      <p:sp>
+        <p:nvSpPr>
+          <p:cNvPr id="15" name="Text 13"/>
+          <p:cNvSpPr/>
+          <p:nvPr/>
+        </p:nvSpPr>
+        <p:spPr>
+          <a:xfrm>
+            <a:off x="8074152" y="3666744"/>
+            <a:ext cx="2825496" cy="201168"/>
+          </a:xfrm>
+          <a:prstGeom prst="rect">
+            <a:avLst/>
+          </a:prstGeom>
+          <a:noFill/>
+          <a:ln/>
+        </p:spPr>
+        <p:txBody>
+          <a:bodyPr wrap="square" lIns="0" tIns="0" rIns="0" bIns="0" rtlCol="0" anchor="ctr"/>
+          <a:lstStyle/>
+          <a:p>
+            <a:pPr indent="0" marL="0">
+              <a:buNone/>
+            </a:pPr>
+            <a:r>
+              <a:rPr lang="en-US" sz="950" b="1" dirty="0">
+                <a:solidFill>
+                  <a:srgbClr val="0068B7"/>
+                </a:solidFill>
+                <a:latin typeface="Aptos" pitchFamily="34" charset="0"/>
+                <a:ea typeface="Aptos" pitchFamily="34" charset="-122"/>
+                <a:cs typeface="Aptos" pitchFamily="34" charset="-120"/>
+              </a:rPr>
+              <a:t>Use this for</a:t>
+            </a:r>
+            <a:endParaRPr lang="en-US" sz="950" dirty="0"/>
+          </a:p>
+        </p:txBody>
+      </p:sp>
+      <p:sp>
+        <p:nvSpPr>
+          <p:cNvPr id="16" name="Text 14"/>
+          <p:cNvSpPr/>
+          <p:nvPr/>
+        </p:nvSpPr>
+        <p:spPr>
+          <a:xfrm>
+            <a:off x="8074152" y="3959352"/>
+            <a:ext cx="2825496" cy="1170432"/>
+          </a:xfrm>
+          <a:prstGeom prst="rect">
+            <a:avLst/>
+          </a:prstGeom>
+          <a:noFill/>
+          <a:ln/>
+        </p:spPr>
+        <p:txBody>
+          <a:bodyPr wrap="square" lIns="0" tIns="0" rIns="0" bIns="0" rtlCol="0" anchor="t">
+            <a:normAutofit/>
+          </a:bodyPr>
+          <a:lstStyle/>
+          <a:p>
+            <a:pPr indent="0" marL="0">
+              <a:buNone/>
+            </a:pPr>
+            <a:r>
+              <a:rPr lang="en-US" sz="1250" dirty="0">
+                <a:solidFill>
+                  <a:srgbClr val="17364A"/>
+                </a:solidFill>
+                <a:latin typeface="Aptos" pitchFamily="34" charset="0"/>
+                <a:ea typeface="Aptos" pitchFamily="34" charset="-122"/>
+                <a:cs typeface="Aptos" pitchFamily="34" charset="-120"/>
+              </a:rPr>
+              <a:t>Connect the concept to public health decisions, safeguards, documentation, or implementation work.</a:t>
+            </a:r>
+            <a:endParaRPr lang="en-US" sz="1250" dirty="0"/>
           </a:p>
         </p:txBody>
       </p:sp>
@@ -7334,7 +13099,32 @@
       </p:sp>
       <p:sp>
         <p:nvSpPr>
-          <p:cNvPr id="3" name="Text 1"/>
+          <p:cNvPr id="3" name="Shape 1"/>
+          <p:cNvSpPr/>
+          <p:nvPr/>
+        </p:nvSpPr>
+        <p:spPr>
+          <a:xfrm>
+            <a:off x="0" y="164592"/>
+            <a:ext cx="146304" cy="6693408"/>
+          </a:xfrm>
+          <a:prstGeom prst="rect">
+            <a:avLst/>
+          </a:prstGeom>
+          <a:solidFill>
+            <a:srgbClr val="2F8A28"/>
+          </a:solidFill>
+          <a:ln w="12700">
+            <a:solidFill>
+              <a:srgbClr val="2F8A28"/>
+            </a:solidFill>
+            <a:prstDash val="solid"/>
+          </a:ln>
+        </p:spPr>
+      </p:sp>
+      <p:sp>
+        <p:nvSpPr>
+          <p:cNvPr id="4" name="Text 2"/>
           <p:cNvSpPr/>
           <p:nvPr/>
         </p:nvSpPr>
@@ -7373,7 +13163,7 @@
       </p:sp>
       <p:sp>
         <p:nvSpPr>
-          <p:cNvPr id="4" name="Text 2"/>
+          <p:cNvPr id="5" name="Text 3"/>
           <p:cNvSpPr/>
           <p:nvPr/>
         </p:nvSpPr>
@@ -7412,7 +13202,7 @@
       </p:sp>
       <p:sp>
         <p:nvSpPr>
-          <p:cNvPr id="5" name="Text 3"/>
+          <p:cNvPr id="6" name="Text 4"/>
           <p:cNvSpPr/>
           <p:nvPr/>
         </p:nvSpPr>
@@ -7451,13 +13241,77 @@
       </p:sp>
       <p:sp>
         <p:nvSpPr>
-          <p:cNvPr id="6" name="Text 4"/>
+          <p:cNvPr id="7" name="Shape 5"/>
           <p:cNvSpPr/>
           <p:nvPr/>
         </p:nvSpPr>
         <p:spPr>
           <a:xfrm>
             <a:off x="640080" y="658368"/>
+            <a:ext cx="420624" cy="420624"/>
+          </a:xfrm>
+          <a:prstGeom prst="ellipse">
+            <a:avLst/>
+          </a:prstGeom>
+          <a:solidFill>
+            <a:srgbClr val="0068B7"/>
+          </a:solidFill>
+          <a:ln w="12700">
+            <a:solidFill>
+              <a:srgbClr val="0068B7"/>
+            </a:solidFill>
+            <a:prstDash val="solid"/>
+          </a:ln>
+        </p:spPr>
+      </p:sp>
+      <p:sp>
+        <p:nvSpPr>
+          <p:cNvPr id="8" name="Text 6"/>
+          <p:cNvSpPr/>
+          <p:nvPr/>
+        </p:nvSpPr>
+        <p:spPr>
+          <a:xfrm>
+            <a:off x="640080" y="731520"/>
+            <a:ext cx="420624" cy="164592"/>
+          </a:xfrm>
+          <a:prstGeom prst="rect">
+            <a:avLst/>
+          </a:prstGeom>
+          <a:noFill/>
+          <a:ln/>
+        </p:spPr>
+        <p:txBody>
+          <a:bodyPr wrap="square" lIns="0" tIns="0" rIns="0" bIns="0" rtlCol="0" anchor="ctr"/>
+          <a:lstStyle/>
+          <a:p>
+            <a:pPr algn="ctr" indent="0" marL="0">
+              <a:buNone/>
+            </a:pPr>
+            <a:r>
+              <a:rPr lang="en-US" sz="1100" b="1" dirty="0">
+                <a:solidFill>
+                  <a:srgbClr val="FFFFFF"/>
+                </a:solidFill>
+                <a:latin typeface="Aptos" pitchFamily="34" charset="0"/>
+                <a:ea typeface="Aptos" pitchFamily="34" charset="-122"/>
+                <a:cs typeface="Aptos" pitchFamily="34" charset="-120"/>
+              </a:rPr>
+              <a:t>2</a:t>
+            </a:r>
+            <a:endParaRPr lang="en-US" sz="1100" dirty="0"/>
+          </a:p>
+        </p:txBody>
+      </p:sp>
+      <p:sp>
+        <p:nvSpPr>
+          <p:cNvPr id="9" name="Text 7"/>
+          <p:cNvSpPr/>
+          <p:nvPr/>
+        </p:nvSpPr>
+        <p:spPr>
+          <a:xfrm>
+            <a:off x="640080" y="621792"/>
             <a:ext cx="10881360" cy="566928"/>
           </a:xfrm>
           <a:prstGeom prst="rect">
@@ -7484,7 +13338,7 @@
                 <a:ea typeface="Aptos Display" pitchFamily="34" charset="-122"/>
                 <a:cs typeface="Aptos Display" pitchFamily="34" charset="-120"/>
               </a:rPr>
-              <a:t>Public Health Example</a:t>
+              <a:t>Module Overview</a:t>
             </a:r>
             <a:endParaRPr lang="en-US" sz="2700" dirty="0"/>
           </a:p>
@@ -7492,32 +13346,29 @@
       </p:sp>
       <p:sp>
         <p:nvSpPr>
-          <p:cNvPr id="7" name="Text 5"/>
-          <p:cNvSpPr/>
-          <p:nvPr/>
-        </p:nvSpPr>
-        <p:spPr>
-          <a:xfrm>
-            <a:off x="822960" y="1325880"/>
-            <a:ext cx="10378440" cy="4800600"/>
-          </a:xfrm>
-          <a:prstGeom prst="rect">
-            <a:avLst/>
-          </a:prstGeom>
-          <a:noFill/>
-          <a:ln/>
-        </p:spPr>
-        <p:txBody>
-          <a:bodyPr wrap="square" lIns="1016" tIns="1016" rIns="1016" bIns="1016" rtlCol="0" anchor="t">
+          <p:cNvPr id="10" name="Text 8"/>
+          <p:cNvSpPr/>
+          <p:nvPr/>
+        </p:nvSpPr>
+        <p:spPr>
+          <a:xfrm>
+            <a:off x="868680" y="1417320"/>
+            <a:ext cx="6675120" cy="4434840"/>
+          </a:xfrm>
+          <a:prstGeom prst="rect">
+            <a:avLst/>
+          </a:prstGeom>
+          <a:noFill/>
+          <a:ln/>
+        </p:spPr>
+        <p:txBody>
+          <a:bodyPr wrap="square" lIns="635" tIns="635" rIns="635" bIns="635" rtlCol="0" anchor="t">
             <a:normAutofit/>
           </a:bodyPr>
           <a:lstStyle/>
           <a:p>
-            <a:pPr indent="0" marL="0">
-              <a:buNone/>
-            </a:pPr>
-            <a:r>
-              <a:rPr lang="en-US" sz="1420" dirty="0">
+            <a:r>
+              <a:rPr lang="en-US" sz="1700" dirty="0">
                 <a:solidFill>
                   <a:srgbClr val="17364A"/>
                 </a:solidFill>
@@ -7525,9 +13376,265 @@
                 <a:ea typeface="Aptos" pitchFamily="34" charset="-122"/>
                 <a:cs typeface="Aptos" pitchFamily="34" charset="-120"/>
               </a:rPr>
-              <a:t>A health department uses AI to draft a heat safety message for older adults, outdoor workers, and people without reliable air conditioning. Communications staff verify the recommendations against official guidance, rewrite the message in plain language, review it for accessibility and language access, avoid blaming individuals for structural risks, and route the final version through the approved public information process before release.</a:t>
-            </a:r>
-            <a:endParaRPr lang="en-US" sz="1420" dirty="0"/>
+              <a:t>Generative AI can support public health communications by helping staff draft, revise, simplify, translate, tailor, and.</a:t>
+            </a:r>
+            <a:endParaRPr lang="en-US" sz="1700" dirty="0"/>
+          </a:p>
+          <a:p>
+            <a:r>
+              <a:rPr lang="en-US" sz="1700" dirty="0">
+                <a:solidFill>
+                  <a:srgbClr val="17364A"/>
+                </a:solidFill>
+                <a:latin typeface="Aptos" pitchFamily="34" charset="0"/>
+                <a:ea typeface="Aptos" pitchFamily="34" charset="-122"/>
+                <a:cs typeface="Aptos" pitchFamily="34" charset="-120"/>
+              </a:rPr>
+              <a:t>However, public health communication carries high trust, equity, accessibility, and accuracy obligations.</a:t>
+            </a:r>
+            <a:endParaRPr lang="en-US" sz="1700" dirty="0"/>
+          </a:p>
+          <a:p>
+            <a:r>
+              <a:rPr lang="en-US" sz="1700" dirty="0">
+                <a:solidFill>
+                  <a:srgbClr val="17364A"/>
+                </a:solidFill>
+                <a:latin typeface="Aptos" pitchFamily="34" charset="0"/>
+                <a:ea typeface="Aptos" pitchFamily="34" charset="-122"/>
+                <a:cs typeface="Aptos" pitchFamily="34" charset="-120"/>
+              </a:rPr>
+              <a:t>AI-generated text can sound clear and authoritative while misstating evidence, omitting uncertainty, using stigmatizing.</a:t>
+            </a:r>
+            <a:endParaRPr lang="en-US" sz="1700" dirty="0"/>
+          </a:p>
+          <a:p>
+            <a:r>
+              <a:rPr lang="en-US" sz="1700" dirty="0">
+                <a:solidFill>
+                  <a:srgbClr val="17364A"/>
+                </a:solidFill>
+                <a:latin typeface="Aptos" pitchFamily="34" charset="0"/>
+                <a:ea typeface="Aptos" pitchFamily="34" charset="-122"/>
+                <a:cs typeface="Aptos" pitchFamily="34" charset="-120"/>
+              </a:rPr>
+              <a:t>This module teaches communications staff and program partners how to use AI as a drafting and review aid while preserving.</a:t>
+            </a:r>
+            <a:endParaRPr lang="en-US" sz="1700" dirty="0"/>
+          </a:p>
+        </p:txBody>
+      </p:sp>
+      <p:sp>
+        <p:nvSpPr>
+          <p:cNvPr id="11" name="Shape 9"/>
+          <p:cNvSpPr/>
+          <p:nvPr/>
+        </p:nvSpPr>
+        <p:spPr>
+          <a:xfrm>
+            <a:off x="7909560" y="1417320"/>
+            <a:ext cx="3154680" cy="1828800"/>
+          </a:xfrm>
+          <a:prstGeom prst="roundRect">
+            <a:avLst>
+              <a:gd name="adj" fmla="val 6000"/>
+            </a:avLst>
+          </a:prstGeom>
+          <a:solidFill>
+            <a:srgbClr val="EEF8ED"/>
+          </a:solidFill>
+          <a:ln w="12700">
+            <a:solidFill>
+              <a:srgbClr val="B9D7E6"/>
+            </a:solidFill>
+            <a:prstDash val="solid"/>
+          </a:ln>
+        </p:spPr>
+      </p:sp>
+      <p:sp>
+        <p:nvSpPr>
+          <p:cNvPr id="12" name="Text 10"/>
+          <p:cNvSpPr/>
+          <p:nvPr/>
+        </p:nvSpPr>
+        <p:spPr>
+          <a:xfrm>
+            <a:off x="8074152" y="1563624"/>
+            <a:ext cx="2825496" cy="201168"/>
+          </a:xfrm>
+          <a:prstGeom prst="rect">
+            <a:avLst/>
+          </a:prstGeom>
+          <a:noFill/>
+          <a:ln/>
+        </p:spPr>
+        <p:txBody>
+          <a:bodyPr wrap="square" lIns="0" tIns="0" rIns="0" bIns="0" rtlCol="0" anchor="ctr"/>
+          <a:lstStyle/>
+          <a:p>
+            <a:pPr indent="0" marL="0">
+              <a:buNone/>
+            </a:pPr>
+            <a:r>
+              <a:rPr lang="en-US" sz="950" b="1" dirty="0">
+                <a:solidFill>
+                  <a:srgbClr val="0068B7"/>
+                </a:solidFill>
+                <a:latin typeface="Aptos" pitchFamily="34" charset="0"/>
+                <a:ea typeface="Aptos" pitchFamily="34" charset="-122"/>
+                <a:cs typeface="Aptos" pitchFamily="34" charset="-120"/>
+              </a:rPr>
+              <a:t>Key idea</a:t>
+            </a:r>
+            <a:endParaRPr lang="en-US" sz="950" dirty="0"/>
+          </a:p>
+        </p:txBody>
+      </p:sp>
+      <p:sp>
+        <p:nvSpPr>
+          <p:cNvPr id="13" name="Text 11"/>
+          <p:cNvSpPr/>
+          <p:nvPr/>
+        </p:nvSpPr>
+        <p:spPr>
+          <a:xfrm>
+            <a:off x="8074152" y="1856232"/>
+            <a:ext cx="2825496" cy="1261872"/>
+          </a:xfrm>
+          <a:prstGeom prst="rect">
+            <a:avLst/>
+          </a:prstGeom>
+          <a:noFill/>
+          <a:ln/>
+        </p:spPr>
+        <p:txBody>
+          <a:bodyPr wrap="square" lIns="0" tIns="0" rIns="0" bIns="0" rtlCol="0" anchor="t">
+            <a:normAutofit/>
+          </a:bodyPr>
+          <a:lstStyle/>
+          <a:p>
+            <a:pPr indent="0" marL="0">
+              <a:buNone/>
+            </a:pPr>
+            <a:r>
+              <a:rPr lang="en-US" sz="1250" dirty="0">
+                <a:solidFill>
+                  <a:srgbClr val="17364A"/>
+                </a:solidFill>
+                <a:latin typeface="Aptos" pitchFamily="34" charset="0"/>
+                <a:ea typeface="Aptos" pitchFamily="34" charset="-122"/>
+                <a:cs typeface="Aptos" pitchFamily="34" charset="-120"/>
+              </a:rPr>
+              <a:t>Generative AI can support public health communications by helping staff draft, revise, simplify, translate, tailor, and.</a:t>
+            </a:r>
+            <a:endParaRPr lang="en-US" sz="1250" dirty="0"/>
+          </a:p>
+        </p:txBody>
+      </p:sp>
+      <p:sp>
+        <p:nvSpPr>
+          <p:cNvPr id="14" name="Shape 12"/>
+          <p:cNvSpPr/>
+          <p:nvPr/>
+        </p:nvSpPr>
+        <p:spPr>
+          <a:xfrm>
+            <a:off x="7909560" y="3520440"/>
+            <a:ext cx="3154680" cy="1737360"/>
+          </a:xfrm>
+          <a:prstGeom prst="roundRect">
+            <a:avLst>
+              <a:gd name="adj" fmla="val 6316"/>
+            </a:avLst>
+          </a:prstGeom>
+          <a:solidFill>
+            <a:srgbClr val="EAF6F8"/>
+          </a:solidFill>
+          <a:ln w="12700">
+            <a:solidFill>
+              <a:srgbClr val="B9D7E6"/>
+            </a:solidFill>
+            <a:prstDash val="solid"/>
+          </a:ln>
+        </p:spPr>
+      </p:sp>
+      <p:sp>
+        <p:nvSpPr>
+          <p:cNvPr id="15" name="Text 13"/>
+          <p:cNvSpPr/>
+          <p:nvPr/>
+        </p:nvSpPr>
+        <p:spPr>
+          <a:xfrm>
+            <a:off x="8074152" y="3666744"/>
+            <a:ext cx="2825496" cy="201168"/>
+          </a:xfrm>
+          <a:prstGeom prst="rect">
+            <a:avLst/>
+          </a:prstGeom>
+          <a:noFill/>
+          <a:ln/>
+        </p:spPr>
+        <p:txBody>
+          <a:bodyPr wrap="square" lIns="0" tIns="0" rIns="0" bIns="0" rtlCol="0" anchor="ctr"/>
+          <a:lstStyle/>
+          <a:p>
+            <a:pPr indent="0" marL="0">
+              <a:buNone/>
+            </a:pPr>
+            <a:r>
+              <a:rPr lang="en-US" sz="950" b="1" dirty="0">
+                <a:solidFill>
+                  <a:srgbClr val="0068B7"/>
+                </a:solidFill>
+                <a:latin typeface="Aptos" pitchFamily="34" charset="0"/>
+                <a:ea typeface="Aptos" pitchFamily="34" charset="-122"/>
+                <a:cs typeface="Aptos" pitchFamily="34" charset="-120"/>
+              </a:rPr>
+              <a:t>Use this for</a:t>
+            </a:r>
+            <a:endParaRPr lang="en-US" sz="950" dirty="0"/>
+          </a:p>
+        </p:txBody>
+      </p:sp>
+      <p:sp>
+        <p:nvSpPr>
+          <p:cNvPr id="16" name="Text 14"/>
+          <p:cNvSpPr/>
+          <p:nvPr/>
+        </p:nvSpPr>
+        <p:spPr>
+          <a:xfrm>
+            <a:off x="8074152" y="3959352"/>
+            <a:ext cx="2825496" cy="1170432"/>
+          </a:xfrm>
+          <a:prstGeom prst="rect">
+            <a:avLst/>
+          </a:prstGeom>
+          <a:noFill/>
+          <a:ln/>
+        </p:spPr>
+        <p:txBody>
+          <a:bodyPr wrap="square" lIns="0" tIns="0" rIns="0" bIns="0" rtlCol="0" anchor="t">
+            <a:normAutofit/>
+          </a:bodyPr>
+          <a:lstStyle/>
+          <a:p>
+            <a:pPr indent="0" marL="0">
+              <a:buNone/>
+            </a:pPr>
+            <a:r>
+              <a:rPr lang="en-US" sz="1250" dirty="0">
+                <a:solidFill>
+                  <a:srgbClr val="17364A"/>
+                </a:solidFill>
+                <a:latin typeface="Aptos" pitchFamily="34" charset="0"/>
+                <a:ea typeface="Aptos" pitchFamily="34" charset="-122"/>
+                <a:cs typeface="Aptos" pitchFamily="34" charset="-120"/>
+              </a:rPr>
+              <a:t>Connect the concept to public health decisions, safeguards, documentation, or implementation work.</a:t>
+            </a:r>
+            <a:endParaRPr lang="en-US" sz="1250" dirty="0"/>
           </a:p>
         </p:txBody>
       </p:sp>
@@ -7590,7 +13697,32 @@
       </p:sp>
       <p:sp>
         <p:nvSpPr>
-          <p:cNvPr id="3" name="Text 1"/>
+          <p:cNvPr id="3" name="Shape 1"/>
+          <p:cNvSpPr/>
+          <p:nvPr/>
+        </p:nvSpPr>
+        <p:spPr>
+          <a:xfrm>
+            <a:off x="0" y="164592"/>
+            <a:ext cx="146304" cy="6693408"/>
+          </a:xfrm>
+          <a:prstGeom prst="rect">
+            <a:avLst/>
+          </a:prstGeom>
+          <a:solidFill>
+            <a:srgbClr val="2F8A28"/>
+          </a:solidFill>
+          <a:ln w="12700">
+            <a:solidFill>
+              <a:srgbClr val="2F8A28"/>
+            </a:solidFill>
+            <a:prstDash val="solid"/>
+          </a:ln>
+        </p:spPr>
+      </p:sp>
+      <p:sp>
+        <p:nvSpPr>
+          <p:cNvPr id="4" name="Text 2"/>
           <p:cNvSpPr/>
           <p:nvPr/>
         </p:nvSpPr>
@@ -7629,7 +13761,7 @@
       </p:sp>
       <p:sp>
         <p:nvSpPr>
-          <p:cNvPr id="4" name="Text 2"/>
+          <p:cNvPr id="5" name="Text 3"/>
           <p:cNvSpPr/>
           <p:nvPr/>
         </p:nvSpPr>
@@ -7668,7 +13800,7 @@
       </p:sp>
       <p:sp>
         <p:nvSpPr>
-          <p:cNvPr id="5" name="Text 3"/>
+          <p:cNvPr id="6" name="Text 4"/>
           <p:cNvSpPr/>
           <p:nvPr/>
         </p:nvSpPr>
@@ -7707,13 +13839,77 @@
       </p:sp>
       <p:sp>
         <p:nvSpPr>
-          <p:cNvPr id="6" name="Text 4"/>
+          <p:cNvPr id="7" name="Shape 5"/>
           <p:cNvSpPr/>
           <p:nvPr/>
         </p:nvSpPr>
         <p:spPr>
           <a:xfrm>
             <a:off x="640080" y="658368"/>
+            <a:ext cx="420624" cy="420624"/>
+          </a:xfrm>
+          <a:prstGeom prst="ellipse">
+            <a:avLst/>
+          </a:prstGeom>
+          <a:solidFill>
+            <a:srgbClr val="0068B7"/>
+          </a:solidFill>
+          <a:ln w="12700">
+            <a:solidFill>
+              <a:srgbClr val="0068B7"/>
+            </a:solidFill>
+            <a:prstDash val="solid"/>
+          </a:ln>
+        </p:spPr>
+      </p:sp>
+      <p:sp>
+        <p:nvSpPr>
+          <p:cNvPr id="8" name="Text 6"/>
+          <p:cNvSpPr/>
+          <p:nvPr/>
+        </p:nvSpPr>
+        <p:spPr>
+          <a:xfrm>
+            <a:off x="640080" y="731520"/>
+            <a:ext cx="420624" cy="164592"/>
+          </a:xfrm>
+          <a:prstGeom prst="rect">
+            <a:avLst/>
+          </a:prstGeom>
+          <a:noFill/>
+          <a:ln/>
+        </p:spPr>
+        <p:txBody>
+          <a:bodyPr wrap="square" lIns="0" tIns="0" rIns="0" bIns="0" rtlCol="0" anchor="ctr"/>
+          <a:lstStyle/>
+          <a:p>
+            <a:pPr algn="ctr" indent="0" marL="0">
+              <a:buNone/>
+            </a:pPr>
+            <a:r>
+              <a:rPr lang="en-US" sz="1100" b="1" dirty="0">
+                <a:solidFill>
+                  <a:srgbClr val="FFFFFF"/>
+                </a:solidFill>
+                <a:latin typeface="Aptos" pitchFamily="34" charset="0"/>
+                <a:ea typeface="Aptos" pitchFamily="34" charset="-122"/>
+                <a:cs typeface="Aptos" pitchFamily="34" charset="-120"/>
+              </a:rPr>
+              <a:t>3</a:t>
+            </a:r>
+            <a:endParaRPr lang="en-US" sz="1100" dirty="0"/>
+          </a:p>
+        </p:txBody>
+      </p:sp>
+      <p:sp>
+        <p:nvSpPr>
+          <p:cNvPr id="9" name="Text 7"/>
+          <p:cNvSpPr/>
+          <p:nvPr/>
+        </p:nvSpPr>
+        <p:spPr>
+          <a:xfrm>
+            <a:off x="640080" y="621792"/>
             <a:ext cx="10881360" cy="566928"/>
           </a:xfrm>
           <a:prstGeom prst="rect">
@@ -7740,7 +13936,7 @@
                 <a:ea typeface="Aptos Display" pitchFamily="34" charset="-122"/>
                 <a:cs typeface="Aptos Display" pitchFamily="34" charset="-120"/>
               </a:rPr>
-              <a:t>Topic Deep Dive</a:t>
+              <a:t>Jurisdiction and Agency Policy Note</a:t>
             </a:r>
             <a:endParaRPr lang="en-US" sz="2700" dirty="0"/>
           </a:p>
@@ -7748,32 +13944,29 @@
       </p:sp>
       <p:sp>
         <p:nvSpPr>
-          <p:cNvPr id="7" name="Text 5"/>
-          <p:cNvSpPr/>
-          <p:nvPr/>
-        </p:nvSpPr>
-        <p:spPr>
-          <a:xfrm>
-            <a:off x="822960" y="1325880"/>
-            <a:ext cx="10378440" cy="4800600"/>
-          </a:xfrm>
-          <a:prstGeom prst="rect">
-            <a:avLst/>
-          </a:prstGeom>
-          <a:noFill/>
-          <a:ln/>
-        </p:spPr>
-        <p:txBody>
-          <a:bodyPr wrap="square" lIns="1016" tIns="1016" rIns="1016" bIns="1016" rtlCol="0" anchor="t">
+          <p:cNvPr id="10" name="Text 8"/>
+          <p:cNvSpPr/>
+          <p:nvPr/>
+        </p:nvSpPr>
+        <p:spPr>
+          <a:xfrm>
+            <a:off x="868680" y="1417320"/>
+            <a:ext cx="6675120" cy="4434840"/>
+          </a:xfrm>
+          <a:prstGeom prst="rect">
+            <a:avLst/>
+          </a:prstGeom>
+          <a:noFill/>
+          <a:ln/>
+        </p:spPr>
+        <p:txBody>
+          <a:bodyPr wrap="square" lIns="635" tIns="635" rIns="635" bIns="635" rtlCol="0" anchor="t">
             <a:normAutofit/>
           </a:bodyPr>
           <a:lstStyle/>
           <a:p>
-            <a:pPr indent="0" marL="0">
-              <a:buNone/>
-            </a:pPr>
-            <a:r>
-              <a:rPr lang="en-US" sz="1420" dirty="0">
+            <a:r>
+              <a:rPr lang="en-US" sz="1700" dirty="0">
                 <a:solidFill>
                   <a:srgbClr val="17364A"/>
                 </a:solidFill>
@@ -7781,9 +13974,251 @@
                 <a:ea typeface="Aptos" pitchFamily="34" charset="-122"/>
                 <a:cs typeface="Aptos" pitchFamily="34" charset="-120"/>
               </a:rPr>
-              <a:t>AI can be useful early in the message development process. It can generate first drafts, propose alternative tones, simplify technical language, identify jargon, create audience-specific versions, and suggest questions the public may ask. These uses can save time, especially when communications staff support multiple programs. However, AI should not be treated as the authority on public health content. The approved evidence base should come from agency guidance, subject matter experts, official data, and community context. Source verification is essential because AI-generated language may include unsupported claims, outdated recommendations, fabricated details, or overconfident statements. Communications staff should verify factual claims, numbers, dates, risk statements, recommendations, and eligibility criteria against approved sources. When uncertainty exists, the message should explain what is known, what is not known, and what actions people can take. Equity and accessibility review should be built into the workflow. AI-generated messages may not adequately address language access, disability access, literacy, cultural context, rural access, transportation barriers, technology access, or historical mistrust. Public health messages should be reviewed for plain language, readability, alternative formats, translation quality, non-stigmatizing language, and practical feasibility for the intended audience.</a:t>
-            </a:r>
-            <a:endParaRPr lang="en-US" sz="1420" dirty="0"/>
+              <a:t>This national-level module is intended for training and planning purposes.</a:t>
+            </a:r>
+            <a:endParaRPr lang="en-US" sz="1700" dirty="0"/>
+          </a:p>
+          <a:p>
+            <a:r>
+              <a:rPr lang="en-US" sz="1700" dirty="0">
+                <a:solidFill>
+                  <a:srgbClr val="17364A"/>
+                </a:solidFill>
+                <a:latin typeface="Aptos" pitchFamily="34" charset="0"/>
+                <a:ea typeface="Aptos" pitchFamily="34" charset="-122"/>
+                <a:cs typeface="Aptos" pitchFamily="34" charset="-120"/>
+              </a:rPr>
+              <a:t>It does not replace legal, privacy, procurement, civil rights, records, or agency policy review.</a:t>
+            </a:r>
+            <a:endParaRPr lang="en-US" sz="1700" dirty="0"/>
+          </a:p>
+          <a:p>
+            <a:r>
+              <a:rPr lang="en-US" sz="1700" dirty="0">
+                <a:solidFill>
+                  <a:srgbClr val="17364A"/>
+                </a:solidFill>
+                <a:latin typeface="Aptos" pitchFamily="34" charset="0"/>
+                <a:ea typeface="Aptos" pitchFamily="34" charset="-122"/>
+                <a:cs typeface="Aptos" pitchFamily="34" charset="-120"/>
+              </a:rPr>
+              <a:t>Learners should confirm applicable requirements in their own jurisdiction and organization before implementing AI-supported.</a:t>
+            </a:r>
+            <a:endParaRPr lang="en-US" sz="1700" dirty="0"/>
+          </a:p>
+        </p:txBody>
+      </p:sp>
+      <p:sp>
+        <p:nvSpPr>
+          <p:cNvPr id="11" name="Shape 9"/>
+          <p:cNvSpPr/>
+          <p:nvPr/>
+        </p:nvSpPr>
+        <p:spPr>
+          <a:xfrm>
+            <a:off x="7909560" y="1417320"/>
+            <a:ext cx="3154680" cy="1828800"/>
+          </a:xfrm>
+          <a:prstGeom prst="roundRect">
+            <a:avLst>
+              <a:gd name="adj" fmla="val 6000"/>
+            </a:avLst>
+          </a:prstGeom>
+          <a:solidFill>
+            <a:srgbClr val="EEF8ED"/>
+          </a:solidFill>
+          <a:ln w="12700">
+            <a:solidFill>
+              <a:srgbClr val="B9D7E6"/>
+            </a:solidFill>
+            <a:prstDash val="solid"/>
+          </a:ln>
+        </p:spPr>
+      </p:sp>
+      <p:sp>
+        <p:nvSpPr>
+          <p:cNvPr id="12" name="Text 10"/>
+          <p:cNvSpPr/>
+          <p:nvPr/>
+        </p:nvSpPr>
+        <p:spPr>
+          <a:xfrm>
+            <a:off x="8074152" y="1563624"/>
+            <a:ext cx="2825496" cy="201168"/>
+          </a:xfrm>
+          <a:prstGeom prst="rect">
+            <a:avLst/>
+          </a:prstGeom>
+          <a:noFill/>
+          <a:ln/>
+        </p:spPr>
+        <p:txBody>
+          <a:bodyPr wrap="square" lIns="0" tIns="0" rIns="0" bIns="0" rtlCol="0" anchor="ctr"/>
+          <a:lstStyle/>
+          <a:p>
+            <a:pPr indent="0" marL="0">
+              <a:buNone/>
+            </a:pPr>
+            <a:r>
+              <a:rPr lang="en-US" sz="950" b="1" dirty="0">
+                <a:solidFill>
+                  <a:srgbClr val="0068B7"/>
+                </a:solidFill>
+                <a:latin typeface="Aptos" pitchFamily="34" charset="0"/>
+                <a:ea typeface="Aptos" pitchFamily="34" charset="-122"/>
+                <a:cs typeface="Aptos" pitchFamily="34" charset="-120"/>
+              </a:rPr>
+              <a:t>Key idea</a:t>
+            </a:r>
+            <a:endParaRPr lang="en-US" sz="950" dirty="0"/>
+          </a:p>
+        </p:txBody>
+      </p:sp>
+      <p:sp>
+        <p:nvSpPr>
+          <p:cNvPr id="13" name="Text 11"/>
+          <p:cNvSpPr/>
+          <p:nvPr/>
+        </p:nvSpPr>
+        <p:spPr>
+          <a:xfrm>
+            <a:off x="8074152" y="1856232"/>
+            <a:ext cx="2825496" cy="1261872"/>
+          </a:xfrm>
+          <a:prstGeom prst="rect">
+            <a:avLst/>
+          </a:prstGeom>
+          <a:noFill/>
+          <a:ln/>
+        </p:spPr>
+        <p:txBody>
+          <a:bodyPr wrap="square" lIns="0" tIns="0" rIns="0" bIns="0" rtlCol="0" anchor="t">
+            <a:normAutofit/>
+          </a:bodyPr>
+          <a:lstStyle/>
+          <a:p>
+            <a:pPr indent="0" marL="0">
+              <a:buNone/>
+            </a:pPr>
+            <a:r>
+              <a:rPr lang="en-US" sz="1250" dirty="0">
+                <a:solidFill>
+                  <a:srgbClr val="17364A"/>
+                </a:solidFill>
+                <a:latin typeface="Aptos" pitchFamily="34" charset="0"/>
+                <a:ea typeface="Aptos" pitchFamily="34" charset="-122"/>
+                <a:cs typeface="Aptos" pitchFamily="34" charset="-120"/>
+              </a:rPr>
+              <a:t>This national-level module is intended for training and planning purposes.</a:t>
+            </a:r>
+            <a:endParaRPr lang="en-US" sz="1250" dirty="0"/>
+          </a:p>
+        </p:txBody>
+      </p:sp>
+      <p:sp>
+        <p:nvSpPr>
+          <p:cNvPr id="14" name="Shape 12"/>
+          <p:cNvSpPr/>
+          <p:nvPr/>
+        </p:nvSpPr>
+        <p:spPr>
+          <a:xfrm>
+            <a:off x="7909560" y="3520440"/>
+            <a:ext cx="3154680" cy="1737360"/>
+          </a:xfrm>
+          <a:prstGeom prst="roundRect">
+            <a:avLst>
+              <a:gd name="adj" fmla="val 6316"/>
+            </a:avLst>
+          </a:prstGeom>
+          <a:solidFill>
+            <a:srgbClr val="EAF6F8"/>
+          </a:solidFill>
+          <a:ln w="12700">
+            <a:solidFill>
+              <a:srgbClr val="B9D7E6"/>
+            </a:solidFill>
+            <a:prstDash val="solid"/>
+          </a:ln>
+        </p:spPr>
+      </p:sp>
+      <p:sp>
+        <p:nvSpPr>
+          <p:cNvPr id="15" name="Text 13"/>
+          <p:cNvSpPr/>
+          <p:nvPr/>
+        </p:nvSpPr>
+        <p:spPr>
+          <a:xfrm>
+            <a:off x="8074152" y="3666744"/>
+            <a:ext cx="2825496" cy="201168"/>
+          </a:xfrm>
+          <a:prstGeom prst="rect">
+            <a:avLst/>
+          </a:prstGeom>
+          <a:noFill/>
+          <a:ln/>
+        </p:spPr>
+        <p:txBody>
+          <a:bodyPr wrap="square" lIns="0" tIns="0" rIns="0" bIns="0" rtlCol="0" anchor="ctr"/>
+          <a:lstStyle/>
+          <a:p>
+            <a:pPr indent="0" marL="0">
+              <a:buNone/>
+            </a:pPr>
+            <a:r>
+              <a:rPr lang="en-US" sz="950" b="1" dirty="0">
+                <a:solidFill>
+                  <a:srgbClr val="0068B7"/>
+                </a:solidFill>
+                <a:latin typeface="Aptos" pitchFamily="34" charset="0"/>
+                <a:ea typeface="Aptos" pitchFamily="34" charset="-122"/>
+                <a:cs typeface="Aptos" pitchFamily="34" charset="-120"/>
+              </a:rPr>
+              <a:t>Use this for</a:t>
+            </a:r>
+            <a:endParaRPr lang="en-US" sz="950" dirty="0"/>
+          </a:p>
+        </p:txBody>
+      </p:sp>
+      <p:sp>
+        <p:nvSpPr>
+          <p:cNvPr id="16" name="Text 14"/>
+          <p:cNvSpPr/>
+          <p:nvPr/>
+        </p:nvSpPr>
+        <p:spPr>
+          <a:xfrm>
+            <a:off x="8074152" y="3959352"/>
+            <a:ext cx="2825496" cy="1170432"/>
+          </a:xfrm>
+          <a:prstGeom prst="rect">
+            <a:avLst/>
+          </a:prstGeom>
+          <a:noFill/>
+          <a:ln/>
+        </p:spPr>
+        <p:txBody>
+          <a:bodyPr wrap="square" lIns="0" tIns="0" rIns="0" bIns="0" rtlCol="0" anchor="t">
+            <a:normAutofit/>
+          </a:bodyPr>
+          <a:lstStyle/>
+          <a:p>
+            <a:pPr indent="0" marL="0">
+              <a:buNone/>
+            </a:pPr>
+            <a:r>
+              <a:rPr lang="en-US" sz="1250" dirty="0">
+                <a:solidFill>
+                  <a:srgbClr val="17364A"/>
+                </a:solidFill>
+                <a:latin typeface="Aptos" pitchFamily="34" charset="0"/>
+                <a:ea typeface="Aptos" pitchFamily="34" charset="-122"/>
+                <a:cs typeface="Aptos" pitchFamily="34" charset="-120"/>
+              </a:rPr>
+              <a:t>Connect the concept to public health decisions, safeguards, documentation, or implementation work.</a:t>
+            </a:r>
+            <a:endParaRPr lang="en-US" sz="1250" dirty="0"/>
           </a:p>
         </p:txBody>
       </p:sp>
@@ -7846,7 +14281,32 @@
       </p:sp>
       <p:sp>
         <p:nvSpPr>
-          <p:cNvPr id="3" name="Text 1"/>
+          <p:cNvPr id="3" name="Shape 1"/>
+          <p:cNvSpPr/>
+          <p:nvPr/>
+        </p:nvSpPr>
+        <p:spPr>
+          <a:xfrm>
+            <a:off x="0" y="164592"/>
+            <a:ext cx="146304" cy="6693408"/>
+          </a:xfrm>
+          <a:prstGeom prst="rect">
+            <a:avLst/>
+          </a:prstGeom>
+          <a:solidFill>
+            <a:srgbClr val="2F8A28"/>
+          </a:solidFill>
+          <a:ln w="12700">
+            <a:solidFill>
+              <a:srgbClr val="2F8A28"/>
+            </a:solidFill>
+            <a:prstDash val="solid"/>
+          </a:ln>
+        </p:spPr>
+      </p:sp>
+      <p:sp>
+        <p:nvSpPr>
+          <p:cNvPr id="4" name="Text 2"/>
           <p:cNvSpPr/>
           <p:nvPr/>
         </p:nvSpPr>
@@ -7885,7 +14345,7 @@
       </p:sp>
       <p:sp>
         <p:nvSpPr>
-          <p:cNvPr id="4" name="Text 2"/>
+          <p:cNvPr id="5" name="Text 3"/>
           <p:cNvSpPr/>
           <p:nvPr/>
         </p:nvSpPr>
@@ -7924,7 +14384,7 @@
       </p:sp>
       <p:sp>
         <p:nvSpPr>
-          <p:cNvPr id="5" name="Text 3"/>
+          <p:cNvPr id="6" name="Text 4"/>
           <p:cNvSpPr/>
           <p:nvPr/>
         </p:nvSpPr>
@@ -7963,13 +14423,77 @@
       </p:sp>
       <p:sp>
         <p:nvSpPr>
-          <p:cNvPr id="6" name="Text 4"/>
+          <p:cNvPr id="7" name="Shape 5"/>
           <p:cNvSpPr/>
           <p:nvPr/>
         </p:nvSpPr>
         <p:spPr>
           <a:xfrm>
             <a:off x="640080" y="658368"/>
+            <a:ext cx="420624" cy="420624"/>
+          </a:xfrm>
+          <a:prstGeom prst="ellipse">
+            <a:avLst/>
+          </a:prstGeom>
+          <a:solidFill>
+            <a:srgbClr val="0068B7"/>
+          </a:solidFill>
+          <a:ln w="12700">
+            <a:solidFill>
+              <a:srgbClr val="0068B7"/>
+            </a:solidFill>
+            <a:prstDash val="solid"/>
+          </a:ln>
+        </p:spPr>
+      </p:sp>
+      <p:sp>
+        <p:nvSpPr>
+          <p:cNvPr id="8" name="Text 6"/>
+          <p:cNvSpPr/>
+          <p:nvPr/>
+        </p:nvSpPr>
+        <p:spPr>
+          <a:xfrm>
+            <a:off x="640080" y="731520"/>
+            <a:ext cx="420624" cy="164592"/>
+          </a:xfrm>
+          <a:prstGeom prst="rect">
+            <a:avLst/>
+          </a:prstGeom>
+          <a:noFill/>
+          <a:ln/>
+        </p:spPr>
+        <p:txBody>
+          <a:bodyPr wrap="square" lIns="0" tIns="0" rIns="0" bIns="0" rtlCol="0" anchor="ctr"/>
+          <a:lstStyle/>
+          <a:p>
+            <a:pPr algn="ctr" indent="0" marL="0">
+              <a:buNone/>
+            </a:pPr>
+            <a:r>
+              <a:rPr lang="en-US" sz="1100" b="1" dirty="0">
+                <a:solidFill>
+                  <a:srgbClr val="FFFFFF"/>
+                </a:solidFill>
+                <a:latin typeface="Aptos" pitchFamily="34" charset="0"/>
+                <a:ea typeface="Aptos" pitchFamily="34" charset="-122"/>
+                <a:cs typeface="Aptos" pitchFamily="34" charset="-120"/>
+              </a:rPr>
+              <a:t>4</a:t>
+            </a:r>
+            <a:endParaRPr lang="en-US" sz="1100" dirty="0"/>
+          </a:p>
+        </p:txBody>
+      </p:sp>
+      <p:sp>
+        <p:nvSpPr>
+          <p:cNvPr id="9" name="Text 7"/>
+          <p:cNvSpPr/>
+          <p:nvPr/>
+        </p:nvSpPr>
+        <p:spPr>
+          <a:xfrm>
+            <a:off x="640080" y="621792"/>
             <a:ext cx="10881360" cy="566928"/>
           </a:xfrm>
           <a:prstGeom prst="rect">
@@ -7996,7 +14520,7 @@
                 <a:ea typeface="Aptos Display" pitchFamily="34" charset="-122"/>
                 <a:cs typeface="Aptos Display" pitchFamily="34" charset="-120"/>
               </a:rPr>
-              <a:t>Topic Deep Dive Continued</a:t>
+              <a:t>Public Health Example</a:t>
             </a:r>
             <a:endParaRPr lang="en-US" sz="2700" dirty="0"/>
           </a:p>
@@ -8004,32 +14528,29 @@
       </p:sp>
       <p:sp>
         <p:nvSpPr>
-          <p:cNvPr id="7" name="Text 5"/>
-          <p:cNvSpPr/>
-          <p:nvPr/>
-        </p:nvSpPr>
-        <p:spPr>
-          <a:xfrm>
-            <a:off x="822960" y="1325880"/>
-            <a:ext cx="10378440" cy="4800600"/>
-          </a:xfrm>
-          <a:prstGeom prst="rect">
-            <a:avLst/>
-          </a:prstGeom>
-          <a:noFill/>
-          <a:ln/>
-        </p:spPr>
-        <p:txBody>
-          <a:bodyPr wrap="square" lIns="1016" tIns="1016" rIns="1016" bIns="1016" rtlCol="0" anchor="t">
+          <p:cNvPr id="10" name="Text 8"/>
+          <p:cNvSpPr/>
+          <p:nvPr/>
+        </p:nvSpPr>
+        <p:spPr>
+          <a:xfrm>
+            <a:off x="868680" y="1417320"/>
+            <a:ext cx="6675120" cy="4434840"/>
+          </a:xfrm>
+          <a:prstGeom prst="rect">
+            <a:avLst/>
+          </a:prstGeom>
+          <a:noFill/>
+          <a:ln/>
+        </p:spPr>
+        <p:txBody>
+          <a:bodyPr wrap="square" lIns="635" tIns="635" rIns="635" bIns="635" rtlCol="0" anchor="t">
             <a:normAutofit/>
           </a:bodyPr>
           <a:lstStyle/>
           <a:p>
-            <a:pPr indent="0" marL="0">
-              <a:buNone/>
-            </a:pPr>
-            <a:r>
-              <a:rPr lang="en-US" sz="1420" dirty="0">
+            <a:r>
+              <a:rPr lang="en-US" sz="1700" dirty="0">
                 <a:solidFill>
                   <a:srgbClr val="17364A"/>
                 </a:solidFill>
@@ -8037,9 +14558,237 @@
                 <a:ea typeface="Aptos" pitchFamily="34" charset="-122"/>
                 <a:cs typeface="Aptos" pitchFamily="34" charset="-120"/>
               </a:rPr>
-              <a:t>AI can also support review, but it should not replace reviewers. A communications workflow should define who checks technical accuracy, who reviews equity and accessibility, who approves public release, and who monitors public response after dissemination. For urgent communications, the workflow should include expedited review rules that still preserve accuracy and accountability.</a:t>
-            </a:r>
-            <a:endParaRPr lang="en-US" sz="1420" dirty="0"/>
+              <a:t>A health department uses AI to draft a heat safety message for older adults, outdoor workers, and people without reliable.</a:t>
+            </a:r>
+            <a:endParaRPr lang="en-US" sz="1700" dirty="0"/>
+          </a:p>
+          <a:p>
+            <a:r>
+              <a:rPr lang="en-US" sz="1700" dirty="0">
+                <a:solidFill>
+                  <a:srgbClr val="17364A"/>
+                </a:solidFill>
+                <a:latin typeface="Aptos" pitchFamily="34" charset="0"/>
+                <a:ea typeface="Aptos" pitchFamily="34" charset="-122"/>
+                <a:cs typeface="Aptos" pitchFamily="34" charset="-120"/>
+              </a:rPr>
+              <a:t>Communications staff verify the recommendations against official guidance, rewrite the message in plain language, review it.</a:t>
+            </a:r>
+            <a:endParaRPr lang="en-US" sz="1700" dirty="0"/>
+          </a:p>
+        </p:txBody>
+      </p:sp>
+      <p:sp>
+        <p:nvSpPr>
+          <p:cNvPr id="11" name="Shape 9"/>
+          <p:cNvSpPr/>
+          <p:nvPr/>
+        </p:nvSpPr>
+        <p:spPr>
+          <a:xfrm>
+            <a:off x="7909560" y="1417320"/>
+            <a:ext cx="3154680" cy="1828800"/>
+          </a:xfrm>
+          <a:prstGeom prst="roundRect">
+            <a:avLst>
+              <a:gd name="adj" fmla="val 6000"/>
+            </a:avLst>
+          </a:prstGeom>
+          <a:solidFill>
+            <a:srgbClr val="EEF8ED"/>
+          </a:solidFill>
+          <a:ln w="12700">
+            <a:solidFill>
+              <a:srgbClr val="B9D7E6"/>
+            </a:solidFill>
+            <a:prstDash val="solid"/>
+          </a:ln>
+        </p:spPr>
+      </p:sp>
+      <p:sp>
+        <p:nvSpPr>
+          <p:cNvPr id="12" name="Text 10"/>
+          <p:cNvSpPr/>
+          <p:nvPr/>
+        </p:nvSpPr>
+        <p:spPr>
+          <a:xfrm>
+            <a:off x="8074152" y="1563624"/>
+            <a:ext cx="2825496" cy="201168"/>
+          </a:xfrm>
+          <a:prstGeom prst="rect">
+            <a:avLst/>
+          </a:prstGeom>
+          <a:noFill/>
+          <a:ln/>
+        </p:spPr>
+        <p:txBody>
+          <a:bodyPr wrap="square" lIns="0" tIns="0" rIns="0" bIns="0" rtlCol="0" anchor="ctr"/>
+          <a:lstStyle/>
+          <a:p>
+            <a:pPr indent="0" marL="0">
+              <a:buNone/>
+            </a:pPr>
+            <a:r>
+              <a:rPr lang="en-US" sz="950" b="1" dirty="0">
+                <a:solidFill>
+                  <a:srgbClr val="0068B7"/>
+                </a:solidFill>
+                <a:latin typeface="Aptos" pitchFamily="34" charset="0"/>
+                <a:ea typeface="Aptos" pitchFamily="34" charset="-122"/>
+                <a:cs typeface="Aptos" pitchFamily="34" charset="-120"/>
+              </a:rPr>
+              <a:t>Key idea</a:t>
+            </a:r>
+            <a:endParaRPr lang="en-US" sz="950" dirty="0"/>
+          </a:p>
+        </p:txBody>
+      </p:sp>
+      <p:sp>
+        <p:nvSpPr>
+          <p:cNvPr id="13" name="Text 11"/>
+          <p:cNvSpPr/>
+          <p:nvPr/>
+        </p:nvSpPr>
+        <p:spPr>
+          <a:xfrm>
+            <a:off x="8074152" y="1856232"/>
+            <a:ext cx="2825496" cy="1261872"/>
+          </a:xfrm>
+          <a:prstGeom prst="rect">
+            <a:avLst/>
+          </a:prstGeom>
+          <a:noFill/>
+          <a:ln/>
+        </p:spPr>
+        <p:txBody>
+          <a:bodyPr wrap="square" lIns="0" tIns="0" rIns="0" bIns="0" rtlCol="0" anchor="t">
+            <a:normAutofit/>
+          </a:bodyPr>
+          <a:lstStyle/>
+          <a:p>
+            <a:pPr indent="0" marL="0">
+              <a:buNone/>
+            </a:pPr>
+            <a:r>
+              <a:rPr lang="en-US" sz="1250" dirty="0">
+                <a:solidFill>
+                  <a:srgbClr val="17364A"/>
+                </a:solidFill>
+                <a:latin typeface="Aptos" pitchFamily="34" charset="0"/>
+                <a:ea typeface="Aptos" pitchFamily="34" charset="-122"/>
+                <a:cs typeface="Aptos" pitchFamily="34" charset="-120"/>
+              </a:rPr>
+              <a:t>A health department uses AI to draft a heat safety message for older adults, outdoor workers, and people without reliable.</a:t>
+            </a:r>
+            <a:endParaRPr lang="en-US" sz="1250" dirty="0"/>
+          </a:p>
+        </p:txBody>
+      </p:sp>
+      <p:sp>
+        <p:nvSpPr>
+          <p:cNvPr id="14" name="Shape 12"/>
+          <p:cNvSpPr/>
+          <p:nvPr/>
+        </p:nvSpPr>
+        <p:spPr>
+          <a:xfrm>
+            <a:off x="7909560" y="3520440"/>
+            <a:ext cx="3154680" cy="1737360"/>
+          </a:xfrm>
+          <a:prstGeom prst="roundRect">
+            <a:avLst>
+              <a:gd name="adj" fmla="val 6316"/>
+            </a:avLst>
+          </a:prstGeom>
+          <a:solidFill>
+            <a:srgbClr val="EAF6F8"/>
+          </a:solidFill>
+          <a:ln w="12700">
+            <a:solidFill>
+              <a:srgbClr val="B9D7E6"/>
+            </a:solidFill>
+            <a:prstDash val="solid"/>
+          </a:ln>
+        </p:spPr>
+      </p:sp>
+      <p:sp>
+        <p:nvSpPr>
+          <p:cNvPr id="15" name="Text 13"/>
+          <p:cNvSpPr/>
+          <p:nvPr/>
+        </p:nvSpPr>
+        <p:spPr>
+          <a:xfrm>
+            <a:off x="8074152" y="3666744"/>
+            <a:ext cx="2825496" cy="201168"/>
+          </a:xfrm>
+          <a:prstGeom prst="rect">
+            <a:avLst/>
+          </a:prstGeom>
+          <a:noFill/>
+          <a:ln/>
+        </p:spPr>
+        <p:txBody>
+          <a:bodyPr wrap="square" lIns="0" tIns="0" rIns="0" bIns="0" rtlCol="0" anchor="ctr"/>
+          <a:lstStyle/>
+          <a:p>
+            <a:pPr indent="0" marL="0">
+              <a:buNone/>
+            </a:pPr>
+            <a:r>
+              <a:rPr lang="en-US" sz="950" b="1" dirty="0">
+                <a:solidFill>
+                  <a:srgbClr val="0068B7"/>
+                </a:solidFill>
+                <a:latin typeface="Aptos" pitchFamily="34" charset="0"/>
+                <a:ea typeface="Aptos" pitchFamily="34" charset="-122"/>
+                <a:cs typeface="Aptos" pitchFamily="34" charset="-120"/>
+              </a:rPr>
+              <a:t>Use this for</a:t>
+            </a:r>
+            <a:endParaRPr lang="en-US" sz="950" dirty="0"/>
+          </a:p>
+        </p:txBody>
+      </p:sp>
+      <p:sp>
+        <p:nvSpPr>
+          <p:cNvPr id="16" name="Text 14"/>
+          <p:cNvSpPr/>
+          <p:nvPr/>
+        </p:nvSpPr>
+        <p:spPr>
+          <a:xfrm>
+            <a:off x="8074152" y="3959352"/>
+            <a:ext cx="2825496" cy="1170432"/>
+          </a:xfrm>
+          <a:prstGeom prst="rect">
+            <a:avLst/>
+          </a:prstGeom>
+          <a:noFill/>
+          <a:ln/>
+        </p:spPr>
+        <p:txBody>
+          <a:bodyPr wrap="square" lIns="0" tIns="0" rIns="0" bIns="0" rtlCol="0" anchor="t">
+            <a:normAutofit/>
+          </a:bodyPr>
+          <a:lstStyle/>
+          <a:p>
+            <a:pPr indent="0" marL="0">
+              <a:buNone/>
+            </a:pPr>
+            <a:r>
+              <a:rPr lang="en-US" sz="1250" dirty="0">
+                <a:solidFill>
+                  <a:srgbClr val="17364A"/>
+                </a:solidFill>
+                <a:latin typeface="Aptos" pitchFamily="34" charset="0"/>
+                <a:ea typeface="Aptos" pitchFamily="34" charset="-122"/>
+                <a:cs typeface="Aptos" pitchFamily="34" charset="-120"/>
+              </a:rPr>
+              <a:t>Connect the concept to public health decisions, safeguards, documentation, or implementation work.</a:t>
+            </a:r>
+            <a:endParaRPr lang="en-US" sz="1250" dirty="0"/>
           </a:p>
         </p:txBody>
       </p:sp>
@@ -8102,7 +14851,32 @@
       </p:sp>
       <p:sp>
         <p:nvSpPr>
-          <p:cNvPr id="3" name="Text 1"/>
+          <p:cNvPr id="3" name="Shape 1"/>
+          <p:cNvSpPr/>
+          <p:nvPr/>
+        </p:nvSpPr>
+        <p:spPr>
+          <a:xfrm>
+            <a:off x="0" y="164592"/>
+            <a:ext cx="146304" cy="6693408"/>
+          </a:xfrm>
+          <a:prstGeom prst="rect">
+            <a:avLst/>
+          </a:prstGeom>
+          <a:solidFill>
+            <a:srgbClr val="2F8A28"/>
+          </a:solidFill>
+          <a:ln w="12700">
+            <a:solidFill>
+              <a:srgbClr val="2F8A28"/>
+            </a:solidFill>
+            <a:prstDash val="solid"/>
+          </a:ln>
+        </p:spPr>
+      </p:sp>
+      <p:sp>
+        <p:nvSpPr>
+          <p:cNvPr id="4" name="Text 2"/>
           <p:cNvSpPr/>
           <p:nvPr/>
         </p:nvSpPr>
@@ -8141,7 +14915,7 @@
       </p:sp>
       <p:sp>
         <p:nvSpPr>
-          <p:cNvPr id="4" name="Text 2"/>
+          <p:cNvPr id="5" name="Text 3"/>
           <p:cNvSpPr/>
           <p:nvPr/>
         </p:nvSpPr>
@@ -8180,7 +14954,7 @@
       </p:sp>
       <p:sp>
         <p:nvSpPr>
-          <p:cNvPr id="5" name="Text 3"/>
+          <p:cNvPr id="6" name="Text 4"/>
           <p:cNvSpPr/>
           <p:nvPr/>
         </p:nvSpPr>
@@ -8219,13 +14993,77 @@
       </p:sp>
       <p:sp>
         <p:nvSpPr>
-          <p:cNvPr id="6" name="Text 4"/>
+          <p:cNvPr id="7" name="Shape 5"/>
           <p:cNvSpPr/>
           <p:nvPr/>
         </p:nvSpPr>
         <p:spPr>
           <a:xfrm>
             <a:off x="640080" y="658368"/>
+            <a:ext cx="420624" cy="420624"/>
+          </a:xfrm>
+          <a:prstGeom prst="ellipse">
+            <a:avLst/>
+          </a:prstGeom>
+          <a:solidFill>
+            <a:srgbClr val="0068B7"/>
+          </a:solidFill>
+          <a:ln w="12700">
+            <a:solidFill>
+              <a:srgbClr val="0068B7"/>
+            </a:solidFill>
+            <a:prstDash val="solid"/>
+          </a:ln>
+        </p:spPr>
+      </p:sp>
+      <p:sp>
+        <p:nvSpPr>
+          <p:cNvPr id="8" name="Text 6"/>
+          <p:cNvSpPr/>
+          <p:nvPr/>
+        </p:nvSpPr>
+        <p:spPr>
+          <a:xfrm>
+            <a:off x="640080" y="731520"/>
+            <a:ext cx="420624" cy="164592"/>
+          </a:xfrm>
+          <a:prstGeom prst="rect">
+            <a:avLst/>
+          </a:prstGeom>
+          <a:noFill/>
+          <a:ln/>
+        </p:spPr>
+        <p:txBody>
+          <a:bodyPr wrap="square" lIns="0" tIns="0" rIns="0" bIns="0" rtlCol="0" anchor="ctr"/>
+          <a:lstStyle/>
+          <a:p>
+            <a:pPr algn="ctr" indent="0" marL="0">
+              <a:buNone/>
+            </a:pPr>
+            <a:r>
+              <a:rPr lang="en-US" sz="1100" b="1" dirty="0">
+                <a:solidFill>
+                  <a:srgbClr val="FFFFFF"/>
+                </a:solidFill>
+                <a:latin typeface="Aptos" pitchFamily="34" charset="0"/>
+                <a:ea typeface="Aptos" pitchFamily="34" charset="-122"/>
+                <a:cs typeface="Aptos" pitchFamily="34" charset="-120"/>
+              </a:rPr>
+              <a:t>5</a:t>
+            </a:r>
+            <a:endParaRPr lang="en-US" sz="1100" dirty="0"/>
+          </a:p>
+        </p:txBody>
+      </p:sp>
+      <p:sp>
+        <p:nvSpPr>
+          <p:cNvPr id="9" name="Text 7"/>
+          <p:cNvSpPr/>
+          <p:nvPr/>
+        </p:nvSpPr>
+        <p:spPr>
+          <a:xfrm>
+            <a:off x="640080" y="621792"/>
             <a:ext cx="10881360" cy="566928"/>
           </a:xfrm>
           <a:prstGeom prst="rect">
@@ -8252,7 +15090,7 @@
                 <a:ea typeface="Aptos Display" pitchFamily="34" charset="-122"/>
                 <a:cs typeface="Aptos Display" pitchFamily="34" charset="-120"/>
               </a:rPr>
-              <a:t>Risks, Failure Modes, and Guardrails</a:t>
+              <a:t>Topic Deep Dive</a:t>
             </a:r>
             <a:endParaRPr lang="en-US" sz="2700" dirty="0"/>
           </a:p>
@@ -8260,32 +15098,29 @@
       </p:sp>
       <p:sp>
         <p:nvSpPr>
-          <p:cNvPr id="7" name="Text 5"/>
-          <p:cNvSpPr/>
-          <p:nvPr/>
-        </p:nvSpPr>
-        <p:spPr>
-          <a:xfrm>
-            <a:off x="822960" y="1325880"/>
-            <a:ext cx="10378440" cy="4800600"/>
-          </a:xfrm>
-          <a:prstGeom prst="rect">
-            <a:avLst/>
-          </a:prstGeom>
-          <a:noFill/>
-          <a:ln/>
-        </p:spPr>
-        <p:txBody>
-          <a:bodyPr wrap="square" lIns="1016" tIns="1016" rIns="1016" bIns="1016" rtlCol="0" anchor="t">
+          <p:cNvPr id="10" name="Text 8"/>
+          <p:cNvSpPr/>
+          <p:nvPr/>
+        </p:nvSpPr>
+        <p:spPr>
+          <a:xfrm>
+            <a:off x="868680" y="1417320"/>
+            <a:ext cx="6675120" cy="4434840"/>
+          </a:xfrm>
+          <a:prstGeom prst="rect">
+            <a:avLst/>
+          </a:prstGeom>
+          <a:noFill/>
+          <a:ln/>
+        </p:spPr>
+        <p:txBody>
+          <a:bodyPr wrap="square" lIns="635" tIns="635" rIns="635" bIns="635" rtlCol="0" anchor="t">
             <a:normAutofit/>
           </a:bodyPr>
           <a:lstStyle/>
           <a:p>
-            <a:pPr indent="0" marL="0">
-              <a:buNone/>
-            </a:pPr>
-            <a:r>
-              <a:rPr lang="en-US" sz="1420" dirty="0">
+            <a:r>
+              <a:rPr lang="en-US" sz="1700" dirty="0">
                 <a:solidFill>
                   <a:srgbClr val="17364A"/>
                 </a:solidFill>
@@ -8293,9 +15128,265 @@
                 <a:ea typeface="Aptos" pitchFamily="34" charset="-122"/>
                 <a:cs typeface="Aptos" pitchFamily="34" charset="-120"/>
               </a:rPr>
-              <a:t>Risks and failure modes include the following: AI-generated messages overstating evidence or omitting uncertainty. Use of stigmatizing, blaming, or culturally inappropriate language.</a:t>
-            </a:r>
-            <a:endParaRPr lang="en-US" sz="1420" dirty="0"/>
+              <a:t>AI can be useful early in the message development process.</a:t>
+            </a:r>
+            <a:endParaRPr lang="en-US" sz="1700" dirty="0"/>
+          </a:p>
+          <a:p>
+            <a:r>
+              <a:rPr lang="en-US" sz="1700" dirty="0">
+                <a:solidFill>
+                  <a:srgbClr val="17364A"/>
+                </a:solidFill>
+                <a:latin typeface="Aptos" pitchFamily="34" charset="0"/>
+                <a:ea typeface="Aptos" pitchFamily="34" charset="-122"/>
+                <a:cs typeface="Aptos" pitchFamily="34" charset="-120"/>
+              </a:rPr>
+              <a:t>It can generate first drafts, propose alternative tones, simplify technical language, identify jargon, create.</a:t>
+            </a:r>
+            <a:endParaRPr lang="en-US" sz="1700" dirty="0"/>
+          </a:p>
+          <a:p>
+            <a:r>
+              <a:rPr lang="en-US" sz="1700" dirty="0">
+                <a:solidFill>
+                  <a:srgbClr val="17364A"/>
+                </a:solidFill>
+                <a:latin typeface="Aptos" pitchFamily="34" charset="0"/>
+                <a:ea typeface="Aptos" pitchFamily="34" charset="-122"/>
+                <a:cs typeface="Aptos" pitchFamily="34" charset="-120"/>
+              </a:rPr>
+              <a:t>These uses can save time, especially when communications staff support multiple programs.</a:t>
+            </a:r>
+            <a:endParaRPr lang="en-US" sz="1700" dirty="0"/>
+          </a:p>
+          <a:p>
+            <a:r>
+              <a:rPr lang="en-US" sz="1700" dirty="0">
+                <a:solidFill>
+                  <a:srgbClr val="17364A"/>
+                </a:solidFill>
+                <a:latin typeface="Aptos" pitchFamily="34" charset="0"/>
+                <a:ea typeface="Aptos" pitchFamily="34" charset="-122"/>
+                <a:cs typeface="Aptos" pitchFamily="34" charset="-120"/>
+              </a:rPr>
+              <a:t>However, AI should not be treated as the authority on public health content.</a:t>
+            </a:r>
+            <a:endParaRPr lang="en-US" sz="1700" dirty="0"/>
+          </a:p>
+        </p:txBody>
+      </p:sp>
+      <p:sp>
+        <p:nvSpPr>
+          <p:cNvPr id="11" name="Shape 9"/>
+          <p:cNvSpPr/>
+          <p:nvPr/>
+        </p:nvSpPr>
+        <p:spPr>
+          <a:xfrm>
+            <a:off x="7909560" y="1417320"/>
+            <a:ext cx="3154680" cy="1828800"/>
+          </a:xfrm>
+          <a:prstGeom prst="roundRect">
+            <a:avLst>
+              <a:gd name="adj" fmla="val 6000"/>
+            </a:avLst>
+          </a:prstGeom>
+          <a:solidFill>
+            <a:srgbClr val="EEF8ED"/>
+          </a:solidFill>
+          <a:ln w="12700">
+            <a:solidFill>
+              <a:srgbClr val="B9D7E6"/>
+            </a:solidFill>
+            <a:prstDash val="solid"/>
+          </a:ln>
+        </p:spPr>
+      </p:sp>
+      <p:sp>
+        <p:nvSpPr>
+          <p:cNvPr id="12" name="Text 10"/>
+          <p:cNvSpPr/>
+          <p:nvPr/>
+        </p:nvSpPr>
+        <p:spPr>
+          <a:xfrm>
+            <a:off x="8074152" y="1563624"/>
+            <a:ext cx="2825496" cy="201168"/>
+          </a:xfrm>
+          <a:prstGeom prst="rect">
+            <a:avLst/>
+          </a:prstGeom>
+          <a:noFill/>
+          <a:ln/>
+        </p:spPr>
+        <p:txBody>
+          <a:bodyPr wrap="square" lIns="0" tIns="0" rIns="0" bIns="0" rtlCol="0" anchor="ctr"/>
+          <a:lstStyle/>
+          <a:p>
+            <a:pPr indent="0" marL="0">
+              <a:buNone/>
+            </a:pPr>
+            <a:r>
+              <a:rPr lang="en-US" sz="950" b="1" dirty="0">
+                <a:solidFill>
+                  <a:srgbClr val="0068B7"/>
+                </a:solidFill>
+                <a:latin typeface="Aptos" pitchFamily="34" charset="0"/>
+                <a:ea typeface="Aptos" pitchFamily="34" charset="-122"/>
+                <a:cs typeface="Aptos" pitchFamily="34" charset="-120"/>
+              </a:rPr>
+              <a:t>Key idea</a:t>
+            </a:r>
+            <a:endParaRPr lang="en-US" sz="950" dirty="0"/>
+          </a:p>
+        </p:txBody>
+      </p:sp>
+      <p:sp>
+        <p:nvSpPr>
+          <p:cNvPr id="13" name="Text 11"/>
+          <p:cNvSpPr/>
+          <p:nvPr/>
+        </p:nvSpPr>
+        <p:spPr>
+          <a:xfrm>
+            <a:off x="8074152" y="1856232"/>
+            <a:ext cx="2825496" cy="1261872"/>
+          </a:xfrm>
+          <a:prstGeom prst="rect">
+            <a:avLst/>
+          </a:prstGeom>
+          <a:noFill/>
+          <a:ln/>
+        </p:spPr>
+        <p:txBody>
+          <a:bodyPr wrap="square" lIns="0" tIns="0" rIns="0" bIns="0" rtlCol="0" anchor="t">
+            <a:normAutofit/>
+          </a:bodyPr>
+          <a:lstStyle/>
+          <a:p>
+            <a:pPr indent="0" marL="0">
+              <a:buNone/>
+            </a:pPr>
+            <a:r>
+              <a:rPr lang="en-US" sz="1250" dirty="0">
+                <a:solidFill>
+                  <a:srgbClr val="17364A"/>
+                </a:solidFill>
+                <a:latin typeface="Aptos" pitchFamily="34" charset="0"/>
+                <a:ea typeface="Aptos" pitchFamily="34" charset="-122"/>
+                <a:cs typeface="Aptos" pitchFamily="34" charset="-120"/>
+              </a:rPr>
+              <a:t>AI can be useful early in the message development process.</a:t>
+            </a:r>
+            <a:endParaRPr lang="en-US" sz="1250" dirty="0"/>
+          </a:p>
+        </p:txBody>
+      </p:sp>
+      <p:sp>
+        <p:nvSpPr>
+          <p:cNvPr id="14" name="Shape 12"/>
+          <p:cNvSpPr/>
+          <p:nvPr/>
+        </p:nvSpPr>
+        <p:spPr>
+          <a:xfrm>
+            <a:off x="7909560" y="3520440"/>
+            <a:ext cx="3154680" cy="1737360"/>
+          </a:xfrm>
+          <a:prstGeom prst="roundRect">
+            <a:avLst>
+              <a:gd name="adj" fmla="val 6316"/>
+            </a:avLst>
+          </a:prstGeom>
+          <a:solidFill>
+            <a:srgbClr val="EAF6F8"/>
+          </a:solidFill>
+          <a:ln w="12700">
+            <a:solidFill>
+              <a:srgbClr val="B9D7E6"/>
+            </a:solidFill>
+            <a:prstDash val="solid"/>
+          </a:ln>
+        </p:spPr>
+      </p:sp>
+      <p:sp>
+        <p:nvSpPr>
+          <p:cNvPr id="15" name="Text 13"/>
+          <p:cNvSpPr/>
+          <p:nvPr/>
+        </p:nvSpPr>
+        <p:spPr>
+          <a:xfrm>
+            <a:off x="8074152" y="3666744"/>
+            <a:ext cx="2825496" cy="201168"/>
+          </a:xfrm>
+          <a:prstGeom prst="rect">
+            <a:avLst/>
+          </a:prstGeom>
+          <a:noFill/>
+          <a:ln/>
+        </p:spPr>
+        <p:txBody>
+          <a:bodyPr wrap="square" lIns="0" tIns="0" rIns="0" bIns="0" rtlCol="0" anchor="ctr"/>
+          <a:lstStyle/>
+          <a:p>
+            <a:pPr indent="0" marL="0">
+              <a:buNone/>
+            </a:pPr>
+            <a:r>
+              <a:rPr lang="en-US" sz="950" b="1" dirty="0">
+                <a:solidFill>
+                  <a:srgbClr val="0068B7"/>
+                </a:solidFill>
+                <a:latin typeface="Aptos" pitchFamily="34" charset="0"/>
+                <a:ea typeface="Aptos" pitchFamily="34" charset="-122"/>
+                <a:cs typeface="Aptos" pitchFamily="34" charset="-120"/>
+              </a:rPr>
+              <a:t>Use this for</a:t>
+            </a:r>
+            <a:endParaRPr lang="en-US" sz="950" dirty="0"/>
+          </a:p>
+        </p:txBody>
+      </p:sp>
+      <p:sp>
+        <p:nvSpPr>
+          <p:cNvPr id="16" name="Text 14"/>
+          <p:cNvSpPr/>
+          <p:nvPr/>
+        </p:nvSpPr>
+        <p:spPr>
+          <a:xfrm>
+            <a:off x="8074152" y="3959352"/>
+            <a:ext cx="2825496" cy="1170432"/>
+          </a:xfrm>
+          <a:prstGeom prst="rect">
+            <a:avLst/>
+          </a:prstGeom>
+          <a:noFill/>
+          <a:ln/>
+        </p:spPr>
+        <p:txBody>
+          <a:bodyPr wrap="square" lIns="0" tIns="0" rIns="0" bIns="0" rtlCol="0" anchor="t">
+            <a:normAutofit/>
+          </a:bodyPr>
+          <a:lstStyle/>
+          <a:p>
+            <a:pPr indent="0" marL="0">
+              <a:buNone/>
+            </a:pPr>
+            <a:r>
+              <a:rPr lang="en-US" sz="1250" dirty="0">
+                <a:solidFill>
+                  <a:srgbClr val="17364A"/>
+                </a:solidFill>
+                <a:latin typeface="Aptos" pitchFamily="34" charset="0"/>
+                <a:ea typeface="Aptos" pitchFamily="34" charset="-122"/>
+                <a:cs typeface="Aptos" pitchFamily="34" charset="-120"/>
+              </a:rPr>
+              <a:t>Connect the concept to public health decisions, safeguards, documentation, or implementation work.</a:t>
+            </a:r>
+            <a:endParaRPr lang="en-US" sz="1250" dirty="0"/>
           </a:p>
         </p:txBody>
       </p:sp>

--- a/downloads/presentations/modules/lesson-25-ai-for-public-health-communications-and-message-development.pptx
+++ b/downloads/presentations/modules/lesson-25-ai-for-public-health-communications-and-message-development.pptx
@@ -3092,6 +3092,45 @@
           </a:p>
         </p:txBody>
       </p:sp>
+      <p:sp>
+        <p:nvSpPr>
+          <p:cNvPr id="8" name="Text 5"/>
+          <p:cNvSpPr/>
+          <p:nvPr/>
+        </p:nvSpPr>
+        <p:spPr>
+          <a:xfrm>
+            <a:off x="11137392" y="6510528"/>
+            <a:ext cx="411480" cy="201168"/>
+          </a:xfrm>
+          <a:prstGeom prst="rect">
+            <a:avLst/>
+          </a:prstGeom>
+          <a:noFill/>
+          <a:ln/>
+        </p:spPr>
+        <p:txBody>
+          <a:bodyPr wrap="square" lIns="0" tIns="0" rIns="0" bIns="0" rtlCol="0" anchor="ctr"/>
+          <a:lstStyle/>
+          <a:p>
+            <a:pPr algn="r" indent="0" marL="0">
+              <a:buNone/>
+            </a:pPr>
+            <a:r>
+              <a:rPr lang="en-US" sz="900" dirty="0">
+                <a:solidFill>
+                  <a:srgbClr val="5F7181"/>
+                </a:solidFill>
+                <a:latin typeface="Aptos" pitchFamily="34" charset="0"/>
+                <a:ea typeface="Aptos" pitchFamily="34" charset="-122"/>
+                <a:cs typeface="Aptos" pitchFamily="34" charset="-120"/>
+              </a:rPr>
+              <a:t>1</a:t>
+            </a:r>
+            <a:endParaRPr lang="en-US" sz="900" dirty="0"/>
+          </a:p>
+        </p:txBody>
+      </p:sp>
     </p:spTree>
   </p:cSld>
   <p:clrMapOvr>
@@ -3285,7 +3324,7 @@
                 <a:ea typeface="Aptos" pitchFamily="34" charset="-122"/>
                 <a:cs typeface="Aptos" pitchFamily="34" charset="-120"/>
               </a:rPr>
-              <a:t>© Paula Soper</a:t>
+              <a:t>Â© Paula Soper</a:t>
             </a:r>
             <a:endParaRPr lang="en-US" sz="800" dirty="0"/>
           </a:p>
@@ -3299,8 +3338,47 @@
         </p:nvSpPr>
         <p:spPr>
           <a:xfrm>
+            <a:off x="11137392" y="6510528"/>
+            <a:ext cx="411480" cy="201168"/>
+          </a:xfrm>
+          <a:prstGeom prst="rect">
+            <a:avLst/>
+          </a:prstGeom>
+          <a:noFill/>
+          <a:ln/>
+        </p:spPr>
+        <p:txBody>
+          <a:bodyPr wrap="square" lIns="0" tIns="0" rIns="0" bIns="0" rtlCol="0" anchor="ctr"/>
+          <a:lstStyle/>
+          <a:p>
+            <a:pPr algn="r" indent="0" marL="0">
+              <a:buNone/>
+            </a:pPr>
+            <a:r>
+              <a:rPr lang="en-US" sz="900" dirty="0">
+                <a:solidFill>
+                  <a:srgbClr val="5F7181"/>
+                </a:solidFill>
+                <a:latin typeface="Aptos" pitchFamily="34" charset="0"/>
+                <a:ea typeface="Aptos" pitchFamily="34" charset="-122"/>
+                <a:cs typeface="Aptos" pitchFamily="34" charset="-120"/>
+              </a:rPr>
+              <a:t>10</a:t>
+            </a:r>
+            <a:endParaRPr lang="en-US" sz="900" dirty="0"/>
+          </a:p>
+        </p:txBody>
+      </p:sp>
+      <p:sp>
+        <p:nvSpPr>
+          <p:cNvPr id="8" name="Text 6"/>
+          <p:cNvSpPr/>
+          <p:nvPr/>
+        </p:nvSpPr>
+        <p:spPr>
+          <a:xfrm>
             <a:off x="640080" y="658368"/>
-            <a:ext cx="10881360" cy="566928"/>
+            <a:ext cx="10881360" cy="713232"/>
           </a:xfrm>
           <a:prstGeom prst="rect">
             <a:avLst/>
@@ -3318,7 +3396,7 @@
               <a:buNone/>
             </a:pPr>
             <a:r>
-              <a:rPr lang="en-US" sz="2700" b="1" dirty="0">
+              <a:rPr lang="en-US" sz="3400" b="1" dirty="0">
                 <a:solidFill>
                   <a:srgbClr val="003A63"/>
                 </a:solidFill>
@@ -3328,20 +3406,20 @@
               </a:rPr>
               <a:t>Topic Deep Dive Continued</a:t>
             </a:r>
-            <a:endParaRPr lang="en-US" sz="2700" dirty="0"/>
-          </a:p>
-        </p:txBody>
-      </p:sp>
-      <p:sp>
-        <p:nvSpPr>
-          <p:cNvPr id="8" name="Text 6"/>
-          <p:cNvSpPr/>
-          <p:nvPr/>
-        </p:nvSpPr>
-        <p:spPr>
-          <a:xfrm>
-            <a:off x="868680" y="1417320"/>
-            <a:ext cx="6675120" cy="4434840"/>
+            <a:endParaRPr lang="en-US" sz="3400" dirty="0"/>
+          </a:p>
+        </p:txBody>
+      </p:sp>
+      <p:sp>
+        <p:nvSpPr>
+          <p:cNvPr id="9" name="Text 7"/>
+          <p:cNvSpPr/>
+          <p:nvPr/>
+        </p:nvSpPr>
+        <p:spPr>
+          <a:xfrm>
+            <a:off x="868680" y="1508760"/>
+            <a:ext cx="6537960" cy="4160520"/>
           </a:xfrm>
           <a:prstGeom prst="rect">
             <a:avLst/>
@@ -3356,7 +3434,7 @@
           <a:lstStyle/>
           <a:p>
             <a:r>
-              <a:rPr lang="en-US" sz="1700" dirty="0">
+              <a:rPr lang="en-US" sz="2100" dirty="0">
                 <a:solidFill>
                   <a:srgbClr val="17364A"/>
                 </a:solidFill>
@@ -3366,11 +3444,11 @@
               </a:rPr>
               <a:t>AI can also support review, but it should not replace reviewers.</a:t>
             </a:r>
-            <a:endParaRPr lang="en-US" sz="1700" dirty="0"/>
-          </a:p>
-          <a:p>
-            <a:r>
-              <a:rPr lang="en-US" sz="1700" dirty="0">
+            <a:endParaRPr lang="en-US" sz="2100" dirty="0"/>
+          </a:p>
+          <a:p>
+            <a:r>
+              <a:rPr lang="en-US" sz="2100" dirty="0">
                 <a:solidFill>
                   <a:srgbClr val="17364A"/>
                 </a:solidFill>
@@ -3378,13 +3456,13 @@
                 <a:ea typeface="Aptos" pitchFamily="34" charset="-122"/>
                 <a:cs typeface="Aptos" pitchFamily="34" charset="-120"/>
               </a:rPr>
-              <a:t>A communications workflow should define who checks technical accuracy, who reviews equity and accessibility, who approves.</a:t>
-            </a:r>
-            <a:endParaRPr lang="en-US" sz="1700" dirty="0"/>
-          </a:p>
-          <a:p>
-            <a:r>
-              <a:rPr lang="en-US" sz="1700" dirty="0">
+              <a:t>A communications workflow should define who checks technical accuracy, who reviews equity and.</a:t>
+            </a:r>
+            <a:endParaRPr lang="en-US" sz="2100" dirty="0"/>
+          </a:p>
+          <a:p>
+            <a:r>
+              <a:rPr lang="en-US" sz="2100" dirty="0">
                 <a:solidFill>
                   <a:srgbClr val="17364A"/>
                 </a:solidFill>
@@ -3392,15 +3470,15 @@
                 <a:ea typeface="Aptos" pitchFamily="34" charset="-122"/>
                 <a:cs typeface="Aptos" pitchFamily="34" charset="-120"/>
               </a:rPr>
-              <a:t>For urgent communications, the workflow should include expedited review rules that still preserve accuracy and.</a:t>
-            </a:r>
-            <a:endParaRPr lang="en-US" sz="1700" dirty="0"/>
-          </a:p>
-        </p:txBody>
-      </p:sp>
-      <p:sp>
-        <p:nvSpPr>
-          <p:cNvPr id="9" name="Shape 7"/>
+              <a:t>For urgent communications, the workflow should include expedited review rules that still preserve.</a:t>
+            </a:r>
+            <a:endParaRPr lang="en-US" sz="2100" dirty="0"/>
+          </a:p>
+        </p:txBody>
+      </p:sp>
+      <p:sp>
+        <p:nvSpPr>
+          <p:cNvPr id="10" name="Shape 8"/>
           <p:cNvSpPr/>
           <p:nvPr/>
         </p:nvSpPr>
@@ -3427,14 +3505,14 @@
       </p:sp>
       <p:sp>
         <p:nvSpPr>
-          <p:cNvPr id="10" name="Text 8"/>
+          <p:cNvPr id="11" name="Text 9"/>
           <p:cNvSpPr/>
           <p:nvPr/>
         </p:nvSpPr>
         <p:spPr>
           <a:xfrm>
             <a:off x="8074152" y="1563624"/>
-            <a:ext cx="2825496" cy="201168"/>
+            <a:ext cx="2825496" cy="256032"/>
           </a:xfrm>
           <a:prstGeom prst="rect">
             <a:avLst/>
@@ -3450,7 +3528,7 @@
               <a:buNone/>
             </a:pPr>
             <a:r>
-              <a:rPr lang="en-US" sz="950" b="1" dirty="0">
+              <a:rPr lang="en-US" sz="1300" b="1" dirty="0">
                 <a:solidFill>
                   <a:srgbClr val="0068B7"/>
                 </a:solidFill>
@@ -3460,20 +3538,20 @@
               </a:rPr>
               <a:t>Key idea</a:t>
             </a:r>
-            <a:endParaRPr lang="en-US" sz="950" dirty="0"/>
-          </a:p>
-        </p:txBody>
-      </p:sp>
-      <p:sp>
-        <p:nvSpPr>
-          <p:cNvPr id="11" name="Text 9"/>
-          <p:cNvSpPr/>
-          <p:nvPr/>
-        </p:nvSpPr>
-        <p:spPr>
-          <a:xfrm>
-            <a:off x="8074152" y="1856232"/>
-            <a:ext cx="2825496" cy="1261872"/>
+            <a:endParaRPr lang="en-US" sz="1300" dirty="0"/>
+          </a:p>
+        </p:txBody>
+      </p:sp>
+      <p:sp>
+        <p:nvSpPr>
+          <p:cNvPr id="12" name="Text 10"/>
+          <p:cNvSpPr/>
+          <p:nvPr/>
+        </p:nvSpPr>
+        <p:spPr>
+          <a:xfrm>
+            <a:off x="8074152" y="1920240"/>
+            <a:ext cx="2825496" cy="1188720"/>
           </a:xfrm>
           <a:prstGeom prst="rect">
             <a:avLst/>
@@ -3491,7 +3569,7 @@
               <a:buNone/>
             </a:pPr>
             <a:r>
-              <a:rPr lang="en-US" sz="1250" dirty="0">
+              <a:rPr lang="en-US" sz="1550" dirty="0">
                 <a:solidFill>
                   <a:srgbClr val="17364A"/>
                 </a:solidFill>
@@ -3501,13 +3579,13 @@
               </a:rPr>
               <a:t>AI can also support review, but it should not replace reviewers.</a:t>
             </a:r>
-            <a:endParaRPr lang="en-US" sz="1250" dirty="0"/>
-          </a:p>
-        </p:txBody>
-      </p:sp>
-      <p:sp>
-        <p:nvSpPr>
-          <p:cNvPr id="12" name="Shape 10"/>
+            <a:endParaRPr lang="en-US" sz="1550" dirty="0"/>
+          </a:p>
+        </p:txBody>
+      </p:sp>
+      <p:sp>
+        <p:nvSpPr>
+          <p:cNvPr id="13" name="Shape 11"/>
           <p:cNvSpPr/>
           <p:nvPr/>
         </p:nvSpPr>
@@ -3534,14 +3612,14 @@
       </p:sp>
       <p:sp>
         <p:nvSpPr>
-          <p:cNvPr id="13" name="Text 11"/>
+          <p:cNvPr id="14" name="Text 12"/>
           <p:cNvSpPr/>
           <p:nvPr/>
         </p:nvSpPr>
         <p:spPr>
           <a:xfrm>
             <a:off x="8074152" y="3666744"/>
-            <a:ext cx="2825496" cy="201168"/>
+            <a:ext cx="2825496" cy="256032"/>
           </a:xfrm>
           <a:prstGeom prst="rect">
             <a:avLst/>
@@ -3557,7 +3635,7 @@
               <a:buNone/>
             </a:pPr>
             <a:r>
-              <a:rPr lang="en-US" sz="950" b="1" dirty="0">
+              <a:rPr lang="en-US" sz="1300" b="1" dirty="0">
                 <a:solidFill>
                   <a:srgbClr val="0068B7"/>
                 </a:solidFill>
@@ -3567,20 +3645,20 @@
               </a:rPr>
               <a:t>Use this for</a:t>
             </a:r>
-            <a:endParaRPr lang="en-US" sz="950" dirty="0"/>
-          </a:p>
-        </p:txBody>
-      </p:sp>
-      <p:sp>
-        <p:nvSpPr>
-          <p:cNvPr id="14" name="Text 12"/>
-          <p:cNvSpPr/>
-          <p:nvPr/>
-        </p:nvSpPr>
-        <p:spPr>
-          <a:xfrm>
-            <a:off x="8074152" y="3959352"/>
-            <a:ext cx="2825496" cy="1170432"/>
+            <a:endParaRPr lang="en-US" sz="1300" dirty="0"/>
+          </a:p>
+        </p:txBody>
+      </p:sp>
+      <p:sp>
+        <p:nvSpPr>
+          <p:cNvPr id="15" name="Text 13"/>
+          <p:cNvSpPr/>
+          <p:nvPr/>
+        </p:nvSpPr>
+        <p:spPr>
+          <a:xfrm>
+            <a:off x="8074152" y="4023360"/>
+            <a:ext cx="2825496" cy="1097280"/>
           </a:xfrm>
           <a:prstGeom prst="rect">
             <a:avLst/>
@@ -3598,7 +3676,7 @@
               <a:buNone/>
             </a:pPr>
             <a:r>
-              <a:rPr lang="en-US" sz="1250" dirty="0">
+              <a:rPr lang="en-US" sz="1550" dirty="0">
                 <a:solidFill>
                   <a:srgbClr val="17364A"/>
                 </a:solidFill>
@@ -3608,7 +3686,7 @@
               </a:rPr>
               <a:t>Connect the concept to public health decisions, safeguards, documentation, or implementation work.</a:t>
             </a:r>
-            <a:endParaRPr lang="en-US" sz="1250" dirty="0"/>
+            <a:endParaRPr lang="en-US" sz="1550" dirty="0"/>
           </a:p>
         </p:txBody>
       </p:sp>
@@ -3805,7 +3883,7 @@
                 <a:ea typeface="Aptos" pitchFamily="34" charset="-122"/>
                 <a:cs typeface="Aptos" pitchFamily="34" charset="-120"/>
               </a:rPr>
-              <a:t>© Paula Soper</a:t>
+              <a:t>Â© Paula Soper</a:t>
             </a:r>
             <a:endParaRPr lang="en-US" sz="800" dirty="0"/>
           </a:p>
@@ -3813,7 +3891,46 @@
       </p:sp>
       <p:sp>
         <p:nvSpPr>
-          <p:cNvPr id="7" name="Shape 5"/>
+          <p:cNvPr id="7" name="Text 5"/>
+          <p:cNvSpPr/>
+          <p:nvPr/>
+        </p:nvSpPr>
+        <p:spPr>
+          <a:xfrm>
+            <a:off x="11137392" y="6510528"/>
+            <a:ext cx="411480" cy="201168"/>
+          </a:xfrm>
+          <a:prstGeom prst="rect">
+            <a:avLst/>
+          </a:prstGeom>
+          <a:noFill/>
+          <a:ln/>
+        </p:spPr>
+        <p:txBody>
+          <a:bodyPr wrap="square" lIns="0" tIns="0" rIns="0" bIns="0" rtlCol="0" anchor="ctr"/>
+          <a:lstStyle/>
+          <a:p>
+            <a:pPr algn="r" indent="0" marL="0">
+              <a:buNone/>
+            </a:pPr>
+            <a:r>
+              <a:rPr lang="en-US" sz="900" dirty="0">
+                <a:solidFill>
+                  <a:srgbClr val="5F7181"/>
+                </a:solidFill>
+                <a:latin typeface="Aptos" pitchFamily="34" charset="0"/>
+                <a:ea typeface="Aptos" pitchFamily="34" charset="-122"/>
+                <a:cs typeface="Aptos" pitchFamily="34" charset="-120"/>
+              </a:rPr>
+              <a:t>11</a:t>
+            </a:r>
+            <a:endParaRPr lang="en-US" sz="900" dirty="0"/>
+          </a:p>
+        </p:txBody>
+      </p:sp>
+      <p:sp>
+        <p:nvSpPr>
+          <p:cNvPr id="8" name="Shape 6"/>
           <p:cNvSpPr/>
           <p:nvPr/>
         </p:nvSpPr>
@@ -3838,7 +3955,7 @@
       </p:sp>
       <p:sp>
         <p:nvSpPr>
-          <p:cNvPr id="8" name="Text 6"/>
+          <p:cNvPr id="9" name="Text 7"/>
           <p:cNvSpPr/>
           <p:nvPr/>
         </p:nvSpPr>
@@ -3877,14 +3994,14 @@
       </p:sp>
       <p:sp>
         <p:nvSpPr>
-          <p:cNvPr id="9" name="Text 7"/>
+          <p:cNvPr id="10" name="Text 8"/>
           <p:cNvSpPr/>
           <p:nvPr/>
         </p:nvSpPr>
         <p:spPr>
           <a:xfrm>
             <a:off x="640080" y="621792"/>
-            <a:ext cx="10881360" cy="566928"/>
+            <a:ext cx="10881360" cy="713232"/>
           </a:xfrm>
           <a:prstGeom prst="rect">
             <a:avLst/>
@@ -3902,7 +4019,7 @@
               <a:buNone/>
             </a:pPr>
             <a:r>
-              <a:rPr lang="en-US" sz="2700" b="1" dirty="0">
+              <a:rPr lang="en-US" sz="3400" b="1" dirty="0">
                 <a:solidFill>
                   <a:srgbClr val="003A63"/>
                 </a:solidFill>
@@ -3912,20 +4029,20 @@
               </a:rPr>
               <a:t>Risks, Failure Modes, and Guardrails</a:t>
             </a:r>
-            <a:endParaRPr lang="en-US" sz="2700" dirty="0"/>
-          </a:p>
-        </p:txBody>
-      </p:sp>
-      <p:sp>
-        <p:nvSpPr>
-          <p:cNvPr id="10" name="Text 8"/>
-          <p:cNvSpPr/>
-          <p:nvPr/>
-        </p:nvSpPr>
-        <p:spPr>
-          <a:xfrm>
-            <a:off x="868680" y="1417320"/>
-            <a:ext cx="6675120" cy="4434840"/>
+            <a:endParaRPr lang="en-US" sz="3400" dirty="0"/>
+          </a:p>
+        </p:txBody>
+      </p:sp>
+      <p:sp>
+        <p:nvSpPr>
+          <p:cNvPr id="11" name="Text 9"/>
+          <p:cNvSpPr/>
+          <p:nvPr/>
+        </p:nvSpPr>
+        <p:spPr>
+          <a:xfrm>
+            <a:off x="868680" y="1508760"/>
+            <a:ext cx="6537960" cy="4160520"/>
           </a:xfrm>
           <a:prstGeom prst="rect">
             <a:avLst/>
@@ -3940,7 +4057,7 @@
           <a:lstStyle/>
           <a:p>
             <a:r>
-              <a:rPr lang="en-US" sz="1700" dirty="0">
+              <a:rPr lang="en-US" sz="2100" dirty="0">
                 <a:solidFill>
                   <a:srgbClr val="17364A"/>
                 </a:solidFill>
@@ -3950,11 +4067,11 @@
               </a:rPr>
               <a:t>Risks and failure modes include the following:</a:t>
             </a:r>
-            <a:endParaRPr lang="en-US" sz="1700" dirty="0"/>
-          </a:p>
-          <a:p>
-            <a:r>
-              <a:rPr lang="en-US" sz="1700" dirty="0">
+            <a:endParaRPr lang="en-US" sz="2100" dirty="0"/>
+          </a:p>
+          <a:p>
+            <a:r>
+              <a:rPr lang="en-US" sz="2100" dirty="0">
                 <a:solidFill>
                   <a:srgbClr val="17364A"/>
                 </a:solidFill>
@@ -3964,11 +4081,11 @@
               </a:rPr>
               <a:t>AI-generated messages overstating evidence or omitting uncertainty.</a:t>
             </a:r>
-            <a:endParaRPr lang="en-US" sz="1700" dirty="0"/>
-          </a:p>
-          <a:p>
-            <a:r>
-              <a:rPr lang="en-US" sz="1700" dirty="0">
+            <a:endParaRPr lang="en-US" sz="2100" dirty="0"/>
+          </a:p>
+          <a:p>
+            <a:r>
+              <a:rPr lang="en-US" sz="2100" dirty="0">
                 <a:solidFill>
                   <a:srgbClr val="17364A"/>
                 </a:solidFill>
@@ -3978,13 +4095,13 @@
               </a:rPr>
               <a:t>Use of stigmatizing, blaming, or culturally inappropriate language.</a:t>
             </a:r>
-            <a:endParaRPr lang="en-US" sz="1700" dirty="0"/>
-          </a:p>
-        </p:txBody>
-      </p:sp>
-      <p:sp>
-        <p:nvSpPr>
-          <p:cNvPr id="11" name="Shape 9"/>
+            <a:endParaRPr lang="en-US" sz="2100" dirty="0"/>
+          </a:p>
+        </p:txBody>
+      </p:sp>
+      <p:sp>
+        <p:nvSpPr>
+          <p:cNvPr id="12" name="Shape 10"/>
           <p:cNvSpPr/>
           <p:nvPr/>
         </p:nvSpPr>
@@ -4011,14 +4128,14 @@
       </p:sp>
       <p:sp>
         <p:nvSpPr>
-          <p:cNvPr id="12" name="Text 10"/>
+          <p:cNvPr id="13" name="Text 11"/>
           <p:cNvSpPr/>
           <p:nvPr/>
         </p:nvSpPr>
         <p:spPr>
           <a:xfrm>
             <a:off x="8074152" y="1563624"/>
-            <a:ext cx="2825496" cy="201168"/>
+            <a:ext cx="2825496" cy="256032"/>
           </a:xfrm>
           <a:prstGeom prst="rect">
             <a:avLst/>
@@ -4034,7 +4151,7 @@
               <a:buNone/>
             </a:pPr>
             <a:r>
-              <a:rPr lang="en-US" sz="950" b="1" dirty="0">
+              <a:rPr lang="en-US" sz="1300" b="1" dirty="0">
                 <a:solidFill>
                   <a:srgbClr val="0068B7"/>
                 </a:solidFill>
@@ -4044,20 +4161,20 @@
               </a:rPr>
               <a:t>Key idea</a:t>
             </a:r>
-            <a:endParaRPr lang="en-US" sz="950" dirty="0"/>
-          </a:p>
-        </p:txBody>
-      </p:sp>
-      <p:sp>
-        <p:nvSpPr>
-          <p:cNvPr id="13" name="Text 11"/>
-          <p:cNvSpPr/>
-          <p:nvPr/>
-        </p:nvSpPr>
-        <p:spPr>
-          <a:xfrm>
-            <a:off x="8074152" y="1856232"/>
-            <a:ext cx="2825496" cy="1261872"/>
+            <a:endParaRPr lang="en-US" sz="1300" dirty="0"/>
+          </a:p>
+        </p:txBody>
+      </p:sp>
+      <p:sp>
+        <p:nvSpPr>
+          <p:cNvPr id="14" name="Text 12"/>
+          <p:cNvSpPr/>
+          <p:nvPr/>
+        </p:nvSpPr>
+        <p:spPr>
+          <a:xfrm>
+            <a:off x="8074152" y="1920240"/>
+            <a:ext cx="2825496" cy="1188720"/>
           </a:xfrm>
           <a:prstGeom prst="rect">
             <a:avLst/>
@@ -4075,7 +4192,7 @@
               <a:buNone/>
             </a:pPr>
             <a:r>
-              <a:rPr lang="en-US" sz="1250" dirty="0">
+              <a:rPr lang="en-US" sz="1550" dirty="0">
                 <a:solidFill>
                   <a:srgbClr val="17364A"/>
                 </a:solidFill>
@@ -4085,13 +4202,13 @@
               </a:rPr>
               <a:t>Risks and failure modes include the following:</a:t>
             </a:r>
-            <a:endParaRPr lang="en-US" sz="1250" dirty="0"/>
-          </a:p>
-        </p:txBody>
-      </p:sp>
-      <p:sp>
-        <p:nvSpPr>
-          <p:cNvPr id="14" name="Shape 12"/>
+            <a:endParaRPr lang="en-US" sz="1550" dirty="0"/>
+          </a:p>
+        </p:txBody>
+      </p:sp>
+      <p:sp>
+        <p:nvSpPr>
+          <p:cNvPr id="15" name="Shape 13"/>
           <p:cNvSpPr/>
           <p:nvPr/>
         </p:nvSpPr>
@@ -4118,14 +4235,14 @@
       </p:sp>
       <p:sp>
         <p:nvSpPr>
-          <p:cNvPr id="15" name="Text 13"/>
+          <p:cNvPr id="16" name="Text 14"/>
           <p:cNvSpPr/>
           <p:nvPr/>
         </p:nvSpPr>
         <p:spPr>
           <a:xfrm>
             <a:off x="8074152" y="3666744"/>
-            <a:ext cx="2825496" cy="201168"/>
+            <a:ext cx="2825496" cy="256032"/>
           </a:xfrm>
           <a:prstGeom prst="rect">
             <a:avLst/>
@@ -4141,7 +4258,7 @@
               <a:buNone/>
             </a:pPr>
             <a:r>
-              <a:rPr lang="en-US" sz="950" b="1" dirty="0">
+              <a:rPr lang="en-US" sz="1300" b="1" dirty="0">
                 <a:solidFill>
                   <a:srgbClr val="0068B7"/>
                 </a:solidFill>
@@ -4151,20 +4268,20 @@
               </a:rPr>
               <a:t>Use this for</a:t>
             </a:r>
-            <a:endParaRPr lang="en-US" sz="950" dirty="0"/>
-          </a:p>
-        </p:txBody>
-      </p:sp>
-      <p:sp>
-        <p:nvSpPr>
-          <p:cNvPr id="16" name="Text 14"/>
-          <p:cNvSpPr/>
-          <p:nvPr/>
-        </p:nvSpPr>
-        <p:spPr>
-          <a:xfrm>
-            <a:off x="8074152" y="3959352"/>
-            <a:ext cx="2825496" cy="1170432"/>
+            <a:endParaRPr lang="en-US" sz="1300" dirty="0"/>
+          </a:p>
+        </p:txBody>
+      </p:sp>
+      <p:sp>
+        <p:nvSpPr>
+          <p:cNvPr id="17" name="Text 15"/>
+          <p:cNvSpPr/>
+          <p:nvPr/>
+        </p:nvSpPr>
+        <p:spPr>
+          <a:xfrm>
+            <a:off x="8074152" y="4023360"/>
+            <a:ext cx="2825496" cy="1097280"/>
           </a:xfrm>
           <a:prstGeom prst="rect">
             <a:avLst/>
@@ -4182,7 +4299,7 @@
               <a:buNone/>
             </a:pPr>
             <a:r>
-              <a:rPr lang="en-US" sz="1250" dirty="0">
+              <a:rPr lang="en-US" sz="1550" dirty="0">
                 <a:solidFill>
                   <a:srgbClr val="17364A"/>
                 </a:solidFill>
@@ -4192,7 +4309,7 @@
               </a:rPr>
               <a:t>Connect the concept to public health decisions, safeguards, documentation, or implementation work.</a:t>
             </a:r>
-            <a:endParaRPr lang="en-US" sz="1250" dirty="0"/>
+            <a:endParaRPr lang="en-US" sz="1550" dirty="0"/>
           </a:p>
         </p:txBody>
       </p:sp>
@@ -4389,7 +4506,7 @@
                 <a:ea typeface="Aptos" pitchFamily="34" charset="-122"/>
                 <a:cs typeface="Aptos" pitchFamily="34" charset="-120"/>
               </a:rPr>
-              <a:t>© Paula Soper</a:t>
+              <a:t>Â© Paula Soper</a:t>
             </a:r>
             <a:endParaRPr lang="en-US" sz="800" dirty="0"/>
           </a:p>
@@ -4403,8 +4520,47 @@
         </p:nvSpPr>
         <p:spPr>
           <a:xfrm>
+            <a:off x="11137392" y="6510528"/>
+            <a:ext cx="411480" cy="201168"/>
+          </a:xfrm>
+          <a:prstGeom prst="rect">
+            <a:avLst/>
+          </a:prstGeom>
+          <a:noFill/>
+          <a:ln/>
+        </p:spPr>
+        <p:txBody>
+          <a:bodyPr wrap="square" lIns="0" tIns="0" rIns="0" bIns="0" rtlCol="0" anchor="ctr"/>
+          <a:lstStyle/>
+          <a:p>
+            <a:pPr algn="r" indent="0" marL="0">
+              <a:buNone/>
+            </a:pPr>
+            <a:r>
+              <a:rPr lang="en-US" sz="900" dirty="0">
+                <a:solidFill>
+                  <a:srgbClr val="5F7181"/>
+                </a:solidFill>
+                <a:latin typeface="Aptos" pitchFamily="34" charset="0"/>
+                <a:ea typeface="Aptos" pitchFamily="34" charset="-122"/>
+                <a:cs typeface="Aptos" pitchFamily="34" charset="-120"/>
+              </a:rPr>
+              <a:t>12</a:t>
+            </a:r>
+            <a:endParaRPr lang="en-US" sz="900" dirty="0"/>
+          </a:p>
+        </p:txBody>
+      </p:sp>
+      <p:sp>
+        <p:nvSpPr>
+          <p:cNvPr id="8" name="Text 6"/>
+          <p:cNvSpPr/>
+          <p:nvPr/>
+        </p:nvSpPr>
+        <p:spPr>
+          <a:xfrm>
             <a:off x="640080" y="658368"/>
-            <a:ext cx="10881360" cy="566928"/>
+            <a:ext cx="10881360" cy="713232"/>
           </a:xfrm>
           <a:prstGeom prst="rect">
             <a:avLst/>
@@ -4422,7 +4578,7 @@
               <a:buNone/>
             </a:pPr>
             <a:r>
-              <a:rPr lang="en-US" sz="2700" b="1" dirty="0">
+              <a:rPr lang="en-US" sz="3400" b="1" dirty="0">
                 <a:solidFill>
                   <a:srgbClr val="003A63"/>
                 </a:solidFill>
@@ -4432,20 +4588,20 @@
               </a:rPr>
               <a:t>Risks, Failure Modes, and Guardrails Continued</a:t>
             </a:r>
-            <a:endParaRPr lang="en-US" sz="2700" dirty="0"/>
-          </a:p>
-        </p:txBody>
-      </p:sp>
-      <p:sp>
-        <p:nvSpPr>
-          <p:cNvPr id="8" name="Text 6"/>
-          <p:cNvSpPr/>
-          <p:nvPr/>
-        </p:nvSpPr>
-        <p:spPr>
-          <a:xfrm>
-            <a:off x="868680" y="1417320"/>
-            <a:ext cx="6675120" cy="4434840"/>
+            <a:endParaRPr lang="en-US" sz="3400" dirty="0"/>
+          </a:p>
+        </p:txBody>
+      </p:sp>
+      <p:sp>
+        <p:nvSpPr>
+          <p:cNvPr id="9" name="Text 7"/>
+          <p:cNvSpPr/>
+          <p:nvPr/>
+        </p:nvSpPr>
+        <p:spPr>
+          <a:xfrm>
+            <a:off x="868680" y="1508760"/>
+            <a:ext cx="6537960" cy="4160520"/>
           </a:xfrm>
           <a:prstGeom prst="rect">
             <a:avLst/>
@@ -4460,7 +4616,7 @@
           <a:lstStyle/>
           <a:p>
             <a:r>
-              <a:rPr lang="en-US" sz="1700" dirty="0">
+              <a:rPr lang="en-US" sz="2100" dirty="0">
                 <a:solidFill>
                   <a:srgbClr val="17364A"/>
                 </a:solidFill>
@@ -4470,11 +4626,11 @@
               </a:rPr>
               <a:t>Unverified translations or readability changes that alter meaning.</a:t>
             </a:r>
-            <a:endParaRPr lang="en-US" sz="1700" dirty="0"/>
-          </a:p>
-          <a:p>
-            <a:r>
-              <a:rPr lang="en-US" sz="1700" dirty="0">
+            <a:endParaRPr lang="en-US" sz="2100" dirty="0"/>
+          </a:p>
+          <a:p>
+            <a:r>
+              <a:rPr lang="en-US" sz="2100" dirty="0">
                 <a:solidFill>
                   <a:srgbClr val="17364A"/>
                 </a:solidFill>
@@ -4484,11 +4640,11 @@
               </a:rPr>
               <a:t>Public-facing content being released without required subject matter or leadership review.</a:t>
             </a:r>
-            <a:endParaRPr lang="en-US" sz="1700" dirty="0"/>
-          </a:p>
-          <a:p>
-            <a:r>
-              <a:rPr lang="en-US" sz="1700" dirty="0">
+            <a:endParaRPr lang="en-US" sz="2100" dirty="0"/>
+          </a:p>
+          <a:p>
+            <a:r>
+              <a:rPr lang="en-US" sz="2100" dirty="0">
                 <a:solidFill>
                   <a:srgbClr val="17364A"/>
                 </a:solidFill>
@@ -4496,15 +4652,15 @@
                 <a:ea typeface="Aptos" pitchFamily="34" charset="-122"/>
                 <a:cs typeface="Aptos" pitchFamily="34" charset="-120"/>
               </a:rPr>
-              <a:t>Messages that assume access to resources, technology, transportation, or healthcare that the audience may not have.</a:t>
-            </a:r>
-            <a:endParaRPr lang="en-US" sz="1700" dirty="0"/>
-          </a:p>
-        </p:txBody>
-      </p:sp>
-      <p:sp>
-        <p:nvSpPr>
-          <p:cNvPr id="9" name="Shape 7"/>
+              <a:t>Messages that assume access to resources, technology, transportation, or healthcare that the audience.</a:t>
+            </a:r>
+            <a:endParaRPr lang="en-US" sz="2100" dirty="0"/>
+          </a:p>
+        </p:txBody>
+      </p:sp>
+      <p:sp>
+        <p:nvSpPr>
+          <p:cNvPr id="10" name="Shape 8"/>
           <p:cNvSpPr/>
           <p:nvPr/>
         </p:nvSpPr>
@@ -4531,14 +4687,14 @@
       </p:sp>
       <p:sp>
         <p:nvSpPr>
-          <p:cNvPr id="10" name="Text 8"/>
+          <p:cNvPr id="11" name="Text 9"/>
           <p:cNvSpPr/>
           <p:nvPr/>
         </p:nvSpPr>
         <p:spPr>
           <a:xfrm>
             <a:off x="8074152" y="1563624"/>
-            <a:ext cx="2825496" cy="201168"/>
+            <a:ext cx="2825496" cy="256032"/>
           </a:xfrm>
           <a:prstGeom prst="rect">
             <a:avLst/>
@@ -4554,7 +4710,7 @@
               <a:buNone/>
             </a:pPr>
             <a:r>
-              <a:rPr lang="en-US" sz="950" b="1" dirty="0">
+              <a:rPr lang="en-US" sz="1300" b="1" dirty="0">
                 <a:solidFill>
                   <a:srgbClr val="0068B7"/>
                 </a:solidFill>
@@ -4564,20 +4720,20 @@
               </a:rPr>
               <a:t>Key idea</a:t>
             </a:r>
-            <a:endParaRPr lang="en-US" sz="950" dirty="0"/>
-          </a:p>
-        </p:txBody>
-      </p:sp>
-      <p:sp>
-        <p:nvSpPr>
-          <p:cNvPr id="11" name="Text 9"/>
-          <p:cNvSpPr/>
-          <p:nvPr/>
-        </p:nvSpPr>
-        <p:spPr>
-          <a:xfrm>
-            <a:off x="8074152" y="1856232"/>
-            <a:ext cx="2825496" cy="1261872"/>
+            <a:endParaRPr lang="en-US" sz="1300" dirty="0"/>
+          </a:p>
+        </p:txBody>
+      </p:sp>
+      <p:sp>
+        <p:nvSpPr>
+          <p:cNvPr id="12" name="Text 10"/>
+          <p:cNvSpPr/>
+          <p:nvPr/>
+        </p:nvSpPr>
+        <p:spPr>
+          <a:xfrm>
+            <a:off x="8074152" y="1920240"/>
+            <a:ext cx="2825496" cy="1188720"/>
           </a:xfrm>
           <a:prstGeom prst="rect">
             <a:avLst/>
@@ -4595,7 +4751,7 @@
               <a:buNone/>
             </a:pPr>
             <a:r>
-              <a:rPr lang="en-US" sz="1250" dirty="0">
+              <a:rPr lang="en-US" sz="1550" dirty="0">
                 <a:solidFill>
                   <a:srgbClr val="17364A"/>
                 </a:solidFill>
@@ -4605,13 +4761,13 @@
               </a:rPr>
               <a:t>Unverified translations or readability changes that alter meaning.</a:t>
             </a:r>
-            <a:endParaRPr lang="en-US" sz="1250" dirty="0"/>
-          </a:p>
-        </p:txBody>
-      </p:sp>
-      <p:sp>
-        <p:nvSpPr>
-          <p:cNvPr id="12" name="Shape 10"/>
+            <a:endParaRPr lang="en-US" sz="1550" dirty="0"/>
+          </a:p>
+        </p:txBody>
+      </p:sp>
+      <p:sp>
+        <p:nvSpPr>
+          <p:cNvPr id="13" name="Shape 11"/>
           <p:cNvSpPr/>
           <p:nvPr/>
         </p:nvSpPr>
@@ -4638,14 +4794,14 @@
       </p:sp>
       <p:sp>
         <p:nvSpPr>
-          <p:cNvPr id="13" name="Text 11"/>
+          <p:cNvPr id="14" name="Text 12"/>
           <p:cNvSpPr/>
           <p:nvPr/>
         </p:nvSpPr>
         <p:spPr>
           <a:xfrm>
             <a:off x="8074152" y="3666744"/>
-            <a:ext cx="2825496" cy="201168"/>
+            <a:ext cx="2825496" cy="256032"/>
           </a:xfrm>
           <a:prstGeom prst="rect">
             <a:avLst/>
@@ -4661,7 +4817,7 @@
               <a:buNone/>
             </a:pPr>
             <a:r>
-              <a:rPr lang="en-US" sz="950" b="1" dirty="0">
+              <a:rPr lang="en-US" sz="1300" b="1" dirty="0">
                 <a:solidFill>
                   <a:srgbClr val="0068B7"/>
                 </a:solidFill>
@@ -4671,20 +4827,20 @@
               </a:rPr>
               <a:t>Use this for</a:t>
             </a:r>
-            <a:endParaRPr lang="en-US" sz="950" dirty="0"/>
-          </a:p>
-        </p:txBody>
-      </p:sp>
-      <p:sp>
-        <p:nvSpPr>
-          <p:cNvPr id="14" name="Text 12"/>
-          <p:cNvSpPr/>
-          <p:nvPr/>
-        </p:nvSpPr>
-        <p:spPr>
-          <a:xfrm>
-            <a:off x="8074152" y="3959352"/>
-            <a:ext cx="2825496" cy="1170432"/>
+            <a:endParaRPr lang="en-US" sz="1300" dirty="0"/>
+          </a:p>
+        </p:txBody>
+      </p:sp>
+      <p:sp>
+        <p:nvSpPr>
+          <p:cNvPr id="15" name="Text 13"/>
+          <p:cNvSpPr/>
+          <p:nvPr/>
+        </p:nvSpPr>
+        <p:spPr>
+          <a:xfrm>
+            <a:off x="8074152" y="4023360"/>
+            <a:ext cx="2825496" cy="1097280"/>
           </a:xfrm>
           <a:prstGeom prst="rect">
             <a:avLst/>
@@ -4702,7 +4858,7 @@
               <a:buNone/>
             </a:pPr>
             <a:r>
-              <a:rPr lang="en-US" sz="1250" dirty="0">
+              <a:rPr lang="en-US" sz="1550" dirty="0">
                 <a:solidFill>
                   <a:srgbClr val="17364A"/>
                 </a:solidFill>
@@ -4712,7 +4868,7 @@
               </a:rPr>
               <a:t>Connect the concept to public health decisions, safeguards, documentation, or implementation work.</a:t>
             </a:r>
-            <a:endParaRPr lang="en-US" sz="1250" dirty="0"/>
+            <a:endParaRPr lang="en-US" sz="1550" dirty="0"/>
           </a:p>
         </p:txBody>
       </p:sp>
@@ -4909,7 +5065,7 @@
                 <a:ea typeface="Aptos" pitchFamily="34" charset="-122"/>
                 <a:cs typeface="Aptos" pitchFamily="34" charset="-120"/>
               </a:rPr>
-              <a:t>© Paula Soper</a:t>
+              <a:t>Â© Paula Soper</a:t>
             </a:r>
             <a:endParaRPr lang="en-US" sz="800" dirty="0"/>
           </a:p>
@@ -4923,8 +5079,47 @@
         </p:nvSpPr>
         <p:spPr>
           <a:xfrm>
+            <a:off x="11137392" y="6510528"/>
+            <a:ext cx="411480" cy="201168"/>
+          </a:xfrm>
+          <a:prstGeom prst="rect">
+            <a:avLst/>
+          </a:prstGeom>
+          <a:noFill/>
+          <a:ln/>
+        </p:spPr>
+        <p:txBody>
+          <a:bodyPr wrap="square" lIns="0" tIns="0" rIns="0" bIns="0" rtlCol="0" anchor="ctr"/>
+          <a:lstStyle/>
+          <a:p>
+            <a:pPr algn="r" indent="0" marL="0">
+              <a:buNone/>
+            </a:pPr>
+            <a:r>
+              <a:rPr lang="en-US" sz="900" dirty="0">
+                <a:solidFill>
+                  <a:srgbClr val="5F7181"/>
+                </a:solidFill>
+                <a:latin typeface="Aptos" pitchFamily="34" charset="0"/>
+                <a:ea typeface="Aptos" pitchFamily="34" charset="-122"/>
+                <a:cs typeface="Aptos" pitchFamily="34" charset="-120"/>
+              </a:rPr>
+              <a:t>13</a:t>
+            </a:r>
+            <a:endParaRPr lang="en-US" sz="900" dirty="0"/>
+          </a:p>
+        </p:txBody>
+      </p:sp>
+      <p:sp>
+        <p:nvSpPr>
+          <p:cNvPr id="8" name="Text 6"/>
+          <p:cNvSpPr/>
+          <p:nvPr/>
+        </p:nvSpPr>
+        <p:spPr>
+          <a:xfrm>
             <a:off x="640080" y="658368"/>
-            <a:ext cx="10881360" cy="566928"/>
+            <a:ext cx="10881360" cy="713232"/>
           </a:xfrm>
           <a:prstGeom prst="rect">
             <a:avLst/>
@@ -4942,7 +5137,7 @@
               <a:buNone/>
             </a:pPr>
             <a:r>
-              <a:rPr lang="en-US" sz="2700" b="1" dirty="0">
+              <a:rPr lang="en-US" sz="3400" b="1" dirty="0">
                 <a:solidFill>
                   <a:srgbClr val="003A63"/>
                 </a:solidFill>
@@ -4952,20 +5147,20 @@
               </a:rPr>
               <a:t>Risks, Failure Modes, and Guardrails Continued</a:t>
             </a:r>
-            <a:endParaRPr lang="en-US" sz="2700" dirty="0"/>
-          </a:p>
-        </p:txBody>
-      </p:sp>
-      <p:sp>
-        <p:nvSpPr>
-          <p:cNvPr id="8" name="Text 6"/>
-          <p:cNvSpPr/>
-          <p:nvPr/>
-        </p:nvSpPr>
-        <p:spPr>
-          <a:xfrm>
-            <a:off x="868680" y="1417320"/>
-            <a:ext cx="6675120" cy="4434840"/>
+            <a:endParaRPr lang="en-US" sz="3400" dirty="0"/>
+          </a:p>
+        </p:txBody>
+      </p:sp>
+      <p:sp>
+        <p:nvSpPr>
+          <p:cNvPr id="9" name="Text 7"/>
+          <p:cNvSpPr/>
+          <p:nvPr/>
+        </p:nvSpPr>
+        <p:spPr>
+          <a:xfrm>
+            <a:off x="868680" y="1508760"/>
+            <a:ext cx="6537960" cy="4160520"/>
           </a:xfrm>
           <a:prstGeom prst="rect">
             <a:avLst/>
@@ -4980,7 +5175,7 @@
           <a:lstStyle/>
           <a:p>
             <a:r>
-              <a:rPr lang="en-US" sz="1700" dirty="0">
+              <a:rPr lang="en-US" sz="2100" dirty="0">
                 <a:solidFill>
                   <a:srgbClr val="17364A"/>
                 </a:solidFill>
@@ -4990,11 +5185,11 @@
               </a:rPr>
               <a:t>Recommended guardrails include the following:</a:t>
             </a:r>
-            <a:endParaRPr lang="en-US" sz="1700" dirty="0"/>
-          </a:p>
-          <a:p>
-            <a:r>
-              <a:rPr lang="en-US" sz="1700" dirty="0">
+            <a:endParaRPr lang="en-US" sz="2100" dirty="0"/>
+          </a:p>
+          <a:p>
+            <a:r>
+              <a:rPr lang="en-US" sz="2100" dirty="0">
                 <a:solidFill>
                   <a:srgbClr val="17364A"/>
                 </a:solidFill>
@@ -5004,11 +5199,11 @@
               </a:rPr>
               <a:t>Use only approved tools and approved source material for public health communications.</a:t>
             </a:r>
-            <a:endParaRPr lang="en-US" sz="1700" dirty="0"/>
-          </a:p>
-          <a:p>
-            <a:r>
-              <a:rPr lang="en-US" sz="1700" dirty="0">
+            <a:endParaRPr lang="en-US" sz="2100" dirty="0"/>
+          </a:p>
+          <a:p>
+            <a:r>
+              <a:rPr lang="en-US" sz="2100" dirty="0">
                 <a:solidFill>
                   <a:srgbClr val="17364A"/>
                 </a:solidFill>
@@ -5018,13 +5213,13 @@
               </a:rPr>
               <a:t>Require human review for accuracy, plain language, accessibility, equity, and tone.</a:t>
             </a:r>
-            <a:endParaRPr lang="en-US" sz="1700" dirty="0"/>
-          </a:p>
-        </p:txBody>
-      </p:sp>
-      <p:sp>
-        <p:nvSpPr>
-          <p:cNvPr id="9" name="Shape 7"/>
+            <a:endParaRPr lang="en-US" sz="2100" dirty="0"/>
+          </a:p>
+        </p:txBody>
+      </p:sp>
+      <p:sp>
+        <p:nvSpPr>
+          <p:cNvPr id="10" name="Shape 8"/>
           <p:cNvSpPr/>
           <p:nvPr/>
         </p:nvSpPr>
@@ -5051,14 +5246,14 @@
       </p:sp>
       <p:sp>
         <p:nvSpPr>
-          <p:cNvPr id="10" name="Text 8"/>
+          <p:cNvPr id="11" name="Text 9"/>
           <p:cNvSpPr/>
           <p:nvPr/>
         </p:nvSpPr>
         <p:spPr>
           <a:xfrm>
             <a:off x="8074152" y="1563624"/>
-            <a:ext cx="2825496" cy="201168"/>
+            <a:ext cx="2825496" cy="256032"/>
           </a:xfrm>
           <a:prstGeom prst="rect">
             <a:avLst/>
@@ -5074,7 +5269,7 @@
               <a:buNone/>
             </a:pPr>
             <a:r>
-              <a:rPr lang="en-US" sz="950" b="1" dirty="0">
+              <a:rPr lang="en-US" sz="1300" b="1" dirty="0">
                 <a:solidFill>
                   <a:srgbClr val="0068B7"/>
                 </a:solidFill>
@@ -5084,20 +5279,20 @@
               </a:rPr>
               <a:t>Key idea</a:t>
             </a:r>
-            <a:endParaRPr lang="en-US" sz="950" dirty="0"/>
-          </a:p>
-        </p:txBody>
-      </p:sp>
-      <p:sp>
-        <p:nvSpPr>
-          <p:cNvPr id="11" name="Text 9"/>
-          <p:cNvSpPr/>
-          <p:nvPr/>
-        </p:nvSpPr>
-        <p:spPr>
-          <a:xfrm>
-            <a:off x="8074152" y="1856232"/>
-            <a:ext cx="2825496" cy="1261872"/>
+            <a:endParaRPr lang="en-US" sz="1300" dirty="0"/>
+          </a:p>
+        </p:txBody>
+      </p:sp>
+      <p:sp>
+        <p:nvSpPr>
+          <p:cNvPr id="12" name="Text 10"/>
+          <p:cNvSpPr/>
+          <p:nvPr/>
+        </p:nvSpPr>
+        <p:spPr>
+          <a:xfrm>
+            <a:off x="8074152" y="1920240"/>
+            <a:ext cx="2825496" cy="1188720"/>
           </a:xfrm>
           <a:prstGeom prst="rect">
             <a:avLst/>
@@ -5115,7 +5310,7 @@
               <a:buNone/>
             </a:pPr>
             <a:r>
-              <a:rPr lang="en-US" sz="1250" dirty="0">
+              <a:rPr lang="en-US" sz="1550" dirty="0">
                 <a:solidFill>
                   <a:srgbClr val="17364A"/>
                 </a:solidFill>
@@ -5125,13 +5320,13 @@
               </a:rPr>
               <a:t>Recommended guardrails include the following:</a:t>
             </a:r>
-            <a:endParaRPr lang="en-US" sz="1250" dirty="0"/>
-          </a:p>
-        </p:txBody>
-      </p:sp>
-      <p:sp>
-        <p:nvSpPr>
-          <p:cNvPr id="12" name="Shape 10"/>
+            <a:endParaRPr lang="en-US" sz="1550" dirty="0"/>
+          </a:p>
+        </p:txBody>
+      </p:sp>
+      <p:sp>
+        <p:nvSpPr>
+          <p:cNvPr id="13" name="Shape 11"/>
           <p:cNvSpPr/>
           <p:nvPr/>
         </p:nvSpPr>
@@ -5158,14 +5353,14 @@
       </p:sp>
       <p:sp>
         <p:nvSpPr>
-          <p:cNvPr id="13" name="Text 11"/>
+          <p:cNvPr id="14" name="Text 12"/>
           <p:cNvSpPr/>
           <p:nvPr/>
         </p:nvSpPr>
         <p:spPr>
           <a:xfrm>
             <a:off x="8074152" y="3666744"/>
-            <a:ext cx="2825496" cy="201168"/>
+            <a:ext cx="2825496" cy="256032"/>
           </a:xfrm>
           <a:prstGeom prst="rect">
             <a:avLst/>
@@ -5181,7 +5376,7 @@
               <a:buNone/>
             </a:pPr>
             <a:r>
-              <a:rPr lang="en-US" sz="950" b="1" dirty="0">
+              <a:rPr lang="en-US" sz="1300" b="1" dirty="0">
                 <a:solidFill>
                   <a:srgbClr val="0068B7"/>
                 </a:solidFill>
@@ -5191,20 +5386,20 @@
               </a:rPr>
               <a:t>Use this for</a:t>
             </a:r>
-            <a:endParaRPr lang="en-US" sz="950" dirty="0"/>
-          </a:p>
-        </p:txBody>
-      </p:sp>
-      <p:sp>
-        <p:nvSpPr>
-          <p:cNvPr id="14" name="Text 12"/>
-          <p:cNvSpPr/>
-          <p:nvPr/>
-        </p:nvSpPr>
-        <p:spPr>
-          <a:xfrm>
-            <a:off x="8074152" y="3959352"/>
-            <a:ext cx="2825496" cy="1170432"/>
+            <a:endParaRPr lang="en-US" sz="1300" dirty="0"/>
+          </a:p>
+        </p:txBody>
+      </p:sp>
+      <p:sp>
+        <p:nvSpPr>
+          <p:cNvPr id="15" name="Text 13"/>
+          <p:cNvSpPr/>
+          <p:nvPr/>
+        </p:nvSpPr>
+        <p:spPr>
+          <a:xfrm>
+            <a:off x="8074152" y="4023360"/>
+            <a:ext cx="2825496" cy="1097280"/>
           </a:xfrm>
           <a:prstGeom prst="rect">
             <a:avLst/>
@@ -5222,7 +5417,7 @@
               <a:buNone/>
             </a:pPr>
             <a:r>
-              <a:rPr lang="en-US" sz="1250" dirty="0">
+              <a:rPr lang="en-US" sz="1550" dirty="0">
                 <a:solidFill>
                   <a:srgbClr val="17364A"/>
                 </a:solidFill>
@@ -5232,7 +5427,7 @@
               </a:rPr>
               <a:t>Connect the concept to public health decisions, safeguards, documentation, or implementation work.</a:t>
             </a:r>
-            <a:endParaRPr lang="en-US" sz="1250" dirty="0"/>
+            <a:endParaRPr lang="en-US" sz="1550" dirty="0"/>
           </a:p>
         </p:txBody>
       </p:sp>
@@ -5429,7 +5624,7 @@
                 <a:ea typeface="Aptos" pitchFamily="34" charset="-122"/>
                 <a:cs typeface="Aptos" pitchFamily="34" charset="-120"/>
               </a:rPr>
-              <a:t>© Paula Soper</a:t>
+              <a:t>Â© Paula Soper</a:t>
             </a:r>
             <a:endParaRPr lang="en-US" sz="800" dirty="0"/>
           </a:p>
@@ -5443,8 +5638,47 @@
         </p:nvSpPr>
         <p:spPr>
           <a:xfrm>
+            <a:off x="11137392" y="6510528"/>
+            <a:ext cx="411480" cy="201168"/>
+          </a:xfrm>
+          <a:prstGeom prst="rect">
+            <a:avLst/>
+          </a:prstGeom>
+          <a:noFill/>
+          <a:ln/>
+        </p:spPr>
+        <p:txBody>
+          <a:bodyPr wrap="square" lIns="0" tIns="0" rIns="0" bIns="0" rtlCol="0" anchor="ctr"/>
+          <a:lstStyle/>
+          <a:p>
+            <a:pPr algn="r" indent="0" marL="0">
+              <a:buNone/>
+            </a:pPr>
+            <a:r>
+              <a:rPr lang="en-US" sz="900" dirty="0">
+                <a:solidFill>
+                  <a:srgbClr val="5F7181"/>
+                </a:solidFill>
+                <a:latin typeface="Aptos" pitchFamily="34" charset="0"/>
+                <a:ea typeface="Aptos" pitchFamily="34" charset="-122"/>
+                <a:cs typeface="Aptos" pitchFamily="34" charset="-120"/>
+              </a:rPr>
+              <a:t>14</a:t>
+            </a:r>
+            <a:endParaRPr lang="en-US" sz="900" dirty="0"/>
+          </a:p>
+        </p:txBody>
+      </p:sp>
+      <p:sp>
+        <p:nvSpPr>
+          <p:cNvPr id="8" name="Text 6"/>
+          <p:cNvSpPr/>
+          <p:nvPr/>
+        </p:nvSpPr>
+        <p:spPr>
+          <a:xfrm>
             <a:off x="640080" y="658368"/>
-            <a:ext cx="10881360" cy="566928"/>
+            <a:ext cx="10881360" cy="713232"/>
           </a:xfrm>
           <a:prstGeom prst="rect">
             <a:avLst/>
@@ -5462,7 +5696,7 @@
               <a:buNone/>
             </a:pPr>
             <a:r>
-              <a:rPr lang="en-US" sz="2700" b="1" dirty="0">
+              <a:rPr lang="en-US" sz="3400" b="1" dirty="0">
                 <a:solidFill>
                   <a:srgbClr val="003A63"/>
                 </a:solidFill>
@@ -5472,20 +5706,20 @@
               </a:rPr>
               <a:t>Risks, Failure Modes, and Guardrails Continued</a:t>
             </a:r>
-            <a:endParaRPr lang="en-US" sz="2700" dirty="0"/>
-          </a:p>
-        </p:txBody>
-      </p:sp>
-      <p:sp>
-        <p:nvSpPr>
-          <p:cNvPr id="8" name="Text 6"/>
-          <p:cNvSpPr/>
-          <p:nvPr/>
-        </p:nvSpPr>
-        <p:spPr>
-          <a:xfrm>
-            <a:off x="868680" y="1417320"/>
-            <a:ext cx="6675120" cy="4434840"/>
+            <a:endParaRPr lang="en-US" sz="3400" dirty="0"/>
+          </a:p>
+        </p:txBody>
+      </p:sp>
+      <p:sp>
+        <p:nvSpPr>
+          <p:cNvPr id="9" name="Text 7"/>
+          <p:cNvSpPr/>
+          <p:nvPr/>
+        </p:nvSpPr>
+        <p:spPr>
+          <a:xfrm>
+            <a:off x="868680" y="1508760"/>
+            <a:ext cx="6537960" cy="4160520"/>
           </a:xfrm>
           <a:prstGeom prst="rect">
             <a:avLst/>
@@ -5500,7 +5734,7 @@
           <a:lstStyle/>
           <a:p>
             <a:r>
-              <a:rPr lang="en-US" sz="1700" dirty="0">
+              <a:rPr lang="en-US" sz="2100" dirty="0">
                 <a:solidFill>
                   <a:srgbClr val="17364A"/>
                 </a:solidFill>
@@ -5510,11 +5744,11 @@
               </a:rPr>
               <a:t>Document source material used for public-facing claims.</a:t>
             </a:r>
-            <a:endParaRPr lang="en-US" sz="1700" dirty="0"/>
-          </a:p>
-          <a:p>
-            <a:r>
-              <a:rPr lang="en-US" sz="1700" dirty="0">
+            <a:endParaRPr lang="en-US" sz="2100" dirty="0"/>
+          </a:p>
+          <a:p>
+            <a:r>
+              <a:rPr lang="en-US" sz="2100" dirty="0">
                 <a:solidFill>
                   <a:srgbClr val="17364A"/>
                 </a:solidFill>
@@ -5524,11 +5758,11 @@
               </a:rPr>
               <a:t>Use qualified review for translation and language access needs.</a:t>
             </a:r>
-            <a:endParaRPr lang="en-US" sz="1700" dirty="0"/>
-          </a:p>
-          <a:p>
-            <a:r>
-              <a:rPr lang="en-US" sz="1700" dirty="0">
+            <a:endParaRPr lang="en-US" sz="2100" dirty="0"/>
+          </a:p>
+          <a:p>
+            <a:r>
+              <a:rPr lang="en-US" sz="2100" dirty="0">
                 <a:solidFill>
                   <a:srgbClr val="17364A"/>
                 </a:solidFill>
@@ -5538,13 +5772,13 @@
               </a:rPr>
               <a:t>Route public-facing materials through the agency approval process before release.</a:t>
             </a:r>
-            <a:endParaRPr lang="en-US" sz="1700" dirty="0"/>
-          </a:p>
-        </p:txBody>
-      </p:sp>
-      <p:sp>
-        <p:nvSpPr>
-          <p:cNvPr id="9" name="Shape 7"/>
+            <a:endParaRPr lang="en-US" sz="2100" dirty="0"/>
+          </a:p>
+        </p:txBody>
+      </p:sp>
+      <p:sp>
+        <p:nvSpPr>
+          <p:cNvPr id="10" name="Shape 8"/>
           <p:cNvSpPr/>
           <p:nvPr/>
         </p:nvSpPr>
@@ -5571,14 +5805,14 @@
       </p:sp>
       <p:sp>
         <p:nvSpPr>
-          <p:cNvPr id="10" name="Text 8"/>
+          <p:cNvPr id="11" name="Text 9"/>
           <p:cNvSpPr/>
           <p:nvPr/>
         </p:nvSpPr>
         <p:spPr>
           <a:xfrm>
             <a:off x="8074152" y="1563624"/>
-            <a:ext cx="2825496" cy="201168"/>
+            <a:ext cx="2825496" cy="256032"/>
           </a:xfrm>
           <a:prstGeom prst="rect">
             <a:avLst/>
@@ -5594,7 +5828,7 @@
               <a:buNone/>
             </a:pPr>
             <a:r>
-              <a:rPr lang="en-US" sz="950" b="1" dirty="0">
+              <a:rPr lang="en-US" sz="1300" b="1" dirty="0">
                 <a:solidFill>
                   <a:srgbClr val="0068B7"/>
                 </a:solidFill>
@@ -5604,20 +5838,20 @@
               </a:rPr>
               <a:t>Key idea</a:t>
             </a:r>
-            <a:endParaRPr lang="en-US" sz="950" dirty="0"/>
-          </a:p>
-        </p:txBody>
-      </p:sp>
-      <p:sp>
-        <p:nvSpPr>
-          <p:cNvPr id="11" name="Text 9"/>
-          <p:cNvSpPr/>
-          <p:nvPr/>
-        </p:nvSpPr>
-        <p:spPr>
-          <a:xfrm>
-            <a:off x="8074152" y="1856232"/>
-            <a:ext cx="2825496" cy="1261872"/>
+            <a:endParaRPr lang="en-US" sz="1300" dirty="0"/>
+          </a:p>
+        </p:txBody>
+      </p:sp>
+      <p:sp>
+        <p:nvSpPr>
+          <p:cNvPr id="12" name="Text 10"/>
+          <p:cNvSpPr/>
+          <p:nvPr/>
+        </p:nvSpPr>
+        <p:spPr>
+          <a:xfrm>
+            <a:off x="8074152" y="1920240"/>
+            <a:ext cx="2825496" cy="1188720"/>
           </a:xfrm>
           <a:prstGeom prst="rect">
             <a:avLst/>
@@ -5635,7 +5869,7 @@
               <a:buNone/>
             </a:pPr>
             <a:r>
-              <a:rPr lang="en-US" sz="1250" dirty="0">
+              <a:rPr lang="en-US" sz="1550" dirty="0">
                 <a:solidFill>
                   <a:srgbClr val="17364A"/>
                 </a:solidFill>
@@ -5645,13 +5879,13 @@
               </a:rPr>
               <a:t>Document source material used for public-facing claims.</a:t>
             </a:r>
-            <a:endParaRPr lang="en-US" sz="1250" dirty="0"/>
-          </a:p>
-        </p:txBody>
-      </p:sp>
-      <p:sp>
-        <p:nvSpPr>
-          <p:cNvPr id="12" name="Shape 10"/>
+            <a:endParaRPr lang="en-US" sz="1550" dirty="0"/>
+          </a:p>
+        </p:txBody>
+      </p:sp>
+      <p:sp>
+        <p:nvSpPr>
+          <p:cNvPr id="13" name="Shape 11"/>
           <p:cNvSpPr/>
           <p:nvPr/>
         </p:nvSpPr>
@@ -5678,14 +5912,14 @@
       </p:sp>
       <p:sp>
         <p:nvSpPr>
-          <p:cNvPr id="13" name="Text 11"/>
+          <p:cNvPr id="14" name="Text 12"/>
           <p:cNvSpPr/>
           <p:nvPr/>
         </p:nvSpPr>
         <p:spPr>
           <a:xfrm>
             <a:off x="8074152" y="3666744"/>
-            <a:ext cx="2825496" cy="201168"/>
+            <a:ext cx="2825496" cy="256032"/>
           </a:xfrm>
           <a:prstGeom prst="rect">
             <a:avLst/>
@@ -5701,7 +5935,7 @@
               <a:buNone/>
             </a:pPr>
             <a:r>
-              <a:rPr lang="en-US" sz="950" b="1" dirty="0">
+              <a:rPr lang="en-US" sz="1300" b="1" dirty="0">
                 <a:solidFill>
                   <a:srgbClr val="0068B7"/>
                 </a:solidFill>
@@ -5711,20 +5945,20 @@
               </a:rPr>
               <a:t>Use this for</a:t>
             </a:r>
-            <a:endParaRPr lang="en-US" sz="950" dirty="0"/>
-          </a:p>
-        </p:txBody>
-      </p:sp>
-      <p:sp>
-        <p:nvSpPr>
-          <p:cNvPr id="14" name="Text 12"/>
-          <p:cNvSpPr/>
-          <p:nvPr/>
-        </p:nvSpPr>
-        <p:spPr>
-          <a:xfrm>
-            <a:off x="8074152" y="3959352"/>
-            <a:ext cx="2825496" cy="1170432"/>
+            <a:endParaRPr lang="en-US" sz="1300" dirty="0"/>
+          </a:p>
+        </p:txBody>
+      </p:sp>
+      <p:sp>
+        <p:nvSpPr>
+          <p:cNvPr id="15" name="Text 13"/>
+          <p:cNvSpPr/>
+          <p:nvPr/>
+        </p:nvSpPr>
+        <p:spPr>
+          <a:xfrm>
+            <a:off x="8074152" y="4023360"/>
+            <a:ext cx="2825496" cy="1097280"/>
           </a:xfrm>
           <a:prstGeom prst="rect">
             <a:avLst/>
@@ -5742,7 +5976,7 @@
               <a:buNone/>
             </a:pPr>
             <a:r>
-              <a:rPr lang="en-US" sz="1250" dirty="0">
+              <a:rPr lang="en-US" sz="1550" dirty="0">
                 <a:solidFill>
                   <a:srgbClr val="17364A"/>
                 </a:solidFill>
@@ -5752,7 +5986,7 @@
               </a:rPr>
               <a:t>Connect the concept to public health decisions, safeguards, documentation, or implementation work.</a:t>
             </a:r>
-            <a:endParaRPr lang="en-US" sz="1250" dirty="0"/>
+            <a:endParaRPr lang="en-US" sz="1550" dirty="0"/>
           </a:p>
         </p:txBody>
       </p:sp>
@@ -5949,7 +6183,7 @@
                 <a:ea typeface="Aptos" pitchFamily="34" charset="-122"/>
                 <a:cs typeface="Aptos" pitchFamily="34" charset="-120"/>
               </a:rPr>
-              <a:t>© Paula Soper</a:t>
+              <a:t>Â© Paula Soper</a:t>
             </a:r>
             <a:endParaRPr lang="en-US" sz="800" dirty="0"/>
           </a:p>
@@ -5957,7 +6191,46 @@
       </p:sp>
       <p:sp>
         <p:nvSpPr>
-          <p:cNvPr id="7" name="Shape 5"/>
+          <p:cNvPr id="7" name="Text 5"/>
+          <p:cNvSpPr/>
+          <p:nvPr/>
+        </p:nvSpPr>
+        <p:spPr>
+          <a:xfrm>
+            <a:off x="11137392" y="6510528"/>
+            <a:ext cx="411480" cy="201168"/>
+          </a:xfrm>
+          <a:prstGeom prst="rect">
+            <a:avLst/>
+          </a:prstGeom>
+          <a:noFill/>
+          <a:ln/>
+        </p:spPr>
+        <p:txBody>
+          <a:bodyPr wrap="square" lIns="0" tIns="0" rIns="0" bIns="0" rtlCol="0" anchor="ctr"/>
+          <a:lstStyle/>
+          <a:p>
+            <a:pPr algn="r" indent="0" marL="0">
+              <a:buNone/>
+            </a:pPr>
+            <a:r>
+              <a:rPr lang="en-US" sz="900" dirty="0">
+                <a:solidFill>
+                  <a:srgbClr val="5F7181"/>
+                </a:solidFill>
+                <a:latin typeface="Aptos" pitchFamily="34" charset="0"/>
+                <a:ea typeface="Aptos" pitchFamily="34" charset="-122"/>
+                <a:cs typeface="Aptos" pitchFamily="34" charset="-120"/>
+              </a:rPr>
+              <a:t>15</a:t>
+            </a:r>
+            <a:endParaRPr lang="en-US" sz="900" dirty="0"/>
+          </a:p>
+        </p:txBody>
+      </p:sp>
+      <p:sp>
+        <p:nvSpPr>
+          <p:cNvPr id="8" name="Shape 6"/>
           <p:cNvSpPr/>
           <p:nvPr/>
         </p:nvSpPr>
@@ -5982,7 +6255,7 @@
       </p:sp>
       <p:sp>
         <p:nvSpPr>
-          <p:cNvPr id="8" name="Text 6"/>
+          <p:cNvPr id="9" name="Text 7"/>
           <p:cNvSpPr/>
           <p:nvPr/>
         </p:nvSpPr>
@@ -6021,14 +6294,14 @@
       </p:sp>
       <p:sp>
         <p:nvSpPr>
-          <p:cNvPr id="9" name="Text 7"/>
+          <p:cNvPr id="10" name="Text 8"/>
           <p:cNvSpPr/>
           <p:nvPr/>
         </p:nvSpPr>
         <p:spPr>
           <a:xfrm>
             <a:off x="640080" y="621792"/>
-            <a:ext cx="10881360" cy="566928"/>
+            <a:ext cx="10881360" cy="713232"/>
           </a:xfrm>
           <a:prstGeom prst="rect">
             <a:avLst/>
@@ -6046,7 +6319,7 @@
               <a:buNone/>
             </a:pPr>
             <a:r>
-              <a:rPr lang="en-US" sz="2700" b="1" dirty="0">
+              <a:rPr lang="en-US" sz="3400" b="1" dirty="0">
                 <a:solidFill>
                   <a:srgbClr val="003A63"/>
                 </a:solidFill>
@@ -6056,20 +6329,20 @@
               </a:rPr>
               <a:t>Reflection Questions</a:t>
             </a:r>
-            <a:endParaRPr lang="en-US" sz="2700" dirty="0"/>
-          </a:p>
-        </p:txBody>
-      </p:sp>
-      <p:sp>
-        <p:nvSpPr>
-          <p:cNvPr id="10" name="Text 8"/>
-          <p:cNvSpPr/>
-          <p:nvPr/>
-        </p:nvSpPr>
-        <p:spPr>
-          <a:xfrm>
-            <a:off x="868680" y="1417320"/>
-            <a:ext cx="6675120" cy="4434840"/>
+            <a:endParaRPr lang="en-US" sz="3400" dirty="0"/>
+          </a:p>
+        </p:txBody>
+      </p:sp>
+      <p:sp>
+        <p:nvSpPr>
+          <p:cNvPr id="11" name="Text 9"/>
+          <p:cNvSpPr/>
+          <p:nvPr/>
+        </p:nvSpPr>
+        <p:spPr>
+          <a:xfrm>
+            <a:off x="868680" y="1508760"/>
+            <a:ext cx="6537960" cy="4160520"/>
           </a:xfrm>
           <a:prstGeom prst="rect">
             <a:avLst/>
@@ -6084,7 +6357,7 @@
           <a:lstStyle/>
           <a:p>
             <a:r>
-              <a:rPr lang="en-US" sz="1700" dirty="0">
+              <a:rPr lang="en-US" sz="2100" dirty="0">
                 <a:solidFill>
                   <a:srgbClr val="17364A"/>
                 </a:solidFill>
@@ -6094,11 +6367,11 @@
               </a:rPr>
               <a:t>Where does this topic appear in your agency, program, or workflow?</a:t>
             </a:r>
-            <a:endParaRPr lang="en-US" sz="1700" dirty="0"/>
-          </a:p>
-          <a:p>
-            <a:r>
-              <a:rPr lang="en-US" sz="1700" dirty="0">
+            <a:endParaRPr lang="en-US" sz="2100" dirty="0"/>
+          </a:p>
+          <a:p>
+            <a:r>
+              <a:rPr lang="en-US" sz="2100" dirty="0">
                 <a:solidFill>
                   <a:srgbClr val="17364A"/>
                 </a:solidFill>
@@ -6108,11 +6381,11 @@
               </a:rPr>
               <a:t>Which staff roles would need to understand or apply this concept before AI use is approved?</a:t>
             </a:r>
-            <a:endParaRPr lang="en-US" sz="1700" dirty="0"/>
-          </a:p>
-          <a:p>
-            <a:r>
-              <a:rPr lang="en-US" sz="1700" dirty="0">
+            <a:endParaRPr lang="en-US" sz="2100" dirty="0"/>
+          </a:p>
+          <a:p>
+            <a:r>
+              <a:rPr lang="en-US" sz="2100" dirty="0">
                 <a:solidFill>
                   <a:srgbClr val="17364A"/>
                 </a:solidFill>
@@ -6122,13 +6395,13 @@
               </a:rPr>
               <a:t>What could go wrong if this topic is not addressed before implementation?</a:t>
             </a:r>
-            <a:endParaRPr lang="en-US" sz="1700" dirty="0"/>
-          </a:p>
-        </p:txBody>
-      </p:sp>
-      <p:sp>
-        <p:nvSpPr>
-          <p:cNvPr id="11" name="Shape 9"/>
+            <a:endParaRPr lang="en-US" sz="2100" dirty="0"/>
+          </a:p>
+        </p:txBody>
+      </p:sp>
+      <p:sp>
+        <p:nvSpPr>
+          <p:cNvPr id="12" name="Shape 10"/>
           <p:cNvSpPr/>
           <p:nvPr/>
         </p:nvSpPr>
@@ -6155,14 +6428,14 @@
       </p:sp>
       <p:sp>
         <p:nvSpPr>
-          <p:cNvPr id="12" name="Text 10"/>
+          <p:cNvPr id="13" name="Text 11"/>
           <p:cNvSpPr/>
           <p:nvPr/>
         </p:nvSpPr>
         <p:spPr>
           <a:xfrm>
             <a:off x="8074152" y="1563624"/>
-            <a:ext cx="2825496" cy="201168"/>
+            <a:ext cx="2825496" cy="256032"/>
           </a:xfrm>
           <a:prstGeom prst="rect">
             <a:avLst/>
@@ -6178,7 +6451,7 @@
               <a:buNone/>
             </a:pPr>
             <a:r>
-              <a:rPr lang="en-US" sz="950" b="1" dirty="0">
+              <a:rPr lang="en-US" sz="1300" b="1" dirty="0">
                 <a:solidFill>
                   <a:srgbClr val="0068B7"/>
                 </a:solidFill>
@@ -6188,20 +6461,20 @@
               </a:rPr>
               <a:t>Key idea</a:t>
             </a:r>
-            <a:endParaRPr lang="en-US" sz="950" dirty="0"/>
-          </a:p>
-        </p:txBody>
-      </p:sp>
-      <p:sp>
-        <p:nvSpPr>
-          <p:cNvPr id="13" name="Text 11"/>
-          <p:cNvSpPr/>
-          <p:nvPr/>
-        </p:nvSpPr>
-        <p:spPr>
-          <a:xfrm>
-            <a:off x="8074152" y="1856232"/>
-            <a:ext cx="2825496" cy="1261872"/>
+            <a:endParaRPr lang="en-US" sz="1300" dirty="0"/>
+          </a:p>
+        </p:txBody>
+      </p:sp>
+      <p:sp>
+        <p:nvSpPr>
+          <p:cNvPr id="14" name="Text 12"/>
+          <p:cNvSpPr/>
+          <p:nvPr/>
+        </p:nvSpPr>
+        <p:spPr>
+          <a:xfrm>
+            <a:off x="8074152" y="1920240"/>
+            <a:ext cx="2825496" cy="1188720"/>
           </a:xfrm>
           <a:prstGeom prst="rect">
             <a:avLst/>
@@ -6219,7 +6492,7 @@
               <a:buNone/>
             </a:pPr>
             <a:r>
-              <a:rPr lang="en-US" sz="1250" dirty="0">
+              <a:rPr lang="en-US" sz="1550" dirty="0">
                 <a:solidFill>
                   <a:srgbClr val="17364A"/>
                 </a:solidFill>
@@ -6229,13 +6502,13 @@
               </a:rPr>
               <a:t>Where does this topic appear in your agency, program, or workflow?</a:t>
             </a:r>
-            <a:endParaRPr lang="en-US" sz="1250" dirty="0"/>
-          </a:p>
-        </p:txBody>
-      </p:sp>
-      <p:sp>
-        <p:nvSpPr>
-          <p:cNvPr id="14" name="Shape 12"/>
+            <a:endParaRPr lang="en-US" sz="1550" dirty="0"/>
+          </a:p>
+        </p:txBody>
+      </p:sp>
+      <p:sp>
+        <p:nvSpPr>
+          <p:cNvPr id="15" name="Shape 13"/>
           <p:cNvSpPr/>
           <p:nvPr/>
         </p:nvSpPr>
@@ -6262,14 +6535,14 @@
       </p:sp>
       <p:sp>
         <p:nvSpPr>
-          <p:cNvPr id="15" name="Text 13"/>
+          <p:cNvPr id="16" name="Text 14"/>
           <p:cNvSpPr/>
           <p:nvPr/>
         </p:nvSpPr>
         <p:spPr>
           <a:xfrm>
             <a:off x="8074152" y="3666744"/>
-            <a:ext cx="2825496" cy="201168"/>
+            <a:ext cx="2825496" cy="256032"/>
           </a:xfrm>
           <a:prstGeom prst="rect">
             <a:avLst/>
@@ -6285,7 +6558,7 @@
               <a:buNone/>
             </a:pPr>
             <a:r>
-              <a:rPr lang="en-US" sz="950" b="1" dirty="0">
+              <a:rPr lang="en-US" sz="1300" b="1" dirty="0">
                 <a:solidFill>
                   <a:srgbClr val="0068B7"/>
                 </a:solidFill>
@@ -6295,20 +6568,20 @@
               </a:rPr>
               <a:t>Use this for</a:t>
             </a:r>
-            <a:endParaRPr lang="en-US" sz="950" dirty="0"/>
-          </a:p>
-        </p:txBody>
-      </p:sp>
-      <p:sp>
-        <p:nvSpPr>
-          <p:cNvPr id="16" name="Text 14"/>
-          <p:cNvSpPr/>
-          <p:nvPr/>
-        </p:nvSpPr>
-        <p:spPr>
-          <a:xfrm>
-            <a:off x="8074152" y="3959352"/>
-            <a:ext cx="2825496" cy="1170432"/>
+            <a:endParaRPr lang="en-US" sz="1300" dirty="0"/>
+          </a:p>
+        </p:txBody>
+      </p:sp>
+      <p:sp>
+        <p:nvSpPr>
+          <p:cNvPr id="17" name="Text 15"/>
+          <p:cNvSpPr/>
+          <p:nvPr/>
+        </p:nvSpPr>
+        <p:spPr>
+          <a:xfrm>
+            <a:off x="8074152" y="4023360"/>
+            <a:ext cx="2825496" cy="1097280"/>
           </a:xfrm>
           <a:prstGeom prst="rect">
             <a:avLst/>
@@ -6326,7 +6599,7 @@
               <a:buNone/>
             </a:pPr>
             <a:r>
-              <a:rPr lang="en-US" sz="1250" dirty="0">
+              <a:rPr lang="en-US" sz="1550" dirty="0">
                 <a:solidFill>
                   <a:srgbClr val="17364A"/>
                 </a:solidFill>
@@ -6336,7 +6609,7 @@
               </a:rPr>
               <a:t>Connect the concept to public health decisions, safeguards, documentation, or implementation work.</a:t>
             </a:r>
-            <a:endParaRPr lang="en-US" sz="1250" dirty="0"/>
+            <a:endParaRPr lang="en-US" sz="1550" dirty="0"/>
           </a:p>
         </p:txBody>
       </p:sp>
@@ -6533,7 +6806,7 @@
                 <a:ea typeface="Aptos" pitchFamily="34" charset="-122"/>
                 <a:cs typeface="Aptos" pitchFamily="34" charset="-120"/>
               </a:rPr>
-              <a:t>© Paula Soper</a:t>
+              <a:t>Â© Paula Soper</a:t>
             </a:r>
             <a:endParaRPr lang="en-US" sz="800" dirty="0"/>
           </a:p>
@@ -6547,8 +6820,47 @@
         </p:nvSpPr>
         <p:spPr>
           <a:xfrm>
+            <a:off x="11137392" y="6510528"/>
+            <a:ext cx="411480" cy="201168"/>
+          </a:xfrm>
+          <a:prstGeom prst="rect">
+            <a:avLst/>
+          </a:prstGeom>
+          <a:noFill/>
+          <a:ln/>
+        </p:spPr>
+        <p:txBody>
+          <a:bodyPr wrap="square" lIns="0" tIns="0" rIns="0" bIns="0" rtlCol="0" anchor="ctr"/>
+          <a:lstStyle/>
+          <a:p>
+            <a:pPr algn="r" indent="0" marL="0">
+              <a:buNone/>
+            </a:pPr>
+            <a:r>
+              <a:rPr lang="en-US" sz="900" dirty="0">
+                <a:solidFill>
+                  <a:srgbClr val="5F7181"/>
+                </a:solidFill>
+                <a:latin typeface="Aptos" pitchFamily="34" charset="0"/>
+                <a:ea typeface="Aptos" pitchFamily="34" charset="-122"/>
+                <a:cs typeface="Aptos" pitchFamily="34" charset="-120"/>
+              </a:rPr>
+              <a:t>16</a:t>
+            </a:r>
+            <a:endParaRPr lang="en-US" sz="900" dirty="0"/>
+          </a:p>
+        </p:txBody>
+      </p:sp>
+      <p:sp>
+        <p:nvSpPr>
+          <p:cNvPr id="8" name="Text 6"/>
+          <p:cNvSpPr/>
+          <p:nvPr/>
+        </p:nvSpPr>
+        <p:spPr>
+          <a:xfrm>
             <a:off x="640080" y="658368"/>
-            <a:ext cx="10881360" cy="566928"/>
+            <a:ext cx="10881360" cy="713232"/>
           </a:xfrm>
           <a:prstGeom prst="rect">
             <a:avLst/>
@@ -6566,7 +6878,7 @@
               <a:buNone/>
             </a:pPr>
             <a:r>
-              <a:rPr lang="en-US" sz="2700" b="1" dirty="0">
+              <a:rPr lang="en-US" sz="3400" b="1" dirty="0">
                 <a:solidFill>
                   <a:srgbClr val="003A63"/>
                 </a:solidFill>
@@ -6576,20 +6888,20 @@
               </a:rPr>
               <a:t>Reflection Questions Continued</a:t>
             </a:r>
-            <a:endParaRPr lang="en-US" sz="2700" dirty="0"/>
-          </a:p>
-        </p:txBody>
-      </p:sp>
-      <p:sp>
-        <p:nvSpPr>
-          <p:cNvPr id="8" name="Text 6"/>
-          <p:cNvSpPr/>
-          <p:nvPr/>
-        </p:nvSpPr>
-        <p:spPr>
-          <a:xfrm>
-            <a:off x="868680" y="1417320"/>
-            <a:ext cx="6675120" cy="4434840"/>
+            <a:endParaRPr lang="en-US" sz="3400" dirty="0"/>
+          </a:p>
+        </p:txBody>
+      </p:sp>
+      <p:sp>
+        <p:nvSpPr>
+          <p:cNvPr id="9" name="Text 7"/>
+          <p:cNvSpPr/>
+          <p:nvPr/>
+        </p:nvSpPr>
+        <p:spPr>
+          <a:xfrm>
+            <a:off x="868680" y="1508760"/>
+            <a:ext cx="6537960" cy="4160520"/>
           </a:xfrm>
           <a:prstGeom prst="rect">
             <a:avLst/>
@@ -6604,7 +6916,7 @@
           <a:lstStyle/>
           <a:p>
             <a:r>
-              <a:rPr lang="en-US" sz="1700" dirty="0">
+              <a:rPr lang="en-US" sz="2100" dirty="0">
                 <a:solidFill>
                   <a:srgbClr val="17364A"/>
                 </a:solidFill>
@@ -6614,11 +6926,11 @@
               </a:rPr>
               <a:t>What evidence would governance, leadership, or operations staff need before moving forward?</a:t>
             </a:r>
-            <a:endParaRPr lang="en-US" sz="1700" dirty="0"/>
-          </a:p>
-          <a:p>
-            <a:r>
-              <a:rPr lang="en-US" sz="1700" dirty="0">
+            <a:endParaRPr lang="en-US" sz="2100" dirty="0"/>
+          </a:p>
+          <a:p>
+            <a:r>
+              <a:rPr lang="en-US" sz="2100" dirty="0">
                 <a:solidFill>
                   <a:srgbClr val="17364A"/>
                 </a:solidFill>
@@ -6628,13 +6940,13 @@
               </a:rPr>
               <a:t>Which policy, data, equity, privacy, security, or workflow questions remain unresolved?</a:t>
             </a:r>
-            <a:endParaRPr lang="en-US" sz="1700" dirty="0"/>
-          </a:p>
-        </p:txBody>
-      </p:sp>
-      <p:sp>
-        <p:nvSpPr>
-          <p:cNvPr id="9" name="Shape 7"/>
+            <a:endParaRPr lang="en-US" sz="2100" dirty="0"/>
+          </a:p>
+        </p:txBody>
+      </p:sp>
+      <p:sp>
+        <p:nvSpPr>
+          <p:cNvPr id="10" name="Shape 8"/>
           <p:cNvSpPr/>
           <p:nvPr/>
         </p:nvSpPr>
@@ -6661,14 +6973,14 @@
       </p:sp>
       <p:sp>
         <p:nvSpPr>
-          <p:cNvPr id="10" name="Text 8"/>
+          <p:cNvPr id="11" name="Text 9"/>
           <p:cNvSpPr/>
           <p:nvPr/>
         </p:nvSpPr>
         <p:spPr>
           <a:xfrm>
             <a:off x="8074152" y="1563624"/>
-            <a:ext cx="2825496" cy="201168"/>
+            <a:ext cx="2825496" cy="256032"/>
           </a:xfrm>
           <a:prstGeom prst="rect">
             <a:avLst/>
@@ -6684,7 +6996,7 @@
               <a:buNone/>
             </a:pPr>
             <a:r>
-              <a:rPr lang="en-US" sz="950" b="1" dirty="0">
+              <a:rPr lang="en-US" sz="1300" b="1" dirty="0">
                 <a:solidFill>
                   <a:srgbClr val="0068B7"/>
                 </a:solidFill>
@@ -6694,20 +7006,20 @@
               </a:rPr>
               <a:t>Key idea</a:t>
             </a:r>
-            <a:endParaRPr lang="en-US" sz="950" dirty="0"/>
-          </a:p>
-        </p:txBody>
-      </p:sp>
-      <p:sp>
-        <p:nvSpPr>
-          <p:cNvPr id="11" name="Text 9"/>
-          <p:cNvSpPr/>
-          <p:nvPr/>
-        </p:nvSpPr>
-        <p:spPr>
-          <a:xfrm>
-            <a:off x="8074152" y="1856232"/>
-            <a:ext cx="2825496" cy="1261872"/>
+            <a:endParaRPr lang="en-US" sz="1300" dirty="0"/>
+          </a:p>
+        </p:txBody>
+      </p:sp>
+      <p:sp>
+        <p:nvSpPr>
+          <p:cNvPr id="12" name="Text 10"/>
+          <p:cNvSpPr/>
+          <p:nvPr/>
+        </p:nvSpPr>
+        <p:spPr>
+          <a:xfrm>
+            <a:off x="8074152" y="1920240"/>
+            <a:ext cx="2825496" cy="1188720"/>
           </a:xfrm>
           <a:prstGeom prst="rect">
             <a:avLst/>
@@ -6725,7 +7037,7 @@
               <a:buNone/>
             </a:pPr>
             <a:r>
-              <a:rPr lang="en-US" sz="1250" dirty="0">
+              <a:rPr lang="en-US" sz="1550" dirty="0">
                 <a:solidFill>
                   <a:srgbClr val="17364A"/>
                 </a:solidFill>
@@ -6735,13 +7047,13 @@
               </a:rPr>
               <a:t>What evidence would governance, leadership, or operations staff need before moving forward?</a:t>
             </a:r>
-            <a:endParaRPr lang="en-US" sz="1250" dirty="0"/>
-          </a:p>
-        </p:txBody>
-      </p:sp>
-      <p:sp>
-        <p:nvSpPr>
-          <p:cNvPr id="12" name="Shape 10"/>
+            <a:endParaRPr lang="en-US" sz="1550" dirty="0"/>
+          </a:p>
+        </p:txBody>
+      </p:sp>
+      <p:sp>
+        <p:nvSpPr>
+          <p:cNvPr id="13" name="Shape 11"/>
           <p:cNvSpPr/>
           <p:nvPr/>
         </p:nvSpPr>
@@ -6768,14 +7080,14 @@
       </p:sp>
       <p:sp>
         <p:nvSpPr>
-          <p:cNvPr id="13" name="Text 11"/>
+          <p:cNvPr id="14" name="Text 12"/>
           <p:cNvSpPr/>
           <p:nvPr/>
         </p:nvSpPr>
         <p:spPr>
           <a:xfrm>
             <a:off x="8074152" y="3666744"/>
-            <a:ext cx="2825496" cy="201168"/>
+            <a:ext cx="2825496" cy="256032"/>
           </a:xfrm>
           <a:prstGeom prst="rect">
             <a:avLst/>
@@ -6791,7 +7103,7 @@
               <a:buNone/>
             </a:pPr>
             <a:r>
-              <a:rPr lang="en-US" sz="950" b="1" dirty="0">
+              <a:rPr lang="en-US" sz="1300" b="1" dirty="0">
                 <a:solidFill>
                   <a:srgbClr val="0068B7"/>
                 </a:solidFill>
@@ -6801,20 +7113,20 @@
               </a:rPr>
               <a:t>Use this for</a:t>
             </a:r>
-            <a:endParaRPr lang="en-US" sz="950" dirty="0"/>
-          </a:p>
-        </p:txBody>
-      </p:sp>
-      <p:sp>
-        <p:nvSpPr>
-          <p:cNvPr id="14" name="Text 12"/>
-          <p:cNvSpPr/>
-          <p:nvPr/>
-        </p:nvSpPr>
-        <p:spPr>
-          <a:xfrm>
-            <a:off x="8074152" y="3959352"/>
-            <a:ext cx="2825496" cy="1170432"/>
+            <a:endParaRPr lang="en-US" sz="1300" dirty="0"/>
+          </a:p>
+        </p:txBody>
+      </p:sp>
+      <p:sp>
+        <p:nvSpPr>
+          <p:cNvPr id="15" name="Text 13"/>
+          <p:cNvSpPr/>
+          <p:nvPr/>
+        </p:nvSpPr>
+        <p:spPr>
+          <a:xfrm>
+            <a:off x="8074152" y="4023360"/>
+            <a:ext cx="2825496" cy="1097280"/>
           </a:xfrm>
           <a:prstGeom prst="rect">
             <a:avLst/>
@@ -6832,7 +7144,7 @@
               <a:buNone/>
             </a:pPr>
             <a:r>
-              <a:rPr lang="en-US" sz="1250" dirty="0">
+              <a:rPr lang="en-US" sz="1550" dirty="0">
                 <a:solidFill>
                   <a:srgbClr val="17364A"/>
                 </a:solidFill>
@@ -6842,7 +7154,7 @@
               </a:rPr>
               <a:t>Connect the concept to public health decisions, safeguards, documentation, or implementation work.</a:t>
             </a:r>
-            <a:endParaRPr lang="en-US" sz="1250" dirty="0"/>
+            <a:endParaRPr lang="en-US" sz="1550" dirty="0"/>
           </a:p>
         </p:txBody>
       </p:sp>
@@ -7039,7 +7351,7 @@
                 <a:ea typeface="Aptos" pitchFamily="34" charset="-122"/>
                 <a:cs typeface="Aptos" pitchFamily="34" charset="-120"/>
               </a:rPr>
-              <a:t>© Paula Soper</a:t>
+              <a:t>Â© Paula Soper</a:t>
             </a:r>
             <a:endParaRPr lang="en-US" sz="800" dirty="0"/>
           </a:p>
@@ -7047,7 +7359,46 @@
       </p:sp>
       <p:sp>
         <p:nvSpPr>
-          <p:cNvPr id="7" name="Shape 5"/>
+          <p:cNvPr id="7" name="Text 5"/>
+          <p:cNvSpPr/>
+          <p:nvPr/>
+        </p:nvSpPr>
+        <p:spPr>
+          <a:xfrm>
+            <a:off x="11137392" y="6510528"/>
+            <a:ext cx="411480" cy="201168"/>
+          </a:xfrm>
+          <a:prstGeom prst="rect">
+            <a:avLst/>
+          </a:prstGeom>
+          <a:noFill/>
+          <a:ln/>
+        </p:spPr>
+        <p:txBody>
+          <a:bodyPr wrap="square" lIns="0" tIns="0" rIns="0" bIns="0" rtlCol="0" anchor="ctr"/>
+          <a:lstStyle/>
+          <a:p>
+            <a:pPr algn="r" indent="0" marL="0">
+              <a:buNone/>
+            </a:pPr>
+            <a:r>
+              <a:rPr lang="en-US" sz="900" dirty="0">
+                <a:solidFill>
+                  <a:srgbClr val="5F7181"/>
+                </a:solidFill>
+                <a:latin typeface="Aptos" pitchFamily="34" charset="0"/>
+                <a:ea typeface="Aptos" pitchFamily="34" charset="-122"/>
+                <a:cs typeface="Aptos" pitchFamily="34" charset="-120"/>
+              </a:rPr>
+              <a:t>17</a:t>
+            </a:r>
+            <a:endParaRPr lang="en-US" sz="900" dirty="0"/>
+          </a:p>
+        </p:txBody>
+      </p:sp>
+      <p:sp>
+        <p:nvSpPr>
+          <p:cNvPr id="8" name="Shape 6"/>
           <p:cNvSpPr/>
           <p:nvPr/>
         </p:nvSpPr>
@@ -7072,7 +7423,7 @@
       </p:sp>
       <p:sp>
         <p:nvSpPr>
-          <p:cNvPr id="8" name="Text 6"/>
+          <p:cNvPr id="9" name="Text 7"/>
           <p:cNvSpPr/>
           <p:nvPr/>
         </p:nvSpPr>
@@ -7111,14 +7462,14 @@
       </p:sp>
       <p:sp>
         <p:nvSpPr>
-          <p:cNvPr id="9" name="Text 7"/>
+          <p:cNvPr id="10" name="Text 8"/>
           <p:cNvSpPr/>
           <p:nvPr/>
         </p:nvSpPr>
         <p:spPr>
           <a:xfrm>
             <a:off x="640080" y="621792"/>
-            <a:ext cx="10881360" cy="566928"/>
+            <a:ext cx="10881360" cy="713232"/>
           </a:xfrm>
           <a:prstGeom prst="rect">
             <a:avLst/>
@@ -7136,7 +7487,7 @@
               <a:buNone/>
             </a:pPr>
             <a:r>
-              <a:rPr lang="en-US" sz="2700" b="1" dirty="0">
+              <a:rPr lang="en-US" sz="3400" b="1" dirty="0">
                 <a:solidFill>
                   <a:srgbClr val="003A63"/>
                 </a:solidFill>
@@ -7146,20 +7497,20 @@
               </a:rPr>
               <a:t>Practical Exercise</a:t>
             </a:r>
-            <a:endParaRPr lang="en-US" sz="2700" dirty="0"/>
-          </a:p>
-        </p:txBody>
-      </p:sp>
-      <p:sp>
-        <p:nvSpPr>
-          <p:cNvPr id="10" name="Text 8"/>
-          <p:cNvSpPr/>
-          <p:nvPr/>
-        </p:nvSpPr>
-        <p:spPr>
-          <a:xfrm>
-            <a:off x="868680" y="1417320"/>
-            <a:ext cx="6675120" cy="4434840"/>
+            <a:endParaRPr lang="en-US" sz="3400" dirty="0"/>
+          </a:p>
+        </p:txBody>
+      </p:sp>
+      <p:sp>
+        <p:nvSpPr>
+          <p:cNvPr id="11" name="Text 9"/>
+          <p:cNvSpPr/>
+          <p:nvPr/>
+        </p:nvSpPr>
+        <p:spPr>
+          <a:xfrm>
+            <a:off x="868680" y="1508760"/>
+            <a:ext cx="6537960" cy="4160520"/>
           </a:xfrm>
           <a:prstGeom prst="rect">
             <a:avLst/>
@@ -7174,7 +7525,7 @@
           <a:lstStyle/>
           <a:p>
             <a:r>
-              <a:rPr lang="en-US" sz="1700" dirty="0">
+              <a:rPr lang="en-US" sz="2100" dirty="0">
                 <a:solidFill>
                   <a:srgbClr val="17364A"/>
                 </a:solidFill>
@@ -7184,11 +7535,11 @@
               </a:rPr>
               <a:t>Create an AI-assisted communications review checklist for one public health message.</a:t>
             </a:r>
-            <a:endParaRPr lang="en-US" sz="1700" dirty="0"/>
-          </a:p>
-          <a:p>
-            <a:r>
-              <a:rPr lang="en-US" sz="1700" dirty="0">
+            <a:endParaRPr lang="en-US" sz="2100" dirty="0"/>
+          </a:p>
+          <a:p>
+            <a:r>
+              <a:rPr lang="en-US" sz="2100" dirty="0">
                 <a:solidFill>
                   <a:srgbClr val="17364A"/>
                 </a:solidFill>
@@ -7196,15 +7547,15 @@
                 <a:ea typeface="Aptos" pitchFamily="34" charset="-122"/>
                 <a:cs typeface="Aptos" pitchFamily="34" charset="-120"/>
               </a:rPr>
-              <a:t>Include intended audience, source material, factual claims to verify, plain language review, accessibility review, language.</a:t>
-            </a:r>
-            <a:endParaRPr lang="en-US" sz="1700" dirty="0"/>
-          </a:p>
-        </p:txBody>
-      </p:sp>
-      <p:sp>
-        <p:nvSpPr>
-          <p:cNvPr id="11" name="Shape 9"/>
+              <a:t>Include intended audience, source material, factual claims to verify, plain language review,.</a:t>
+            </a:r>
+            <a:endParaRPr lang="en-US" sz="2100" dirty="0"/>
+          </a:p>
+        </p:txBody>
+      </p:sp>
+      <p:sp>
+        <p:nvSpPr>
+          <p:cNvPr id="12" name="Shape 10"/>
           <p:cNvSpPr/>
           <p:nvPr/>
         </p:nvSpPr>
@@ -7231,14 +7582,14 @@
       </p:sp>
       <p:sp>
         <p:nvSpPr>
-          <p:cNvPr id="12" name="Text 10"/>
+          <p:cNvPr id="13" name="Text 11"/>
           <p:cNvSpPr/>
           <p:nvPr/>
         </p:nvSpPr>
         <p:spPr>
           <a:xfrm>
             <a:off x="8074152" y="1563624"/>
-            <a:ext cx="2825496" cy="201168"/>
+            <a:ext cx="2825496" cy="256032"/>
           </a:xfrm>
           <a:prstGeom prst="rect">
             <a:avLst/>
@@ -7254,7 +7605,7 @@
               <a:buNone/>
             </a:pPr>
             <a:r>
-              <a:rPr lang="en-US" sz="950" b="1" dirty="0">
+              <a:rPr lang="en-US" sz="1300" b="1" dirty="0">
                 <a:solidFill>
                   <a:srgbClr val="0068B7"/>
                 </a:solidFill>
@@ -7264,20 +7615,20 @@
               </a:rPr>
               <a:t>Key idea</a:t>
             </a:r>
-            <a:endParaRPr lang="en-US" sz="950" dirty="0"/>
-          </a:p>
-        </p:txBody>
-      </p:sp>
-      <p:sp>
-        <p:nvSpPr>
-          <p:cNvPr id="13" name="Text 11"/>
-          <p:cNvSpPr/>
-          <p:nvPr/>
-        </p:nvSpPr>
-        <p:spPr>
-          <a:xfrm>
-            <a:off x="8074152" y="1856232"/>
-            <a:ext cx="2825496" cy="1261872"/>
+            <a:endParaRPr lang="en-US" sz="1300" dirty="0"/>
+          </a:p>
+        </p:txBody>
+      </p:sp>
+      <p:sp>
+        <p:nvSpPr>
+          <p:cNvPr id="14" name="Text 12"/>
+          <p:cNvSpPr/>
+          <p:nvPr/>
+        </p:nvSpPr>
+        <p:spPr>
+          <a:xfrm>
+            <a:off x="8074152" y="1920240"/>
+            <a:ext cx="2825496" cy="1188720"/>
           </a:xfrm>
           <a:prstGeom prst="rect">
             <a:avLst/>
@@ -7295,7 +7646,7 @@
               <a:buNone/>
             </a:pPr>
             <a:r>
-              <a:rPr lang="en-US" sz="1250" dirty="0">
+              <a:rPr lang="en-US" sz="1550" dirty="0">
                 <a:solidFill>
                   <a:srgbClr val="17364A"/>
                 </a:solidFill>
@@ -7305,13 +7656,13 @@
               </a:rPr>
               <a:t>Create an AI-assisted communications review checklist for one public health message.</a:t>
             </a:r>
-            <a:endParaRPr lang="en-US" sz="1250" dirty="0"/>
-          </a:p>
-        </p:txBody>
-      </p:sp>
-      <p:sp>
-        <p:nvSpPr>
-          <p:cNvPr id="14" name="Shape 12"/>
+            <a:endParaRPr lang="en-US" sz="1550" dirty="0"/>
+          </a:p>
+        </p:txBody>
+      </p:sp>
+      <p:sp>
+        <p:nvSpPr>
+          <p:cNvPr id="15" name="Shape 13"/>
           <p:cNvSpPr/>
           <p:nvPr/>
         </p:nvSpPr>
@@ -7338,14 +7689,14 @@
       </p:sp>
       <p:sp>
         <p:nvSpPr>
-          <p:cNvPr id="15" name="Text 13"/>
+          <p:cNvPr id="16" name="Text 14"/>
           <p:cNvSpPr/>
           <p:nvPr/>
         </p:nvSpPr>
         <p:spPr>
           <a:xfrm>
             <a:off x="8074152" y="3666744"/>
-            <a:ext cx="2825496" cy="201168"/>
+            <a:ext cx="2825496" cy="256032"/>
           </a:xfrm>
           <a:prstGeom prst="rect">
             <a:avLst/>
@@ -7361,7 +7712,7 @@
               <a:buNone/>
             </a:pPr>
             <a:r>
-              <a:rPr lang="en-US" sz="950" b="1" dirty="0">
+              <a:rPr lang="en-US" sz="1300" b="1" dirty="0">
                 <a:solidFill>
                   <a:srgbClr val="0068B7"/>
                 </a:solidFill>
@@ -7371,20 +7722,20 @@
               </a:rPr>
               <a:t>Use this for</a:t>
             </a:r>
-            <a:endParaRPr lang="en-US" sz="950" dirty="0"/>
-          </a:p>
-        </p:txBody>
-      </p:sp>
-      <p:sp>
-        <p:nvSpPr>
-          <p:cNvPr id="16" name="Text 14"/>
-          <p:cNvSpPr/>
-          <p:nvPr/>
-        </p:nvSpPr>
-        <p:spPr>
-          <a:xfrm>
-            <a:off x="8074152" y="3959352"/>
-            <a:ext cx="2825496" cy="1170432"/>
+            <a:endParaRPr lang="en-US" sz="1300" dirty="0"/>
+          </a:p>
+        </p:txBody>
+      </p:sp>
+      <p:sp>
+        <p:nvSpPr>
+          <p:cNvPr id="17" name="Text 15"/>
+          <p:cNvSpPr/>
+          <p:nvPr/>
+        </p:nvSpPr>
+        <p:spPr>
+          <a:xfrm>
+            <a:off x="8074152" y="4023360"/>
+            <a:ext cx="2825496" cy="1097280"/>
           </a:xfrm>
           <a:prstGeom prst="rect">
             <a:avLst/>
@@ -7402,7 +7753,7 @@
               <a:buNone/>
             </a:pPr>
             <a:r>
-              <a:rPr lang="en-US" sz="1250" dirty="0">
+              <a:rPr lang="en-US" sz="1550" dirty="0">
                 <a:solidFill>
                   <a:srgbClr val="17364A"/>
                 </a:solidFill>
@@ -7412,7 +7763,7 @@
               </a:rPr>
               <a:t>Connect the concept to public health decisions, safeguards, documentation, or implementation work.</a:t>
             </a:r>
-            <a:endParaRPr lang="en-US" sz="1250" dirty="0"/>
+            <a:endParaRPr lang="en-US" sz="1550" dirty="0"/>
           </a:p>
         </p:txBody>
       </p:sp>
@@ -7609,7 +7960,7 @@
                 <a:ea typeface="Aptos" pitchFamily="34" charset="-122"/>
                 <a:cs typeface="Aptos" pitchFamily="34" charset="-120"/>
               </a:rPr>
-              <a:t>© Paula Soper</a:t>
+              <a:t>Â© Paula Soper</a:t>
             </a:r>
             <a:endParaRPr lang="en-US" sz="800" dirty="0"/>
           </a:p>
@@ -7617,7 +7968,46 @@
       </p:sp>
       <p:sp>
         <p:nvSpPr>
-          <p:cNvPr id="7" name="Shape 5"/>
+          <p:cNvPr id="7" name="Text 5"/>
+          <p:cNvSpPr/>
+          <p:nvPr/>
+        </p:nvSpPr>
+        <p:spPr>
+          <a:xfrm>
+            <a:off x="11137392" y="6510528"/>
+            <a:ext cx="411480" cy="201168"/>
+          </a:xfrm>
+          <a:prstGeom prst="rect">
+            <a:avLst/>
+          </a:prstGeom>
+          <a:noFill/>
+          <a:ln/>
+        </p:spPr>
+        <p:txBody>
+          <a:bodyPr wrap="square" lIns="0" tIns="0" rIns="0" bIns="0" rtlCol="0" anchor="ctr"/>
+          <a:lstStyle/>
+          <a:p>
+            <a:pPr algn="r" indent="0" marL="0">
+              <a:buNone/>
+            </a:pPr>
+            <a:r>
+              <a:rPr lang="en-US" sz="900" dirty="0">
+                <a:solidFill>
+                  <a:srgbClr val="5F7181"/>
+                </a:solidFill>
+                <a:latin typeface="Aptos" pitchFamily="34" charset="0"/>
+                <a:ea typeface="Aptos" pitchFamily="34" charset="-122"/>
+                <a:cs typeface="Aptos" pitchFamily="34" charset="-120"/>
+              </a:rPr>
+              <a:t>18</a:t>
+            </a:r>
+            <a:endParaRPr lang="en-US" sz="900" dirty="0"/>
+          </a:p>
+        </p:txBody>
+      </p:sp>
+      <p:sp>
+        <p:nvSpPr>
+          <p:cNvPr id="8" name="Shape 6"/>
           <p:cNvSpPr/>
           <p:nvPr/>
         </p:nvSpPr>
@@ -7642,7 +8032,7 @@
       </p:sp>
       <p:sp>
         <p:nvSpPr>
-          <p:cNvPr id="8" name="Text 6"/>
+          <p:cNvPr id="9" name="Text 7"/>
           <p:cNvSpPr/>
           <p:nvPr/>
         </p:nvSpPr>
@@ -7681,14 +8071,14 @@
       </p:sp>
       <p:sp>
         <p:nvSpPr>
-          <p:cNvPr id="9" name="Text 7"/>
+          <p:cNvPr id="10" name="Text 8"/>
           <p:cNvSpPr/>
           <p:nvPr/>
         </p:nvSpPr>
         <p:spPr>
           <a:xfrm>
             <a:off x="640080" y="621792"/>
-            <a:ext cx="10881360" cy="566928"/>
+            <a:ext cx="10881360" cy="713232"/>
           </a:xfrm>
           <a:prstGeom prst="rect">
             <a:avLst/>
@@ -7706,7 +8096,7 @@
               <a:buNone/>
             </a:pPr>
             <a:r>
-              <a:rPr lang="en-US" sz="2700" b="1" dirty="0">
+              <a:rPr lang="en-US" sz="3400" b="1" dirty="0">
                 <a:solidFill>
                   <a:srgbClr val="003A63"/>
                 </a:solidFill>
@@ -7716,20 +8106,20 @@
               </a:rPr>
               <a:t>Expected Artifact or Evidence</a:t>
             </a:r>
-            <a:endParaRPr lang="en-US" sz="2700" dirty="0"/>
-          </a:p>
-        </p:txBody>
-      </p:sp>
-      <p:sp>
-        <p:nvSpPr>
-          <p:cNvPr id="10" name="Text 8"/>
-          <p:cNvSpPr/>
-          <p:nvPr/>
-        </p:nvSpPr>
-        <p:spPr>
-          <a:xfrm>
-            <a:off x="868680" y="1417320"/>
-            <a:ext cx="6675120" cy="4434840"/>
+            <a:endParaRPr lang="en-US" sz="3400" dirty="0"/>
+          </a:p>
+        </p:txBody>
+      </p:sp>
+      <p:sp>
+        <p:nvSpPr>
+          <p:cNvPr id="11" name="Text 9"/>
+          <p:cNvSpPr/>
+          <p:nvPr/>
+        </p:nvSpPr>
+        <p:spPr>
+          <a:xfrm>
+            <a:off x="868680" y="1508760"/>
+            <a:ext cx="6537960" cy="4160520"/>
           </a:xfrm>
           <a:prstGeom prst="rect">
             <a:avLst/>
@@ -7744,7 +8134,7 @@
           <a:lstStyle/>
           <a:p>
             <a:r>
-              <a:rPr lang="en-US" sz="1700" dirty="0">
+              <a:rPr lang="en-US" sz="2100" dirty="0">
                 <a:solidFill>
                   <a:srgbClr val="17364A"/>
                 </a:solidFill>
@@ -7754,11 +8144,11 @@
               </a:rPr>
               <a:t>AI-assisted communications review checklist</a:t>
             </a:r>
-            <a:endParaRPr lang="en-US" sz="1700" dirty="0"/>
-          </a:p>
-          <a:p>
-            <a:r>
-              <a:rPr lang="en-US" sz="1700" dirty="0">
+            <a:endParaRPr lang="en-US" sz="2100" dirty="0"/>
+          </a:p>
+          <a:p>
+            <a:r>
+              <a:rPr lang="en-US" sz="2100" dirty="0">
                 <a:solidFill>
                   <a:srgbClr val="17364A"/>
                 </a:solidFill>
@@ -7768,11 +8158,11 @@
               </a:rPr>
               <a:t>Source verification notes</a:t>
             </a:r>
-            <a:endParaRPr lang="en-US" sz="1700" dirty="0"/>
-          </a:p>
-          <a:p>
-            <a:r>
-              <a:rPr lang="en-US" sz="1700" dirty="0">
+            <a:endParaRPr lang="en-US" sz="2100" dirty="0"/>
+          </a:p>
+          <a:p>
+            <a:r>
+              <a:rPr lang="en-US" sz="2100" dirty="0">
                 <a:solidFill>
                   <a:srgbClr val="17364A"/>
                 </a:solidFill>
@@ -7782,13 +8172,13 @@
               </a:rPr>
               <a:t>Plain language and accessibility review notes</a:t>
             </a:r>
-            <a:endParaRPr lang="en-US" sz="1700" dirty="0"/>
-          </a:p>
-        </p:txBody>
-      </p:sp>
-      <p:sp>
-        <p:nvSpPr>
-          <p:cNvPr id="11" name="Shape 9"/>
+            <a:endParaRPr lang="en-US" sz="2100" dirty="0"/>
+          </a:p>
+        </p:txBody>
+      </p:sp>
+      <p:sp>
+        <p:nvSpPr>
+          <p:cNvPr id="12" name="Shape 10"/>
           <p:cNvSpPr/>
           <p:nvPr/>
         </p:nvSpPr>
@@ -7815,14 +8205,14 @@
       </p:sp>
       <p:sp>
         <p:nvSpPr>
-          <p:cNvPr id="12" name="Text 10"/>
+          <p:cNvPr id="13" name="Text 11"/>
           <p:cNvSpPr/>
           <p:nvPr/>
         </p:nvSpPr>
         <p:spPr>
           <a:xfrm>
             <a:off x="8074152" y="1563624"/>
-            <a:ext cx="2825496" cy="201168"/>
+            <a:ext cx="2825496" cy="256032"/>
           </a:xfrm>
           <a:prstGeom prst="rect">
             <a:avLst/>
@@ -7838,7 +8228,7 @@
               <a:buNone/>
             </a:pPr>
             <a:r>
-              <a:rPr lang="en-US" sz="950" b="1" dirty="0">
+              <a:rPr lang="en-US" sz="1300" b="1" dirty="0">
                 <a:solidFill>
                   <a:srgbClr val="0068B7"/>
                 </a:solidFill>
@@ -7848,20 +8238,20 @@
               </a:rPr>
               <a:t>Key idea</a:t>
             </a:r>
-            <a:endParaRPr lang="en-US" sz="950" dirty="0"/>
-          </a:p>
-        </p:txBody>
-      </p:sp>
-      <p:sp>
-        <p:nvSpPr>
-          <p:cNvPr id="13" name="Text 11"/>
-          <p:cNvSpPr/>
-          <p:nvPr/>
-        </p:nvSpPr>
-        <p:spPr>
-          <a:xfrm>
-            <a:off x="8074152" y="1856232"/>
-            <a:ext cx="2825496" cy="1261872"/>
+            <a:endParaRPr lang="en-US" sz="1300" dirty="0"/>
+          </a:p>
+        </p:txBody>
+      </p:sp>
+      <p:sp>
+        <p:nvSpPr>
+          <p:cNvPr id="14" name="Text 12"/>
+          <p:cNvSpPr/>
+          <p:nvPr/>
+        </p:nvSpPr>
+        <p:spPr>
+          <a:xfrm>
+            <a:off x="8074152" y="1920240"/>
+            <a:ext cx="2825496" cy="1188720"/>
           </a:xfrm>
           <a:prstGeom prst="rect">
             <a:avLst/>
@@ -7879,7 +8269,7 @@
               <a:buNone/>
             </a:pPr>
             <a:r>
-              <a:rPr lang="en-US" sz="1250" dirty="0">
+              <a:rPr lang="en-US" sz="1550" dirty="0">
                 <a:solidFill>
                   <a:srgbClr val="17364A"/>
                 </a:solidFill>
@@ -7889,13 +8279,13 @@
               </a:rPr>
               <a:t>AI-assisted communications review checklist</a:t>
             </a:r>
-            <a:endParaRPr lang="en-US" sz="1250" dirty="0"/>
-          </a:p>
-        </p:txBody>
-      </p:sp>
-      <p:sp>
-        <p:nvSpPr>
-          <p:cNvPr id="14" name="Shape 12"/>
+            <a:endParaRPr lang="en-US" sz="1550" dirty="0"/>
+          </a:p>
+        </p:txBody>
+      </p:sp>
+      <p:sp>
+        <p:nvSpPr>
+          <p:cNvPr id="15" name="Shape 13"/>
           <p:cNvSpPr/>
           <p:nvPr/>
         </p:nvSpPr>
@@ -7922,14 +8312,14 @@
       </p:sp>
       <p:sp>
         <p:nvSpPr>
-          <p:cNvPr id="15" name="Text 13"/>
+          <p:cNvPr id="16" name="Text 14"/>
           <p:cNvSpPr/>
           <p:nvPr/>
         </p:nvSpPr>
         <p:spPr>
           <a:xfrm>
             <a:off x="8074152" y="3666744"/>
-            <a:ext cx="2825496" cy="201168"/>
+            <a:ext cx="2825496" cy="256032"/>
           </a:xfrm>
           <a:prstGeom prst="rect">
             <a:avLst/>
@@ -7945,7 +8335,7 @@
               <a:buNone/>
             </a:pPr>
             <a:r>
-              <a:rPr lang="en-US" sz="950" b="1" dirty="0">
+              <a:rPr lang="en-US" sz="1300" b="1" dirty="0">
                 <a:solidFill>
                   <a:srgbClr val="0068B7"/>
                 </a:solidFill>
@@ -7955,20 +8345,20 @@
               </a:rPr>
               <a:t>Use this for</a:t>
             </a:r>
-            <a:endParaRPr lang="en-US" sz="950" dirty="0"/>
-          </a:p>
-        </p:txBody>
-      </p:sp>
-      <p:sp>
-        <p:nvSpPr>
-          <p:cNvPr id="16" name="Text 14"/>
-          <p:cNvSpPr/>
-          <p:nvPr/>
-        </p:nvSpPr>
-        <p:spPr>
-          <a:xfrm>
-            <a:off x="8074152" y="3959352"/>
-            <a:ext cx="2825496" cy="1170432"/>
+            <a:endParaRPr lang="en-US" sz="1300" dirty="0"/>
+          </a:p>
+        </p:txBody>
+      </p:sp>
+      <p:sp>
+        <p:nvSpPr>
+          <p:cNvPr id="17" name="Text 15"/>
+          <p:cNvSpPr/>
+          <p:nvPr/>
+        </p:nvSpPr>
+        <p:spPr>
+          <a:xfrm>
+            <a:off x="8074152" y="4023360"/>
+            <a:ext cx="2825496" cy="1097280"/>
           </a:xfrm>
           <a:prstGeom prst="rect">
             <a:avLst/>
@@ -7986,7 +8376,7 @@
               <a:buNone/>
             </a:pPr>
             <a:r>
-              <a:rPr lang="en-US" sz="1250" dirty="0">
+              <a:rPr lang="en-US" sz="1550" dirty="0">
                 <a:solidFill>
                   <a:srgbClr val="17364A"/>
                 </a:solidFill>
@@ -7996,7 +8386,7 @@
               </a:rPr>
               <a:t>Connect the concept to public health decisions, safeguards, documentation, or implementation work.</a:t>
             </a:r>
-            <a:endParaRPr lang="en-US" sz="1250" dirty="0"/>
+            <a:endParaRPr lang="en-US" sz="1550" dirty="0"/>
           </a:p>
         </p:txBody>
       </p:sp>
@@ -8193,7 +8583,7 @@
                 <a:ea typeface="Aptos" pitchFamily="34" charset="-122"/>
                 <a:cs typeface="Aptos" pitchFamily="34" charset="-120"/>
               </a:rPr>
-              <a:t>© Paula Soper</a:t>
+              <a:t>Â© Paula Soper</a:t>
             </a:r>
             <a:endParaRPr lang="en-US" sz="800" dirty="0"/>
           </a:p>
@@ -8207,8 +8597,47 @@
         </p:nvSpPr>
         <p:spPr>
           <a:xfrm>
+            <a:off x="11137392" y="6510528"/>
+            <a:ext cx="411480" cy="201168"/>
+          </a:xfrm>
+          <a:prstGeom prst="rect">
+            <a:avLst/>
+          </a:prstGeom>
+          <a:noFill/>
+          <a:ln/>
+        </p:spPr>
+        <p:txBody>
+          <a:bodyPr wrap="square" lIns="0" tIns="0" rIns="0" bIns="0" rtlCol="0" anchor="ctr"/>
+          <a:lstStyle/>
+          <a:p>
+            <a:pPr algn="r" indent="0" marL="0">
+              <a:buNone/>
+            </a:pPr>
+            <a:r>
+              <a:rPr lang="en-US" sz="900" dirty="0">
+                <a:solidFill>
+                  <a:srgbClr val="5F7181"/>
+                </a:solidFill>
+                <a:latin typeface="Aptos" pitchFamily="34" charset="0"/>
+                <a:ea typeface="Aptos" pitchFamily="34" charset="-122"/>
+                <a:cs typeface="Aptos" pitchFamily="34" charset="-120"/>
+              </a:rPr>
+              <a:t>19</a:t>
+            </a:r>
+            <a:endParaRPr lang="en-US" sz="900" dirty="0"/>
+          </a:p>
+        </p:txBody>
+      </p:sp>
+      <p:sp>
+        <p:nvSpPr>
+          <p:cNvPr id="8" name="Text 6"/>
+          <p:cNvSpPr/>
+          <p:nvPr/>
+        </p:nvSpPr>
+        <p:spPr>
+          <a:xfrm>
             <a:off x="640080" y="658368"/>
-            <a:ext cx="10881360" cy="566928"/>
+            <a:ext cx="10881360" cy="713232"/>
           </a:xfrm>
           <a:prstGeom prst="rect">
             <a:avLst/>
@@ -8226,7 +8655,7 @@
               <a:buNone/>
             </a:pPr>
             <a:r>
-              <a:rPr lang="en-US" sz="2700" b="1" dirty="0">
+              <a:rPr lang="en-US" sz="3400" b="1" dirty="0">
                 <a:solidFill>
                   <a:srgbClr val="003A63"/>
                 </a:solidFill>
@@ -8236,20 +8665,20 @@
               </a:rPr>
               <a:t>Expected Artifact or Evidence Continued</a:t>
             </a:r>
-            <a:endParaRPr lang="en-US" sz="2700" dirty="0"/>
-          </a:p>
-        </p:txBody>
-      </p:sp>
-      <p:sp>
-        <p:nvSpPr>
-          <p:cNvPr id="8" name="Text 6"/>
-          <p:cNvSpPr/>
-          <p:nvPr/>
-        </p:nvSpPr>
-        <p:spPr>
-          <a:xfrm>
-            <a:off x="868680" y="1417320"/>
-            <a:ext cx="6675120" cy="4434840"/>
+            <a:endParaRPr lang="en-US" sz="3400" dirty="0"/>
+          </a:p>
+        </p:txBody>
+      </p:sp>
+      <p:sp>
+        <p:nvSpPr>
+          <p:cNvPr id="9" name="Text 7"/>
+          <p:cNvSpPr/>
+          <p:nvPr/>
+        </p:nvSpPr>
+        <p:spPr>
+          <a:xfrm>
+            <a:off x="868680" y="1508760"/>
+            <a:ext cx="6537960" cy="4160520"/>
           </a:xfrm>
           <a:prstGeom prst="rect">
             <a:avLst/>
@@ -8264,7 +8693,7 @@
           <a:lstStyle/>
           <a:p>
             <a:r>
-              <a:rPr lang="en-US" sz="1700" dirty="0">
+              <a:rPr lang="en-US" sz="2100" dirty="0">
                 <a:solidFill>
                   <a:srgbClr val="17364A"/>
                 </a:solidFill>
@@ -8274,11 +8703,11 @@
               </a:rPr>
               <a:t>Approval pathway documentation</a:t>
             </a:r>
-            <a:endParaRPr lang="en-US" sz="1700" dirty="0"/>
-          </a:p>
-          <a:p>
-            <a:r>
-              <a:rPr lang="en-US" sz="1700" dirty="0">
+            <a:endParaRPr lang="en-US" sz="2100" dirty="0"/>
+          </a:p>
+          <a:p>
+            <a:r>
+              <a:rPr lang="en-US" sz="2100" dirty="0">
                 <a:solidFill>
                   <a:srgbClr val="17364A"/>
                 </a:solidFill>
@@ -8288,13 +8717,13 @@
               </a:rPr>
               <a:t>Final reviewed message or sample revision</a:t>
             </a:r>
-            <a:endParaRPr lang="en-US" sz="1700" dirty="0"/>
-          </a:p>
-        </p:txBody>
-      </p:sp>
-      <p:sp>
-        <p:nvSpPr>
-          <p:cNvPr id="9" name="Shape 7"/>
+            <a:endParaRPr lang="en-US" sz="2100" dirty="0"/>
+          </a:p>
+        </p:txBody>
+      </p:sp>
+      <p:sp>
+        <p:nvSpPr>
+          <p:cNvPr id="10" name="Shape 8"/>
           <p:cNvSpPr/>
           <p:nvPr/>
         </p:nvSpPr>
@@ -8321,14 +8750,14 @@
       </p:sp>
       <p:sp>
         <p:nvSpPr>
-          <p:cNvPr id="10" name="Text 8"/>
+          <p:cNvPr id="11" name="Text 9"/>
           <p:cNvSpPr/>
           <p:nvPr/>
         </p:nvSpPr>
         <p:spPr>
           <a:xfrm>
             <a:off x="8074152" y="1563624"/>
-            <a:ext cx="2825496" cy="201168"/>
+            <a:ext cx="2825496" cy="256032"/>
           </a:xfrm>
           <a:prstGeom prst="rect">
             <a:avLst/>
@@ -8344,7 +8773,7 @@
               <a:buNone/>
             </a:pPr>
             <a:r>
-              <a:rPr lang="en-US" sz="950" b="1" dirty="0">
+              <a:rPr lang="en-US" sz="1300" b="1" dirty="0">
                 <a:solidFill>
                   <a:srgbClr val="0068B7"/>
                 </a:solidFill>
@@ -8354,20 +8783,20 @@
               </a:rPr>
               <a:t>Key idea</a:t>
             </a:r>
-            <a:endParaRPr lang="en-US" sz="950" dirty="0"/>
-          </a:p>
-        </p:txBody>
-      </p:sp>
-      <p:sp>
-        <p:nvSpPr>
-          <p:cNvPr id="11" name="Text 9"/>
-          <p:cNvSpPr/>
-          <p:nvPr/>
-        </p:nvSpPr>
-        <p:spPr>
-          <a:xfrm>
-            <a:off x="8074152" y="1856232"/>
-            <a:ext cx="2825496" cy="1261872"/>
+            <a:endParaRPr lang="en-US" sz="1300" dirty="0"/>
+          </a:p>
+        </p:txBody>
+      </p:sp>
+      <p:sp>
+        <p:nvSpPr>
+          <p:cNvPr id="12" name="Text 10"/>
+          <p:cNvSpPr/>
+          <p:nvPr/>
+        </p:nvSpPr>
+        <p:spPr>
+          <a:xfrm>
+            <a:off x="8074152" y="1920240"/>
+            <a:ext cx="2825496" cy="1188720"/>
           </a:xfrm>
           <a:prstGeom prst="rect">
             <a:avLst/>
@@ -8385,7 +8814,7 @@
               <a:buNone/>
             </a:pPr>
             <a:r>
-              <a:rPr lang="en-US" sz="1250" dirty="0">
+              <a:rPr lang="en-US" sz="1550" dirty="0">
                 <a:solidFill>
                   <a:srgbClr val="17364A"/>
                 </a:solidFill>
@@ -8395,13 +8824,13 @@
               </a:rPr>
               <a:t>Approval pathway documentation</a:t>
             </a:r>
-            <a:endParaRPr lang="en-US" sz="1250" dirty="0"/>
-          </a:p>
-        </p:txBody>
-      </p:sp>
-      <p:sp>
-        <p:nvSpPr>
-          <p:cNvPr id="12" name="Shape 10"/>
+            <a:endParaRPr lang="en-US" sz="1550" dirty="0"/>
+          </a:p>
+        </p:txBody>
+      </p:sp>
+      <p:sp>
+        <p:nvSpPr>
+          <p:cNvPr id="13" name="Shape 11"/>
           <p:cNvSpPr/>
           <p:nvPr/>
         </p:nvSpPr>
@@ -8428,14 +8857,14 @@
       </p:sp>
       <p:sp>
         <p:nvSpPr>
-          <p:cNvPr id="13" name="Text 11"/>
+          <p:cNvPr id="14" name="Text 12"/>
           <p:cNvSpPr/>
           <p:nvPr/>
         </p:nvSpPr>
         <p:spPr>
           <a:xfrm>
             <a:off x="8074152" y="3666744"/>
-            <a:ext cx="2825496" cy="201168"/>
+            <a:ext cx="2825496" cy="256032"/>
           </a:xfrm>
           <a:prstGeom prst="rect">
             <a:avLst/>
@@ -8451,7 +8880,7 @@
               <a:buNone/>
             </a:pPr>
             <a:r>
-              <a:rPr lang="en-US" sz="950" b="1" dirty="0">
+              <a:rPr lang="en-US" sz="1300" b="1" dirty="0">
                 <a:solidFill>
                   <a:srgbClr val="0068B7"/>
                 </a:solidFill>
@@ -8461,20 +8890,20 @@
               </a:rPr>
               <a:t>Use this for</a:t>
             </a:r>
-            <a:endParaRPr lang="en-US" sz="950" dirty="0"/>
-          </a:p>
-        </p:txBody>
-      </p:sp>
-      <p:sp>
-        <p:nvSpPr>
-          <p:cNvPr id="14" name="Text 12"/>
-          <p:cNvSpPr/>
-          <p:nvPr/>
-        </p:nvSpPr>
-        <p:spPr>
-          <a:xfrm>
-            <a:off x="8074152" y="3959352"/>
-            <a:ext cx="2825496" cy="1170432"/>
+            <a:endParaRPr lang="en-US" sz="1300" dirty="0"/>
+          </a:p>
+        </p:txBody>
+      </p:sp>
+      <p:sp>
+        <p:nvSpPr>
+          <p:cNvPr id="15" name="Text 13"/>
+          <p:cNvSpPr/>
+          <p:nvPr/>
+        </p:nvSpPr>
+        <p:spPr>
+          <a:xfrm>
+            <a:off x="8074152" y="4023360"/>
+            <a:ext cx="2825496" cy="1097280"/>
           </a:xfrm>
           <a:prstGeom prst="rect">
             <a:avLst/>
@@ -8492,7 +8921,7 @@
               <a:buNone/>
             </a:pPr>
             <a:r>
-              <a:rPr lang="en-US" sz="1250" dirty="0">
+              <a:rPr lang="en-US" sz="1550" dirty="0">
                 <a:solidFill>
                   <a:srgbClr val="17364A"/>
                 </a:solidFill>
@@ -8502,7 +8931,7 @@
               </a:rPr>
               <a:t>Connect the concept to public health decisions, safeguards, documentation, or implementation work.</a:t>
             </a:r>
-            <a:endParaRPr lang="en-US" sz="1250" dirty="0"/>
+            <a:endParaRPr lang="en-US" sz="1550" dirty="0"/>
           </a:p>
         </p:txBody>
       </p:sp>
@@ -8699,7 +9128,7 @@
                 <a:ea typeface="Aptos" pitchFamily="34" charset="-122"/>
                 <a:cs typeface="Aptos" pitchFamily="34" charset="-120"/>
               </a:rPr>
-              <a:t>© Paula Soper</a:t>
+              <a:t>Â© Paula Soper</a:t>
             </a:r>
             <a:endParaRPr lang="en-US" sz="800" dirty="0"/>
           </a:p>
@@ -8713,8 +9142,47 @@
         </p:nvSpPr>
         <p:spPr>
           <a:xfrm>
+            <a:off x="11137392" y="6510528"/>
+            <a:ext cx="411480" cy="201168"/>
+          </a:xfrm>
+          <a:prstGeom prst="rect">
+            <a:avLst/>
+          </a:prstGeom>
+          <a:noFill/>
+          <a:ln/>
+        </p:spPr>
+        <p:txBody>
+          <a:bodyPr wrap="square" lIns="0" tIns="0" rIns="0" bIns="0" rtlCol="0" anchor="ctr"/>
+          <a:lstStyle/>
+          <a:p>
+            <a:pPr algn="r" indent="0" marL="0">
+              <a:buNone/>
+            </a:pPr>
+            <a:r>
+              <a:rPr lang="en-US" sz="900" dirty="0">
+                <a:solidFill>
+                  <a:srgbClr val="5F7181"/>
+                </a:solidFill>
+                <a:latin typeface="Aptos" pitchFamily="34" charset="0"/>
+                <a:ea typeface="Aptos" pitchFamily="34" charset="-122"/>
+                <a:cs typeface="Aptos" pitchFamily="34" charset="-120"/>
+              </a:rPr>
+              <a:t>2</a:t>
+            </a:r>
+            <a:endParaRPr lang="en-US" sz="900" dirty="0"/>
+          </a:p>
+        </p:txBody>
+      </p:sp>
+      <p:sp>
+        <p:nvSpPr>
+          <p:cNvPr id="8" name="Text 6"/>
+          <p:cNvSpPr/>
+          <p:nvPr/>
+        </p:nvSpPr>
+        <p:spPr>
+          <a:xfrm>
             <a:off x="640080" y="658368"/>
-            <a:ext cx="10881360" cy="566928"/>
+            <a:ext cx="10881360" cy="713232"/>
           </a:xfrm>
           <a:prstGeom prst="rect">
             <a:avLst/>
@@ -8732,7 +9200,7 @@
               <a:buNone/>
             </a:pPr>
             <a:r>
-              <a:rPr lang="en-US" sz="2700" b="1" dirty="0">
+              <a:rPr lang="en-US" sz="3400" b="1" dirty="0">
                 <a:solidFill>
                   <a:srgbClr val="003A63"/>
                 </a:solidFill>
@@ -8742,20 +9210,20 @@
               </a:rPr>
               <a:t>What this module helps you do</a:t>
             </a:r>
-            <a:endParaRPr lang="en-US" sz="2700" dirty="0"/>
-          </a:p>
-        </p:txBody>
-      </p:sp>
-      <p:sp>
-        <p:nvSpPr>
-          <p:cNvPr id="8" name="Text 6"/>
-          <p:cNvSpPr/>
-          <p:nvPr/>
-        </p:nvSpPr>
-        <p:spPr>
-          <a:xfrm>
-            <a:off x="868680" y="1417320"/>
-            <a:ext cx="6675120" cy="3291840"/>
+            <a:endParaRPr lang="en-US" sz="3400" dirty="0"/>
+          </a:p>
+        </p:txBody>
+      </p:sp>
+      <p:sp>
+        <p:nvSpPr>
+          <p:cNvPr id="9" name="Text 7"/>
+          <p:cNvSpPr/>
+          <p:nvPr/>
+        </p:nvSpPr>
+        <p:spPr>
+          <a:xfrm>
+            <a:off x="868680" y="1508760"/>
+            <a:ext cx="6446520" cy="2926080"/>
           </a:xfrm>
           <a:prstGeom prst="rect">
             <a:avLst/>
@@ -8770,7 +9238,7 @@
           <a:lstStyle/>
           <a:p>
             <a:r>
-              <a:rPr lang="en-US" sz="1700" dirty="0">
+              <a:rPr lang="en-US" sz="2100" dirty="0">
                 <a:solidFill>
                   <a:srgbClr val="17364A"/>
                 </a:solidFill>
@@ -8778,13 +9246,13 @@
                 <a:ea typeface="Aptos" pitchFamily="34" charset="-122"/>
                 <a:cs typeface="Aptos" pitchFamily="34" charset="-120"/>
               </a:rPr>
-              <a:t>Generative AI can support public health communications by helping staff draft, revise, simplify, translate, tailor, and test messages.</a:t>
-            </a:r>
-            <a:endParaRPr lang="en-US" sz="1700" dirty="0"/>
-          </a:p>
-          <a:p>
-            <a:r>
-              <a:rPr lang="en-US" sz="1700" dirty="0">
+              <a:t>Generative AI can support public health communications by helping staff draft, revise, simplify, translate,.</a:t>
+            </a:r>
+            <a:endParaRPr lang="en-US" sz="2100" dirty="0"/>
+          </a:p>
+          <a:p>
+            <a:r>
+              <a:rPr lang="en-US" sz="2100" dirty="0">
                 <a:solidFill>
                   <a:srgbClr val="17364A"/>
                 </a:solidFill>
@@ -8794,11 +9262,11 @@
               </a:rPr>
               <a:t>However, public health communication carries high trust, equity, accessibility, and accuracy obligations.</a:t>
             </a:r>
-            <a:endParaRPr lang="en-US" sz="1700" dirty="0"/>
-          </a:p>
-          <a:p>
-            <a:r>
-              <a:rPr lang="en-US" sz="1700" dirty="0">
+            <a:endParaRPr lang="en-US" sz="2100" dirty="0"/>
+          </a:p>
+          <a:p>
+            <a:r>
+              <a:rPr lang="en-US" sz="2100" dirty="0">
                 <a:solidFill>
                   <a:srgbClr val="17364A"/>
                 </a:solidFill>
@@ -8806,29 +9274,15 @@
                 <a:ea typeface="Aptos" pitchFamily="34" charset="-122"/>
                 <a:cs typeface="Aptos" pitchFamily="34" charset="-120"/>
               </a:rPr>
-              <a:t>AI-generated text can sound clear and authoritative while misstating evidence, omitting uncertainty, using stigmatizing language, failing to meet.</a:t>
-            </a:r>
-            <a:endParaRPr lang="en-US" sz="1700" dirty="0"/>
-          </a:p>
-          <a:p>
-            <a:r>
-              <a:rPr lang="en-US" sz="1700" dirty="0">
-                <a:solidFill>
-                  <a:srgbClr val="17364A"/>
-                </a:solidFill>
-                <a:latin typeface="Aptos" pitchFamily="34" charset="0"/>
-                <a:ea typeface="Aptos" pitchFamily="34" charset="-122"/>
-                <a:cs typeface="Aptos" pitchFamily="34" charset="-120"/>
-              </a:rPr>
-              <a:t>This module teaches communications staff and program partners how to use AI as a drafting and review aid while preserving human accountability.</a:t>
-            </a:r>
-            <a:endParaRPr lang="en-US" sz="1700" dirty="0"/>
-          </a:p>
-        </p:txBody>
-      </p:sp>
-      <p:sp>
-        <p:nvSpPr>
-          <p:cNvPr id="9" name="Shape 7"/>
+              <a:t>AI-generated text can sound clear and authoritative while misstating evidence, omitting uncertainty, using.</a:t>
+            </a:r>
+            <a:endParaRPr lang="en-US" sz="2100" dirty="0"/>
+          </a:p>
+        </p:txBody>
+      </p:sp>
+      <p:sp>
+        <p:nvSpPr>
+          <p:cNvPr id="10" name="Shape 8"/>
           <p:cNvSpPr/>
           <p:nvPr/>
         </p:nvSpPr>
@@ -8855,14 +9309,14 @@
       </p:sp>
       <p:sp>
         <p:nvSpPr>
-          <p:cNvPr id="10" name="Text 8"/>
+          <p:cNvPr id="11" name="Text 9"/>
           <p:cNvSpPr/>
           <p:nvPr/>
         </p:nvSpPr>
         <p:spPr>
           <a:xfrm>
             <a:off x="8074152" y="1563624"/>
-            <a:ext cx="2825496" cy="201168"/>
+            <a:ext cx="2825496" cy="256032"/>
           </a:xfrm>
           <a:prstGeom prst="rect">
             <a:avLst/>
@@ -8878,7 +9332,7 @@
               <a:buNone/>
             </a:pPr>
             <a:r>
-              <a:rPr lang="en-US" sz="950" b="1" dirty="0">
+              <a:rPr lang="en-US" sz="1300" b="1" dirty="0">
                 <a:solidFill>
                   <a:srgbClr val="0068B7"/>
                 </a:solidFill>
@@ -8888,20 +9342,20 @@
               </a:rPr>
               <a:t>Module details</a:t>
             </a:r>
-            <a:endParaRPr lang="en-US" sz="950" dirty="0"/>
-          </a:p>
-        </p:txBody>
-      </p:sp>
-      <p:sp>
-        <p:nvSpPr>
-          <p:cNvPr id="11" name="Text 9"/>
-          <p:cNvSpPr/>
-          <p:nvPr/>
-        </p:nvSpPr>
-        <p:spPr>
-          <a:xfrm>
-            <a:off x="8074152" y="1856232"/>
-            <a:ext cx="2825496" cy="1353312"/>
+            <a:endParaRPr lang="en-US" sz="1300" dirty="0"/>
+          </a:p>
+        </p:txBody>
+      </p:sp>
+      <p:sp>
+        <p:nvSpPr>
+          <p:cNvPr id="12" name="Text 10"/>
+          <p:cNvSpPr/>
+          <p:nvPr/>
+        </p:nvSpPr>
+        <p:spPr>
+          <a:xfrm>
+            <a:off x="8074152" y="1920240"/>
+            <a:ext cx="2825496" cy="1280160"/>
           </a:xfrm>
           <a:prstGeom prst="rect">
             <a:avLst/>
@@ -8919,7 +9373,7 @@
               <a:buNone/>
             </a:pPr>
             <a:r>
-              <a:rPr lang="en-US" sz="1250" dirty="0">
+              <a:rPr lang="en-US" sz="1550" dirty="0">
                 <a:solidFill>
                   <a:srgbClr val="17364A"/>
                 </a:solidFill>
@@ -8929,14 +9383,14 @@
               </a:rPr>
               <a:t>Level: applied/foundational</a:t>
             </a:r>
-            <a:endParaRPr lang="en-US" sz="1250" dirty="0"/>
+            <a:endParaRPr lang="en-US" sz="1550" dirty="0"/>
           </a:p>
           <a:p>
             <a:pPr indent="0" marL="0">
               <a:buNone/>
             </a:pPr>
             <a:r>
-              <a:rPr lang="en-US" sz="1250" dirty="0">
+              <a:rPr lang="en-US" sz="1550" dirty="0">
                 <a:solidFill>
                   <a:srgbClr val="17364A"/>
                 </a:solidFill>
@@ -8946,14 +9400,14 @@
               </a:rPr>
               <a:t>Primary track: Communications Role-Based Track</a:t>
             </a:r>
-            <a:endParaRPr lang="en-US" sz="1250" dirty="0"/>
+            <a:endParaRPr lang="en-US" sz="1550" dirty="0"/>
           </a:p>
           <a:p>
             <a:pPr indent="0" marL="0">
               <a:buNone/>
             </a:pPr>
             <a:r>
-              <a:rPr lang="en-US" sz="1250" dirty="0">
+              <a:rPr lang="en-US" sz="1550" dirty="0">
                 <a:solidFill>
                   <a:srgbClr val="17364A"/>
                 </a:solidFill>
@@ -8963,32 +9417,32 @@
               </a:rPr>
               <a:t>Appears in tracks: communications, shared-foundational, policy, public-health-executive-leadership</a:t>
             </a:r>
-            <a:endParaRPr lang="en-US" sz="1250" dirty="0"/>
-          </a:p>
-        </p:txBody>
-      </p:sp>
-      <p:sp>
-        <p:nvSpPr>
-          <p:cNvPr id="12" name="Shape 10"/>
-          <p:cNvSpPr/>
-          <p:nvPr/>
-        </p:nvSpPr>
-        <p:spPr>
-          <a:xfrm>
-            <a:off x="7909560" y="3611880"/>
-            <a:ext cx="3154680" cy="1783080"/>
+            <a:endParaRPr lang="en-US" sz="1550" dirty="0"/>
+          </a:p>
+        </p:txBody>
+      </p:sp>
+      <p:sp>
+        <p:nvSpPr>
+          <p:cNvPr id="13" name="Shape 11"/>
+          <p:cNvSpPr/>
+          <p:nvPr/>
+        </p:nvSpPr>
+        <p:spPr>
+          <a:xfrm>
+            <a:off x="7635240" y="3730752"/>
+            <a:ext cx="1033272" cy="749808"/>
           </a:xfrm>
           <a:prstGeom prst="roundRect">
             <a:avLst>
-              <a:gd name="adj" fmla="val 6154"/>
+              <a:gd name="adj" fmla="val 14634"/>
             </a:avLst>
           </a:prstGeom>
           <a:solidFill>
-            <a:srgbClr val="EEF8ED"/>
+            <a:srgbClr val="0068B7"/>
           </a:solidFill>
           <a:ln w="12700">
             <a:solidFill>
-              <a:srgbClr val="B9D7E6"/>
+              <a:srgbClr val="0068B7"/>
             </a:solidFill>
             <a:prstDash val="solid"/>
           </a:ln>
@@ -8996,81 +9450,256 @@
       </p:sp>
       <p:sp>
         <p:nvSpPr>
-          <p:cNvPr id="13" name="Text 11"/>
-          <p:cNvSpPr/>
-          <p:nvPr/>
-        </p:nvSpPr>
-        <p:spPr>
-          <a:xfrm>
-            <a:off x="8074152" y="3758184"/>
-            <a:ext cx="2825496" cy="201168"/>
-          </a:xfrm>
-          <a:prstGeom prst="rect">
-            <a:avLst/>
-          </a:prstGeom>
-          <a:noFill/>
-          <a:ln/>
-        </p:spPr>
-        <p:txBody>
-          <a:bodyPr wrap="square" lIns="0" tIns="0" rIns="0" bIns="0" rtlCol="0" anchor="ctr"/>
-          <a:lstStyle/>
-          <a:p>
-            <a:pPr indent="0" marL="0">
-              <a:buNone/>
-            </a:pPr>
-            <a:r>
-              <a:rPr lang="en-US" sz="950" b="1" dirty="0">
-                <a:solidFill>
-                  <a:srgbClr val="0068B7"/>
-                </a:solidFill>
-                <a:latin typeface="Aptos" pitchFamily="34" charset="0"/>
-                <a:ea typeface="Aptos" pitchFamily="34" charset="-122"/>
-                <a:cs typeface="Aptos" pitchFamily="34" charset="-120"/>
-              </a:rPr>
-              <a:t>Learning approach</a:t>
-            </a:r>
-            <a:endParaRPr lang="en-US" sz="950" dirty="0"/>
-          </a:p>
-        </p:txBody>
-      </p:sp>
-      <p:sp>
-        <p:nvSpPr>
           <p:cNvPr id="14" name="Text 12"/>
           <p:cNvSpPr/>
           <p:nvPr/>
         </p:nvSpPr>
         <p:spPr>
           <a:xfrm>
-            <a:off x="8074152" y="4050792"/>
-            <a:ext cx="2825496" cy="1216152"/>
-          </a:xfrm>
-          <a:prstGeom prst="rect">
-            <a:avLst/>
-          </a:prstGeom>
-          <a:noFill/>
-          <a:ln/>
-        </p:spPr>
-        <p:txBody>
-          <a:bodyPr wrap="square" lIns="0" tIns="0" rIns="0" bIns="0" rtlCol="0" anchor="t">
+            <a:off x="7708392" y="3922776"/>
+            <a:ext cx="886968" cy="310896"/>
+          </a:xfrm>
+          <a:prstGeom prst="rect">
+            <a:avLst/>
+          </a:prstGeom>
+          <a:noFill/>
+          <a:ln/>
+        </p:spPr>
+        <p:txBody>
+          <a:bodyPr wrap="square" lIns="0" tIns="0" rIns="0" bIns="0" rtlCol="0" anchor="ctr">
             <a:normAutofit/>
           </a:bodyPr>
           <a:lstStyle/>
           <a:p>
-            <a:pPr indent="0" marL="0">
-              <a:buNone/>
-            </a:pPr>
-            <a:r>
-              <a:rPr lang="en-US" sz="1250" dirty="0">
-                <a:solidFill>
-                  <a:srgbClr val="17364A"/>
-                </a:solidFill>
-                <a:latin typeface="Aptos" pitchFamily="34" charset="0"/>
-                <a:ea typeface="Aptos" pitchFamily="34" charset="-122"/>
-                <a:cs typeface="Aptos" pitchFamily="34" charset="-120"/>
-              </a:rPr>
-              <a:t>Review the core ideas, complete the practical exercise, check your understanding, and use the related plays and tools to apply the lesson.</a:t>
-            </a:r>
-            <a:endParaRPr lang="en-US" sz="1250" dirty="0"/>
+            <a:pPr algn="ctr" indent="0" marL="0">
+              <a:buNone/>
+            </a:pPr>
+            <a:r>
+              <a:rPr lang="en-US" sz="1500" b="1" dirty="0">
+                <a:solidFill>
+                  <a:srgbClr val="FFFFFF"/>
+                </a:solidFill>
+                <a:latin typeface="Aptos" pitchFamily="34" charset="0"/>
+                <a:ea typeface="Aptos" pitchFamily="34" charset="-122"/>
+                <a:cs typeface="Aptos" pitchFamily="34" charset="-120"/>
+              </a:rPr>
+              <a:t>Learn</a:t>
+            </a:r>
+            <a:endParaRPr lang="en-US" sz="1500" dirty="0"/>
+          </a:p>
+        </p:txBody>
+      </p:sp>
+      <p:sp>
+        <p:nvSpPr>
+          <p:cNvPr id="15" name="Text 13"/>
+          <p:cNvSpPr/>
+          <p:nvPr/>
+        </p:nvSpPr>
+        <p:spPr>
+          <a:xfrm>
+            <a:off x="8695944" y="3941064"/>
+            <a:ext cx="201168" cy="256032"/>
+          </a:xfrm>
+          <a:prstGeom prst="rect">
+            <a:avLst/>
+          </a:prstGeom>
+          <a:noFill/>
+          <a:ln/>
+        </p:spPr>
+        <p:txBody>
+          <a:bodyPr wrap="square" lIns="0" tIns="0" rIns="0" bIns="0" rtlCol="0" anchor="ctr"/>
+          <a:lstStyle/>
+          <a:p>
+            <a:pPr algn="ctr" indent="0" marL="0">
+              <a:buNone/>
+            </a:pPr>
+            <a:r>
+              <a:rPr lang="en-US" sz="1800" b="1" dirty="0">
+                <a:solidFill>
+                  <a:srgbClr val="0068B7"/>
+                </a:solidFill>
+                <a:latin typeface="Aptos" pitchFamily="34" charset="0"/>
+                <a:ea typeface="Aptos" pitchFamily="34" charset="-122"/>
+                <a:cs typeface="Aptos" pitchFamily="34" charset="-120"/>
+              </a:rPr>
+              <a:t>â†’</a:t>
+            </a:r>
+            <a:endParaRPr lang="en-US" sz="1800" dirty="0"/>
+          </a:p>
+        </p:txBody>
+      </p:sp>
+      <p:sp>
+        <p:nvSpPr>
+          <p:cNvPr id="16" name="Shape 14"/>
+          <p:cNvSpPr/>
+          <p:nvPr/>
+        </p:nvSpPr>
+        <p:spPr>
+          <a:xfrm>
+            <a:off x="8924544" y="3730752"/>
+            <a:ext cx="1033272" cy="749808"/>
+          </a:xfrm>
+          <a:prstGeom prst="roundRect">
+            <a:avLst>
+              <a:gd name="adj" fmla="val 14634"/>
+            </a:avLst>
+          </a:prstGeom>
+          <a:solidFill>
+            <a:srgbClr val="2F8A28"/>
+          </a:solidFill>
+          <a:ln w="12700">
+            <a:solidFill>
+              <a:srgbClr val="2F8A28"/>
+            </a:solidFill>
+            <a:prstDash val="solid"/>
+          </a:ln>
+        </p:spPr>
+      </p:sp>
+      <p:sp>
+        <p:nvSpPr>
+          <p:cNvPr id="17" name="Text 15"/>
+          <p:cNvSpPr/>
+          <p:nvPr/>
+        </p:nvSpPr>
+        <p:spPr>
+          <a:xfrm>
+            <a:off x="8997696" y="3922776"/>
+            <a:ext cx="886968" cy="310896"/>
+          </a:xfrm>
+          <a:prstGeom prst="rect">
+            <a:avLst/>
+          </a:prstGeom>
+          <a:noFill/>
+          <a:ln/>
+        </p:spPr>
+        <p:txBody>
+          <a:bodyPr wrap="square" lIns="0" tIns="0" rIns="0" bIns="0" rtlCol="0" anchor="ctr">
+            <a:normAutofit/>
+          </a:bodyPr>
+          <a:lstStyle/>
+          <a:p>
+            <a:pPr algn="ctr" indent="0" marL="0">
+              <a:buNone/>
+            </a:pPr>
+            <a:r>
+              <a:rPr lang="en-US" sz="1500" b="1" dirty="0">
+                <a:solidFill>
+                  <a:srgbClr val="FFFFFF"/>
+                </a:solidFill>
+                <a:latin typeface="Aptos" pitchFamily="34" charset="0"/>
+                <a:ea typeface="Aptos" pitchFamily="34" charset="-122"/>
+                <a:cs typeface="Aptos" pitchFamily="34" charset="-120"/>
+              </a:rPr>
+              <a:t>Apply</a:t>
+            </a:r>
+            <a:endParaRPr lang="en-US" sz="1500" dirty="0"/>
+          </a:p>
+        </p:txBody>
+      </p:sp>
+      <p:sp>
+        <p:nvSpPr>
+          <p:cNvPr id="18" name="Text 16"/>
+          <p:cNvSpPr/>
+          <p:nvPr/>
+        </p:nvSpPr>
+        <p:spPr>
+          <a:xfrm>
+            <a:off x="9985248" y="3941064"/>
+            <a:ext cx="201168" cy="256032"/>
+          </a:xfrm>
+          <a:prstGeom prst="rect">
+            <a:avLst/>
+          </a:prstGeom>
+          <a:noFill/>
+          <a:ln/>
+        </p:spPr>
+        <p:txBody>
+          <a:bodyPr wrap="square" lIns="0" tIns="0" rIns="0" bIns="0" rtlCol="0" anchor="ctr"/>
+          <a:lstStyle/>
+          <a:p>
+            <a:pPr algn="ctr" indent="0" marL="0">
+              <a:buNone/>
+            </a:pPr>
+            <a:r>
+              <a:rPr lang="en-US" sz="1800" b="1" dirty="0">
+                <a:solidFill>
+                  <a:srgbClr val="0068B7"/>
+                </a:solidFill>
+                <a:latin typeface="Aptos" pitchFamily="34" charset="0"/>
+                <a:ea typeface="Aptos" pitchFamily="34" charset="-122"/>
+                <a:cs typeface="Aptos" pitchFamily="34" charset="-120"/>
+              </a:rPr>
+              <a:t>â†’</a:t>
+            </a:r>
+            <a:endParaRPr lang="en-US" sz="1800" dirty="0"/>
+          </a:p>
+        </p:txBody>
+      </p:sp>
+      <p:sp>
+        <p:nvSpPr>
+          <p:cNvPr id="19" name="Shape 17"/>
+          <p:cNvSpPr/>
+          <p:nvPr/>
+        </p:nvSpPr>
+        <p:spPr>
+          <a:xfrm>
+            <a:off x="10213848" y="3730752"/>
+            <a:ext cx="1033272" cy="749808"/>
+          </a:xfrm>
+          <a:prstGeom prst="roundRect">
+            <a:avLst>
+              <a:gd name="adj" fmla="val 14634"/>
+            </a:avLst>
+          </a:prstGeom>
+          <a:solidFill>
+            <a:srgbClr val="6A4CA3"/>
+          </a:solidFill>
+          <a:ln w="12700">
+            <a:solidFill>
+              <a:srgbClr val="6A4CA3"/>
+            </a:solidFill>
+            <a:prstDash val="solid"/>
+          </a:ln>
+        </p:spPr>
+      </p:sp>
+      <p:sp>
+        <p:nvSpPr>
+          <p:cNvPr id="20" name="Text 18"/>
+          <p:cNvSpPr/>
+          <p:nvPr/>
+        </p:nvSpPr>
+        <p:spPr>
+          <a:xfrm>
+            <a:off x="10287000" y="3922776"/>
+            <a:ext cx="886968" cy="310896"/>
+          </a:xfrm>
+          <a:prstGeom prst="rect">
+            <a:avLst/>
+          </a:prstGeom>
+          <a:noFill/>
+          <a:ln/>
+        </p:spPr>
+        <p:txBody>
+          <a:bodyPr wrap="square" lIns="0" tIns="0" rIns="0" bIns="0" rtlCol="0" anchor="ctr">
+            <a:normAutofit/>
+          </a:bodyPr>
+          <a:lstStyle/>
+          <a:p>
+            <a:pPr algn="ctr" indent="0" marL="0">
+              <a:buNone/>
+            </a:pPr>
+            <a:r>
+              <a:rPr lang="en-US" sz="1500" b="1" dirty="0">
+                <a:solidFill>
+                  <a:srgbClr val="FFFFFF"/>
+                </a:solidFill>
+                <a:latin typeface="Aptos" pitchFamily="34" charset="0"/>
+                <a:ea typeface="Aptos" pitchFamily="34" charset="-122"/>
+                <a:cs typeface="Aptos" pitchFamily="34" charset="-120"/>
+              </a:rPr>
+              <a:t>Document</a:t>
+            </a:r>
+            <a:endParaRPr lang="en-US" sz="1500" dirty="0"/>
           </a:p>
         </p:txBody>
       </p:sp>
@@ -9267,7 +9896,7 @@
                 <a:ea typeface="Aptos" pitchFamily="34" charset="-122"/>
                 <a:cs typeface="Aptos" pitchFamily="34" charset="-120"/>
               </a:rPr>
-              <a:t>© Paula Soper</a:t>
+              <a:t>Â© Paula Soper</a:t>
             </a:r>
             <a:endParaRPr lang="en-US" sz="800" dirty="0"/>
           </a:p>
@@ -9275,7 +9904,46 @@
       </p:sp>
       <p:sp>
         <p:nvSpPr>
-          <p:cNvPr id="7" name="Shape 5"/>
+          <p:cNvPr id="7" name="Text 5"/>
+          <p:cNvSpPr/>
+          <p:nvPr/>
+        </p:nvSpPr>
+        <p:spPr>
+          <a:xfrm>
+            <a:off x="11137392" y="6510528"/>
+            <a:ext cx="411480" cy="201168"/>
+          </a:xfrm>
+          <a:prstGeom prst="rect">
+            <a:avLst/>
+          </a:prstGeom>
+          <a:noFill/>
+          <a:ln/>
+        </p:spPr>
+        <p:txBody>
+          <a:bodyPr wrap="square" lIns="0" tIns="0" rIns="0" bIns="0" rtlCol="0" anchor="ctr"/>
+          <a:lstStyle/>
+          <a:p>
+            <a:pPr algn="r" indent="0" marL="0">
+              <a:buNone/>
+            </a:pPr>
+            <a:r>
+              <a:rPr lang="en-US" sz="900" dirty="0">
+                <a:solidFill>
+                  <a:srgbClr val="5F7181"/>
+                </a:solidFill>
+                <a:latin typeface="Aptos" pitchFamily="34" charset="0"/>
+                <a:ea typeface="Aptos" pitchFamily="34" charset="-122"/>
+                <a:cs typeface="Aptos" pitchFamily="34" charset="-120"/>
+              </a:rPr>
+              <a:t>20</a:t>
+            </a:r>
+            <a:endParaRPr lang="en-US" sz="900" dirty="0"/>
+          </a:p>
+        </p:txBody>
+      </p:sp>
+      <p:sp>
+        <p:nvSpPr>
+          <p:cNvPr id="8" name="Shape 6"/>
           <p:cNvSpPr/>
           <p:nvPr/>
         </p:nvSpPr>
@@ -9300,7 +9968,7 @@
       </p:sp>
       <p:sp>
         <p:nvSpPr>
-          <p:cNvPr id="8" name="Text 6"/>
+          <p:cNvPr id="9" name="Text 7"/>
           <p:cNvSpPr/>
           <p:nvPr/>
         </p:nvSpPr>
@@ -9339,14 +10007,14 @@
       </p:sp>
       <p:sp>
         <p:nvSpPr>
-          <p:cNvPr id="9" name="Text 7"/>
+          <p:cNvPr id="10" name="Text 8"/>
           <p:cNvSpPr/>
           <p:nvPr/>
         </p:nvSpPr>
         <p:spPr>
           <a:xfrm>
             <a:off x="640080" y="621792"/>
-            <a:ext cx="10881360" cy="566928"/>
+            <a:ext cx="10881360" cy="713232"/>
           </a:xfrm>
           <a:prstGeom prst="rect">
             <a:avLst/>
@@ -9364,7 +10032,7 @@
               <a:buNone/>
             </a:pPr>
             <a:r>
-              <a:rPr lang="en-US" sz="2700" b="1" dirty="0">
+              <a:rPr lang="en-US" sz="3400" b="1" dirty="0">
                 <a:solidFill>
                   <a:srgbClr val="003A63"/>
                 </a:solidFill>
@@ -9374,20 +10042,20 @@
               </a:rPr>
               <a:t>Expected Assignment</a:t>
             </a:r>
-            <a:endParaRPr lang="en-US" sz="2700" dirty="0"/>
-          </a:p>
-        </p:txBody>
-      </p:sp>
-      <p:sp>
-        <p:nvSpPr>
-          <p:cNvPr id="10" name="Text 8"/>
-          <p:cNvSpPr/>
-          <p:nvPr/>
-        </p:nvSpPr>
-        <p:spPr>
-          <a:xfrm>
-            <a:off x="868680" y="1417320"/>
-            <a:ext cx="6675120" cy="4434840"/>
+            <a:endParaRPr lang="en-US" sz="3400" dirty="0"/>
+          </a:p>
+        </p:txBody>
+      </p:sp>
+      <p:sp>
+        <p:nvSpPr>
+          <p:cNvPr id="11" name="Text 9"/>
+          <p:cNvSpPr/>
+          <p:nvPr/>
+        </p:nvSpPr>
+        <p:spPr>
+          <a:xfrm>
+            <a:off x="868680" y="1508760"/>
+            <a:ext cx="6537960" cy="4160520"/>
           </a:xfrm>
           <a:prstGeom prst="rect">
             <a:avLst/>
@@ -9402,7 +10070,7 @@
           <a:lstStyle/>
           <a:p>
             <a:r>
-              <a:rPr lang="en-US" sz="1700" dirty="0">
+              <a:rPr lang="en-US" sz="2100" dirty="0">
                 <a:solidFill>
                   <a:srgbClr val="17364A"/>
                 </a:solidFill>
@@ -9412,11 +10080,11 @@
               </a:rPr>
               <a:t>AI-assisted communications review checklist</a:t>
             </a:r>
-            <a:endParaRPr lang="en-US" sz="1700" dirty="0"/>
-          </a:p>
-          <a:p>
-            <a:r>
-              <a:rPr lang="en-US" sz="1700" dirty="0">
+            <a:endParaRPr lang="en-US" sz="2100" dirty="0"/>
+          </a:p>
+          <a:p>
+            <a:r>
+              <a:rPr lang="en-US" sz="2100" dirty="0">
                 <a:solidFill>
                   <a:srgbClr val="17364A"/>
                 </a:solidFill>
@@ -9426,11 +10094,11 @@
               </a:rPr>
               <a:t>Source verification notes</a:t>
             </a:r>
-            <a:endParaRPr lang="en-US" sz="1700" dirty="0"/>
-          </a:p>
-          <a:p>
-            <a:r>
-              <a:rPr lang="en-US" sz="1700" dirty="0">
+            <a:endParaRPr lang="en-US" sz="2100" dirty="0"/>
+          </a:p>
+          <a:p>
+            <a:r>
+              <a:rPr lang="en-US" sz="2100" dirty="0">
                 <a:solidFill>
                   <a:srgbClr val="17364A"/>
                 </a:solidFill>
@@ -9440,27 +10108,13 @@
               </a:rPr>
               <a:t>Plain language and accessibility review notes</a:t>
             </a:r>
-            <a:endParaRPr lang="en-US" sz="1700" dirty="0"/>
-          </a:p>
-          <a:p>
-            <a:r>
-              <a:rPr lang="en-US" sz="1700" dirty="0">
-                <a:solidFill>
-                  <a:srgbClr val="17364A"/>
-                </a:solidFill>
-                <a:latin typeface="Aptos" pitchFamily="34" charset="0"/>
-                <a:ea typeface="Aptos" pitchFamily="34" charset="-122"/>
-                <a:cs typeface="Aptos" pitchFamily="34" charset="-120"/>
-              </a:rPr>
-              <a:t>Approval pathway documentation</a:t>
-            </a:r>
-            <a:endParaRPr lang="en-US" sz="1700" dirty="0"/>
-          </a:p>
-        </p:txBody>
-      </p:sp>
-      <p:sp>
-        <p:nvSpPr>
-          <p:cNvPr id="11" name="Shape 9"/>
+            <a:endParaRPr lang="en-US" sz="2100" dirty="0"/>
+          </a:p>
+        </p:txBody>
+      </p:sp>
+      <p:sp>
+        <p:nvSpPr>
+          <p:cNvPr id="12" name="Shape 10"/>
           <p:cNvSpPr/>
           <p:nvPr/>
         </p:nvSpPr>
@@ -9487,14 +10141,14 @@
       </p:sp>
       <p:sp>
         <p:nvSpPr>
-          <p:cNvPr id="12" name="Text 10"/>
+          <p:cNvPr id="13" name="Text 11"/>
           <p:cNvSpPr/>
           <p:nvPr/>
         </p:nvSpPr>
         <p:spPr>
           <a:xfrm>
             <a:off x="8074152" y="1563624"/>
-            <a:ext cx="2825496" cy="201168"/>
+            <a:ext cx="2825496" cy="256032"/>
           </a:xfrm>
           <a:prstGeom prst="rect">
             <a:avLst/>
@@ -9510,7 +10164,7 @@
               <a:buNone/>
             </a:pPr>
             <a:r>
-              <a:rPr lang="en-US" sz="950" b="1" dirty="0">
+              <a:rPr lang="en-US" sz="1300" b="1" dirty="0">
                 <a:solidFill>
                   <a:srgbClr val="0068B7"/>
                 </a:solidFill>
@@ -9520,20 +10174,20 @@
               </a:rPr>
               <a:t>Key idea</a:t>
             </a:r>
-            <a:endParaRPr lang="en-US" sz="950" dirty="0"/>
-          </a:p>
-        </p:txBody>
-      </p:sp>
-      <p:sp>
-        <p:nvSpPr>
-          <p:cNvPr id="13" name="Text 11"/>
-          <p:cNvSpPr/>
-          <p:nvPr/>
-        </p:nvSpPr>
-        <p:spPr>
-          <a:xfrm>
-            <a:off x="8074152" y="1856232"/>
-            <a:ext cx="2825496" cy="1261872"/>
+            <a:endParaRPr lang="en-US" sz="1300" dirty="0"/>
+          </a:p>
+        </p:txBody>
+      </p:sp>
+      <p:sp>
+        <p:nvSpPr>
+          <p:cNvPr id="14" name="Text 12"/>
+          <p:cNvSpPr/>
+          <p:nvPr/>
+        </p:nvSpPr>
+        <p:spPr>
+          <a:xfrm>
+            <a:off x="8074152" y="1920240"/>
+            <a:ext cx="2825496" cy="1188720"/>
           </a:xfrm>
           <a:prstGeom prst="rect">
             <a:avLst/>
@@ -9551,7 +10205,7 @@
               <a:buNone/>
             </a:pPr>
             <a:r>
-              <a:rPr lang="en-US" sz="1250" dirty="0">
+              <a:rPr lang="en-US" sz="1550" dirty="0">
                 <a:solidFill>
                   <a:srgbClr val="17364A"/>
                 </a:solidFill>
@@ -9561,13 +10215,13 @@
               </a:rPr>
               <a:t>AI-assisted communications review checklist</a:t>
             </a:r>
-            <a:endParaRPr lang="en-US" sz="1250" dirty="0"/>
-          </a:p>
-        </p:txBody>
-      </p:sp>
-      <p:sp>
-        <p:nvSpPr>
-          <p:cNvPr id="14" name="Shape 12"/>
+            <a:endParaRPr lang="en-US" sz="1550" dirty="0"/>
+          </a:p>
+        </p:txBody>
+      </p:sp>
+      <p:sp>
+        <p:nvSpPr>
+          <p:cNvPr id="15" name="Shape 13"/>
           <p:cNvSpPr/>
           <p:nvPr/>
         </p:nvSpPr>
@@ -9594,14 +10248,14 @@
       </p:sp>
       <p:sp>
         <p:nvSpPr>
-          <p:cNvPr id="15" name="Text 13"/>
+          <p:cNvPr id="16" name="Text 14"/>
           <p:cNvSpPr/>
           <p:nvPr/>
         </p:nvSpPr>
         <p:spPr>
           <a:xfrm>
             <a:off x="8074152" y="3666744"/>
-            <a:ext cx="2825496" cy="201168"/>
+            <a:ext cx="2825496" cy="256032"/>
           </a:xfrm>
           <a:prstGeom prst="rect">
             <a:avLst/>
@@ -9617,7 +10271,7 @@
               <a:buNone/>
             </a:pPr>
             <a:r>
-              <a:rPr lang="en-US" sz="950" b="1" dirty="0">
+              <a:rPr lang="en-US" sz="1300" b="1" dirty="0">
                 <a:solidFill>
                   <a:srgbClr val="0068B7"/>
                 </a:solidFill>
@@ -9627,20 +10281,20 @@
               </a:rPr>
               <a:t>Use this for</a:t>
             </a:r>
-            <a:endParaRPr lang="en-US" sz="950" dirty="0"/>
-          </a:p>
-        </p:txBody>
-      </p:sp>
-      <p:sp>
-        <p:nvSpPr>
-          <p:cNvPr id="16" name="Text 14"/>
-          <p:cNvSpPr/>
-          <p:nvPr/>
-        </p:nvSpPr>
-        <p:spPr>
-          <a:xfrm>
-            <a:off x="8074152" y="3959352"/>
-            <a:ext cx="2825496" cy="1170432"/>
+            <a:endParaRPr lang="en-US" sz="1300" dirty="0"/>
+          </a:p>
+        </p:txBody>
+      </p:sp>
+      <p:sp>
+        <p:nvSpPr>
+          <p:cNvPr id="17" name="Text 15"/>
+          <p:cNvSpPr/>
+          <p:nvPr/>
+        </p:nvSpPr>
+        <p:spPr>
+          <a:xfrm>
+            <a:off x="8074152" y="4023360"/>
+            <a:ext cx="2825496" cy="1097280"/>
           </a:xfrm>
           <a:prstGeom prst="rect">
             <a:avLst/>
@@ -9658,7 +10312,7 @@
               <a:buNone/>
             </a:pPr>
             <a:r>
-              <a:rPr lang="en-US" sz="1250" dirty="0">
+              <a:rPr lang="en-US" sz="1550" dirty="0">
                 <a:solidFill>
                   <a:srgbClr val="17364A"/>
                 </a:solidFill>
@@ -9668,7 +10322,7 @@
               </a:rPr>
               <a:t>Connect the concept to public health decisions, safeguards, documentation, or implementation work.</a:t>
             </a:r>
-            <a:endParaRPr lang="en-US" sz="1250" dirty="0"/>
+            <a:endParaRPr lang="en-US" sz="1550" dirty="0"/>
           </a:p>
         </p:txBody>
       </p:sp>
@@ -9865,7 +10519,7 @@
                 <a:ea typeface="Aptos" pitchFamily="34" charset="-122"/>
                 <a:cs typeface="Aptos" pitchFamily="34" charset="-120"/>
               </a:rPr>
-              <a:t>© Paula Soper</a:t>
+              <a:t>Â© Paula Soper</a:t>
             </a:r>
             <a:endParaRPr lang="en-US" sz="800" dirty="0"/>
           </a:p>
@@ -9873,7 +10527,46 @@
       </p:sp>
       <p:sp>
         <p:nvSpPr>
-          <p:cNvPr id="7" name="Shape 5"/>
+          <p:cNvPr id="7" name="Text 5"/>
+          <p:cNvSpPr/>
+          <p:nvPr/>
+        </p:nvSpPr>
+        <p:spPr>
+          <a:xfrm>
+            <a:off x="11137392" y="6510528"/>
+            <a:ext cx="411480" cy="201168"/>
+          </a:xfrm>
+          <a:prstGeom prst="rect">
+            <a:avLst/>
+          </a:prstGeom>
+          <a:noFill/>
+          <a:ln/>
+        </p:spPr>
+        <p:txBody>
+          <a:bodyPr wrap="square" lIns="0" tIns="0" rIns="0" bIns="0" rtlCol="0" anchor="ctr"/>
+          <a:lstStyle/>
+          <a:p>
+            <a:pPr algn="r" indent="0" marL="0">
+              <a:buNone/>
+            </a:pPr>
+            <a:r>
+              <a:rPr lang="en-US" sz="900" dirty="0">
+                <a:solidFill>
+                  <a:srgbClr val="5F7181"/>
+                </a:solidFill>
+                <a:latin typeface="Aptos" pitchFamily="34" charset="0"/>
+                <a:ea typeface="Aptos" pitchFamily="34" charset="-122"/>
+                <a:cs typeface="Aptos" pitchFamily="34" charset="-120"/>
+              </a:rPr>
+              <a:t>21</a:t>
+            </a:r>
+            <a:endParaRPr lang="en-US" sz="900" dirty="0"/>
+          </a:p>
+        </p:txBody>
+      </p:sp>
+      <p:sp>
+        <p:nvSpPr>
+          <p:cNvPr id="8" name="Shape 6"/>
           <p:cNvSpPr/>
           <p:nvPr/>
         </p:nvSpPr>
@@ -9898,7 +10591,7 @@
       </p:sp>
       <p:sp>
         <p:nvSpPr>
-          <p:cNvPr id="8" name="Text 6"/>
+          <p:cNvPr id="9" name="Text 7"/>
           <p:cNvSpPr/>
           <p:nvPr/>
         </p:nvSpPr>
@@ -9937,14 +10630,14 @@
       </p:sp>
       <p:sp>
         <p:nvSpPr>
-          <p:cNvPr id="9" name="Text 7"/>
+          <p:cNvPr id="10" name="Text 8"/>
           <p:cNvSpPr/>
           <p:nvPr/>
         </p:nvSpPr>
         <p:spPr>
           <a:xfrm>
             <a:off x="640080" y="621792"/>
-            <a:ext cx="10881360" cy="566928"/>
+            <a:ext cx="10881360" cy="713232"/>
           </a:xfrm>
           <a:prstGeom prst="rect">
             <a:avLst/>
@@ -9962,7 +10655,7 @@
               <a:buNone/>
             </a:pPr>
             <a:r>
-              <a:rPr lang="en-US" sz="2700" b="1" dirty="0">
+              <a:rPr lang="en-US" sz="3400" b="1" dirty="0">
                 <a:solidFill>
                   <a:srgbClr val="003A63"/>
                 </a:solidFill>
@@ -9972,20 +10665,20 @@
               </a:rPr>
               <a:t>Knowledge Check</a:t>
             </a:r>
-            <a:endParaRPr lang="en-US" sz="2700" dirty="0"/>
-          </a:p>
-        </p:txBody>
-      </p:sp>
-      <p:sp>
-        <p:nvSpPr>
-          <p:cNvPr id="10" name="Text 8"/>
-          <p:cNvSpPr/>
-          <p:nvPr/>
-        </p:nvSpPr>
-        <p:spPr>
-          <a:xfrm>
-            <a:off x="868680" y="1417320"/>
-            <a:ext cx="6675120" cy="4434840"/>
+            <a:endParaRPr lang="en-US" sz="3400" dirty="0"/>
+          </a:p>
+        </p:txBody>
+      </p:sp>
+      <p:sp>
+        <p:nvSpPr>
+          <p:cNvPr id="11" name="Text 9"/>
+          <p:cNvSpPr/>
+          <p:nvPr/>
+        </p:nvSpPr>
+        <p:spPr>
+          <a:xfrm>
+            <a:off x="868680" y="1508760"/>
+            <a:ext cx="6537960" cy="4160520"/>
           </a:xfrm>
           <a:prstGeom prst="rect">
             <a:avLst/>
@@ -10000,7 +10693,7 @@
           <a:lstStyle/>
           <a:p>
             <a:r>
-              <a:rPr lang="en-US" sz="1700" dirty="0">
+              <a:rPr lang="en-US" sz="2100" dirty="0">
                 <a:solidFill>
                   <a:srgbClr val="17364A"/>
                 </a:solidFill>
@@ -10010,11 +10703,11 @@
               </a:rPr>
               <a:t>1. What is an appropriate role for AI in public health communications?</a:t>
             </a:r>
-            <a:endParaRPr lang="en-US" sz="1700" dirty="0"/>
-          </a:p>
-          <a:p>
-            <a:r>
-              <a:rPr lang="en-US" sz="1700" dirty="0">
+            <a:endParaRPr lang="en-US" sz="2100" dirty="0"/>
+          </a:p>
+          <a:p>
+            <a:r>
+              <a:rPr lang="en-US" sz="2100" dirty="0">
                 <a:solidFill>
                   <a:srgbClr val="17364A"/>
                 </a:solidFill>
@@ -10024,11 +10717,11 @@
               </a:rPr>
               <a:t>2. Why is source verification necessary?</a:t>
             </a:r>
-            <a:endParaRPr lang="en-US" sz="1700" dirty="0"/>
-          </a:p>
-          <a:p>
-            <a:r>
-              <a:rPr lang="en-US" sz="1700" dirty="0">
+            <a:endParaRPr lang="en-US" sz="2100" dirty="0"/>
+          </a:p>
+          <a:p>
+            <a:r>
+              <a:rPr lang="en-US" sz="2100" dirty="0">
                 <a:solidFill>
                   <a:srgbClr val="17364A"/>
                 </a:solidFill>
@@ -10038,27 +10731,13 @@
               </a:rPr>
               <a:t>3. Which review is especially important for public-facing AI-assisted messages?</a:t>
             </a:r>
-            <a:endParaRPr lang="en-US" sz="1700" dirty="0"/>
-          </a:p>
-          <a:p>
-            <a:r>
-              <a:rPr lang="en-US" sz="1700" dirty="0">
-                <a:solidFill>
-                  <a:srgbClr val="17364A"/>
-                </a:solidFill>
-                <a:latin typeface="Aptos" pitchFamily="34" charset="0"/>
-                <a:ea typeface="Aptos" pitchFamily="34" charset="-122"/>
-                <a:cs typeface="Aptos" pitchFamily="34" charset="-120"/>
-              </a:rPr>
-              <a:t>4. What should happen with AI-assisted translation for public health messages?</a:t>
-            </a:r>
-            <a:endParaRPr lang="en-US" sz="1700" dirty="0"/>
-          </a:p>
-        </p:txBody>
-      </p:sp>
-      <p:sp>
-        <p:nvSpPr>
-          <p:cNvPr id="11" name="Shape 9"/>
+            <a:endParaRPr lang="en-US" sz="2100" dirty="0"/>
+          </a:p>
+        </p:txBody>
+      </p:sp>
+      <p:sp>
+        <p:nvSpPr>
+          <p:cNvPr id="12" name="Shape 10"/>
           <p:cNvSpPr/>
           <p:nvPr/>
         </p:nvSpPr>
@@ -10085,14 +10764,14 @@
       </p:sp>
       <p:sp>
         <p:nvSpPr>
-          <p:cNvPr id="12" name="Text 10"/>
+          <p:cNvPr id="13" name="Text 11"/>
           <p:cNvSpPr/>
           <p:nvPr/>
         </p:nvSpPr>
         <p:spPr>
           <a:xfrm>
             <a:off x="8074152" y="1563624"/>
-            <a:ext cx="2825496" cy="201168"/>
+            <a:ext cx="2825496" cy="256032"/>
           </a:xfrm>
           <a:prstGeom prst="rect">
             <a:avLst/>
@@ -10108,7 +10787,7 @@
               <a:buNone/>
             </a:pPr>
             <a:r>
-              <a:rPr lang="en-US" sz="950" b="1" dirty="0">
+              <a:rPr lang="en-US" sz="1300" b="1" dirty="0">
                 <a:solidFill>
                   <a:srgbClr val="0068B7"/>
                 </a:solidFill>
@@ -10118,20 +10797,20 @@
               </a:rPr>
               <a:t>Key idea</a:t>
             </a:r>
-            <a:endParaRPr lang="en-US" sz="950" dirty="0"/>
-          </a:p>
-        </p:txBody>
-      </p:sp>
-      <p:sp>
-        <p:nvSpPr>
-          <p:cNvPr id="13" name="Text 11"/>
-          <p:cNvSpPr/>
-          <p:nvPr/>
-        </p:nvSpPr>
-        <p:spPr>
-          <a:xfrm>
-            <a:off x="8074152" y="1856232"/>
-            <a:ext cx="2825496" cy="1261872"/>
+            <a:endParaRPr lang="en-US" sz="1300" dirty="0"/>
+          </a:p>
+        </p:txBody>
+      </p:sp>
+      <p:sp>
+        <p:nvSpPr>
+          <p:cNvPr id="14" name="Text 12"/>
+          <p:cNvSpPr/>
+          <p:nvPr/>
+        </p:nvSpPr>
+        <p:spPr>
+          <a:xfrm>
+            <a:off x="8074152" y="1920240"/>
+            <a:ext cx="2825496" cy="1188720"/>
           </a:xfrm>
           <a:prstGeom prst="rect">
             <a:avLst/>
@@ -10149,7 +10828,7 @@
               <a:buNone/>
             </a:pPr>
             <a:r>
-              <a:rPr lang="en-US" sz="1250" dirty="0">
+              <a:rPr lang="en-US" sz="1550" dirty="0">
                 <a:solidFill>
                   <a:srgbClr val="17364A"/>
                 </a:solidFill>
@@ -10159,13 +10838,13 @@
               </a:rPr>
               <a:t>1. What is an appropriate role for AI in public health communications?</a:t>
             </a:r>
-            <a:endParaRPr lang="en-US" sz="1250" dirty="0"/>
-          </a:p>
-        </p:txBody>
-      </p:sp>
-      <p:sp>
-        <p:nvSpPr>
-          <p:cNvPr id="14" name="Shape 12"/>
+            <a:endParaRPr lang="en-US" sz="1550" dirty="0"/>
+          </a:p>
+        </p:txBody>
+      </p:sp>
+      <p:sp>
+        <p:nvSpPr>
+          <p:cNvPr id="15" name="Shape 13"/>
           <p:cNvSpPr/>
           <p:nvPr/>
         </p:nvSpPr>
@@ -10192,14 +10871,14 @@
       </p:sp>
       <p:sp>
         <p:nvSpPr>
-          <p:cNvPr id="15" name="Text 13"/>
+          <p:cNvPr id="16" name="Text 14"/>
           <p:cNvSpPr/>
           <p:nvPr/>
         </p:nvSpPr>
         <p:spPr>
           <a:xfrm>
             <a:off x="8074152" y="3666744"/>
-            <a:ext cx="2825496" cy="201168"/>
+            <a:ext cx="2825496" cy="256032"/>
           </a:xfrm>
           <a:prstGeom prst="rect">
             <a:avLst/>
@@ -10215,7 +10894,7 @@
               <a:buNone/>
             </a:pPr>
             <a:r>
-              <a:rPr lang="en-US" sz="950" b="1" dirty="0">
+              <a:rPr lang="en-US" sz="1300" b="1" dirty="0">
                 <a:solidFill>
                   <a:srgbClr val="0068B7"/>
                 </a:solidFill>
@@ -10225,20 +10904,20 @@
               </a:rPr>
               <a:t>Use this for</a:t>
             </a:r>
-            <a:endParaRPr lang="en-US" sz="950" dirty="0"/>
-          </a:p>
-        </p:txBody>
-      </p:sp>
-      <p:sp>
-        <p:nvSpPr>
-          <p:cNvPr id="16" name="Text 14"/>
-          <p:cNvSpPr/>
-          <p:nvPr/>
-        </p:nvSpPr>
-        <p:spPr>
-          <a:xfrm>
-            <a:off x="8074152" y="3959352"/>
-            <a:ext cx="2825496" cy="1170432"/>
+            <a:endParaRPr lang="en-US" sz="1300" dirty="0"/>
+          </a:p>
+        </p:txBody>
+      </p:sp>
+      <p:sp>
+        <p:nvSpPr>
+          <p:cNvPr id="17" name="Text 15"/>
+          <p:cNvSpPr/>
+          <p:nvPr/>
+        </p:nvSpPr>
+        <p:spPr>
+          <a:xfrm>
+            <a:off x="8074152" y="4023360"/>
+            <a:ext cx="2825496" cy="1097280"/>
           </a:xfrm>
           <a:prstGeom prst="rect">
             <a:avLst/>
@@ -10256,7 +10935,7 @@
               <a:buNone/>
             </a:pPr>
             <a:r>
-              <a:rPr lang="en-US" sz="1250" dirty="0">
+              <a:rPr lang="en-US" sz="1550" dirty="0">
                 <a:solidFill>
                   <a:srgbClr val="17364A"/>
                 </a:solidFill>
@@ -10266,7 +10945,7 @@
               </a:rPr>
               <a:t>Connect the concept to public health decisions, safeguards, documentation, or implementation work.</a:t>
             </a:r>
-            <a:endParaRPr lang="en-US" sz="1250" dirty="0"/>
+            <a:endParaRPr lang="en-US" sz="1550" dirty="0"/>
           </a:p>
         </p:txBody>
       </p:sp>
@@ -10463,7 +11142,7 @@
                 <a:ea typeface="Aptos" pitchFamily="34" charset="-122"/>
                 <a:cs typeface="Aptos" pitchFamily="34" charset="-120"/>
               </a:rPr>
-              <a:t>© Paula Soper</a:t>
+              <a:t>Â© Paula Soper</a:t>
             </a:r>
             <a:endParaRPr lang="en-US" sz="800" dirty="0"/>
           </a:p>
@@ -10471,7 +11150,46 @@
       </p:sp>
       <p:sp>
         <p:nvSpPr>
-          <p:cNvPr id="7" name="Shape 5"/>
+          <p:cNvPr id="7" name="Text 5"/>
+          <p:cNvSpPr/>
+          <p:nvPr/>
+        </p:nvSpPr>
+        <p:spPr>
+          <a:xfrm>
+            <a:off x="11137392" y="6510528"/>
+            <a:ext cx="411480" cy="201168"/>
+          </a:xfrm>
+          <a:prstGeom prst="rect">
+            <a:avLst/>
+          </a:prstGeom>
+          <a:noFill/>
+          <a:ln/>
+        </p:spPr>
+        <p:txBody>
+          <a:bodyPr wrap="square" lIns="0" tIns="0" rIns="0" bIns="0" rtlCol="0" anchor="ctr"/>
+          <a:lstStyle/>
+          <a:p>
+            <a:pPr algn="r" indent="0" marL="0">
+              <a:buNone/>
+            </a:pPr>
+            <a:r>
+              <a:rPr lang="en-US" sz="900" dirty="0">
+                <a:solidFill>
+                  <a:srgbClr val="5F7181"/>
+                </a:solidFill>
+                <a:latin typeface="Aptos" pitchFamily="34" charset="0"/>
+                <a:ea typeface="Aptos" pitchFamily="34" charset="-122"/>
+                <a:cs typeface="Aptos" pitchFamily="34" charset="-120"/>
+              </a:rPr>
+              <a:t>22</a:t>
+            </a:r>
+            <a:endParaRPr lang="en-US" sz="900" dirty="0"/>
+          </a:p>
+        </p:txBody>
+      </p:sp>
+      <p:sp>
+        <p:nvSpPr>
+          <p:cNvPr id="8" name="Shape 6"/>
           <p:cNvSpPr/>
           <p:nvPr/>
         </p:nvSpPr>
@@ -10496,7 +11214,7 @@
       </p:sp>
       <p:sp>
         <p:nvSpPr>
-          <p:cNvPr id="8" name="Text 6"/>
+          <p:cNvPr id="9" name="Text 7"/>
           <p:cNvSpPr/>
           <p:nvPr/>
         </p:nvSpPr>
@@ -10535,14 +11253,14 @@
       </p:sp>
       <p:sp>
         <p:nvSpPr>
-          <p:cNvPr id="9" name="Text 7"/>
+          <p:cNvPr id="10" name="Text 8"/>
           <p:cNvSpPr/>
           <p:nvPr/>
         </p:nvSpPr>
         <p:spPr>
           <a:xfrm>
             <a:off x="640080" y="621792"/>
-            <a:ext cx="10881360" cy="566928"/>
+            <a:ext cx="10881360" cy="713232"/>
           </a:xfrm>
           <a:prstGeom prst="rect">
             <a:avLst/>
@@ -10560,7 +11278,7 @@
               <a:buNone/>
             </a:pPr>
             <a:r>
-              <a:rPr lang="en-US" sz="2700" b="1" dirty="0">
+              <a:rPr lang="en-US" sz="3400" b="1" dirty="0">
                 <a:solidFill>
                   <a:srgbClr val="003A63"/>
                 </a:solidFill>
@@ -10570,20 +11288,20 @@
               </a:rPr>
               <a:t>References and Resources</a:t>
             </a:r>
-            <a:endParaRPr lang="en-US" sz="2700" dirty="0"/>
-          </a:p>
-        </p:txBody>
-      </p:sp>
-      <p:sp>
-        <p:nvSpPr>
-          <p:cNvPr id="10" name="Text 8"/>
-          <p:cNvSpPr/>
-          <p:nvPr/>
-        </p:nvSpPr>
-        <p:spPr>
-          <a:xfrm>
-            <a:off x="868680" y="1417320"/>
-            <a:ext cx="6675120" cy="4434840"/>
+            <a:endParaRPr lang="en-US" sz="3400" dirty="0"/>
+          </a:p>
+        </p:txBody>
+      </p:sp>
+      <p:sp>
+        <p:nvSpPr>
+          <p:cNvPr id="11" name="Text 9"/>
+          <p:cNvSpPr/>
+          <p:nvPr/>
+        </p:nvSpPr>
+        <p:spPr>
+          <a:xfrm>
+            <a:off x="868680" y="1508760"/>
+            <a:ext cx="6537960" cy="4160520"/>
           </a:xfrm>
           <a:prstGeom prst="rect">
             <a:avLst/>
@@ -10598,7 +11316,7 @@
           <a:lstStyle/>
           <a:p>
             <a:r>
-              <a:rPr lang="en-US" sz="1700" dirty="0">
+              <a:rPr lang="en-US" sz="2100" dirty="0">
                 <a:solidFill>
                   <a:srgbClr val="17364A"/>
                 </a:solidFill>
@@ -10606,13 +11324,13 @@
                 <a:ea typeface="Aptos" pitchFamily="34" charset="-122"/>
                 <a:cs typeface="Aptos" pitchFamily="34" charset="-120"/>
               </a:rPr>
-              <a:t>NIST Artificial Intelligence Risk Management Framework: https://www.nist.gov/itl/ai-risk-management-framework</a:t>
-            </a:r>
-            <a:endParaRPr lang="en-US" sz="1700" dirty="0"/>
-          </a:p>
-          <a:p>
-            <a:r>
-              <a:rPr lang="en-US" sz="1700" dirty="0">
+              <a:t>NIST Artificial Intelligence Risk Management Framework:.</a:t>
+            </a:r>
+            <a:endParaRPr lang="en-US" sz="2100" dirty="0"/>
+          </a:p>
+          <a:p>
+            <a:r>
+              <a:rPr lang="en-US" sz="2100" dirty="0">
                 <a:solidFill>
                   <a:srgbClr val="17364A"/>
                 </a:solidFill>
@@ -10622,11 +11340,11 @@
               </a:rPr>
               <a:t>NIST Generative AI Profile:.</a:t>
             </a:r>
-            <a:endParaRPr lang="en-US" sz="1700" dirty="0"/>
-          </a:p>
-          <a:p>
-            <a:r>
-              <a:rPr lang="en-US" sz="1700" dirty="0">
+            <a:endParaRPr lang="en-US" sz="2100" dirty="0"/>
+          </a:p>
+          <a:p>
+            <a:r>
+              <a:rPr lang="en-US" sz="2100" dirty="0">
                 <a:solidFill>
                   <a:srgbClr val="17364A"/>
                 </a:solidFill>
@@ -10636,27 +11354,13 @@
               </a:rPr>
               <a:t>CDC Public Health Data Strategy and Data Modernization resources:.</a:t>
             </a:r>
-            <a:endParaRPr lang="en-US" sz="1700" dirty="0"/>
-          </a:p>
-          <a:p>
-            <a:r>
-              <a:rPr lang="en-US" sz="1700" dirty="0">
-                <a:solidFill>
-                  <a:srgbClr val="17364A"/>
-                </a:solidFill>
-                <a:latin typeface="Aptos" pitchFamily="34" charset="0"/>
-                <a:ea typeface="Aptos" pitchFamily="34" charset="-122"/>
-                <a:cs typeface="Aptos" pitchFamily="34" charset="-120"/>
-              </a:rPr>
-              <a:t>OWASP guidance for LLM application security</a:t>
-            </a:r>
-            <a:endParaRPr lang="en-US" sz="1700" dirty="0"/>
-          </a:p>
-        </p:txBody>
-      </p:sp>
-      <p:sp>
-        <p:nvSpPr>
-          <p:cNvPr id="11" name="Shape 9"/>
+            <a:endParaRPr lang="en-US" sz="2100" dirty="0"/>
+          </a:p>
+        </p:txBody>
+      </p:sp>
+      <p:sp>
+        <p:nvSpPr>
+          <p:cNvPr id="12" name="Shape 10"/>
           <p:cNvSpPr/>
           <p:nvPr/>
         </p:nvSpPr>
@@ -10683,14 +11387,14 @@
       </p:sp>
       <p:sp>
         <p:nvSpPr>
-          <p:cNvPr id="12" name="Text 10"/>
+          <p:cNvPr id="13" name="Text 11"/>
           <p:cNvSpPr/>
           <p:nvPr/>
         </p:nvSpPr>
         <p:spPr>
           <a:xfrm>
             <a:off x="8074152" y="1563624"/>
-            <a:ext cx="2825496" cy="201168"/>
+            <a:ext cx="2825496" cy="256032"/>
           </a:xfrm>
           <a:prstGeom prst="rect">
             <a:avLst/>
@@ -10706,7 +11410,7 @@
               <a:buNone/>
             </a:pPr>
             <a:r>
-              <a:rPr lang="en-US" sz="950" b="1" dirty="0">
+              <a:rPr lang="en-US" sz="1300" b="1" dirty="0">
                 <a:solidFill>
                   <a:srgbClr val="0068B7"/>
                 </a:solidFill>
@@ -10716,20 +11420,20 @@
               </a:rPr>
               <a:t>Key idea</a:t>
             </a:r>
-            <a:endParaRPr lang="en-US" sz="950" dirty="0"/>
-          </a:p>
-        </p:txBody>
-      </p:sp>
-      <p:sp>
-        <p:nvSpPr>
-          <p:cNvPr id="13" name="Text 11"/>
-          <p:cNvSpPr/>
-          <p:nvPr/>
-        </p:nvSpPr>
-        <p:spPr>
-          <a:xfrm>
-            <a:off x="8074152" y="1856232"/>
-            <a:ext cx="2825496" cy="1261872"/>
+            <a:endParaRPr lang="en-US" sz="1300" dirty="0"/>
+          </a:p>
+        </p:txBody>
+      </p:sp>
+      <p:sp>
+        <p:nvSpPr>
+          <p:cNvPr id="14" name="Text 12"/>
+          <p:cNvSpPr/>
+          <p:nvPr/>
+        </p:nvSpPr>
+        <p:spPr>
+          <a:xfrm>
+            <a:off x="8074152" y="1920240"/>
+            <a:ext cx="2825496" cy="1188720"/>
           </a:xfrm>
           <a:prstGeom prst="rect">
             <a:avLst/>
@@ -10747,7 +11451,7 @@
               <a:buNone/>
             </a:pPr>
             <a:r>
-              <a:rPr lang="en-US" sz="1250" dirty="0">
+              <a:rPr lang="en-US" sz="1550" dirty="0">
                 <a:solidFill>
                   <a:srgbClr val="17364A"/>
                 </a:solidFill>
@@ -10755,15 +11459,15 @@
                 <a:ea typeface="Aptos" pitchFamily="34" charset="-122"/>
                 <a:cs typeface="Aptos" pitchFamily="34" charset="-120"/>
               </a:rPr>
-              <a:t>NIST Artificial Intelligence Risk Management Framework: https://www.nist.gov/itl/ai-risk-management-framework</a:t>
-            </a:r>
-            <a:endParaRPr lang="en-US" sz="1250" dirty="0"/>
-          </a:p>
-        </p:txBody>
-      </p:sp>
-      <p:sp>
-        <p:nvSpPr>
-          <p:cNvPr id="14" name="Shape 12"/>
+              <a:t>NIST Artificial Intelligence Risk Management Framework:.</a:t>
+            </a:r>
+            <a:endParaRPr lang="en-US" sz="1550" dirty="0"/>
+          </a:p>
+        </p:txBody>
+      </p:sp>
+      <p:sp>
+        <p:nvSpPr>
+          <p:cNvPr id="15" name="Shape 13"/>
           <p:cNvSpPr/>
           <p:nvPr/>
         </p:nvSpPr>
@@ -10790,14 +11494,14 @@
       </p:sp>
       <p:sp>
         <p:nvSpPr>
-          <p:cNvPr id="15" name="Text 13"/>
+          <p:cNvPr id="16" name="Text 14"/>
           <p:cNvSpPr/>
           <p:nvPr/>
         </p:nvSpPr>
         <p:spPr>
           <a:xfrm>
             <a:off x="8074152" y="3666744"/>
-            <a:ext cx="2825496" cy="201168"/>
+            <a:ext cx="2825496" cy="256032"/>
           </a:xfrm>
           <a:prstGeom prst="rect">
             <a:avLst/>
@@ -10813,7 +11517,7 @@
               <a:buNone/>
             </a:pPr>
             <a:r>
-              <a:rPr lang="en-US" sz="950" b="1" dirty="0">
+              <a:rPr lang="en-US" sz="1300" b="1" dirty="0">
                 <a:solidFill>
                   <a:srgbClr val="0068B7"/>
                 </a:solidFill>
@@ -10823,20 +11527,20 @@
               </a:rPr>
               <a:t>Use this for</a:t>
             </a:r>
-            <a:endParaRPr lang="en-US" sz="950" dirty="0"/>
-          </a:p>
-        </p:txBody>
-      </p:sp>
-      <p:sp>
-        <p:nvSpPr>
-          <p:cNvPr id="16" name="Text 14"/>
-          <p:cNvSpPr/>
-          <p:nvPr/>
-        </p:nvSpPr>
-        <p:spPr>
-          <a:xfrm>
-            <a:off x="8074152" y="3959352"/>
-            <a:ext cx="2825496" cy="1170432"/>
+            <a:endParaRPr lang="en-US" sz="1300" dirty="0"/>
+          </a:p>
+        </p:txBody>
+      </p:sp>
+      <p:sp>
+        <p:nvSpPr>
+          <p:cNvPr id="17" name="Text 15"/>
+          <p:cNvSpPr/>
+          <p:nvPr/>
+        </p:nvSpPr>
+        <p:spPr>
+          <a:xfrm>
+            <a:off x="8074152" y="4023360"/>
+            <a:ext cx="2825496" cy="1097280"/>
           </a:xfrm>
           <a:prstGeom prst="rect">
             <a:avLst/>
@@ -10854,7 +11558,7 @@
               <a:buNone/>
             </a:pPr>
             <a:r>
-              <a:rPr lang="en-US" sz="1250" dirty="0">
+              <a:rPr lang="en-US" sz="1550" dirty="0">
                 <a:solidFill>
                   <a:srgbClr val="17364A"/>
                 </a:solidFill>
@@ -10864,7 +11568,7 @@
               </a:rPr>
               <a:t>Connect the concept to public health decisions, safeguards, documentation, or implementation work.</a:t>
             </a:r>
-            <a:endParaRPr lang="en-US" sz="1250" dirty="0"/>
+            <a:endParaRPr lang="en-US" sz="1550" dirty="0"/>
           </a:p>
         </p:txBody>
       </p:sp>
@@ -11061,7 +11765,7 @@
                 <a:ea typeface="Aptos" pitchFamily="34" charset="-122"/>
                 <a:cs typeface="Aptos" pitchFamily="34" charset="-120"/>
               </a:rPr>
-              <a:t>© Paula Soper</a:t>
+              <a:t>Â© Paula Soper</a:t>
             </a:r>
             <a:endParaRPr lang="en-US" sz="800" dirty="0"/>
           </a:p>
@@ -11075,8 +11779,47 @@
         </p:nvSpPr>
         <p:spPr>
           <a:xfrm>
+            <a:off x="11137392" y="6510528"/>
+            <a:ext cx="411480" cy="201168"/>
+          </a:xfrm>
+          <a:prstGeom prst="rect">
+            <a:avLst/>
+          </a:prstGeom>
+          <a:noFill/>
+          <a:ln/>
+        </p:spPr>
+        <p:txBody>
+          <a:bodyPr wrap="square" lIns="0" tIns="0" rIns="0" bIns="0" rtlCol="0" anchor="ctr"/>
+          <a:lstStyle/>
+          <a:p>
+            <a:pPr algn="r" indent="0" marL="0">
+              <a:buNone/>
+            </a:pPr>
+            <a:r>
+              <a:rPr lang="en-US" sz="900" dirty="0">
+                <a:solidFill>
+                  <a:srgbClr val="5F7181"/>
+                </a:solidFill>
+                <a:latin typeface="Aptos" pitchFamily="34" charset="0"/>
+                <a:ea typeface="Aptos" pitchFamily="34" charset="-122"/>
+                <a:cs typeface="Aptos" pitchFamily="34" charset="-120"/>
+              </a:rPr>
+              <a:t>23</a:t>
+            </a:r>
+            <a:endParaRPr lang="en-US" sz="900" dirty="0"/>
+          </a:p>
+        </p:txBody>
+      </p:sp>
+      <p:sp>
+        <p:nvSpPr>
+          <p:cNvPr id="8" name="Text 6"/>
+          <p:cNvSpPr/>
+          <p:nvPr/>
+        </p:nvSpPr>
+        <p:spPr>
+          <a:xfrm>
             <a:off x="640080" y="658368"/>
-            <a:ext cx="10881360" cy="566928"/>
+            <a:ext cx="10881360" cy="713232"/>
           </a:xfrm>
           <a:prstGeom prst="rect">
             <a:avLst/>
@@ -11094,7 +11837,7 @@
               <a:buNone/>
             </a:pPr>
             <a:r>
-              <a:rPr lang="en-US" sz="2700" b="1" dirty="0">
+              <a:rPr lang="en-US" sz="3400" b="1" dirty="0">
                 <a:solidFill>
                   <a:srgbClr val="003A63"/>
                 </a:solidFill>
@@ -11104,20 +11847,20 @@
               </a:rPr>
               <a:t>References and Resources Continued</a:t>
             </a:r>
-            <a:endParaRPr lang="en-US" sz="2700" dirty="0"/>
-          </a:p>
-        </p:txBody>
-      </p:sp>
-      <p:sp>
-        <p:nvSpPr>
-          <p:cNvPr id="8" name="Text 6"/>
-          <p:cNvSpPr/>
-          <p:nvPr/>
-        </p:nvSpPr>
-        <p:spPr>
-          <a:xfrm>
-            <a:off x="868680" y="1417320"/>
-            <a:ext cx="6675120" cy="4434840"/>
+            <a:endParaRPr lang="en-US" sz="3400" dirty="0"/>
+          </a:p>
+        </p:txBody>
+      </p:sp>
+      <p:sp>
+        <p:nvSpPr>
+          <p:cNvPr id="9" name="Text 7"/>
+          <p:cNvSpPr/>
+          <p:nvPr/>
+        </p:nvSpPr>
+        <p:spPr>
+          <a:xfrm>
+            <a:off x="868680" y="1508760"/>
+            <a:ext cx="6537960" cy="4160520"/>
           </a:xfrm>
           <a:prstGeom prst="rect">
             <a:avLst/>
@@ -11132,7 +11875,7 @@
           <a:lstStyle/>
           <a:p>
             <a:r>
-              <a:rPr lang="en-US" sz="1700" dirty="0">
+              <a:rPr lang="en-US" sz="2100" dirty="0">
                 <a:solidFill>
                   <a:srgbClr val="17364A"/>
                 </a:solidFill>
@@ -11142,13 +11885,13 @@
               </a:rPr>
               <a:t>Relevant public health program SOPs, data governance documentation, and implementation plans</a:t>
             </a:r>
-            <a:endParaRPr lang="en-US" sz="1700" dirty="0"/>
-          </a:p>
-        </p:txBody>
-      </p:sp>
-      <p:sp>
-        <p:nvSpPr>
-          <p:cNvPr id="9" name="Shape 7"/>
+            <a:endParaRPr lang="en-US" sz="2100" dirty="0"/>
+          </a:p>
+        </p:txBody>
+      </p:sp>
+      <p:sp>
+        <p:nvSpPr>
+          <p:cNvPr id="10" name="Shape 8"/>
           <p:cNvSpPr/>
           <p:nvPr/>
         </p:nvSpPr>
@@ -11175,14 +11918,14 @@
       </p:sp>
       <p:sp>
         <p:nvSpPr>
-          <p:cNvPr id="10" name="Text 8"/>
+          <p:cNvPr id="11" name="Text 9"/>
           <p:cNvSpPr/>
           <p:nvPr/>
         </p:nvSpPr>
         <p:spPr>
           <a:xfrm>
             <a:off x="8074152" y="1563624"/>
-            <a:ext cx="2825496" cy="201168"/>
+            <a:ext cx="2825496" cy="256032"/>
           </a:xfrm>
           <a:prstGeom prst="rect">
             <a:avLst/>
@@ -11198,7 +11941,7 @@
               <a:buNone/>
             </a:pPr>
             <a:r>
-              <a:rPr lang="en-US" sz="950" b="1" dirty="0">
+              <a:rPr lang="en-US" sz="1300" b="1" dirty="0">
                 <a:solidFill>
                   <a:srgbClr val="0068B7"/>
                 </a:solidFill>
@@ -11208,20 +11951,20 @@
               </a:rPr>
               <a:t>Key idea</a:t>
             </a:r>
-            <a:endParaRPr lang="en-US" sz="950" dirty="0"/>
-          </a:p>
-        </p:txBody>
-      </p:sp>
-      <p:sp>
-        <p:nvSpPr>
-          <p:cNvPr id="11" name="Text 9"/>
-          <p:cNvSpPr/>
-          <p:nvPr/>
-        </p:nvSpPr>
-        <p:spPr>
-          <a:xfrm>
-            <a:off x="8074152" y="1856232"/>
-            <a:ext cx="2825496" cy="1261872"/>
+            <a:endParaRPr lang="en-US" sz="1300" dirty="0"/>
+          </a:p>
+        </p:txBody>
+      </p:sp>
+      <p:sp>
+        <p:nvSpPr>
+          <p:cNvPr id="12" name="Text 10"/>
+          <p:cNvSpPr/>
+          <p:nvPr/>
+        </p:nvSpPr>
+        <p:spPr>
+          <a:xfrm>
+            <a:off x="8074152" y="1920240"/>
+            <a:ext cx="2825496" cy="1188720"/>
           </a:xfrm>
           <a:prstGeom prst="rect">
             <a:avLst/>
@@ -11239,7 +11982,7 @@
               <a:buNone/>
             </a:pPr>
             <a:r>
-              <a:rPr lang="en-US" sz="1250" dirty="0">
+              <a:rPr lang="en-US" sz="1550" dirty="0">
                 <a:solidFill>
                   <a:srgbClr val="17364A"/>
                 </a:solidFill>
@@ -11249,13 +11992,13 @@
               </a:rPr>
               <a:t>Relevant public health program SOPs, data governance documentation, and implementation plans</a:t>
             </a:r>
-            <a:endParaRPr lang="en-US" sz="1250" dirty="0"/>
-          </a:p>
-        </p:txBody>
-      </p:sp>
-      <p:sp>
-        <p:nvSpPr>
-          <p:cNvPr id="12" name="Shape 10"/>
+            <a:endParaRPr lang="en-US" sz="1550" dirty="0"/>
+          </a:p>
+        </p:txBody>
+      </p:sp>
+      <p:sp>
+        <p:nvSpPr>
+          <p:cNvPr id="13" name="Shape 11"/>
           <p:cNvSpPr/>
           <p:nvPr/>
         </p:nvSpPr>
@@ -11282,14 +12025,14 @@
       </p:sp>
       <p:sp>
         <p:nvSpPr>
-          <p:cNvPr id="13" name="Text 11"/>
+          <p:cNvPr id="14" name="Text 12"/>
           <p:cNvSpPr/>
           <p:nvPr/>
         </p:nvSpPr>
         <p:spPr>
           <a:xfrm>
             <a:off x="8074152" y="3666744"/>
-            <a:ext cx="2825496" cy="201168"/>
+            <a:ext cx="2825496" cy="256032"/>
           </a:xfrm>
           <a:prstGeom prst="rect">
             <a:avLst/>
@@ -11305,7 +12048,7 @@
               <a:buNone/>
             </a:pPr>
             <a:r>
-              <a:rPr lang="en-US" sz="950" b="1" dirty="0">
+              <a:rPr lang="en-US" sz="1300" b="1" dirty="0">
                 <a:solidFill>
                   <a:srgbClr val="0068B7"/>
                 </a:solidFill>
@@ -11315,20 +12058,20 @@
               </a:rPr>
               <a:t>Use this for</a:t>
             </a:r>
-            <a:endParaRPr lang="en-US" sz="950" dirty="0"/>
-          </a:p>
-        </p:txBody>
-      </p:sp>
-      <p:sp>
-        <p:nvSpPr>
-          <p:cNvPr id="14" name="Text 12"/>
-          <p:cNvSpPr/>
-          <p:nvPr/>
-        </p:nvSpPr>
-        <p:spPr>
-          <a:xfrm>
-            <a:off x="8074152" y="3959352"/>
-            <a:ext cx="2825496" cy="1170432"/>
+            <a:endParaRPr lang="en-US" sz="1300" dirty="0"/>
+          </a:p>
+        </p:txBody>
+      </p:sp>
+      <p:sp>
+        <p:nvSpPr>
+          <p:cNvPr id="15" name="Text 13"/>
+          <p:cNvSpPr/>
+          <p:nvPr/>
+        </p:nvSpPr>
+        <p:spPr>
+          <a:xfrm>
+            <a:off x="8074152" y="4023360"/>
+            <a:ext cx="2825496" cy="1097280"/>
           </a:xfrm>
           <a:prstGeom prst="rect">
             <a:avLst/>
@@ -11346,7 +12089,7 @@
               <a:buNone/>
             </a:pPr>
             <a:r>
-              <a:rPr lang="en-US" sz="1250" dirty="0">
+              <a:rPr lang="en-US" sz="1550" dirty="0">
                 <a:solidFill>
                   <a:srgbClr val="17364A"/>
                 </a:solidFill>
@@ -11356,7 +12099,7 @@
               </a:rPr>
               <a:t>Connect the concept to public health decisions, safeguards, documentation, or implementation work.</a:t>
             </a:r>
-            <a:endParaRPr lang="en-US" sz="1250" dirty="0"/>
+            <a:endParaRPr lang="en-US" sz="1550" dirty="0"/>
           </a:p>
         </p:txBody>
       </p:sp>
@@ -11553,7 +12296,7 @@
                 <a:ea typeface="Aptos" pitchFamily="34" charset="-122"/>
                 <a:cs typeface="Aptos" pitchFamily="34" charset="-120"/>
               </a:rPr>
-              <a:t>© Paula Soper</a:t>
+              <a:t>Â© Paula Soper</a:t>
             </a:r>
             <a:endParaRPr lang="en-US" sz="800" dirty="0"/>
           </a:p>
@@ -11567,8 +12310,47 @@
         </p:nvSpPr>
         <p:spPr>
           <a:xfrm>
+            <a:off x="11137392" y="6510528"/>
+            <a:ext cx="411480" cy="201168"/>
+          </a:xfrm>
+          <a:prstGeom prst="rect">
+            <a:avLst/>
+          </a:prstGeom>
+          <a:noFill/>
+          <a:ln/>
+        </p:spPr>
+        <p:txBody>
+          <a:bodyPr wrap="square" lIns="0" tIns="0" rIns="0" bIns="0" rtlCol="0" anchor="ctr"/>
+          <a:lstStyle/>
+          <a:p>
+            <a:pPr algn="r" indent="0" marL="0">
+              <a:buNone/>
+            </a:pPr>
+            <a:r>
+              <a:rPr lang="en-US" sz="900" dirty="0">
+                <a:solidFill>
+                  <a:srgbClr val="5F7181"/>
+                </a:solidFill>
+                <a:latin typeface="Aptos" pitchFamily="34" charset="0"/>
+                <a:ea typeface="Aptos" pitchFamily="34" charset="-122"/>
+                <a:cs typeface="Aptos" pitchFamily="34" charset="-120"/>
+              </a:rPr>
+              <a:t>3</a:t>
+            </a:r>
+            <a:endParaRPr lang="en-US" sz="900" dirty="0"/>
+          </a:p>
+        </p:txBody>
+      </p:sp>
+      <p:sp>
+        <p:nvSpPr>
+          <p:cNvPr id="8" name="Text 6"/>
+          <p:cNvSpPr/>
+          <p:nvPr/>
+        </p:nvSpPr>
+        <p:spPr>
+          <a:xfrm>
             <a:off x="640080" y="658368"/>
-            <a:ext cx="10881360" cy="566928"/>
+            <a:ext cx="10881360" cy="713232"/>
           </a:xfrm>
           <a:prstGeom prst="rect">
             <a:avLst/>
@@ -11586,7 +12368,7 @@
               <a:buNone/>
             </a:pPr>
             <a:r>
-              <a:rPr lang="en-US" sz="2700" b="1" dirty="0">
+              <a:rPr lang="en-US" sz="3400" b="1" dirty="0">
                 <a:solidFill>
                   <a:srgbClr val="003A63"/>
                 </a:solidFill>
@@ -11596,20 +12378,20 @@
               </a:rPr>
               <a:t>How this module connects to the playbook</a:t>
             </a:r>
-            <a:endParaRPr lang="en-US" sz="2700" dirty="0"/>
-          </a:p>
-        </p:txBody>
-      </p:sp>
-      <p:sp>
-        <p:nvSpPr>
-          <p:cNvPr id="8" name="Text 6"/>
-          <p:cNvSpPr/>
-          <p:nvPr/>
-        </p:nvSpPr>
-        <p:spPr>
-          <a:xfrm>
-            <a:off x="868680" y="1417320"/>
-            <a:ext cx="6903720" cy="4480560"/>
+            <a:endParaRPr lang="en-US" sz="3400" dirty="0"/>
+          </a:p>
+        </p:txBody>
+      </p:sp>
+      <p:sp>
+        <p:nvSpPr>
+          <p:cNvPr id="9" name="Text 7"/>
+          <p:cNvSpPr/>
+          <p:nvPr/>
+        </p:nvSpPr>
+        <p:spPr>
+          <a:xfrm>
+            <a:off x="868680" y="1508760"/>
+            <a:ext cx="6812280" cy="3977640"/>
           </a:xfrm>
           <a:prstGeom prst="rect">
             <a:avLst/>
@@ -11624,7 +12406,7 @@
           <a:lstStyle/>
           <a:p>
             <a:r>
-              <a:rPr lang="en-US" sz="1540" dirty="0">
+              <a:rPr lang="en-US" sz="1900" dirty="0">
                 <a:solidFill>
                   <a:srgbClr val="17364A"/>
                 </a:solidFill>
@@ -11632,13 +12414,13 @@
                 <a:ea typeface="Aptos" pitchFamily="34" charset="-122"/>
                 <a:cs typeface="Aptos" pitchFamily="34" charset="-120"/>
               </a:rPr>
-              <a:t>Play 11: Build and Deploy AI Solutions - This lesson informs Play 11 by helping learners connect the lesson topic to build and deploy.</a:t>
-            </a:r>
-            <a:endParaRPr lang="en-US" sz="1540" dirty="0"/>
-          </a:p>
-          <a:p>
-            <a:r>
-              <a:rPr lang="en-US" sz="1540" dirty="0">
+              <a:t>Play 11: Build and Deploy AI Solutions - This lesson informs Play 11 by helping learners connect the lesson.</a:t>
+            </a:r>
+            <a:endParaRPr lang="en-US" sz="1900" dirty="0"/>
+          </a:p>
+          <a:p>
+            <a:r>
+              <a:rPr lang="en-US" sz="1900" dirty="0">
                 <a:solidFill>
                   <a:srgbClr val="17364A"/>
                 </a:solidFill>
@@ -11646,13 +12428,13 @@
                 <a:ea typeface="Aptos" pitchFamily="34" charset="-122"/>
                 <a:cs typeface="Aptos" pitchFamily="34" charset="-120"/>
               </a:rPr>
-              <a:t>Play 3: Establish AI Governance - This lesson informs Play 3 by helping learners connect the lesson topic to establish ai governance.</a:t>
-            </a:r>
-            <a:endParaRPr lang="en-US" sz="1540" dirty="0"/>
-          </a:p>
-          <a:p>
-            <a:r>
-              <a:rPr lang="en-US" sz="1540" dirty="0">
+              <a:t>Play 3: Establish AI Governance - This lesson informs Play 3 by helping learners connect the lesson topic to.</a:t>
+            </a:r>
+            <a:endParaRPr lang="en-US" sz="1900" dirty="0"/>
+          </a:p>
+          <a:p>
+            <a:r>
+              <a:rPr lang="en-US" sz="1900" dirty="0">
                 <a:solidFill>
                   <a:srgbClr val="17364A"/>
                 </a:solidFill>
@@ -11660,13 +12442,13 @@
                 <a:ea typeface="Aptos" pitchFamily="34" charset="-122"/>
                 <a:cs typeface="Aptos" pitchFamily="34" charset="-120"/>
               </a:rPr>
-              <a:t>Play 1: Vision &amp; Guardrails - This lesson informs Play 1 by helping learners connect the lesson topic to vision &amp; guardrails work in.</a:t>
-            </a:r>
-            <a:endParaRPr lang="en-US" sz="1540" dirty="0"/>
-          </a:p>
-          <a:p>
-            <a:r>
-              <a:rPr lang="en-US" sz="1540" dirty="0">
+              <a:t>Play 1: Vision &amp; Guardrails - This lesson informs Play 1 by helping learners connect the lesson topic to.</a:t>
+            </a:r>
+            <a:endParaRPr lang="en-US" sz="1900" dirty="0"/>
+          </a:p>
+          <a:p>
+            <a:r>
+              <a:rPr lang="en-US" sz="1900" dirty="0">
                 <a:solidFill>
                   <a:srgbClr val="17364A"/>
                 </a:solidFill>
@@ -11674,15 +12456,15 @@
                 <a:ea typeface="Aptos" pitchFamily="34" charset="-122"/>
                 <a:cs typeface="Aptos" pitchFamily="34" charset="-120"/>
               </a:rPr>
-              <a:t>Play 2: Readiness Assessment - This lesson informs Play 2 by helping learners connect the lesson topic to readiness assessment work.</a:t>
-            </a:r>
-            <a:endParaRPr lang="en-US" sz="1540" dirty="0"/>
-          </a:p>
-        </p:txBody>
-      </p:sp>
-      <p:sp>
-        <p:nvSpPr>
-          <p:cNvPr id="9" name="Shape 7"/>
+              <a:t>Play 2: Readiness Assessment - This lesson informs Play 2 by helping learners connect the lesson topic to.</a:t>
+            </a:r>
+            <a:endParaRPr lang="en-US" sz="1900" dirty="0"/>
+          </a:p>
+        </p:txBody>
+      </p:sp>
+      <p:sp>
+        <p:nvSpPr>
+          <p:cNvPr id="10" name="Shape 8"/>
           <p:cNvSpPr/>
           <p:nvPr/>
         </p:nvSpPr>
@@ -11709,14 +12491,14 @@
       </p:sp>
       <p:sp>
         <p:nvSpPr>
-          <p:cNvPr id="10" name="Text 8"/>
+          <p:cNvPr id="11" name="Text 9"/>
           <p:cNvSpPr/>
           <p:nvPr/>
         </p:nvSpPr>
         <p:spPr>
           <a:xfrm>
             <a:off x="8211312" y="1563624"/>
-            <a:ext cx="2734056" cy="201168"/>
+            <a:ext cx="2734056" cy="256032"/>
           </a:xfrm>
           <a:prstGeom prst="rect">
             <a:avLst/>
@@ -11732,7 +12514,7 @@
               <a:buNone/>
             </a:pPr>
             <a:r>
-              <a:rPr lang="en-US" sz="950" b="1" dirty="0">
+              <a:rPr lang="en-US" sz="1300" b="1" dirty="0">
                 <a:solidFill>
                   <a:srgbClr val="0068B7"/>
                 </a:solidFill>
@@ -11742,20 +12524,20 @@
               </a:rPr>
               <a:t>Apply the lesson</a:t>
             </a:r>
-            <a:endParaRPr lang="en-US" sz="950" dirty="0"/>
-          </a:p>
-        </p:txBody>
-      </p:sp>
-      <p:sp>
-        <p:nvSpPr>
-          <p:cNvPr id="11" name="Text 9"/>
-          <p:cNvSpPr/>
-          <p:nvPr/>
-        </p:nvSpPr>
-        <p:spPr>
-          <a:xfrm>
-            <a:off x="8211312" y="1856232"/>
-            <a:ext cx="2734056" cy="1536192"/>
+            <a:endParaRPr lang="en-US" sz="1300" dirty="0"/>
+          </a:p>
+        </p:txBody>
+      </p:sp>
+      <p:sp>
+        <p:nvSpPr>
+          <p:cNvPr id="12" name="Text 10"/>
+          <p:cNvSpPr/>
+          <p:nvPr/>
+        </p:nvSpPr>
+        <p:spPr>
+          <a:xfrm>
+            <a:off x="8211312" y="1920240"/>
+            <a:ext cx="2734056" cy="1463040"/>
           </a:xfrm>
           <a:prstGeom prst="rect">
             <a:avLst/>
@@ -11773,7 +12555,7 @@
               <a:buNone/>
             </a:pPr>
             <a:r>
-              <a:rPr lang="en-US" sz="1250" dirty="0">
+              <a:rPr lang="en-US" sz="1550" dirty="0">
                 <a:solidFill>
                   <a:srgbClr val="17364A"/>
                 </a:solidFill>
@@ -11783,32 +12565,32 @@
               </a:rPr>
               <a:t>Use the related plays to identify decisions, participants, timing, approvals, and documentation needed for responsible implementation.</a:t>
             </a:r>
-            <a:endParaRPr lang="en-US" sz="1250" dirty="0"/>
-          </a:p>
-        </p:txBody>
-      </p:sp>
-      <p:sp>
-        <p:nvSpPr>
-          <p:cNvPr id="12" name="Shape 10"/>
-          <p:cNvSpPr/>
-          <p:nvPr/>
-        </p:nvSpPr>
-        <p:spPr>
-          <a:xfrm>
-            <a:off x="8046720" y="3794760"/>
-            <a:ext cx="3063240" cy="1508760"/>
+            <a:endParaRPr lang="en-US" sz="1550" dirty="0"/>
+          </a:p>
+        </p:txBody>
+      </p:sp>
+      <p:sp>
+        <p:nvSpPr>
+          <p:cNvPr id="13" name="Shape 11"/>
+          <p:cNvSpPr/>
+          <p:nvPr/>
+        </p:nvSpPr>
+        <p:spPr>
+          <a:xfrm>
+            <a:off x="7818120" y="3977640"/>
+            <a:ext cx="972312" cy="749808"/>
           </a:xfrm>
           <a:prstGeom prst="roundRect">
             <a:avLst>
-              <a:gd name="adj" fmla="val 7273"/>
+              <a:gd name="adj" fmla="val 14634"/>
             </a:avLst>
           </a:prstGeom>
           <a:solidFill>
-            <a:srgbClr val="FFF4D9"/>
+            <a:srgbClr val="0068B7"/>
           </a:solidFill>
           <a:ln w="12700">
             <a:solidFill>
-              <a:srgbClr val="B9D7E6"/>
+              <a:srgbClr val="0068B7"/>
             </a:solidFill>
             <a:prstDash val="solid"/>
           </a:ln>
@@ -11816,81 +12598,256 @@
       </p:sp>
       <p:sp>
         <p:nvSpPr>
-          <p:cNvPr id="13" name="Text 11"/>
-          <p:cNvSpPr/>
-          <p:nvPr/>
-        </p:nvSpPr>
-        <p:spPr>
-          <a:xfrm>
-            <a:off x="8211312" y="3941064"/>
-            <a:ext cx="2734056" cy="201168"/>
-          </a:xfrm>
-          <a:prstGeom prst="rect">
-            <a:avLst/>
-          </a:prstGeom>
-          <a:noFill/>
-          <a:ln/>
-        </p:spPr>
-        <p:txBody>
-          <a:bodyPr wrap="square" lIns="0" tIns="0" rIns="0" bIns="0" rtlCol="0" anchor="ctr"/>
-          <a:lstStyle/>
-          <a:p>
-            <a:pPr indent="0" marL="0">
-              <a:buNone/>
-            </a:pPr>
-            <a:r>
-              <a:rPr lang="en-US" sz="950" b="1" dirty="0">
-                <a:solidFill>
-                  <a:srgbClr val="0068B7"/>
-                </a:solidFill>
-                <a:latin typeface="Aptos" pitchFamily="34" charset="0"/>
-                <a:ea typeface="Aptos" pitchFamily="34" charset="-122"/>
-                <a:cs typeface="Aptos" pitchFamily="34" charset="-120"/>
-              </a:rPr>
-              <a:t>Keep in mind</a:t>
-            </a:r>
-            <a:endParaRPr lang="en-US" sz="950" dirty="0"/>
-          </a:p>
-        </p:txBody>
-      </p:sp>
-      <p:sp>
-        <p:nvSpPr>
           <p:cNvPr id="14" name="Text 12"/>
           <p:cNvSpPr/>
           <p:nvPr/>
         </p:nvSpPr>
         <p:spPr>
           <a:xfrm>
-            <a:off x="8211312" y="4233672"/>
-            <a:ext cx="2734056" cy="941832"/>
-          </a:xfrm>
-          <a:prstGeom prst="rect">
-            <a:avLst/>
-          </a:prstGeom>
-          <a:noFill/>
-          <a:ln/>
-        </p:spPr>
-        <p:txBody>
-          <a:bodyPr wrap="square" lIns="0" tIns="0" rIns="0" bIns="0" rtlCol="0" anchor="t">
+            <a:off x="7891272" y="4169664"/>
+            <a:ext cx="826008" cy="310896"/>
+          </a:xfrm>
+          <a:prstGeom prst="rect">
+            <a:avLst/>
+          </a:prstGeom>
+          <a:noFill/>
+          <a:ln/>
+        </p:spPr>
+        <p:txBody>
+          <a:bodyPr wrap="square" lIns="0" tIns="0" rIns="0" bIns="0" rtlCol="0" anchor="ctr">
             <a:normAutofit/>
           </a:bodyPr>
           <a:lstStyle/>
           <a:p>
-            <a:pPr indent="0" marL="0">
-              <a:buNone/>
-            </a:pPr>
-            <a:r>
-              <a:rPr lang="en-US" sz="1250" dirty="0">
-                <a:solidFill>
-                  <a:srgbClr val="17364A"/>
-                </a:solidFill>
-                <a:latin typeface="Aptos" pitchFamily="34" charset="0"/>
-                <a:ea typeface="Aptos" pitchFamily="34" charset="-122"/>
-                <a:cs typeface="Aptos" pitchFamily="34" charset="-120"/>
-              </a:rPr>
-              <a:t>The playbook connection helps turn training into agency work, not just individual knowledge.</a:t>
-            </a:r>
-            <a:endParaRPr lang="en-US" sz="1250" dirty="0"/>
+            <a:pPr algn="ctr" indent="0" marL="0">
+              <a:buNone/>
+            </a:pPr>
+            <a:r>
+              <a:rPr lang="en-US" sz="1500" b="1" dirty="0">
+                <a:solidFill>
+                  <a:srgbClr val="FFFFFF"/>
+                </a:solidFill>
+                <a:latin typeface="Aptos" pitchFamily="34" charset="0"/>
+                <a:ea typeface="Aptos" pitchFamily="34" charset="-122"/>
+                <a:cs typeface="Aptos" pitchFamily="34" charset="-120"/>
+              </a:rPr>
+              <a:t>Lesson</a:t>
+            </a:r>
+            <a:endParaRPr lang="en-US" sz="1500" dirty="0"/>
+          </a:p>
+        </p:txBody>
+      </p:sp>
+      <p:sp>
+        <p:nvSpPr>
+          <p:cNvPr id="15" name="Text 13"/>
+          <p:cNvSpPr/>
+          <p:nvPr/>
+        </p:nvSpPr>
+        <p:spPr>
+          <a:xfrm>
+            <a:off x="8817864" y="4187952"/>
+            <a:ext cx="201168" cy="256032"/>
+          </a:xfrm>
+          <a:prstGeom prst="rect">
+            <a:avLst/>
+          </a:prstGeom>
+          <a:noFill/>
+          <a:ln/>
+        </p:spPr>
+        <p:txBody>
+          <a:bodyPr wrap="square" lIns="0" tIns="0" rIns="0" bIns="0" rtlCol="0" anchor="ctr"/>
+          <a:lstStyle/>
+          <a:p>
+            <a:pPr algn="ctr" indent="0" marL="0">
+              <a:buNone/>
+            </a:pPr>
+            <a:r>
+              <a:rPr lang="en-US" sz="1800" b="1" dirty="0">
+                <a:solidFill>
+                  <a:srgbClr val="0068B7"/>
+                </a:solidFill>
+                <a:latin typeface="Aptos" pitchFamily="34" charset="0"/>
+                <a:ea typeface="Aptos" pitchFamily="34" charset="-122"/>
+                <a:cs typeface="Aptos" pitchFamily="34" charset="-120"/>
+              </a:rPr>
+              <a:t>â†’</a:t>
+            </a:r>
+            <a:endParaRPr lang="en-US" sz="1800" dirty="0"/>
+          </a:p>
+        </p:txBody>
+      </p:sp>
+      <p:sp>
+        <p:nvSpPr>
+          <p:cNvPr id="16" name="Shape 14"/>
+          <p:cNvSpPr/>
+          <p:nvPr/>
+        </p:nvSpPr>
+        <p:spPr>
+          <a:xfrm>
+            <a:off x="9046464" y="3977640"/>
+            <a:ext cx="972312" cy="749808"/>
+          </a:xfrm>
+          <a:prstGeom prst="roundRect">
+            <a:avLst>
+              <a:gd name="adj" fmla="val 14634"/>
+            </a:avLst>
+          </a:prstGeom>
+          <a:solidFill>
+            <a:srgbClr val="2F8A28"/>
+          </a:solidFill>
+          <a:ln w="12700">
+            <a:solidFill>
+              <a:srgbClr val="2F8A28"/>
+            </a:solidFill>
+            <a:prstDash val="solid"/>
+          </a:ln>
+        </p:spPr>
+      </p:sp>
+      <p:sp>
+        <p:nvSpPr>
+          <p:cNvPr id="17" name="Text 15"/>
+          <p:cNvSpPr/>
+          <p:nvPr/>
+        </p:nvSpPr>
+        <p:spPr>
+          <a:xfrm>
+            <a:off x="9119616" y="4169664"/>
+            <a:ext cx="826008" cy="310896"/>
+          </a:xfrm>
+          <a:prstGeom prst="rect">
+            <a:avLst/>
+          </a:prstGeom>
+          <a:noFill/>
+          <a:ln/>
+        </p:spPr>
+        <p:txBody>
+          <a:bodyPr wrap="square" lIns="0" tIns="0" rIns="0" bIns="0" rtlCol="0" anchor="ctr">
+            <a:normAutofit/>
+          </a:bodyPr>
+          <a:lstStyle/>
+          <a:p>
+            <a:pPr algn="ctr" indent="0" marL="0">
+              <a:buNone/>
+            </a:pPr>
+            <a:r>
+              <a:rPr lang="en-US" sz="1500" b="1" dirty="0">
+                <a:solidFill>
+                  <a:srgbClr val="FFFFFF"/>
+                </a:solidFill>
+                <a:latin typeface="Aptos" pitchFamily="34" charset="0"/>
+                <a:ea typeface="Aptos" pitchFamily="34" charset="-122"/>
+                <a:cs typeface="Aptos" pitchFamily="34" charset="-120"/>
+              </a:rPr>
+              <a:t>Plays</a:t>
+            </a:r>
+            <a:endParaRPr lang="en-US" sz="1500" dirty="0"/>
+          </a:p>
+        </p:txBody>
+      </p:sp>
+      <p:sp>
+        <p:nvSpPr>
+          <p:cNvPr id="18" name="Text 16"/>
+          <p:cNvSpPr/>
+          <p:nvPr/>
+        </p:nvSpPr>
+        <p:spPr>
+          <a:xfrm>
+            <a:off x="10046208" y="4187952"/>
+            <a:ext cx="201168" cy="256032"/>
+          </a:xfrm>
+          <a:prstGeom prst="rect">
+            <a:avLst/>
+          </a:prstGeom>
+          <a:noFill/>
+          <a:ln/>
+        </p:spPr>
+        <p:txBody>
+          <a:bodyPr wrap="square" lIns="0" tIns="0" rIns="0" bIns="0" rtlCol="0" anchor="ctr"/>
+          <a:lstStyle/>
+          <a:p>
+            <a:pPr algn="ctr" indent="0" marL="0">
+              <a:buNone/>
+            </a:pPr>
+            <a:r>
+              <a:rPr lang="en-US" sz="1800" b="1" dirty="0">
+                <a:solidFill>
+                  <a:srgbClr val="0068B7"/>
+                </a:solidFill>
+                <a:latin typeface="Aptos" pitchFamily="34" charset="0"/>
+                <a:ea typeface="Aptos" pitchFamily="34" charset="-122"/>
+                <a:cs typeface="Aptos" pitchFamily="34" charset="-120"/>
+              </a:rPr>
+              <a:t>â†’</a:t>
+            </a:r>
+            <a:endParaRPr lang="en-US" sz="1800" dirty="0"/>
+          </a:p>
+        </p:txBody>
+      </p:sp>
+      <p:sp>
+        <p:nvSpPr>
+          <p:cNvPr id="19" name="Shape 17"/>
+          <p:cNvSpPr/>
+          <p:nvPr/>
+        </p:nvSpPr>
+        <p:spPr>
+          <a:xfrm>
+            <a:off x="10274808" y="3977640"/>
+            <a:ext cx="972312" cy="749808"/>
+          </a:xfrm>
+          <a:prstGeom prst="roundRect">
+            <a:avLst>
+              <a:gd name="adj" fmla="val 14634"/>
+            </a:avLst>
+          </a:prstGeom>
+          <a:solidFill>
+            <a:srgbClr val="6A4CA3"/>
+          </a:solidFill>
+          <a:ln w="12700">
+            <a:solidFill>
+              <a:srgbClr val="6A4CA3"/>
+            </a:solidFill>
+            <a:prstDash val="solid"/>
+          </a:ln>
+        </p:spPr>
+      </p:sp>
+      <p:sp>
+        <p:nvSpPr>
+          <p:cNvPr id="20" name="Text 18"/>
+          <p:cNvSpPr/>
+          <p:nvPr/>
+        </p:nvSpPr>
+        <p:spPr>
+          <a:xfrm>
+            <a:off x="10347960" y="4169664"/>
+            <a:ext cx="826008" cy="310896"/>
+          </a:xfrm>
+          <a:prstGeom prst="rect">
+            <a:avLst/>
+          </a:prstGeom>
+          <a:noFill/>
+          <a:ln/>
+        </p:spPr>
+        <p:txBody>
+          <a:bodyPr wrap="square" lIns="0" tIns="0" rIns="0" bIns="0" rtlCol="0" anchor="ctr">
+            <a:normAutofit/>
+          </a:bodyPr>
+          <a:lstStyle/>
+          <a:p>
+            <a:pPr algn="ctr" indent="0" marL="0">
+              <a:buNone/>
+            </a:pPr>
+            <a:r>
+              <a:rPr lang="en-US" sz="1500" b="1" dirty="0">
+                <a:solidFill>
+                  <a:srgbClr val="FFFFFF"/>
+                </a:solidFill>
+                <a:latin typeface="Aptos" pitchFamily="34" charset="0"/>
+                <a:ea typeface="Aptos" pitchFamily="34" charset="-122"/>
+                <a:cs typeface="Aptos" pitchFamily="34" charset="-120"/>
+              </a:rPr>
+              <a:t>Action</a:t>
+            </a:r>
+            <a:endParaRPr lang="en-US" sz="1500" dirty="0"/>
           </a:p>
         </p:txBody>
       </p:sp>
@@ -12087,7 +13044,7 @@
                 <a:ea typeface="Aptos" pitchFamily="34" charset="-122"/>
                 <a:cs typeface="Aptos" pitchFamily="34" charset="-120"/>
               </a:rPr>
-              <a:t>© Paula Soper</a:t>
+              <a:t>Â© Paula Soper</a:t>
             </a:r>
             <a:endParaRPr lang="en-US" sz="800" dirty="0"/>
           </a:p>
@@ -12101,8 +13058,47 @@
         </p:nvSpPr>
         <p:spPr>
           <a:xfrm>
+            <a:off x="11137392" y="6510528"/>
+            <a:ext cx="411480" cy="201168"/>
+          </a:xfrm>
+          <a:prstGeom prst="rect">
+            <a:avLst/>
+          </a:prstGeom>
+          <a:noFill/>
+          <a:ln/>
+        </p:spPr>
+        <p:txBody>
+          <a:bodyPr wrap="square" lIns="0" tIns="0" rIns="0" bIns="0" rtlCol="0" anchor="ctr"/>
+          <a:lstStyle/>
+          <a:p>
+            <a:pPr algn="r" indent="0" marL="0">
+              <a:buNone/>
+            </a:pPr>
+            <a:r>
+              <a:rPr lang="en-US" sz="900" dirty="0">
+                <a:solidFill>
+                  <a:srgbClr val="5F7181"/>
+                </a:solidFill>
+                <a:latin typeface="Aptos" pitchFamily="34" charset="0"/>
+                <a:ea typeface="Aptos" pitchFamily="34" charset="-122"/>
+                <a:cs typeface="Aptos" pitchFamily="34" charset="-120"/>
+              </a:rPr>
+              <a:t>4</a:t>
+            </a:r>
+            <a:endParaRPr lang="en-US" sz="900" dirty="0"/>
+          </a:p>
+        </p:txBody>
+      </p:sp>
+      <p:sp>
+        <p:nvSpPr>
+          <p:cNvPr id="8" name="Text 6"/>
+          <p:cNvSpPr/>
+          <p:nvPr/>
+        </p:nvSpPr>
+        <p:spPr>
+          <a:xfrm>
             <a:off x="640080" y="658368"/>
-            <a:ext cx="10881360" cy="566928"/>
+            <a:ext cx="10881360" cy="713232"/>
           </a:xfrm>
           <a:prstGeom prst="rect">
             <a:avLst/>
@@ -12120,7 +13116,7 @@
               <a:buNone/>
             </a:pPr>
             <a:r>
-              <a:rPr lang="en-US" sz="2700" b="1" dirty="0">
+              <a:rPr lang="en-US" sz="3400" b="1" dirty="0">
                 <a:solidFill>
                   <a:srgbClr val="003A63"/>
                 </a:solidFill>
@@ -12130,20 +13126,20 @@
               </a:rPr>
               <a:t>Related toolkit resources</a:t>
             </a:r>
-            <a:endParaRPr lang="en-US" sz="2700" dirty="0"/>
-          </a:p>
-        </p:txBody>
-      </p:sp>
-      <p:sp>
-        <p:nvSpPr>
-          <p:cNvPr id="8" name="Text 6"/>
-          <p:cNvSpPr/>
-          <p:nvPr/>
-        </p:nvSpPr>
-        <p:spPr>
-          <a:xfrm>
-            <a:off x="868680" y="1417320"/>
-            <a:ext cx="6903720" cy="4480560"/>
+            <a:endParaRPr lang="en-US" sz="3400" dirty="0"/>
+          </a:p>
+        </p:txBody>
+      </p:sp>
+      <p:sp>
+        <p:nvSpPr>
+          <p:cNvPr id="9" name="Text 7"/>
+          <p:cNvSpPr/>
+          <p:nvPr/>
+        </p:nvSpPr>
+        <p:spPr>
+          <a:xfrm>
+            <a:off x="868680" y="1508760"/>
+            <a:ext cx="6812280" cy="3977640"/>
           </a:xfrm>
           <a:prstGeom prst="rect">
             <a:avLst/>
@@ -12158,7 +13154,7 @@
           <a:lstStyle/>
           <a:p>
             <a:r>
-              <a:rPr lang="en-US" sz="1460" dirty="0">
+              <a:rPr lang="en-US" sz="1850" dirty="0">
                 <a:solidFill>
                   <a:srgbClr val="17364A"/>
                 </a:solidFill>
@@ -12166,13 +13162,13 @@
                 <a:ea typeface="Aptos" pitchFamily="34" charset="-122"/>
                 <a:cs typeface="Aptos" pitchFamily="34" charset="-120"/>
               </a:rPr>
-              <a:t>Tool 4: AI Policy Landscape Scan (Worksheet) - Use AI Policy Landscape Scan to translate this lesson into a documented public health.</a:t>
-            </a:r>
-            <a:endParaRPr lang="en-US" sz="1460" dirty="0"/>
-          </a:p>
-          <a:p>
-            <a:r>
-              <a:rPr lang="en-US" sz="1460" dirty="0">
+              <a:t>Tool 4: AI Policy Landscape Scan (Worksheet) - Use AI Policy Landscape Scan to translate this lesson into a.</a:t>
+            </a:r>
+            <a:endParaRPr lang="en-US" sz="1850" dirty="0"/>
+          </a:p>
+          <a:p>
+            <a:r>
+              <a:rPr lang="en-US" sz="1850" dirty="0">
                 <a:solidFill>
                   <a:srgbClr val="17364A"/>
                 </a:solidFill>
@@ -12180,13 +13176,13 @@
                 <a:ea typeface="Aptos" pitchFamily="34" charset="-122"/>
                 <a:cs typeface="Aptos" pitchFamily="34" charset="-120"/>
               </a:rPr>
-              <a:t>Tool 5: AI Environmental and Resource Impact Review (Checklist) - Use AI Environmental and Resource Impact Review to translate this.</a:t>
-            </a:r>
-            <a:endParaRPr lang="en-US" sz="1460" dirty="0"/>
-          </a:p>
-          <a:p>
-            <a:r>
-              <a:rPr lang="en-US" sz="1460" dirty="0">
+              <a:t>Tool 5: AI Environmental and Resource Impact Review (Checklist) - Use AI Environmental and Resource Impact.</a:t>
+            </a:r>
+            <a:endParaRPr lang="en-US" sz="1850" dirty="0"/>
+          </a:p>
+          <a:p>
+            <a:r>
+              <a:rPr lang="en-US" sz="1850" dirty="0">
                 <a:solidFill>
                   <a:srgbClr val="17364A"/>
                 </a:solidFill>
@@ -12194,13 +13190,13 @@
                 <a:ea typeface="Aptos" pitchFamily="34" charset="-122"/>
                 <a:cs typeface="Aptos" pitchFamily="34" charset="-120"/>
               </a:rPr>
-              <a:t>Tool 6: Human-Centered AI Decision Rule Checklist (Checklist) - Use this tool to complete or strengthen the practical exercise for.</a:t>
-            </a:r>
-            <a:endParaRPr lang="en-US" sz="1460" dirty="0"/>
-          </a:p>
-          <a:p>
-            <a:r>
-              <a:rPr lang="en-US" sz="1460" dirty="0">
+              <a:t>Tool 6: Human-Centered AI Decision Rule Checklist (Checklist) - Use this tool to complete or strengthen the.</a:t>
+            </a:r>
+            <a:endParaRPr lang="en-US" sz="1850" dirty="0"/>
+          </a:p>
+          <a:p>
+            <a:r>
+              <a:rPr lang="en-US" sz="1850" dirty="0">
                 <a:solidFill>
                   <a:srgbClr val="17364A"/>
                 </a:solidFill>
@@ -12208,29 +13204,15 @@
                 <a:ea typeface="Aptos" pitchFamily="34" charset="-122"/>
                 <a:cs typeface="Aptos" pitchFamily="34" charset="-120"/>
               </a:rPr>
-              <a:t>Tool 8: AI Project Charter (Planning) - Use AI Project Charter to translate this lesson into a documented public health AI planning,.</a:t>
-            </a:r>
-            <a:endParaRPr lang="en-US" sz="1460" dirty="0"/>
-          </a:p>
-          <a:p>
-            <a:r>
-              <a:rPr lang="en-US" sz="1460" dirty="0">
-                <a:solidFill>
-                  <a:srgbClr val="17364A"/>
-                </a:solidFill>
-                <a:latin typeface="Aptos" pitchFamily="34" charset="0"/>
-                <a:ea typeface="Aptos" pitchFamily="34" charset="-122"/>
-                <a:cs typeface="Aptos" pitchFamily="34" charset="-120"/>
-              </a:rPr>
-              <a:t>Tool 9: Data Quality Assessment Checklist (Checklist) - Use this tool to complete or strengthen the practical exercise for the module.</a:t>
-            </a:r>
-            <a:endParaRPr lang="en-US" sz="1460" dirty="0"/>
-          </a:p>
-        </p:txBody>
-      </p:sp>
-      <p:sp>
-        <p:nvSpPr>
-          <p:cNvPr id="9" name="Shape 7"/>
+              <a:t>Tool 8: AI Project Charter (Planning) - Use AI Project Charter to translate this lesson into a documented.</a:t>
+            </a:r>
+            <a:endParaRPr lang="en-US" sz="1850" dirty="0"/>
+          </a:p>
+        </p:txBody>
+      </p:sp>
+      <p:sp>
+        <p:nvSpPr>
+          <p:cNvPr id="10" name="Shape 8"/>
           <p:cNvSpPr/>
           <p:nvPr/>
         </p:nvSpPr>
@@ -12257,14 +13239,14 @@
       </p:sp>
       <p:sp>
         <p:nvSpPr>
-          <p:cNvPr id="10" name="Text 8"/>
+          <p:cNvPr id="11" name="Text 9"/>
           <p:cNvSpPr/>
           <p:nvPr/>
         </p:nvSpPr>
         <p:spPr>
           <a:xfrm>
             <a:off x="8211312" y="1563624"/>
-            <a:ext cx="2734056" cy="201168"/>
+            <a:ext cx="2734056" cy="256032"/>
           </a:xfrm>
           <a:prstGeom prst="rect">
             <a:avLst/>
@@ -12280,7 +13262,7 @@
               <a:buNone/>
             </a:pPr>
             <a:r>
-              <a:rPr lang="en-US" sz="950" b="1" dirty="0">
+              <a:rPr lang="en-US" sz="1300" b="1" dirty="0">
                 <a:solidFill>
                   <a:srgbClr val="0068B7"/>
                 </a:solidFill>
@@ -12290,20 +13272,20 @@
               </a:rPr>
               <a:t>Use the tools</a:t>
             </a:r>
-            <a:endParaRPr lang="en-US" sz="950" dirty="0"/>
-          </a:p>
-        </p:txBody>
-      </p:sp>
-      <p:sp>
-        <p:nvSpPr>
-          <p:cNvPr id="11" name="Text 9"/>
-          <p:cNvSpPr/>
-          <p:nvPr/>
-        </p:nvSpPr>
-        <p:spPr>
-          <a:xfrm>
-            <a:off x="8211312" y="1856232"/>
-            <a:ext cx="2734056" cy="1536192"/>
+            <a:endParaRPr lang="en-US" sz="1300" dirty="0"/>
+          </a:p>
+        </p:txBody>
+      </p:sp>
+      <p:sp>
+        <p:nvSpPr>
+          <p:cNvPr id="12" name="Text 10"/>
+          <p:cNvSpPr/>
+          <p:nvPr/>
+        </p:nvSpPr>
+        <p:spPr>
+          <a:xfrm>
+            <a:off x="8211312" y="1920240"/>
+            <a:ext cx="2734056" cy="1463040"/>
           </a:xfrm>
           <a:prstGeom prst="rect">
             <a:avLst/>
@@ -12321,7 +13303,7 @@
               <a:buNone/>
             </a:pPr>
             <a:r>
-              <a:rPr lang="en-US" sz="1250" dirty="0">
+              <a:rPr lang="en-US" sz="1550" dirty="0">
                 <a:solidFill>
                   <a:srgbClr val="17364A"/>
                 </a:solidFill>
@@ -12331,32 +13313,32 @@
               </a:rPr>
               <a:t>Use linked tools when your department needs a structured worksheet, template, checklist, review process, or documentation artifact.</a:t>
             </a:r>
-            <a:endParaRPr lang="en-US" sz="1250" dirty="0"/>
-          </a:p>
-        </p:txBody>
-      </p:sp>
-      <p:sp>
-        <p:nvSpPr>
-          <p:cNvPr id="12" name="Shape 10"/>
-          <p:cNvSpPr/>
-          <p:nvPr/>
-        </p:nvSpPr>
-        <p:spPr>
-          <a:xfrm>
-            <a:off x="8046720" y="3794760"/>
-            <a:ext cx="3063240" cy="1508760"/>
+            <a:endParaRPr lang="en-US" sz="1550" dirty="0"/>
+          </a:p>
+        </p:txBody>
+      </p:sp>
+      <p:sp>
+        <p:nvSpPr>
+          <p:cNvPr id="13" name="Shape 11"/>
+          <p:cNvSpPr/>
+          <p:nvPr/>
+        </p:nvSpPr>
+        <p:spPr>
+          <a:xfrm>
+            <a:off x="7818120" y="3977640"/>
+            <a:ext cx="972312" cy="749808"/>
           </a:xfrm>
           <a:prstGeom prst="roundRect">
             <a:avLst>
-              <a:gd name="adj" fmla="val 7273"/>
+              <a:gd name="adj" fmla="val 14634"/>
             </a:avLst>
           </a:prstGeom>
           <a:solidFill>
-            <a:srgbClr val="EEF8ED"/>
+            <a:srgbClr val="0068B7"/>
           </a:solidFill>
           <a:ln w="12700">
             <a:solidFill>
-              <a:srgbClr val="B9D7E6"/>
+              <a:srgbClr val="0068B7"/>
             </a:solidFill>
             <a:prstDash val="solid"/>
           </a:ln>
@@ -12364,81 +13346,256 @@
       </p:sp>
       <p:sp>
         <p:nvSpPr>
-          <p:cNvPr id="13" name="Text 11"/>
-          <p:cNvSpPr/>
-          <p:nvPr/>
-        </p:nvSpPr>
-        <p:spPr>
-          <a:xfrm>
-            <a:off x="8211312" y="3941064"/>
-            <a:ext cx="2734056" cy="201168"/>
-          </a:xfrm>
-          <a:prstGeom prst="rect">
-            <a:avLst/>
-          </a:prstGeom>
-          <a:noFill/>
-          <a:ln/>
-        </p:spPr>
-        <p:txBody>
-          <a:bodyPr wrap="square" lIns="0" tIns="0" rIns="0" bIns="0" rtlCol="0" anchor="ctr"/>
-          <a:lstStyle/>
-          <a:p>
-            <a:pPr indent="0" marL="0">
-              <a:buNone/>
-            </a:pPr>
-            <a:r>
-              <a:rPr lang="en-US" sz="950" b="1" dirty="0">
-                <a:solidFill>
-                  <a:srgbClr val="0068B7"/>
-                </a:solidFill>
-                <a:latin typeface="Aptos" pitchFamily="34" charset="0"/>
-                <a:ea typeface="Aptos" pitchFamily="34" charset="-122"/>
-                <a:cs typeface="Aptos" pitchFamily="34" charset="-120"/>
-              </a:rPr>
-              <a:t>Avoid duplication</a:t>
-            </a:r>
-            <a:endParaRPr lang="en-US" sz="950" dirty="0"/>
-          </a:p>
-        </p:txBody>
-      </p:sp>
-      <p:sp>
-        <p:nvSpPr>
           <p:cNvPr id="14" name="Text 12"/>
           <p:cNvSpPr/>
           <p:nvPr/>
         </p:nvSpPr>
         <p:spPr>
           <a:xfrm>
-            <a:off x="8211312" y="4233672"/>
-            <a:ext cx="2734056" cy="941832"/>
-          </a:xfrm>
-          <a:prstGeom prst="rect">
-            <a:avLst/>
-          </a:prstGeom>
-          <a:noFill/>
-          <a:ln/>
-        </p:spPr>
-        <p:txBody>
-          <a:bodyPr wrap="square" lIns="0" tIns="0" rIns="0" bIns="0" rtlCol="0" anchor="t">
+            <a:off x="7891272" y="4169664"/>
+            <a:ext cx="826008" cy="310896"/>
+          </a:xfrm>
+          <a:prstGeom prst="rect">
+            <a:avLst/>
+          </a:prstGeom>
+          <a:noFill/>
+          <a:ln/>
+        </p:spPr>
+        <p:txBody>
+          <a:bodyPr wrap="square" lIns="0" tIns="0" rIns="0" bIns="0" rtlCol="0" anchor="ctr">
             <a:normAutofit/>
           </a:bodyPr>
           <a:lstStyle/>
           <a:p>
-            <a:pPr indent="0" marL="0">
-              <a:buNone/>
-            </a:pPr>
-            <a:r>
-              <a:rPr lang="en-US" sz="1250" dirty="0">
-                <a:solidFill>
-                  <a:srgbClr val="17364A"/>
-                </a:solidFill>
-                <a:latin typeface="Aptos" pitchFamily="34" charset="0"/>
-                <a:ea typeface="Aptos" pitchFamily="34" charset="-122"/>
-                <a:cs typeface="Aptos" pitchFamily="34" charset="-120"/>
-              </a:rPr>
-              <a:t>If your department already has a strong equivalent tool, adapt or use the existing process instead of recreating it.</a:t>
-            </a:r>
-            <a:endParaRPr lang="en-US" sz="1250" dirty="0"/>
+            <a:pPr algn="ctr" indent="0" marL="0">
+              <a:buNone/>
+            </a:pPr>
+            <a:r>
+              <a:rPr lang="en-US" sz="1500" b="1" dirty="0">
+                <a:solidFill>
+                  <a:srgbClr val="FFFFFF"/>
+                </a:solidFill>
+                <a:latin typeface="Aptos" pitchFamily="34" charset="0"/>
+                <a:ea typeface="Aptos" pitchFamily="34" charset="-122"/>
+                <a:cs typeface="Aptos" pitchFamily="34" charset="-120"/>
+              </a:rPr>
+              <a:t>Concept</a:t>
+            </a:r>
+            <a:endParaRPr lang="en-US" sz="1500" dirty="0"/>
+          </a:p>
+        </p:txBody>
+      </p:sp>
+      <p:sp>
+        <p:nvSpPr>
+          <p:cNvPr id="15" name="Text 13"/>
+          <p:cNvSpPr/>
+          <p:nvPr/>
+        </p:nvSpPr>
+        <p:spPr>
+          <a:xfrm>
+            <a:off x="8817864" y="4187952"/>
+            <a:ext cx="201168" cy="256032"/>
+          </a:xfrm>
+          <a:prstGeom prst="rect">
+            <a:avLst/>
+          </a:prstGeom>
+          <a:noFill/>
+          <a:ln/>
+        </p:spPr>
+        <p:txBody>
+          <a:bodyPr wrap="square" lIns="0" tIns="0" rIns="0" bIns="0" rtlCol="0" anchor="ctr"/>
+          <a:lstStyle/>
+          <a:p>
+            <a:pPr algn="ctr" indent="0" marL="0">
+              <a:buNone/>
+            </a:pPr>
+            <a:r>
+              <a:rPr lang="en-US" sz="1800" b="1" dirty="0">
+                <a:solidFill>
+                  <a:srgbClr val="0068B7"/>
+                </a:solidFill>
+                <a:latin typeface="Aptos" pitchFamily="34" charset="0"/>
+                <a:ea typeface="Aptos" pitchFamily="34" charset="-122"/>
+                <a:cs typeface="Aptos" pitchFamily="34" charset="-120"/>
+              </a:rPr>
+              <a:t>â†’</a:t>
+            </a:r>
+            <a:endParaRPr lang="en-US" sz="1800" dirty="0"/>
+          </a:p>
+        </p:txBody>
+      </p:sp>
+      <p:sp>
+        <p:nvSpPr>
+          <p:cNvPr id="16" name="Shape 14"/>
+          <p:cNvSpPr/>
+          <p:nvPr/>
+        </p:nvSpPr>
+        <p:spPr>
+          <a:xfrm>
+            <a:off x="9046464" y="3977640"/>
+            <a:ext cx="972312" cy="749808"/>
+          </a:xfrm>
+          <a:prstGeom prst="roundRect">
+            <a:avLst>
+              <a:gd name="adj" fmla="val 14634"/>
+            </a:avLst>
+          </a:prstGeom>
+          <a:solidFill>
+            <a:srgbClr val="2F8A28"/>
+          </a:solidFill>
+          <a:ln w="12700">
+            <a:solidFill>
+              <a:srgbClr val="2F8A28"/>
+            </a:solidFill>
+            <a:prstDash val="solid"/>
+          </a:ln>
+        </p:spPr>
+      </p:sp>
+      <p:sp>
+        <p:nvSpPr>
+          <p:cNvPr id="17" name="Text 15"/>
+          <p:cNvSpPr/>
+          <p:nvPr/>
+        </p:nvSpPr>
+        <p:spPr>
+          <a:xfrm>
+            <a:off x="9119616" y="4169664"/>
+            <a:ext cx="826008" cy="310896"/>
+          </a:xfrm>
+          <a:prstGeom prst="rect">
+            <a:avLst/>
+          </a:prstGeom>
+          <a:noFill/>
+          <a:ln/>
+        </p:spPr>
+        <p:txBody>
+          <a:bodyPr wrap="square" lIns="0" tIns="0" rIns="0" bIns="0" rtlCol="0" anchor="ctr">
+            <a:normAutofit/>
+          </a:bodyPr>
+          <a:lstStyle/>
+          <a:p>
+            <a:pPr algn="ctr" indent="0" marL="0">
+              <a:buNone/>
+            </a:pPr>
+            <a:r>
+              <a:rPr lang="en-US" sz="1500" b="1" dirty="0">
+                <a:solidFill>
+                  <a:srgbClr val="FFFFFF"/>
+                </a:solidFill>
+                <a:latin typeface="Aptos" pitchFamily="34" charset="0"/>
+                <a:ea typeface="Aptos" pitchFamily="34" charset="-122"/>
+                <a:cs typeface="Aptos" pitchFamily="34" charset="-120"/>
+              </a:rPr>
+              <a:t>Tool</a:t>
+            </a:r>
+            <a:endParaRPr lang="en-US" sz="1500" dirty="0"/>
+          </a:p>
+        </p:txBody>
+      </p:sp>
+      <p:sp>
+        <p:nvSpPr>
+          <p:cNvPr id="18" name="Text 16"/>
+          <p:cNvSpPr/>
+          <p:nvPr/>
+        </p:nvSpPr>
+        <p:spPr>
+          <a:xfrm>
+            <a:off x="10046208" y="4187952"/>
+            <a:ext cx="201168" cy="256032"/>
+          </a:xfrm>
+          <a:prstGeom prst="rect">
+            <a:avLst/>
+          </a:prstGeom>
+          <a:noFill/>
+          <a:ln/>
+        </p:spPr>
+        <p:txBody>
+          <a:bodyPr wrap="square" lIns="0" tIns="0" rIns="0" bIns="0" rtlCol="0" anchor="ctr"/>
+          <a:lstStyle/>
+          <a:p>
+            <a:pPr algn="ctr" indent="0" marL="0">
+              <a:buNone/>
+            </a:pPr>
+            <a:r>
+              <a:rPr lang="en-US" sz="1800" b="1" dirty="0">
+                <a:solidFill>
+                  <a:srgbClr val="0068B7"/>
+                </a:solidFill>
+                <a:latin typeface="Aptos" pitchFamily="34" charset="0"/>
+                <a:ea typeface="Aptos" pitchFamily="34" charset="-122"/>
+                <a:cs typeface="Aptos" pitchFamily="34" charset="-120"/>
+              </a:rPr>
+              <a:t>â†’</a:t>
+            </a:r>
+            <a:endParaRPr lang="en-US" sz="1800" dirty="0"/>
+          </a:p>
+        </p:txBody>
+      </p:sp>
+      <p:sp>
+        <p:nvSpPr>
+          <p:cNvPr id="19" name="Shape 17"/>
+          <p:cNvSpPr/>
+          <p:nvPr/>
+        </p:nvSpPr>
+        <p:spPr>
+          <a:xfrm>
+            <a:off x="10274808" y="3977640"/>
+            <a:ext cx="972312" cy="749808"/>
+          </a:xfrm>
+          <a:prstGeom prst="roundRect">
+            <a:avLst>
+              <a:gd name="adj" fmla="val 14634"/>
+            </a:avLst>
+          </a:prstGeom>
+          <a:solidFill>
+            <a:srgbClr val="D69A2D"/>
+          </a:solidFill>
+          <a:ln w="12700">
+            <a:solidFill>
+              <a:srgbClr val="D69A2D"/>
+            </a:solidFill>
+            <a:prstDash val="solid"/>
+          </a:ln>
+        </p:spPr>
+      </p:sp>
+      <p:sp>
+        <p:nvSpPr>
+          <p:cNvPr id="20" name="Text 18"/>
+          <p:cNvSpPr/>
+          <p:nvPr/>
+        </p:nvSpPr>
+        <p:spPr>
+          <a:xfrm>
+            <a:off x="10347960" y="4169664"/>
+            <a:ext cx="826008" cy="310896"/>
+          </a:xfrm>
+          <a:prstGeom prst="rect">
+            <a:avLst/>
+          </a:prstGeom>
+          <a:noFill/>
+          <a:ln/>
+        </p:spPr>
+        <p:txBody>
+          <a:bodyPr wrap="square" lIns="0" tIns="0" rIns="0" bIns="0" rtlCol="0" anchor="ctr">
+            <a:normAutofit/>
+          </a:bodyPr>
+          <a:lstStyle/>
+          <a:p>
+            <a:pPr algn="ctr" indent="0" marL="0">
+              <a:buNone/>
+            </a:pPr>
+            <a:r>
+              <a:rPr lang="en-US" sz="1500" b="1" dirty="0">
+                <a:solidFill>
+                  <a:srgbClr val="FFFFFF"/>
+                </a:solidFill>
+                <a:latin typeface="Aptos" pitchFamily="34" charset="0"/>
+                <a:ea typeface="Aptos" pitchFamily="34" charset="-122"/>
+                <a:cs typeface="Aptos" pitchFamily="34" charset="-120"/>
+              </a:rPr>
+              <a:t>Artifact</a:t>
+            </a:r>
+            <a:endParaRPr lang="en-US" sz="1500" dirty="0"/>
           </a:p>
         </p:txBody>
       </p:sp>
@@ -12635,7 +13792,7 @@
                 <a:ea typeface="Aptos" pitchFamily="34" charset="-122"/>
                 <a:cs typeface="Aptos" pitchFamily="34" charset="-120"/>
               </a:rPr>
-              <a:t>© Paula Soper</a:t>
+              <a:t>Â© Paula Soper</a:t>
             </a:r>
             <a:endParaRPr lang="en-US" sz="800" dirty="0"/>
           </a:p>
@@ -12643,7 +13800,46 @@
       </p:sp>
       <p:sp>
         <p:nvSpPr>
-          <p:cNvPr id="7" name="Shape 5"/>
+          <p:cNvPr id="7" name="Text 5"/>
+          <p:cNvSpPr/>
+          <p:nvPr/>
+        </p:nvSpPr>
+        <p:spPr>
+          <a:xfrm>
+            <a:off x="11137392" y="6510528"/>
+            <a:ext cx="411480" cy="201168"/>
+          </a:xfrm>
+          <a:prstGeom prst="rect">
+            <a:avLst/>
+          </a:prstGeom>
+          <a:noFill/>
+          <a:ln/>
+        </p:spPr>
+        <p:txBody>
+          <a:bodyPr wrap="square" lIns="0" tIns="0" rIns="0" bIns="0" rtlCol="0" anchor="ctr"/>
+          <a:lstStyle/>
+          <a:p>
+            <a:pPr algn="r" indent="0" marL="0">
+              <a:buNone/>
+            </a:pPr>
+            <a:r>
+              <a:rPr lang="en-US" sz="900" dirty="0">
+                <a:solidFill>
+                  <a:srgbClr val="5F7181"/>
+                </a:solidFill>
+                <a:latin typeface="Aptos" pitchFamily="34" charset="0"/>
+                <a:ea typeface="Aptos" pitchFamily="34" charset="-122"/>
+                <a:cs typeface="Aptos" pitchFamily="34" charset="-120"/>
+              </a:rPr>
+              <a:t>5</a:t>
+            </a:r>
+            <a:endParaRPr lang="en-US" sz="900" dirty="0"/>
+          </a:p>
+        </p:txBody>
+      </p:sp>
+      <p:sp>
+        <p:nvSpPr>
+          <p:cNvPr id="8" name="Shape 6"/>
           <p:cNvSpPr/>
           <p:nvPr/>
         </p:nvSpPr>
@@ -12668,7 +13864,7 @@
       </p:sp>
       <p:sp>
         <p:nvSpPr>
-          <p:cNvPr id="8" name="Text 6"/>
+          <p:cNvPr id="9" name="Text 7"/>
           <p:cNvSpPr/>
           <p:nvPr/>
         </p:nvSpPr>
@@ -12707,14 +13903,14 @@
       </p:sp>
       <p:sp>
         <p:nvSpPr>
-          <p:cNvPr id="9" name="Text 7"/>
+          <p:cNvPr id="10" name="Text 8"/>
           <p:cNvSpPr/>
           <p:nvPr/>
         </p:nvSpPr>
         <p:spPr>
           <a:xfrm>
             <a:off x="640080" y="621792"/>
-            <a:ext cx="10881360" cy="566928"/>
+            <a:ext cx="10881360" cy="713232"/>
           </a:xfrm>
           <a:prstGeom prst="rect">
             <a:avLst/>
@@ -12732,7 +13928,7 @@
               <a:buNone/>
             </a:pPr>
             <a:r>
-              <a:rPr lang="en-US" sz="2700" b="1" dirty="0">
+              <a:rPr lang="en-US" sz="3400" b="1" dirty="0">
                 <a:solidFill>
                   <a:srgbClr val="003A63"/>
                 </a:solidFill>
@@ -12742,20 +13938,20 @@
               </a:rPr>
               <a:t>Learning Objectives</a:t>
             </a:r>
-            <a:endParaRPr lang="en-US" sz="2700" dirty="0"/>
-          </a:p>
-        </p:txBody>
-      </p:sp>
-      <p:sp>
-        <p:nvSpPr>
-          <p:cNvPr id="10" name="Text 8"/>
-          <p:cNvSpPr/>
-          <p:nvPr/>
-        </p:nvSpPr>
-        <p:spPr>
-          <a:xfrm>
-            <a:off x="868680" y="1417320"/>
-            <a:ext cx="6675120" cy="4434840"/>
+            <a:endParaRPr lang="en-US" sz="3400" dirty="0"/>
+          </a:p>
+        </p:txBody>
+      </p:sp>
+      <p:sp>
+        <p:nvSpPr>
+          <p:cNvPr id="11" name="Text 9"/>
+          <p:cNvSpPr/>
+          <p:nvPr/>
+        </p:nvSpPr>
+        <p:spPr>
+          <a:xfrm>
+            <a:off x="868680" y="1508760"/>
+            <a:ext cx="6537960" cy="4160520"/>
           </a:xfrm>
           <a:prstGeom prst="rect">
             <a:avLst/>
@@ -12770,7 +13966,7 @@
           <a:lstStyle/>
           <a:p>
             <a:r>
-              <a:rPr lang="en-US" sz="1700" dirty="0">
+              <a:rPr lang="en-US" sz="2100" dirty="0">
                 <a:solidFill>
                   <a:srgbClr val="17364A"/>
                 </a:solidFill>
@@ -12780,11 +13976,11 @@
               </a:rPr>
               <a:t>Identify appropriate and inappropriate uses of AI in public health communications.</a:t>
             </a:r>
-            <a:endParaRPr lang="en-US" sz="1700" dirty="0"/>
-          </a:p>
-          <a:p>
-            <a:r>
-              <a:rPr lang="en-US" sz="1700" dirty="0">
+            <a:endParaRPr lang="en-US" sz="2100" dirty="0"/>
+          </a:p>
+          <a:p>
+            <a:r>
+              <a:rPr lang="en-US" sz="2100" dirty="0">
                 <a:solidFill>
                   <a:srgbClr val="17364A"/>
                 </a:solidFill>
@@ -12794,11 +13990,11 @@
               </a:rPr>
               <a:t>Apply source verification, plain language, accessibility, and equity review to AI-generated messages.</a:t>
             </a:r>
-            <a:endParaRPr lang="en-US" sz="1700" dirty="0"/>
-          </a:p>
-          <a:p>
-            <a:r>
-              <a:rPr lang="en-US" sz="1700" dirty="0">
+            <a:endParaRPr lang="en-US" sz="2100" dirty="0"/>
+          </a:p>
+          <a:p>
+            <a:r>
+              <a:rPr lang="en-US" sz="2100" dirty="0">
                 <a:solidFill>
                   <a:srgbClr val="17364A"/>
                 </a:solidFill>
@@ -12808,27 +14004,13 @@
               </a:rPr>
               <a:t>Design a human review workflow for AI-assisted public-facing communications.</a:t>
             </a:r>
-            <a:endParaRPr lang="en-US" sz="1700" dirty="0"/>
-          </a:p>
-          <a:p>
-            <a:r>
-              <a:rPr lang="en-US" sz="1700" dirty="0">
-                <a:solidFill>
-                  <a:srgbClr val="17364A"/>
-                </a:solidFill>
-                <a:latin typeface="Aptos" pitchFamily="34" charset="0"/>
-                <a:ea typeface="Aptos" pitchFamily="34" charset="-122"/>
-                <a:cs typeface="Aptos" pitchFamily="34" charset="-120"/>
-              </a:rPr>
-              <a:t>Recognize misinformation, overstatement, missing uncertainty, and stigmatizing language risks.</a:t>
-            </a:r>
-            <a:endParaRPr lang="en-US" sz="1700" dirty="0"/>
-          </a:p>
-        </p:txBody>
-      </p:sp>
-      <p:sp>
-        <p:nvSpPr>
-          <p:cNvPr id="11" name="Shape 9"/>
+            <a:endParaRPr lang="en-US" sz="2100" dirty="0"/>
+          </a:p>
+        </p:txBody>
+      </p:sp>
+      <p:sp>
+        <p:nvSpPr>
+          <p:cNvPr id="12" name="Shape 10"/>
           <p:cNvSpPr/>
           <p:nvPr/>
         </p:nvSpPr>
@@ -12855,14 +14037,14 @@
       </p:sp>
       <p:sp>
         <p:nvSpPr>
-          <p:cNvPr id="12" name="Text 10"/>
+          <p:cNvPr id="13" name="Text 11"/>
           <p:cNvSpPr/>
           <p:nvPr/>
         </p:nvSpPr>
         <p:spPr>
           <a:xfrm>
             <a:off x="8074152" y="1563624"/>
-            <a:ext cx="2825496" cy="201168"/>
+            <a:ext cx="2825496" cy="256032"/>
           </a:xfrm>
           <a:prstGeom prst="rect">
             <a:avLst/>
@@ -12878,7 +14060,7 @@
               <a:buNone/>
             </a:pPr>
             <a:r>
-              <a:rPr lang="en-US" sz="950" b="1" dirty="0">
+              <a:rPr lang="en-US" sz="1300" b="1" dirty="0">
                 <a:solidFill>
                   <a:srgbClr val="0068B7"/>
                 </a:solidFill>
@@ -12888,20 +14070,20 @@
               </a:rPr>
               <a:t>Key idea</a:t>
             </a:r>
-            <a:endParaRPr lang="en-US" sz="950" dirty="0"/>
-          </a:p>
-        </p:txBody>
-      </p:sp>
-      <p:sp>
-        <p:nvSpPr>
-          <p:cNvPr id="13" name="Text 11"/>
-          <p:cNvSpPr/>
-          <p:nvPr/>
-        </p:nvSpPr>
-        <p:spPr>
-          <a:xfrm>
-            <a:off x="8074152" y="1856232"/>
-            <a:ext cx="2825496" cy="1261872"/>
+            <a:endParaRPr lang="en-US" sz="1300" dirty="0"/>
+          </a:p>
+        </p:txBody>
+      </p:sp>
+      <p:sp>
+        <p:nvSpPr>
+          <p:cNvPr id="14" name="Text 12"/>
+          <p:cNvSpPr/>
+          <p:nvPr/>
+        </p:nvSpPr>
+        <p:spPr>
+          <a:xfrm>
+            <a:off x="8074152" y="1920240"/>
+            <a:ext cx="2825496" cy="1188720"/>
           </a:xfrm>
           <a:prstGeom prst="rect">
             <a:avLst/>
@@ -12919,7 +14101,7 @@
               <a:buNone/>
             </a:pPr>
             <a:r>
-              <a:rPr lang="en-US" sz="1250" dirty="0">
+              <a:rPr lang="en-US" sz="1550" dirty="0">
                 <a:solidFill>
                   <a:srgbClr val="17364A"/>
                 </a:solidFill>
@@ -12929,13 +14111,13 @@
               </a:rPr>
               <a:t>Identify appropriate and inappropriate uses of AI in public health communications.</a:t>
             </a:r>
-            <a:endParaRPr lang="en-US" sz="1250" dirty="0"/>
-          </a:p>
-        </p:txBody>
-      </p:sp>
-      <p:sp>
-        <p:nvSpPr>
-          <p:cNvPr id="14" name="Shape 12"/>
+            <a:endParaRPr lang="en-US" sz="1550" dirty="0"/>
+          </a:p>
+        </p:txBody>
+      </p:sp>
+      <p:sp>
+        <p:nvSpPr>
+          <p:cNvPr id="15" name="Shape 13"/>
           <p:cNvSpPr/>
           <p:nvPr/>
         </p:nvSpPr>
@@ -12962,14 +14144,14 @@
       </p:sp>
       <p:sp>
         <p:nvSpPr>
-          <p:cNvPr id="15" name="Text 13"/>
+          <p:cNvPr id="16" name="Text 14"/>
           <p:cNvSpPr/>
           <p:nvPr/>
         </p:nvSpPr>
         <p:spPr>
           <a:xfrm>
             <a:off x="8074152" y="3666744"/>
-            <a:ext cx="2825496" cy="201168"/>
+            <a:ext cx="2825496" cy="256032"/>
           </a:xfrm>
           <a:prstGeom prst="rect">
             <a:avLst/>
@@ -12985,7 +14167,7 @@
               <a:buNone/>
             </a:pPr>
             <a:r>
-              <a:rPr lang="en-US" sz="950" b="1" dirty="0">
+              <a:rPr lang="en-US" sz="1300" b="1" dirty="0">
                 <a:solidFill>
                   <a:srgbClr val="0068B7"/>
                 </a:solidFill>
@@ -12995,20 +14177,20 @@
               </a:rPr>
               <a:t>Use this for</a:t>
             </a:r>
-            <a:endParaRPr lang="en-US" sz="950" dirty="0"/>
-          </a:p>
-        </p:txBody>
-      </p:sp>
-      <p:sp>
-        <p:nvSpPr>
-          <p:cNvPr id="16" name="Text 14"/>
-          <p:cNvSpPr/>
-          <p:nvPr/>
-        </p:nvSpPr>
-        <p:spPr>
-          <a:xfrm>
-            <a:off x="8074152" y="3959352"/>
-            <a:ext cx="2825496" cy="1170432"/>
+            <a:endParaRPr lang="en-US" sz="1300" dirty="0"/>
+          </a:p>
+        </p:txBody>
+      </p:sp>
+      <p:sp>
+        <p:nvSpPr>
+          <p:cNvPr id="17" name="Text 15"/>
+          <p:cNvSpPr/>
+          <p:nvPr/>
+        </p:nvSpPr>
+        <p:spPr>
+          <a:xfrm>
+            <a:off x="8074152" y="4023360"/>
+            <a:ext cx="2825496" cy="1097280"/>
           </a:xfrm>
           <a:prstGeom prst="rect">
             <a:avLst/>
@@ -13026,7 +14208,7 @@
               <a:buNone/>
             </a:pPr>
             <a:r>
-              <a:rPr lang="en-US" sz="1250" dirty="0">
+              <a:rPr lang="en-US" sz="1550" dirty="0">
                 <a:solidFill>
                   <a:srgbClr val="17364A"/>
                 </a:solidFill>
@@ -13036,7 +14218,7 @@
               </a:rPr>
               <a:t>Connect the concept to public health decisions, safeguards, documentation, or implementation work.</a:t>
             </a:r>
-            <a:endParaRPr lang="en-US" sz="1250" dirty="0"/>
+            <a:endParaRPr lang="en-US" sz="1550" dirty="0"/>
           </a:p>
         </p:txBody>
       </p:sp>
@@ -13233,7 +14415,7 @@
                 <a:ea typeface="Aptos" pitchFamily="34" charset="-122"/>
                 <a:cs typeface="Aptos" pitchFamily="34" charset="-120"/>
               </a:rPr>
-              <a:t>© Paula Soper</a:t>
+              <a:t>Â© Paula Soper</a:t>
             </a:r>
             <a:endParaRPr lang="en-US" sz="800" dirty="0"/>
           </a:p>
@@ -13241,7 +14423,46 @@
       </p:sp>
       <p:sp>
         <p:nvSpPr>
-          <p:cNvPr id="7" name="Shape 5"/>
+          <p:cNvPr id="7" name="Text 5"/>
+          <p:cNvSpPr/>
+          <p:nvPr/>
+        </p:nvSpPr>
+        <p:spPr>
+          <a:xfrm>
+            <a:off x="11137392" y="6510528"/>
+            <a:ext cx="411480" cy="201168"/>
+          </a:xfrm>
+          <a:prstGeom prst="rect">
+            <a:avLst/>
+          </a:prstGeom>
+          <a:noFill/>
+          <a:ln/>
+        </p:spPr>
+        <p:txBody>
+          <a:bodyPr wrap="square" lIns="0" tIns="0" rIns="0" bIns="0" rtlCol="0" anchor="ctr"/>
+          <a:lstStyle/>
+          <a:p>
+            <a:pPr algn="r" indent="0" marL="0">
+              <a:buNone/>
+            </a:pPr>
+            <a:r>
+              <a:rPr lang="en-US" sz="900" dirty="0">
+                <a:solidFill>
+                  <a:srgbClr val="5F7181"/>
+                </a:solidFill>
+                <a:latin typeface="Aptos" pitchFamily="34" charset="0"/>
+                <a:ea typeface="Aptos" pitchFamily="34" charset="-122"/>
+                <a:cs typeface="Aptos" pitchFamily="34" charset="-120"/>
+              </a:rPr>
+              <a:t>6</a:t>
+            </a:r>
+            <a:endParaRPr lang="en-US" sz="900" dirty="0"/>
+          </a:p>
+        </p:txBody>
+      </p:sp>
+      <p:sp>
+        <p:nvSpPr>
+          <p:cNvPr id="8" name="Shape 6"/>
           <p:cNvSpPr/>
           <p:nvPr/>
         </p:nvSpPr>
@@ -13266,7 +14487,7 @@
       </p:sp>
       <p:sp>
         <p:nvSpPr>
-          <p:cNvPr id="8" name="Text 6"/>
+          <p:cNvPr id="9" name="Text 7"/>
           <p:cNvSpPr/>
           <p:nvPr/>
         </p:nvSpPr>
@@ -13305,14 +14526,14 @@
       </p:sp>
       <p:sp>
         <p:nvSpPr>
-          <p:cNvPr id="9" name="Text 7"/>
+          <p:cNvPr id="10" name="Text 8"/>
           <p:cNvSpPr/>
           <p:nvPr/>
         </p:nvSpPr>
         <p:spPr>
           <a:xfrm>
             <a:off x="640080" y="621792"/>
-            <a:ext cx="10881360" cy="566928"/>
+            <a:ext cx="10881360" cy="713232"/>
           </a:xfrm>
           <a:prstGeom prst="rect">
             <a:avLst/>
@@ -13330,7 +14551,7 @@
               <a:buNone/>
             </a:pPr>
             <a:r>
-              <a:rPr lang="en-US" sz="2700" b="1" dirty="0">
+              <a:rPr lang="en-US" sz="3400" b="1" dirty="0">
                 <a:solidFill>
                   <a:srgbClr val="003A63"/>
                 </a:solidFill>
@@ -13340,20 +14561,20 @@
               </a:rPr>
               <a:t>Module Overview</a:t>
             </a:r>
-            <a:endParaRPr lang="en-US" sz="2700" dirty="0"/>
-          </a:p>
-        </p:txBody>
-      </p:sp>
-      <p:sp>
-        <p:nvSpPr>
-          <p:cNvPr id="10" name="Text 8"/>
-          <p:cNvSpPr/>
-          <p:nvPr/>
-        </p:nvSpPr>
-        <p:spPr>
-          <a:xfrm>
-            <a:off x="868680" y="1417320"/>
-            <a:ext cx="6675120" cy="4434840"/>
+            <a:endParaRPr lang="en-US" sz="3400" dirty="0"/>
+          </a:p>
+        </p:txBody>
+      </p:sp>
+      <p:sp>
+        <p:nvSpPr>
+          <p:cNvPr id="11" name="Text 9"/>
+          <p:cNvSpPr/>
+          <p:nvPr/>
+        </p:nvSpPr>
+        <p:spPr>
+          <a:xfrm>
+            <a:off x="868680" y="1508760"/>
+            <a:ext cx="6537960" cy="4160520"/>
           </a:xfrm>
           <a:prstGeom prst="rect">
             <a:avLst/>
@@ -13368,7 +14589,7 @@
           <a:lstStyle/>
           <a:p>
             <a:r>
-              <a:rPr lang="en-US" sz="1700" dirty="0">
+              <a:rPr lang="en-US" sz="2100" dirty="0">
                 <a:solidFill>
                   <a:srgbClr val="17364A"/>
                 </a:solidFill>
@@ -13376,13 +14597,13 @@
                 <a:ea typeface="Aptos" pitchFamily="34" charset="-122"/>
                 <a:cs typeface="Aptos" pitchFamily="34" charset="-120"/>
               </a:rPr>
-              <a:t>Generative AI can support public health communications by helping staff draft, revise, simplify, translate, tailor, and.</a:t>
-            </a:r>
-            <a:endParaRPr lang="en-US" sz="1700" dirty="0"/>
-          </a:p>
-          <a:p>
-            <a:r>
-              <a:rPr lang="en-US" sz="1700" dirty="0">
+              <a:t>Generative AI can support public health communications by helping staff draft, revise, simplify,.</a:t>
+            </a:r>
+            <a:endParaRPr lang="en-US" sz="2100" dirty="0"/>
+          </a:p>
+          <a:p>
+            <a:r>
+              <a:rPr lang="en-US" sz="2100" dirty="0">
                 <a:solidFill>
                   <a:srgbClr val="17364A"/>
                 </a:solidFill>
@@ -13392,11 +14613,11 @@
               </a:rPr>
               <a:t>However, public health communication carries high trust, equity, accessibility, and accuracy obligations.</a:t>
             </a:r>
-            <a:endParaRPr lang="en-US" sz="1700" dirty="0"/>
-          </a:p>
-          <a:p>
-            <a:r>
-              <a:rPr lang="en-US" sz="1700" dirty="0">
+            <a:endParaRPr lang="en-US" sz="2100" dirty="0"/>
+          </a:p>
+          <a:p>
+            <a:r>
+              <a:rPr lang="en-US" sz="2100" dirty="0">
                 <a:solidFill>
                   <a:srgbClr val="17364A"/>
                 </a:solidFill>
@@ -13404,29 +14625,15 @@
                 <a:ea typeface="Aptos" pitchFamily="34" charset="-122"/>
                 <a:cs typeface="Aptos" pitchFamily="34" charset="-120"/>
               </a:rPr>
-              <a:t>AI-generated text can sound clear and authoritative while misstating evidence, omitting uncertainty, using stigmatizing.</a:t>
-            </a:r>
-            <a:endParaRPr lang="en-US" sz="1700" dirty="0"/>
-          </a:p>
-          <a:p>
-            <a:r>
-              <a:rPr lang="en-US" sz="1700" dirty="0">
-                <a:solidFill>
-                  <a:srgbClr val="17364A"/>
-                </a:solidFill>
-                <a:latin typeface="Aptos" pitchFamily="34" charset="0"/>
-                <a:ea typeface="Aptos" pitchFamily="34" charset="-122"/>
-                <a:cs typeface="Aptos" pitchFamily="34" charset="-120"/>
-              </a:rPr>
-              <a:t>This module teaches communications staff and program partners how to use AI as a drafting and review aid while preserving.</a:t>
-            </a:r>
-            <a:endParaRPr lang="en-US" sz="1700" dirty="0"/>
-          </a:p>
-        </p:txBody>
-      </p:sp>
-      <p:sp>
-        <p:nvSpPr>
-          <p:cNvPr id="11" name="Shape 9"/>
+              <a:t>AI-generated text can sound clear and authoritative while misstating evidence, omitting uncertainty,.</a:t>
+            </a:r>
+            <a:endParaRPr lang="en-US" sz="2100" dirty="0"/>
+          </a:p>
+        </p:txBody>
+      </p:sp>
+      <p:sp>
+        <p:nvSpPr>
+          <p:cNvPr id="12" name="Shape 10"/>
           <p:cNvSpPr/>
           <p:nvPr/>
         </p:nvSpPr>
@@ -13453,14 +14660,14 @@
       </p:sp>
       <p:sp>
         <p:nvSpPr>
-          <p:cNvPr id="12" name="Text 10"/>
+          <p:cNvPr id="13" name="Text 11"/>
           <p:cNvSpPr/>
           <p:nvPr/>
         </p:nvSpPr>
         <p:spPr>
           <a:xfrm>
             <a:off x="8074152" y="1563624"/>
-            <a:ext cx="2825496" cy="201168"/>
+            <a:ext cx="2825496" cy="256032"/>
           </a:xfrm>
           <a:prstGeom prst="rect">
             <a:avLst/>
@@ -13476,7 +14683,7 @@
               <a:buNone/>
             </a:pPr>
             <a:r>
-              <a:rPr lang="en-US" sz="950" b="1" dirty="0">
+              <a:rPr lang="en-US" sz="1300" b="1" dirty="0">
                 <a:solidFill>
                   <a:srgbClr val="0068B7"/>
                 </a:solidFill>
@@ -13486,20 +14693,20 @@
               </a:rPr>
               <a:t>Key idea</a:t>
             </a:r>
-            <a:endParaRPr lang="en-US" sz="950" dirty="0"/>
-          </a:p>
-        </p:txBody>
-      </p:sp>
-      <p:sp>
-        <p:nvSpPr>
-          <p:cNvPr id="13" name="Text 11"/>
-          <p:cNvSpPr/>
-          <p:nvPr/>
-        </p:nvSpPr>
-        <p:spPr>
-          <a:xfrm>
-            <a:off x="8074152" y="1856232"/>
-            <a:ext cx="2825496" cy="1261872"/>
+            <a:endParaRPr lang="en-US" sz="1300" dirty="0"/>
+          </a:p>
+        </p:txBody>
+      </p:sp>
+      <p:sp>
+        <p:nvSpPr>
+          <p:cNvPr id="14" name="Text 12"/>
+          <p:cNvSpPr/>
+          <p:nvPr/>
+        </p:nvSpPr>
+        <p:spPr>
+          <a:xfrm>
+            <a:off x="8074152" y="1920240"/>
+            <a:ext cx="2825496" cy="1188720"/>
           </a:xfrm>
           <a:prstGeom prst="rect">
             <a:avLst/>
@@ -13517,7 +14724,7 @@
               <a:buNone/>
             </a:pPr>
             <a:r>
-              <a:rPr lang="en-US" sz="1250" dirty="0">
+              <a:rPr lang="en-US" sz="1550" dirty="0">
                 <a:solidFill>
                   <a:srgbClr val="17364A"/>
                 </a:solidFill>
@@ -13525,15 +14732,15 @@
                 <a:ea typeface="Aptos" pitchFamily="34" charset="-122"/>
                 <a:cs typeface="Aptos" pitchFamily="34" charset="-120"/>
               </a:rPr>
-              <a:t>Generative AI can support public health communications by helping staff draft, revise, simplify, translate, tailor, and.</a:t>
-            </a:r>
-            <a:endParaRPr lang="en-US" sz="1250" dirty="0"/>
-          </a:p>
-        </p:txBody>
-      </p:sp>
-      <p:sp>
-        <p:nvSpPr>
-          <p:cNvPr id="14" name="Shape 12"/>
+              <a:t>Generative AI can support public health communications by helping staff draft, revise, simplify,.</a:t>
+            </a:r>
+            <a:endParaRPr lang="en-US" sz="1550" dirty="0"/>
+          </a:p>
+        </p:txBody>
+      </p:sp>
+      <p:sp>
+        <p:nvSpPr>
+          <p:cNvPr id="15" name="Shape 13"/>
           <p:cNvSpPr/>
           <p:nvPr/>
         </p:nvSpPr>
@@ -13560,14 +14767,14 @@
       </p:sp>
       <p:sp>
         <p:nvSpPr>
-          <p:cNvPr id="15" name="Text 13"/>
+          <p:cNvPr id="16" name="Text 14"/>
           <p:cNvSpPr/>
           <p:nvPr/>
         </p:nvSpPr>
         <p:spPr>
           <a:xfrm>
             <a:off x="8074152" y="3666744"/>
-            <a:ext cx="2825496" cy="201168"/>
+            <a:ext cx="2825496" cy="256032"/>
           </a:xfrm>
           <a:prstGeom prst="rect">
             <a:avLst/>
@@ -13583,7 +14790,7 @@
               <a:buNone/>
             </a:pPr>
             <a:r>
-              <a:rPr lang="en-US" sz="950" b="1" dirty="0">
+              <a:rPr lang="en-US" sz="1300" b="1" dirty="0">
                 <a:solidFill>
                   <a:srgbClr val="0068B7"/>
                 </a:solidFill>
@@ -13593,20 +14800,20 @@
               </a:rPr>
               <a:t>Use this for</a:t>
             </a:r>
-            <a:endParaRPr lang="en-US" sz="950" dirty="0"/>
-          </a:p>
-        </p:txBody>
-      </p:sp>
-      <p:sp>
-        <p:nvSpPr>
-          <p:cNvPr id="16" name="Text 14"/>
-          <p:cNvSpPr/>
-          <p:nvPr/>
-        </p:nvSpPr>
-        <p:spPr>
-          <a:xfrm>
-            <a:off x="8074152" y="3959352"/>
-            <a:ext cx="2825496" cy="1170432"/>
+            <a:endParaRPr lang="en-US" sz="1300" dirty="0"/>
+          </a:p>
+        </p:txBody>
+      </p:sp>
+      <p:sp>
+        <p:nvSpPr>
+          <p:cNvPr id="17" name="Text 15"/>
+          <p:cNvSpPr/>
+          <p:nvPr/>
+        </p:nvSpPr>
+        <p:spPr>
+          <a:xfrm>
+            <a:off x="8074152" y="4023360"/>
+            <a:ext cx="2825496" cy="1097280"/>
           </a:xfrm>
           <a:prstGeom prst="rect">
             <a:avLst/>
@@ -13624,7 +14831,7 @@
               <a:buNone/>
             </a:pPr>
             <a:r>
-              <a:rPr lang="en-US" sz="1250" dirty="0">
+              <a:rPr lang="en-US" sz="1550" dirty="0">
                 <a:solidFill>
                   <a:srgbClr val="17364A"/>
                 </a:solidFill>
@@ -13634,7 +14841,7 @@
               </a:rPr>
               <a:t>Connect the concept to public health decisions, safeguards, documentation, or implementation work.</a:t>
             </a:r>
-            <a:endParaRPr lang="en-US" sz="1250" dirty="0"/>
+            <a:endParaRPr lang="en-US" sz="1550" dirty="0"/>
           </a:p>
         </p:txBody>
       </p:sp>
@@ -13831,7 +15038,7 @@
                 <a:ea typeface="Aptos" pitchFamily="34" charset="-122"/>
                 <a:cs typeface="Aptos" pitchFamily="34" charset="-120"/>
               </a:rPr>
-              <a:t>© Paula Soper</a:t>
+              <a:t>Â© Paula Soper</a:t>
             </a:r>
             <a:endParaRPr lang="en-US" sz="800" dirty="0"/>
           </a:p>
@@ -13839,7 +15046,46 @@
       </p:sp>
       <p:sp>
         <p:nvSpPr>
-          <p:cNvPr id="7" name="Shape 5"/>
+          <p:cNvPr id="7" name="Text 5"/>
+          <p:cNvSpPr/>
+          <p:nvPr/>
+        </p:nvSpPr>
+        <p:spPr>
+          <a:xfrm>
+            <a:off x="11137392" y="6510528"/>
+            <a:ext cx="411480" cy="201168"/>
+          </a:xfrm>
+          <a:prstGeom prst="rect">
+            <a:avLst/>
+          </a:prstGeom>
+          <a:noFill/>
+          <a:ln/>
+        </p:spPr>
+        <p:txBody>
+          <a:bodyPr wrap="square" lIns="0" tIns="0" rIns="0" bIns="0" rtlCol="0" anchor="ctr"/>
+          <a:lstStyle/>
+          <a:p>
+            <a:pPr algn="r" indent="0" marL="0">
+              <a:buNone/>
+            </a:pPr>
+            <a:r>
+              <a:rPr lang="en-US" sz="900" dirty="0">
+                <a:solidFill>
+                  <a:srgbClr val="5F7181"/>
+                </a:solidFill>
+                <a:latin typeface="Aptos" pitchFamily="34" charset="0"/>
+                <a:ea typeface="Aptos" pitchFamily="34" charset="-122"/>
+                <a:cs typeface="Aptos" pitchFamily="34" charset="-120"/>
+              </a:rPr>
+              <a:t>7</a:t>
+            </a:r>
+            <a:endParaRPr lang="en-US" sz="900" dirty="0"/>
+          </a:p>
+        </p:txBody>
+      </p:sp>
+      <p:sp>
+        <p:nvSpPr>
+          <p:cNvPr id="8" name="Shape 6"/>
           <p:cNvSpPr/>
           <p:nvPr/>
         </p:nvSpPr>
@@ -13864,7 +15110,7 @@
       </p:sp>
       <p:sp>
         <p:nvSpPr>
-          <p:cNvPr id="8" name="Text 6"/>
+          <p:cNvPr id="9" name="Text 7"/>
           <p:cNvSpPr/>
           <p:nvPr/>
         </p:nvSpPr>
@@ -13903,14 +15149,14 @@
       </p:sp>
       <p:sp>
         <p:nvSpPr>
-          <p:cNvPr id="9" name="Text 7"/>
+          <p:cNvPr id="10" name="Text 8"/>
           <p:cNvSpPr/>
           <p:nvPr/>
         </p:nvSpPr>
         <p:spPr>
           <a:xfrm>
             <a:off x="640080" y="621792"/>
-            <a:ext cx="10881360" cy="566928"/>
+            <a:ext cx="10881360" cy="713232"/>
           </a:xfrm>
           <a:prstGeom prst="rect">
             <a:avLst/>
@@ -13928,7 +15174,7 @@
               <a:buNone/>
             </a:pPr>
             <a:r>
-              <a:rPr lang="en-US" sz="2700" b="1" dirty="0">
+              <a:rPr lang="en-US" sz="3400" b="1" dirty="0">
                 <a:solidFill>
                   <a:srgbClr val="003A63"/>
                 </a:solidFill>
@@ -13938,20 +15184,20 @@
               </a:rPr>
               <a:t>Jurisdiction and Agency Policy Note</a:t>
             </a:r>
-            <a:endParaRPr lang="en-US" sz="2700" dirty="0"/>
-          </a:p>
-        </p:txBody>
-      </p:sp>
-      <p:sp>
-        <p:nvSpPr>
-          <p:cNvPr id="10" name="Text 8"/>
-          <p:cNvSpPr/>
-          <p:nvPr/>
-        </p:nvSpPr>
-        <p:spPr>
-          <a:xfrm>
-            <a:off x="868680" y="1417320"/>
-            <a:ext cx="6675120" cy="4434840"/>
+            <a:endParaRPr lang="en-US" sz="3400" dirty="0"/>
+          </a:p>
+        </p:txBody>
+      </p:sp>
+      <p:sp>
+        <p:nvSpPr>
+          <p:cNvPr id="11" name="Text 9"/>
+          <p:cNvSpPr/>
+          <p:nvPr/>
+        </p:nvSpPr>
+        <p:spPr>
+          <a:xfrm>
+            <a:off x="868680" y="1508760"/>
+            <a:ext cx="6537960" cy="4160520"/>
           </a:xfrm>
           <a:prstGeom prst="rect">
             <a:avLst/>
@@ -13966,7 +15212,7 @@
           <a:lstStyle/>
           <a:p>
             <a:r>
-              <a:rPr lang="en-US" sz="1700" dirty="0">
+              <a:rPr lang="en-US" sz="2100" dirty="0">
                 <a:solidFill>
                   <a:srgbClr val="17364A"/>
                 </a:solidFill>
@@ -13976,11 +15222,11 @@
               </a:rPr>
               <a:t>This national-level module is intended for training and planning purposes.</a:t>
             </a:r>
-            <a:endParaRPr lang="en-US" sz="1700" dirty="0"/>
-          </a:p>
-          <a:p>
-            <a:r>
-              <a:rPr lang="en-US" sz="1700" dirty="0">
+            <a:endParaRPr lang="en-US" sz="2100" dirty="0"/>
+          </a:p>
+          <a:p>
+            <a:r>
+              <a:rPr lang="en-US" sz="2100" dirty="0">
                 <a:solidFill>
                   <a:srgbClr val="17364A"/>
                 </a:solidFill>
@@ -13990,11 +15236,11 @@
               </a:rPr>
               <a:t>It does not replace legal, privacy, procurement, civil rights, records, or agency policy review.</a:t>
             </a:r>
-            <a:endParaRPr lang="en-US" sz="1700" dirty="0"/>
-          </a:p>
-          <a:p>
-            <a:r>
-              <a:rPr lang="en-US" sz="1700" dirty="0">
+            <a:endParaRPr lang="en-US" sz="2100" dirty="0"/>
+          </a:p>
+          <a:p>
+            <a:r>
+              <a:rPr lang="en-US" sz="2100" dirty="0">
                 <a:solidFill>
                   <a:srgbClr val="17364A"/>
                 </a:solidFill>
@@ -14002,15 +15248,15 @@
                 <a:ea typeface="Aptos" pitchFamily="34" charset="-122"/>
                 <a:cs typeface="Aptos" pitchFamily="34" charset="-120"/>
               </a:rPr>
-              <a:t>Learners should confirm applicable requirements in their own jurisdiction and organization before implementing AI-supported.</a:t>
-            </a:r>
-            <a:endParaRPr lang="en-US" sz="1700" dirty="0"/>
-          </a:p>
-        </p:txBody>
-      </p:sp>
-      <p:sp>
-        <p:nvSpPr>
-          <p:cNvPr id="11" name="Shape 9"/>
+              <a:t>Learners should confirm applicable requirements in their own jurisdiction and organization before.</a:t>
+            </a:r>
+            <a:endParaRPr lang="en-US" sz="2100" dirty="0"/>
+          </a:p>
+        </p:txBody>
+      </p:sp>
+      <p:sp>
+        <p:nvSpPr>
+          <p:cNvPr id="12" name="Shape 10"/>
           <p:cNvSpPr/>
           <p:nvPr/>
         </p:nvSpPr>
@@ -14037,14 +15283,14 @@
       </p:sp>
       <p:sp>
         <p:nvSpPr>
-          <p:cNvPr id="12" name="Text 10"/>
+          <p:cNvPr id="13" name="Text 11"/>
           <p:cNvSpPr/>
           <p:nvPr/>
         </p:nvSpPr>
         <p:spPr>
           <a:xfrm>
             <a:off x="8074152" y="1563624"/>
-            <a:ext cx="2825496" cy="201168"/>
+            <a:ext cx="2825496" cy="256032"/>
           </a:xfrm>
           <a:prstGeom prst="rect">
             <a:avLst/>
@@ -14060,7 +15306,7 @@
               <a:buNone/>
             </a:pPr>
             <a:r>
-              <a:rPr lang="en-US" sz="950" b="1" dirty="0">
+              <a:rPr lang="en-US" sz="1300" b="1" dirty="0">
                 <a:solidFill>
                   <a:srgbClr val="0068B7"/>
                 </a:solidFill>
@@ -14070,20 +15316,20 @@
               </a:rPr>
               <a:t>Key idea</a:t>
             </a:r>
-            <a:endParaRPr lang="en-US" sz="950" dirty="0"/>
-          </a:p>
-        </p:txBody>
-      </p:sp>
-      <p:sp>
-        <p:nvSpPr>
-          <p:cNvPr id="13" name="Text 11"/>
-          <p:cNvSpPr/>
-          <p:nvPr/>
-        </p:nvSpPr>
-        <p:spPr>
-          <a:xfrm>
-            <a:off x="8074152" y="1856232"/>
-            <a:ext cx="2825496" cy="1261872"/>
+            <a:endParaRPr lang="en-US" sz="1300" dirty="0"/>
+          </a:p>
+        </p:txBody>
+      </p:sp>
+      <p:sp>
+        <p:nvSpPr>
+          <p:cNvPr id="14" name="Text 12"/>
+          <p:cNvSpPr/>
+          <p:nvPr/>
+        </p:nvSpPr>
+        <p:spPr>
+          <a:xfrm>
+            <a:off x="8074152" y="1920240"/>
+            <a:ext cx="2825496" cy="1188720"/>
           </a:xfrm>
           <a:prstGeom prst="rect">
             <a:avLst/>
@@ -14101,7 +15347,7 @@
               <a:buNone/>
             </a:pPr>
             <a:r>
-              <a:rPr lang="en-US" sz="1250" dirty="0">
+              <a:rPr lang="en-US" sz="1550" dirty="0">
                 <a:solidFill>
                   <a:srgbClr val="17364A"/>
                 </a:solidFill>
@@ -14111,13 +15357,13 @@
               </a:rPr>
               <a:t>This national-level module is intended for training and planning purposes.</a:t>
             </a:r>
-            <a:endParaRPr lang="en-US" sz="1250" dirty="0"/>
-          </a:p>
-        </p:txBody>
-      </p:sp>
-      <p:sp>
-        <p:nvSpPr>
-          <p:cNvPr id="14" name="Shape 12"/>
+            <a:endParaRPr lang="en-US" sz="1550" dirty="0"/>
+          </a:p>
+        </p:txBody>
+      </p:sp>
+      <p:sp>
+        <p:nvSpPr>
+          <p:cNvPr id="15" name="Shape 13"/>
           <p:cNvSpPr/>
           <p:nvPr/>
         </p:nvSpPr>
@@ -14144,14 +15390,14 @@
       </p:sp>
       <p:sp>
         <p:nvSpPr>
-          <p:cNvPr id="15" name="Text 13"/>
+          <p:cNvPr id="16" name="Text 14"/>
           <p:cNvSpPr/>
           <p:nvPr/>
         </p:nvSpPr>
         <p:spPr>
           <a:xfrm>
             <a:off x="8074152" y="3666744"/>
-            <a:ext cx="2825496" cy="201168"/>
+            <a:ext cx="2825496" cy="256032"/>
           </a:xfrm>
           <a:prstGeom prst="rect">
             <a:avLst/>
@@ -14167,7 +15413,7 @@
               <a:buNone/>
             </a:pPr>
             <a:r>
-              <a:rPr lang="en-US" sz="950" b="1" dirty="0">
+              <a:rPr lang="en-US" sz="1300" b="1" dirty="0">
                 <a:solidFill>
                   <a:srgbClr val="0068B7"/>
                 </a:solidFill>
@@ -14177,20 +15423,20 @@
               </a:rPr>
               <a:t>Use this for</a:t>
             </a:r>
-            <a:endParaRPr lang="en-US" sz="950" dirty="0"/>
-          </a:p>
-        </p:txBody>
-      </p:sp>
-      <p:sp>
-        <p:nvSpPr>
-          <p:cNvPr id="16" name="Text 14"/>
-          <p:cNvSpPr/>
-          <p:nvPr/>
-        </p:nvSpPr>
-        <p:spPr>
-          <a:xfrm>
-            <a:off x="8074152" y="3959352"/>
-            <a:ext cx="2825496" cy="1170432"/>
+            <a:endParaRPr lang="en-US" sz="1300" dirty="0"/>
+          </a:p>
+        </p:txBody>
+      </p:sp>
+      <p:sp>
+        <p:nvSpPr>
+          <p:cNvPr id="17" name="Text 15"/>
+          <p:cNvSpPr/>
+          <p:nvPr/>
+        </p:nvSpPr>
+        <p:spPr>
+          <a:xfrm>
+            <a:off x="8074152" y="4023360"/>
+            <a:ext cx="2825496" cy="1097280"/>
           </a:xfrm>
           <a:prstGeom prst="rect">
             <a:avLst/>
@@ -14208,7 +15454,7 @@
               <a:buNone/>
             </a:pPr>
             <a:r>
-              <a:rPr lang="en-US" sz="1250" dirty="0">
+              <a:rPr lang="en-US" sz="1550" dirty="0">
                 <a:solidFill>
                   <a:srgbClr val="17364A"/>
                 </a:solidFill>
@@ -14218,7 +15464,7 @@
               </a:rPr>
               <a:t>Connect the concept to public health decisions, safeguards, documentation, or implementation work.</a:t>
             </a:r>
-            <a:endParaRPr lang="en-US" sz="1250" dirty="0"/>
+            <a:endParaRPr lang="en-US" sz="1550" dirty="0"/>
           </a:p>
         </p:txBody>
       </p:sp>
@@ -14415,7 +15661,7 @@
                 <a:ea typeface="Aptos" pitchFamily="34" charset="-122"/>
                 <a:cs typeface="Aptos" pitchFamily="34" charset="-120"/>
               </a:rPr>
-              <a:t>© Paula Soper</a:t>
+              <a:t>Â© Paula Soper</a:t>
             </a:r>
             <a:endParaRPr lang="en-US" sz="800" dirty="0"/>
           </a:p>
@@ -14423,7 +15669,46 @@
       </p:sp>
       <p:sp>
         <p:nvSpPr>
-          <p:cNvPr id="7" name="Shape 5"/>
+          <p:cNvPr id="7" name="Text 5"/>
+          <p:cNvSpPr/>
+          <p:nvPr/>
+        </p:nvSpPr>
+        <p:spPr>
+          <a:xfrm>
+            <a:off x="11137392" y="6510528"/>
+            <a:ext cx="411480" cy="201168"/>
+          </a:xfrm>
+          <a:prstGeom prst="rect">
+            <a:avLst/>
+          </a:prstGeom>
+          <a:noFill/>
+          <a:ln/>
+        </p:spPr>
+        <p:txBody>
+          <a:bodyPr wrap="square" lIns="0" tIns="0" rIns="0" bIns="0" rtlCol="0" anchor="ctr"/>
+          <a:lstStyle/>
+          <a:p>
+            <a:pPr algn="r" indent="0" marL="0">
+              <a:buNone/>
+            </a:pPr>
+            <a:r>
+              <a:rPr lang="en-US" sz="900" dirty="0">
+                <a:solidFill>
+                  <a:srgbClr val="5F7181"/>
+                </a:solidFill>
+                <a:latin typeface="Aptos" pitchFamily="34" charset="0"/>
+                <a:ea typeface="Aptos" pitchFamily="34" charset="-122"/>
+                <a:cs typeface="Aptos" pitchFamily="34" charset="-120"/>
+              </a:rPr>
+              <a:t>8</a:t>
+            </a:r>
+            <a:endParaRPr lang="en-US" sz="900" dirty="0"/>
+          </a:p>
+        </p:txBody>
+      </p:sp>
+      <p:sp>
+        <p:nvSpPr>
+          <p:cNvPr id="8" name="Shape 6"/>
           <p:cNvSpPr/>
           <p:nvPr/>
         </p:nvSpPr>
@@ -14448,7 +15733,7 @@
       </p:sp>
       <p:sp>
         <p:nvSpPr>
-          <p:cNvPr id="8" name="Text 6"/>
+          <p:cNvPr id="9" name="Text 7"/>
           <p:cNvSpPr/>
           <p:nvPr/>
         </p:nvSpPr>
@@ -14487,14 +15772,14 @@
       </p:sp>
       <p:sp>
         <p:nvSpPr>
-          <p:cNvPr id="9" name="Text 7"/>
+          <p:cNvPr id="10" name="Text 8"/>
           <p:cNvSpPr/>
           <p:nvPr/>
         </p:nvSpPr>
         <p:spPr>
           <a:xfrm>
             <a:off x="640080" y="621792"/>
-            <a:ext cx="10881360" cy="566928"/>
+            <a:ext cx="10881360" cy="713232"/>
           </a:xfrm>
           <a:prstGeom prst="rect">
             <a:avLst/>
@@ -14512,7 +15797,7 @@
               <a:buNone/>
             </a:pPr>
             <a:r>
-              <a:rPr lang="en-US" sz="2700" b="1" dirty="0">
+              <a:rPr lang="en-US" sz="3400" b="1" dirty="0">
                 <a:solidFill>
                   <a:srgbClr val="003A63"/>
                 </a:solidFill>
@@ -14522,20 +15807,20 @@
               </a:rPr>
               <a:t>Public Health Example</a:t>
             </a:r>
-            <a:endParaRPr lang="en-US" sz="2700" dirty="0"/>
-          </a:p>
-        </p:txBody>
-      </p:sp>
-      <p:sp>
-        <p:nvSpPr>
-          <p:cNvPr id="10" name="Text 8"/>
-          <p:cNvSpPr/>
-          <p:nvPr/>
-        </p:nvSpPr>
-        <p:spPr>
-          <a:xfrm>
-            <a:off x="868680" y="1417320"/>
-            <a:ext cx="6675120" cy="4434840"/>
+            <a:endParaRPr lang="en-US" sz="3400" dirty="0"/>
+          </a:p>
+        </p:txBody>
+      </p:sp>
+      <p:sp>
+        <p:nvSpPr>
+          <p:cNvPr id="11" name="Text 9"/>
+          <p:cNvSpPr/>
+          <p:nvPr/>
+        </p:nvSpPr>
+        <p:spPr>
+          <a:xfrm>
+            <a:off x="868680" y="1508760"/>
+            <a:ext cx="6537960" cy="4160520"/>
           </a:xfrm>
           <a:prstGeom prst="rect">
             <a:avLst/>
@@ -14550,7 +15835,7 @@
           <a:lstStyle/>
           <a:p>
             <a:r>
-              <a:rPr lang="en-US" sz="1700" dirty="0">
+              <a:rPr lang="en-US" sz="2100" dirty="0">
                 <a:solidFill>
                   <a:srgbClr val="17364A"/>
                 </a:solidFill>
@@ -14558,13 +15843,13 @@
                 <a:ea typeface="Aptos" pitchFamily="34" charset="-122"/>
                 <a:cs typeface="Aptos" pitchFamily="34" charset="-120"/>
               </a:rPr>
-              <a:t>A health department uses AI to draft a heat safety message for older adults, outdoor workers, and people without reliable.</a:t>
-            </a:r>
-            <a:endParaRPr lang="en-US" sz="1700" dirty="0"/>
-          </a:p>
-          <a:p>
-            <a:r>
-              <a:rPr lang="en-US" sz="1700" dirty="0">
+              <a:t>A health department uses AI to draft a heat safety message for older adults, outdoor workers, and.</a:t>
+            </a:r>
+            <a:endParaRPr lang="en-US" sz="2100" dirty="0"/>
+          </a:p>
+          <a:p>
+            <a:r>
+              <a:rPr lang="en-US" sz="2100" dirty="0">
                 <a:solidFill>
                   <a:srgbClr val="17364A"/>
                 </a:solidFill>
@@ -14572,15 +15857,15 @@
                 <a:ea typeface="Aptos" pitchFamily="34" charset="-122"/>
                 <a:cs typeface="Aptos" pitchFamily="34" charset="-120"/>
               </a:rPr>
-              <a:t>Communications staff verify the recommendations against official guidance, rewrite the message in plain language, review it.</a:t>
-            </a:r>
-            <a:endParaRPr lang="en-US" sz="1700" dirty="0"/>
-          </a:p>
-        </p:txBody>
-      </p:sp>
-      <p:sp>
-        <p:nvSpPr>
-          <p:cNvPr id="11" name="Shape 9"/>
+              <a:t>Communications staff verify the recommendations against official guidance, rewrite the message in plain.</a:t>
+            </a:r>
+            <a:endParaRPr lang="en-US" sz="2100" dirty="0"/>
+          </a:p>
+        </p:txBody>
+      </p:sp>
+      <p:sp>
+        <p:nvSpPr>
+          <p:cNvPr id="12" name="Shape 10"/>
           <p:cNvSpPr/>
           <p:nvPr/>
         </p:nvSpPr>
@@ -14607,14 +15892,14 @@
       </p:sp>
       <p:sp>
         <p:nvSpPr>
-          <p:cNvPr id="12" name="Text 10"/>
+          <p:cNvPr id="13" name="Text 11"/>
           <p:cNvSpPr/>
           <p:nvPr/>
         </p:nvSpPr>
         <p:spPr>
           <a:xfrm>
             <a:off x="8074152" y="1563624"/>
-            <a:ext cx="2825496" cy="201168"/>
+            <a:ext cx="2825496" cy="256032"/>
           </a:xfrm>
           <a:prstGeom prst="rect">
             <a:avLst/>
@@ -14630,7 +15915,7 @@
               <a:buNone/>
             </a:pPr>
             <a:r>
-              <a:rPr lang="en-US" sz="950" b="1" dirty="0">
+              <a:rPr lang="en-US" sz="1300" b="1" dirty="0">
                 <a:solidFill>
                   <a:srgbClr val="0068B7"/>
                 </a:solidFill>
@@ -14640,20 +15925,20 @@
               </a:rPr>
               <a:t>Key idea</a:t>
             </a:r>
-            <a:endParaRPr lang="en-US" sz="950" dirty="0"/>
-          </a:p>
-        </p:txBody>
-      </p:sp>
-      <p:sp>
-        <p:nvSpPr>
-          <p:cNvPr id="13" name="Text 11"/>
-          <p:cNvSpPr/>
-          <p:nvPr/>
-        </p:nvSpPr>
-        <p:spPr>
-          <a:xfrm>
-            <a:off x="8074152" y="1856232"/>
-            <a:ext cx="2825496" cy="1261872"/>
+            <a:endParaRPr lang="en-US" sz="1300" dirty="0"/>
+          </a:p>
+        </p:txBody>
+      </p:sp>
+      <p:sp>
+        <p:nvSpPr>
+          <p:cNvPr id="14" name="Text 12"/>
+          <p:cNvSpPr/>
+          <p:nvPr/>
+        </p:nvSpPr>
+        <p:spPr>
+          <a:xfrm>
+            <a:off x="8074152" y="1920240"/>
+            <a:ext cx="2825496" cy="1188720"/>
           </a:xfrm>
           <a:prstGeom prst="rect">
             <a:avLst/>
@@ -14671,7 +15956,7 @@
               <a:buNone/>
             </a:pPr>
             <a:r>
-              <a:rPr lang="en-US" sz="1250" dirty="0">
+              <a:rPr lang="en-US" sz="1550" dirty="0">
                 <a:solidFill>
                   <a:srgbClr val="17364A"/>
                 </a:solidFill>
@@ -14679,15 +15964,15 @@
                 <a:ea typeface="Aptos" pitchFamily="34" charset="-122"/>
                 <a:cs typeface="Aptos" pitchFamily="34" charset="-120"/>
               </a:rPr>
-              <a:t>A health department uses AI to draft a heat safety message for older adults, outdoor workers, and people without reliable.</a:t>
-            </a:r>
-            <a:endParaRPr lang="en-US" sz="1250" dirty="0"/>
-          </a:p>
-        </p:txBody>
-      </p:sp>
-      <p:sp>
-        <p:nvSpPr>
-          <p:cNvPr id="14" name="Shape 12"/>
+              <a:t>A health department uses AI to draft a heat safety message for older adults, outdoor workers, and.</a:t>
+            </a:r>
+            <a:endParaRPr lang="en-US" sz="1550" dirty="0"/>
+          </a:p>
+        </p:txBody>
+      </p:sp>
+      <p:sp>
+        <p:nvSpPr>
+          <p:cNvPr id="15" name="Shape 13"/>
           <p:cNvSpPr/>
           <p:nvPr/>
         </p:nvSpPr>
@@ -14714,14 +15999,14 @@
       </p:sp>
       <p:sp>
         <p:nvSpPr>
-          <p:cNvPr id="15" name="Text 13"/>
+          <p:cNvPr id="16" name="Text 14"/>
           <p:cNvSpPr/>
           <p:nvPr/>
         </p:nvSpPr>
         <p:spPr>
           <a:xfrm>
             <a:off x="8074152" y="3666744"/>
-            <a:ext cx="2825496" cy="201168"/>
+            <a:ext cx="2825496" cy="256032"/>
           </a:xfrm>
           <a:prstGeom prst="rect">
             <a:avLst/>
@@ -14737,7 +16022,7 @@
               <a:buNone/>
             </a:pPr>
             <a:r>
-              <a:rPr lang="en-US" sz="950" b="1" dirty="0">
+              <a:rPr lang="en-US" sz="1300" b="1" dirty="0">
                 <a:solidFill>
                   <a:srgbClr val="0068B7"/>
                 </a:solidFill>
@@ -14747,20 +16032,20 @@
               </a:rPr>
               <a:t>Use this for</a:t>
             </a:r>
-            <a:endParaRPr lang="en-US" sz="950" dirty="0"/>
-          </a:p>
-        </p:txBody>
-      </p:sp>
-      <p:sp>
-        <p:nvSpPr>
-          <p:cNvPr id="16" name="Text 14"/>
-          <p:cNvSpPr/>
-          <p:nvPr/>
-        </p:nvSpPr>
-        <p:spPr>
-          <a:xfrm>
-            <a:off x="8074152" y="3959352"/>
-            <a:ext cx="2825496" cy="1170432"/>
+            <a:endParaRPr lang="en-US" sz="1300" dirty="0"/>
+          </a:p>
+        </p:txBody>
+      </p:sp>
+      <p:sp>
+        <p:nvSpPr>
+          <p:cNvPr id="17" name="Text 15"/>
+          <p:cNvSpPr/>
+          <p:nvPr/>
+        </p:nvSpPr>
+        <p:spPr>
+          <a:xfrm>
+            <a:off x="8074152" y="4023360"/>
+            <a:ext cx="2825496" cy="1097280"/>
           </a:xfrm>
           <a:prstGeom prst="rect">
             <a:avLst/>
@@ -14778,7 +16063,7 @@
               <a:buNone/>
             </a:pPr>
             <a:r>
-              <a:rPr lang="en-US" sz="1250" dirty="0">
+              <a:rPr lang="en-US" sz="1550" dirty="0">
                 <a:solidFill>
                   <a:srgbClr val="17364A"/>
                 </a:solidFill>
@@ -14788,7 +16073,7 @@
               </a:rPr>
               <a:t>Connect the concept to public health decisions, safeguards, documentation, or implementation work.</a:t>
             </a:r>
-            <a:endParaRPr lang="en-US" sz="1250" dirty="0"/>
+            <a:endParaRPr lang="en-US" sz="1550" dirty="0"/>
           </a:p>
         </p:txBody>
       </p:sp>
@@ -14985,7 +16270,7 @@
                 <a:ea typeface="Aptos" pitchFamily="34" charset="-122"/>
                 <a:cs typeface="Aptos" pitchFamily="34" charset="-120"/>
               </a:rPr>
-              <a:t>© Paula Soper</a:t>
+              <a:t>Â© Paula Soper</a:t>
             </a:r>
             <a:endParaRPr lang="en-US" sz="800" dirty="0"/>
           </a:p>
@@ -14993,7 +16278,46 @@
       </p:sp>
       <p:sp>
         <p:nvSpPr>
-          <p:cNvPr id="7" name="Shape 5"/>
+          <p:cNvPr id="7" name="Text 5"/>
+          <p:cNvSpPr/>
+          <p:nvPr/>
+        </p:nvSpPr>
+        <p:spPr>
+          <a:xfrm>
+            <a:off x="11137392" y="6510528"/>
+            <a:ext cx="411480" cy="201168"/>
+          </a:xfrm>
+          <a:prstGeom prst="rect">
+            <a:avLst/>
+          </a:prstGeom>
+          <a:noFill/>
+          <a:ln/>
+        </p:spPr>
+        <p:txBody>
+          <a:bodyPr wrap="square" lIns="0" tIns="0" rIns="0" bIns="0" rtlCol="0" anchor="ctr"/>
+          <a:lstStyle/>
+          <a:p>
+            <a:pPr algn="r" indent="0" marL="0">
+              <a:buNone/>
+            </a:pPr>
+            <a:r>
+              <a:rPr lang="en-US" sz="900" dirty="0">
+                <a:solidFill>
+                  <a:srgbClr val="5F7181"/>
+                </a:solidFill>
+                <a:latin typeface="Aptos" pitchFamily="34" charset="0"/>
+                <a:ea typeface="Aptos" pitchFamily="34" charset="-122"/>
+                <a:cs typeface="Aptos" pitchFamily="34" charset="-120"/>
+              </a:rPr>
+              <a:t>9</a:t>
+            </a:r>
+            <a:endParaRPr lang="en-US" sz="900" dirty="0"/>
+          </a:p>
+        </p:txBody>
+      </p:sp>
+      <p:sp>
+        <p:nvSpPr>
+          <p:cNvPr id="8" name="Shape 6"/>
           <p:cNvSpPr/>
           <p:nvPr/>
         </p:nvSpPr>
@@ -15018,7 +16342,7 @@
       </p:sp>
       <p:sp>
         <p:nvSpPr>
-          <p:cNvPr id="8" name="Text 6"/>
+          <p:cNvPr id="9" name="Text 7"/>
           <p:cNvSpPr/>
           <p:nvPr/>
         </p:nvSpPr>
@@ -15057,14 +16381,14 @@
       </p:sp>
       <p:sp>
         <p:nvSpPr>
-          <p:cNvPr id="9" name="Text 7"/>
+          <p:cNvPr id="10" name="Text 8"/>
           <p:cNvSpPr/>
           <p:nvPr/>
         </p:nvSpPr>
         <p:spPr>
           <a:xfrm>
             <a:off x="640080" y="621792"/>
-            <a:ext cx="10881360" cy="566928"/>
+            <a:ext cx="10881360" cy="713232"/>
           </a:xfrm>
           <a:prstGeom prst="rect">
             <a:avLst/>
@@ -15082,7 +16406,7 @@
               <a:buNone/>
             </a:pPr>
             <a:r>
-              <a:rPr lang="en-US" sz="2700" b="1" dirty="0">
+              <a:rPr lang="en-US" sz="3400" b="1" dirty="0">
                 <a:solidFill>
                   <a:srgbClr val="003A63"/>
                 </a:solidFill>
@@ -15092,20 +16416,20 @@
               </a:rPr>
               <a:t>Topic Deep Dive</a:t>
             </a:r>
-            <a:endParaRPr lang="en-US" sz="2700" dirty="0"/>
-          </a:p>
-        </p:txBody>
-      </p:sp>
-      <p:sp>
-        <p:nvSpPr>
-          <p:cNvPr id="10" name="Text 8"/>
-          <p:cNvSpPr/>
-          <p:nvPr/>
-        </p:nvSpPr>
-        <p:spPr>
-          <a:xfrm>
-            <a:off x="868680" y="1417320"/>
-            <a:ext cx="6675120" cy="4434840"/>
+            <a:endParaRPr lang="en-US" sz="3400" dirty="0"/>
+          </a:p>
+        </p:txBody>
+      </p:sp>
+      <p:sp>
+        <p:nvSpPr>
+          <p:cNvPr id="11" name="Text 9"/>
+          <p:cNvSpPr/>
+          <p:nvPr/>
+        </p:nvSpPr>
+        <p:spPr>
+          <a:xfrm>
+            <a:off x="868680" y="1508760"/>
+            <a:ext cx="6537960" cy="4160520"/>
           </a:xfrm>
           <a:prstGeom prst="rect">
             <a:avLst/>
@@ -15120,7 +16444,7 @@
           <a:lstStyle/>
           <a:p>
             <a:r>
-              <a:rPr lang="en-US" sz="1700" dirty="0">
+              <a:rPr lang="en-US" sz="2100" dirty="0">
                 <a:solidFill>
                   <a:srgbClr val="17364A"/>
                 </a:solidFill>
@@ -15130,11 +16454,11 @@
               </a:rPr>
               <a:t>AI can be useful early in the message development process.</a:t>
             </a:r>
-            <a:endParaRPr lang="en-US" sz="1700" dirty="0"/>
-          </a:p>
-          <a:p>
-            <a:r>
-              <a:rPr lang="en-US" sz="1700" dirty="0">
+            <a:endParaRPr lang="en-US" sz="2100" dirty="0"/>
+          </a:p>
+          <a:p>
+            <a:r>
+              <a:rPr lang="en-US" sz="2100" dirty="0">
                 <a:solidFill>
                   <a:srgbClr val="17364A"/>
                 </a:solidFill>
@@ -15142,13 +16466,13 @@
                 <a:ea typeface="Aptos" pitchFamily="34" charset="-122"/>
                 <a:cs typeface="Aptos" pitchFamily="34" charset="-120"/>
               </a:rPr>
-              <a:t>It can generate first drafts, propose alternative tones, simplify technical language, identify jargon, create.</a:t>
-            </a:r>
-            <a:endParaRPr lang="en-US" sz="1700" dirty="0"/>
-          </a:p>
-          <a:p>
-            <a:r>
-              <a:rPr lang="en-US" sz="1700" dirty="0">
+              <a:t>It can generate first drafts, propose alternative tones, simplify technical language, identify jargon,.</a:t>
+            </a:r>
+            <a:endParaRPr lang="en-US" sz="2100" dirty="0"/>
+          </a:p>
+          <a:p>
+            <a:r>
+              <a:rPr lang="en-US" sz="2100" dirty="0">
                 <a:solidFill>
                   <a:srgbClr val="17364A"/>
                 </a:solidFill>
@@ -15158,27 +16482,13 @@
               </a:rPr>
               <a:t>These uses can save time, especially when communications staff support multiple programs.</a:t>
             </a:r>
-            <a:endParaRPr lang="en-US" sz="1700" dirty="0"/>
-          </a:p>
-          <a:p>
-            <a:r>
-              <a:rPr lang="en-US" sz="1700" dirty="0">
-                <a:solidFill>
-                  <a:srgbClr val="17364A"/>
-                </a:solidFill>
-                <a:latin typeface="Aptos" pitchFamily="34" charset="0"/>
-                <a:ea typeface="Aptos" pitchFamily="34" charset="-122"/>
-                <a:cs typeface="Aptos" pitchFamily="34" charset="-120"/>
-              </a:rPr>
-              <a:t>However, AI should not be treated as the authority on public health content.</a:t>
-            </a:r>
-            <a:endParaRPr lang="en-US" sz="1700" dirty="0"/>
-          </a:p>
-        </p:txBody>
-      </p:sp>
-      <p:sp>
-        <p:nvSpPr>
-          <p:cNvPr id="11" name="Shape 9"/>
+            <a:endParaRPr lang="en-US" sz="2100" dirty="0"/>
+          </a:p>
+        </p:txBody>
+      </p:sp>
+      <p:sp>
+        <p:nvSpPr>
+          <p:cNvPr id="12" name="Shape 10"/>
           <p:cNvSpPr/>
           <p:nvPr/>
         </p:nvSpPr>
@@ -15205,14 +16515,14 @@
       </p:sp>
       <p:sp>
         <p:nvSpPr>
-          <p:cNvPr id="12" name="Text 10"/>
+          <p:cNvPr id="13" name="Text 11"/>
           <p:cNvSpPr/>
           <p:nvPr/>
         </p:nvSpPr>
         <p:spPr>
           <a:xfrm>
             <a:off x="8074152" y="1563624"/>
-            <a:ext cx="2825496" cy="201168"/>
+            <a:ext cx="2825496" cy="256032"/>
           </a:xfrm>
           <a:prstGeom prst="rect">
             <a:avLst/>
@@ -15228,7 +16538,7 @@
               <a:buNone/>
             </a:pPr>
             <a:r>
-              <a:rPr lang="en-US" sz="950" b="1" dirty="0">
+              <a:rPr lang="en-US" sz="1300" b="1" dirty="0">
                 <a:solidFill>
                   <a:srgbClr val="0068B7"/>
                 </a:solidFill>
@@ -15238,20 +16548,20 @@
               </a:rPr>
               <a:t>Key idea</a:t>
             </a:r>
-            <a:endParaRPr lang="en-US" sz="950" dirty="0"/>
-          </a:p>
-        </p:txBody>
-      </p:sp>
-      <p:sp>
-        <p:nvSpPr>
-          <p:cNvPr id="13" name="Text 11"/>
-          <p:cNvSpPr/>
-          <p:nvPr/>
-        </p:nvSpPr>
-        <p:spPr>
-          <a:xfrm>
-            <a:off x="8074152" y="1856232"/>
-            <a:ext cx="2825496" cy="1261872"/>
+            <a:endParaRPr lang="en-US" sz="1300" dirty="0"/>
+          </a:p>
+        </p:txBody>
+      </p:sp>
+      <p:sp>
+        <p:nvSpPr>
+          <p:cNvPr id="14" name="Text 12"/>
+          <p:cNvSpPr/>
+          <p:nvPr/>
+        </p:nvSpPr>
+        <p:spPr>
+          <a:xfrm>
+            <a:off x="8074152" y="1920240"/>
+            <a:ext cx="2825496" cy="1188720"/>
           </a:xfrm>
           <a:prstGeom prst="rect">
             <a:avLst/>
@@ -15269,7 +16579,7 @@
               <a:buNone/>
             </a:pPr>
             <a:r>
-              <a:rPr lang="en-US" sz="1250" dirty="0">
+              <a:rPr lang="en-US" sz="1550" dirty="0">
                 <a:solidFill>
                   <a:srgbClr val="17364A"/>
                 </a:solidFill>
@@ -15279,13 +16589,13 @@
               </a:rPr>
               <a:t>AI can be useful early in the message development process.</a:t>
             </a:r>
-            <a:endParaRPr lang="en-US" sz="1250" dirty="0"/>
-          </a:p>
-        </p:txBody>
-      </p:sp>
-      <p:sp>
-        <p:nvSpPr>
-          <p:cNvPr id="14" name="Shape 12"/>
+            <a:endParaRPr lang="en-US" sz="1550" dirty="0"/>
+          </a:p>
+        </p:txBody>
+      </p:sp>
+      <p:sp>
+        <p:nvSpPr>
+          <p:cNvPr id="15" name="Shape 13"/>
           <p:cNvSpPr/>
           <p:nvPr/>
         </p:nvSpPr>
@@ -15312,14 +16622,14 @@
       </p:sp>
       <p:sp>
         <p:nvSpPr>
-          <p:cNvPr id="15" name="Text 13"/>
+          <p:cNvPr id="16" name="Text 14"/>
           <p:cNvSpPr/>
           <p:nvPr/>
         </p:nvSpPr>
         <p:spPr>
           <a:xfrm>
             <a:off x="8074152" y="3666744"/>
-            <a:ext cx="2825496" cy="201168"/>
+            <a:ext cx="2825496" cy="256032"/>
           </a:xfrm>
           <a:prstGeom prst="rect">
             <a:avLst/>
@@ -15335,7 +16645,7 @@
               <a:buNone/>
             </a:pPr>
             <a:r>
-              <a:rPr lang="en-US" sz="950" b="1" dirty="0">
+              <a:rPr lang="en-US" sz="1300" b="1" dirty="0">
                 <a:solidFill>
                   <a:srgbClr val="0068B7"/>
                 </a:solidFill>
@@ -15345,20 +16655,20 @@
               </a:rPr>
               <a:t>Use this for</a:t>
             </a:r>
-            <a:endParaRPr lang="en-US" sz="950" dirty="0"/>
-          </a:p>
-        </p:txBody>
-      </p:sp>
-      <p:sp>
-        <p:nvSpPr>
-          <p:cNvPr id="16" name="Text 14"/>
-          <p:cNvSpPr/>
-          <p:nvPr/>
-        </p:nvSpPr>
-        <p:spPr>
-          <a:xfrm>
-            <a:off x="8074152" y="3959352"/>
-            <a:ext cx="2825496" cy="1170432"/>
+            <a:endParaRPr lang="en-US" sz="1300" dirty="0"/>
+          </a:p>
+        </p:txBody>
+      </p:sp>
+      <p:sp>
+        <p:nvSpPr>
+          <p:cNvPr id="17" name="Text 15"/>
+          <p:cNvSpPr/>
+          <p:nvPr/>
+        </p:nvSpPr>
+        <p:spPr>
+          <a:xfrm>
+            <a:off x="8074152" y="4023360"/>
+            <a:ext cx="2825496" cy="1097280"/>
           </a:xfrm>
           <a:prstGeom prst="rect">
             <a:avLst/>
@@ -15376,7 +16686,7 @@
               <a:buNone/>
             </a:pPr>
             <a:r>
-              <a:rPr lang="en-US" sz="1250" dirty="0">
+              <a:rPr lang="en-US" sz="1550" dirty="0">
                 <a:solidFill>
                   <a:srgbClr val="17364A"/>
                 </a:solidFill>
@@ -15386,7 +16696,7 @@
               </a:rPr>
               <a:t>Connect the concept to public health decisions, safeguards, documentation, or implementation work.</a:t>
             </a:r>
-            <a:endParaRPr lang="en-US" sz="1250" dirty="0"/>
+            <a:endParaRPr lang="en-US" sz="1550" dirty="0"/>
           </a:p>
         </p:txBody>
       </p:sp>
